--- a/skills/presentation-template-library/skills/artifact-template-moonlit-work-report/assets/reference.pptx
+++ b/skills/presentation-template-library/skills/artifact-template-moonlit-work-report/assets/reference.pptx
@@ -508,8 +508,8 @@
           <p:nvPr/>
         </p:nvPicPr>
         <p:blipFill>
-          <a:blip xmlns:r="http://schemas.openxmlformats.org/officeDocument/2006/relationships" xmlns:a="http://schemas.openxmlformats.org/drawingml/2006/main" r:embed="rIdOfficeKitImagee4bd683f73b7a543_1"/>
-          <a:srcRect xmlns:a="http://schemas.openxmlformats.org/drawingml/2006/main" l="0" t="34171" r="0" b="34171"/>
+          <a:blip xmlns:r="http://schemas.openxmlformats.org/officeDocument/2006/relationships" xmlns:a="http://schemas.openxmlformats.org/drawingml/2006/main" r:embed="rIdOfficeKitImage33b8c33a8fc3d613_1"/>
+          <a:srcRect xmlns:a="http://schemas.openxmlformats.org/drawingml/2006/main" l="0" t="34180" r="0" b="34180"/>
           <a:stretch xmlns:a="http://schemas.openxmlformats.org/drawingml/2006/main">
             <a:fillRect/>
           </a:stretch>
@@ -1322,8 +1322,8 @@
           <p:nvPr/>
         </p:nvPicPr>
         <p:blipFill>
-          <a:blip xmlns:r="http://schemas.openxmlformats.org/officeDocument/2006/relationships" xmlns:a="http://schemas.openxmlformats.org/drawingml/2006/main" r:embed="rIdOfficeKitImagec7b73f8fac405495_1"/>
-          <a:srcRect xmlns:a="http://schemas.openxmlformats.org/drawingml/2006/main" l="0" t="34171" r="0" b="34171"/>
+          <a:blip xmlns:r="http://schemas.openxmlformats.org/officeDocument/2006/relationships" xmlns:a="http://schemas.openxmlformats.org/drawingml/2006/main" r:embed="rIdOfficeKitImage7650495d0c3b8602_1"/>
+          <a:srcRect xmlns:a="http://schemas.openxmlformats.org/drawingml/2006/main" l="0" t="34180" r="0" b="34180"/>
           <a:stretch xmlns:a="http://schemas.openxmlformats.org/drawingml/2006/main">
             <a:fillRect/>
           </a:stretch>
@@ -1389,8 +1389,8 @@
           <p:nvPr/>
         </p:nvPicPr>
         <p:blipFill>
-          <a:blip xmlns:r="http://schemas.openxmlformats.org/officeDocument/2006/relationships" xmlns:a="http://schemas.openxmlformats.org/drawingml/2006/main" r:embed="rIdOfficeKitImagec7b73f8fac405495_1"/>
-          <a:srcRect xmlns:a="http://schemas.openxmlformats.org/drawingml/2006/main" l="0" t="47256" r="0" b="47256"/>
+          <a:blip xmlns:r="http://schemas.openxmlformats.org/officeDocument/2006/relationships" xmlns:a="http://schemas.openxmlformats.org/drawingml/2006/main" r:embed="rIdOfficeKitImage7650495d0c3b8602_1"/>
+          <a:srcRect xmlns:a="http://schemas.openxmlformats.org/drawingml/2006/main" l="0" t="47258" r="0" b="47258"/>
           <a:stretch xmlns:a="http://schemas.openxmlformats.org/drawingml/2006/main">
             <a:fillRect/>
           </a:stretch>
@@ -2179,8 +2179,8 @@
           <p:nvPr/>
         </p:nvPicPr>
         <p:blipFill>
-          <a:blip xmlns:r="http://schemas.openxmlformats.org/officeDocument/2006/relationships" xmlns:a="http://schemas.openxmlformats.org/drawingml/2006/main" r:embed="rIdOfficeKitImage59ee3aa5202fd02f_1"/>
-          <a:srcRect xmlns:a="http://schemas.openxmlformats.org/drawingml/2006/main" l="0" t="34180" r="0" b="34180"/>
+          <a:blip xmlns:r="http://schemas.openxmlformats.org/officeDocument/2006/relationships" xmlns:a="http://schemas.openxmlformats.org/drawingml/2006/main" r:embed="rIdOfficeKitImagee4bd683f73b7a543_1"/>
+          <a:srcRect xmlns:a="http://schemas.openxmlformats.org/drawingml/2006/main" l="0" t="34171" r="0" b="34171"/>
           <a:stretch xmlns:a="http://schemas.openxmlformats.org/drawingml/2006/main">
             <a:fillRect/>
           </a:stretch>
@@ -2246,8 +2246,8 @@
           <p:nvPr/>
         </p:nvPicPr>
         <p:blipFill>
-          <a:blip xmlns:r="http://schemas.openxmlformats.org/officeDocument/2006/relationships" xmlns:a="http://schemas.openxmlformats.org/drawingml/2006/main" r:embed="rIdOfficeKitImage59ee3aa5202fd02f_1"/>
-          <a:srcRect xmlns:a="http://schemas.openxmlformats.org/drawingml/2006/main" l="0" t="47258" r="0" b="47258"/>
+          <a:blip xmlns:r="http://schemas.openxmlformats.org/officeDocument/2006/relationships" xmlns:a="http://schemas.openxmlformats.org/drawingml/2006/main" r:embed="rIdOfficeKitImagee4bd683f73b7a543_1"/>
+          <a:srcRect xmlns:a="http://schemas.openxmlformats.org/drawingml/2006/main" l="0" t="47256" r="0" b="47256"/>
           <a:stretch xmlns:a="http://schemas.openxmlformats.org/drawingml/2006/main">
             <a:fillRect/>
           </a:stretch>
@@ -2497,7 +2497,7 @@
         </p:xfrm>
         <a:graphic xmlns:a="http://schemas.openxmlformats.org/drawingml/2006/main">
           <a:graphicData uri="http://schemas.openxmlformats.org/drawingml/2006/chart">
-            <c:chart xmlns:r="http://schemas.openxmlformats.org/officeDocument/2006/relationships" xmlns:c="http://schemas.openxmlformats.org/drawingml/2006/chart" r:id="Rc5878013a0694dda"/>
+            <c:chart xmlns:r="http://schemas.openxmlformats.org/officeDocument/2006/relationships" xmlns:c="http://schemas.openxmlformats.org/drawingml/2006/chart" r:id="Rdc9846deb41842fc"/>
           </a:graphicData>
         </a:graphic>
       </p:graphicFrame>
@@ -2515,7 +2515,7 @@
         </p:xfrm>
         <a:graphic xmlns:a="http://schemas.openxmlformats.org/drawingml/2006/main">
           <a:graphicData uri="http://schemas.openxmlformats.org/drawingml/2006/chart">
-            <c:chart xmlns:r="http://schemas.openxmlformats.org/officeDocument/2006/relationships" xmlns:c="http://schemas.openxmlformats.org/drawingml/2006/chart" r:id="Rc1b4f47367004fa4"/>
+            <c:chart xmlns:r="http://schemas.openxmlformats.org/officeDocument/2006/relationships" xmlns:c="http://schemas.openxmlformats.org/drawingml/2006/chart" r:id="R1c5e39468ffb4b01"/>
           </a:graphicData>
         </a:graphic>
       </p:graphicFrame>
@@ -2886,8 +2886,8 @@
           <p:nvPr/>
         </p:nvPicPr>
         <p:blipFill>
-          <a:blip xmlns:r="http://schemas.openxmlformats.org/officeDocument/2006/relationships" xmlns:a="http://schemas.openxmlformats.org/drawingml/2006/main" r:embed="rIdOfficeKitImagee4bd683f73b7a543_1"/>
-          <a:srcRect xmlns:a="http://schemas.openxmlformats.org/drawingml/2006/main" l="0" t="47256" r="0" b="47256"/>
+          <a:blip xmlns:r="http://schemas.openxmlformats.org/officeDocument/2006/relationships" xmlns:a="http://schemas.openxmlformats.org/drawingml/2006/main" r:embed="rIdOfficeKitImage59ee3aa5202fd02f_1"/>
+          <a:srcRect xmlns:a="http://schemas.openxmlformats.org/drawingml/2006/main" l="0" t="47258" r="0" b="47258"/>
           <a:stretch xmlns:a="http://schemas.openxmlformats.org/drawingml/2006/main">
             <a:fillRect/>
           </a:stretch>
@@ -4167,7 +4167,7 @@
           <p:nvPr/>
         </p:nvPicPr>
         <p:blipFill>
-          <a:blip xmlns:r="http://schemas.openxmlformats.org/officeDocument/2006/relationships" xmlns:a="http://schemas.openxmlformats.org/drawingml/2006/main" r:embed="rIdOfficeKitImage59ee3aa5202fd02f_1"/>
+          <a:blip xmlns:r="http://schemas.openxmlformats.org/officeDocument/2006/relationships" xmlns:a="http://schemas.openxmlformats.org/drawingml/2006/main" r:embed="rIdOfficeKitImaged71bfa074cda59bb_1"/>
           <a:srcRect xmlns:a="http://schemas.openxmlformats.org/drawingml/2006/main" l="0" t="34180" r="0" b="34180"/>
           <a:stretch xmlns:a="http://schemas.openxmlformats.org/drawingml/2006/main">
             <a:fillRect/>
@@ -4234,7 +4234,7 @@
           <p:nvPr/>
         </p:nvPicPr>
         <p:blipFill>
-          <a:blip xmlns:r="http://schemas.openxmlformats.org/officeDocument/2006/relationships" xmlns:a="http://schemas.openxmlformats.org/drawingml/2006/main" r:embed="rIdOfficeKitImage59ee3aa5202fd02f_1"/>
+          <a:blip xmlns:r="http://schemas.openxmlformats.org/officeDocument/2006/relationships" xmlns:a="http://schemas.openxmlformats.org/drawingml/2006/main" r:embed="rIdOfficeKitImaged71bfa074cda59bb_1"/>
           <a:srcRect xmlns:a="http://schemas.openxmlformats.org/drawingml/2006/main" l="0" t="47258" r="0" b="47258"/>
           <a:stretch xmlns:a="http://schemas.openxmlformats.org/drawingml/2006/main">
             <a:fillRect/>

--- a/skills/presentation-template-library/skills/artifact-template-moonlit-work-report/assets/reference.pptx
+++ b/skills/presentation-template-library/skills/artifact-template-moonlit-work-report/assets/reference.pptx
@@ -508,8 +508,8 @@
           <p:nvPr/>
         </p:nvPicPr>
         <p:blipFill>
-          <a:blip xmlns:r="http://schemas.openxmlformats.org/officeDocument/2006/relationships" xmlns:a="http://schemas.openxmlformats.org/drawingml/2006/main" r:embed="rIdOfficeKitImage33b8c33a8fc3d613_1"/>
-          <a:srcRect xmlns:a="http://schemas.openxmlformats.org/drawingml/2006/main" l="0" t="34180" r="0" b="34180"/>
+          <a:blip xmlns:r="http://schemas.openxmlformats.org/officeDocument/2006/relationships" xmlns:a="http://schemas.openxmlformats.org/drawingml/2006/main" r:embed="rIdOfficeKitImageb7d7d39d00e5a7e4_1"/>
+          <a:srcRect xmlns:a="http://schemas.openxmlformats.org/drawingml/2006/main" l="0" t="34170" r="0" b="34170"/>
           <a:stretch xmlns:a="http://schemas.openxmlformats.org/drawingml/2006/main">
             <a:fillRect/>
           </a:stretch>
@@ -2497,7 +2497,7 @@
         </p:xfrm>
         <a:graphic xmlns:a="http://schemas.openxmlformats.org/drawingml/2006/main">
           <a:graphicData uri="http://schemas.openxmlformats.org/drawingml/2006/chart">
-            <c:chart xmlns:r="http://schemas.openxmlformats.org/officeDocument/2006/relationships" xmlns:c="http://schemas.openxmlformats.org/drawingml/2006/chart" r:id="Rdc9846deb41842fc"/>
+            <c:chart xmlns:r="http://schemas.openxmlformats.org/officeDocument/2006/relationships" xmlns:c="http://schemas.openxmlformats.org/drawingml/2006/chart" r:id="Rcb6814b7f6fb43ac"/>
           </a:graphicData>
         </a:graphic>
       </p:graphicFrame>
@@ -2515,7 +2515,7 @@
         </p:xfrm>
         <a:graphic xmlns:a="http://schemas.openxmlformats.org/drawingml/2006/main">
           <a:graphicData uri="http://schemas.openxmlformats.org/drawingml/2006/chart">
-            <c:chart xmlns:r="http://schemas.openxmlformats.org/officeDocument/2006/relationships" xmlns:c="http://schemas.openxmlformats.org/drawingml/2006/chart" r:id="R1c5e39468ffb4b01"/>
+            <c:chart xmlns:r="http://schemas.openxmlformats.org/officeDocument/2006/relationships" xmlns:c="http://schemas.openxmlformats.org/drawingml/2006/chart" r:id="Rec7716b500d44531"/>
           </a:graphicData>
         </a:graphic>
       </p:graphicFrame>

--- a/skills/presentation-template-library/skills/artifact-template-moonlit-work-report/assets/reference.pptx
+++ b/skills/presentation-template-library/skills/artifact-template-moonlit-work-report/assets/reference.pptx
@@ -481,6 +481,16 @@
 <file path=ppt/slides/slide1.xml><?xml version="1.0" encoding="utf-8"?>
 <p:sld xmlns:p="http://schemas.openxmlformats.org/presentationml/2006/main">
   <p:cSld name="Opening claim">
+    <p:bg>
+      <p:bgPr>
+        <a:blipFill xmlns:a="http://schemas.openxmlformats.org/drawingml/2006/main">
+          <a:blip xmlns:r="http://schemas.openxmlformats.org/officeDocument/2006/relationships" r:embed="rIdOfficeKitImageb7d7d39d00e5a7e4_1"/>
+          <a:stretch>
+            <a:fillRect/>
+          </a:stretch>
+        </a:blipFill>
+      </p:bgPr>
+    </p:bg>
     <p:spTree>
       <p:nvGrpSpPr>
         <p:cNvPr id="1" name=""/>
@@ -495,38 +505,9 @@
           <a:chExt cx="0" cy="0"/>
         </a:xfrm>
       </p:grpSpPr>
-      <p:pic>
-        <p:nvPicPr>
-          <p:cNvPr id="2" name="artifact-template-moonlit-work-report-cover-field">
-            <a:extLst xmlns:a="http://schemas.openxmlformats.org/drawingml/2006/main">
-              <a:ext uri="{C183D7F6-B498-43B3-948B-1728B52AA6E4}">
-                <adec:decorative xmlns:adec="http://schemas.microsoft.com/office/drawing/2017/decorative" val="1"/>
-              </a:ext>
-            </a:extLst>
-          </p:cNvPr>
-          <p:cNvPicPr/>
-          <p:nvPr/>
-        </p:nvPicPr>
-        <p:blipFill>
-          <a:blip xmlns:r="http://schemas.openxmlformats.org/officeDocument/2006/relationships" xmlns:a="http://schemas.openxmlformats.org/drawingml/2006/main" r:embed="rIdOfficeKitImageb7d7d39d00e5a7e4_1"/>
-          <a:srcRect xmlns:a="http://schemas.openxmlformats.org/drawingml/2006/main" l="0" t="34170" r="0" b="34170"/>
-          <a:stretch xmlns:a="http://schemas.openxmlformats.org/drawingml/2006/main">
-            <a:fillRect/>
-          </a:stretch>
-        </p:blipFill>
-        <p:spPr>
-          <a:xfrm xmlns:a="http://schemas.openxmlformats.org/drawingml/2006/main">
-            <a:off x="0" y="0"/>
-            <a:ext cx="15240000" cy="8572500"/>
-          </a:xfrm>
-          <a:prstGeom xmlns:a="http://schemas.openxmlformats.org/drawingml/2006/main" prst="rect">
-            <a:avLst/>
-          </a:prstGeom>
-        </p:spPr>
-      </p:pic>
-      <p:sp>
-        <p:nvSpPr>
-          <p:cNvPr id="3" name="cover-paper-scrim"/>
+      <p:sp>
+        <p:nvSpPr>
+          <p:cNvPr id="2" name="cover-paper-scrim"/>
           <p:cNvSpPr/>
           <p:nvPr/>
         </p:nvSpPr>
@@ -564,7 +545,7 @@
       </p:sp>
       <p:sp>
         <p:nvSpPr>
-          <p:cNvPr id="4" name="top-rule"/>
+          <p:cNvPr id="3" name="top-rule"/>
           <p:cNvSpPr/>
           <p:nvPr/>
         </p:nvSpPr>
@@ -598,7 +579,7 @@
       </p:sp>
       <p:sp>
         <p:nvSpPr>
-          <p:cNvPr id="5" name="eyebrow"/>
+          <p:cNvPr id="4" name="eyebrow"/>
           <p:cNvSpPr txBox="1"/>
           <p:nvPr/>
         </p:nvSpPr>
@@ -635,7 +616,7 @@
       </p:sp>
       <p:sp>
         <p:nvSpPr>
-          <p:cNvPr id="6" name="cover-title"/>
+          <p:cNvPr id="5" name="cover-title"/>
           <p:cNvSpPr txBox="1"/>
           <p:nvPr/>
         </p:nvSpPr>
@@ -672,7 +653,7 @@
       </p:sp>
       <p:sp>
         <p:nvSpPr>
-          <p:cNvPr id="7" name="cover-subtitle"/>
+          <p:cNvPr id="6" name="cover-subtitle"/>
           <p:cNvSpPr txBox="1"/>
           <p:nvPr/>
         </p:nvSpPr>
@@ -709,7 +690,7 @@
       </p:sp>
       <p:sp>
         <p:nvSpPr>
-          <p:cNvPr id="8" name="cover-rule"/>
+          <p:cNvPr id="7" name="cover-rule"/>
           <p:cNvSpPr/>
           <p:nvPr/>
         </p:nvSpPr>
@@ -743,7 +724,7 @@
       </p:sp>
       <p:sp>
         <p:nvSpPr>
-          <p:cNvPr id="9" name="cover-basis"/>
+          <p:cNvPr id="8" name="cover-basis"/>
           <p:cNvSpPr txBox="1"/>
           <p:nvPr/>
         </p:nvSpPr>
@@ -780,7 +761,7 @@
       </p:sp>
       <p:sp>
         <p:nvSpPr>
-          <p:cNvPr id="10" name="cover-thesis"/>
+          <p:cNvPr id="9" name="cover-thesis"/>
           <p:cNvSpPr txBox="1"/>
           <p:nvPr/>
         </p:nvSpPr>
@@ -817,7 +798,7 @@
       </p:sp>
       <p:sp>
         <p:nvSpPr>
-          <p:cNvPr id="11" name="cover-source"/>
+          <p:cNvPr id="10" name="cover-source"/>
           <p:cNvSpPr txBox="1"/>
           <p:nvPr/>
         </p:nvSpPr>
@@ -854,7 +835,7 @@
       </p:sp>
       <p:sp>
         <p:nvSpPr>
-          <p:cNvPr id="12" name="page-number"/>
+          <p:cNvPr id="11" name="page-number"/>
           <p:cNvSpPr txBox="1"/>
           <p:nvPr/>
         </p:nvSpPr>
@@ -892,7 +873,7 @@
       </p:sp>
       <p:sp>
         <p:nvSpPr>
-          <p:cNvPr id="13" name="anchor-field"/>
+          <p:cNvPr id="12" name="anchor-field"/>
           <p:cNvSpPr/>
           <p:nvPr/>
         </p:nvSpPr>
@@ -928,7 +909,7 @@
       </p:sp>
       <p:sp>
         <p:nvSpPr>
-          <p:cNvPr id="14" name="anchor-grid-0-0"/>
+          <p:cNvPr id="13" name="anchor-grid-0-0"/>
           <p:cNvSpPr/>
           <p:nvPr/>
         </p:nvSpPr>
@@ -964,7 +945,7 @@
       </p:sp>
       <p:sp>
         <p:nvSpPr>
-          <p:cNvPr id="15" name="anchor-grid-0-1"/>
+          <p:cNvPr id="14" name="anchor-grid-0-1"/>
           <p:cNvSpPr/>
           <p:nvPr/>
         </p:nvSpPr>
@@ -1000,7 +981,7 @@
       </p:sp>
       <p:sp>
         <p:nvSpPr>
-          <p:cNvPr id="16" name="anchor-grid-0-2"/>
+          <p:cNvPr id="15" name="anchor-grid-0-2"/>
           <p:cNvSpPr/>
           <p:nvPr/>
         </p:nvSpPr>
@@ -1036,7 +1017,7 @@
       </p:sp>
       <p:sp>
         <p:nvSpPr>
-          <p:cNvPr id="17" name="anchor-grid-1-0"/>
+          <p:cNvPr id="16" name="anchor-grid-1-0"/>
           <p:cNvSpPr/>
           <p:nvPr/>
         </p:nvSpPr>
@@ -1072,7 +1053,7 @@
       </p:sp>
       <p:sp>
         <p:nvSpPr>
-          <p:cNvPr id="18" name="anchor-grid-1-1"/>
+          <p:cNvPr id="17" name="anchor-grid-1-1"/>
           <p:cNvSpPr/>
           <p:nvPr/>
         </p:nvSpPr>
@@ -1108,7 +1089,7 @@
       </p:sp>
       <p:sp>
         <p:nvSpPr>
-          <p:cNvPr id="19" name="anchor-grid-1-2"/>
+          <p:cNvPr id="18" name="anchor-grid-1-2"/>
           <p:cNvSpPr/>
           <p:nvPr/>
         </p:nvSpPr>
@@ -1144,7 +1125,7 @@
       </p:sp>
       <p:sp>
         <p:nvSpPr>
-          <p:cNvPr id="20" name="anchor-grid-2-0"/>
+          <p:cNvPr id="19" name="anchor-grid-2-0"/>
           <p:cNvSpPr/>
           <p:nvPr/>
         </p:nvSpPr>
@@ -1180,7 +1161,7 @@
       </p:sp>
       <p:sp>
         <p:nvSpPr>
-          <p:cNvPr id="21" name="anchor-grid-2-1"/>
+          <p:cNvPr id="20" name="anchor-grid-2-1"/>
           <p:cNvSpPr/>
           <p:nvPr/>
         </p:nvSpPr>
@@ -1216,7 +1197,7 @@
       </p:sp>
       <p:sp>
         <p:nvSpPr>
-          <p:cNvPr id="22" name="anchor-grid-2-2"/>
+          <p:cNvPr id="21" name="anchor-grid-2-2"/>
           <p:cNvSpPr/>
           <p:nvPr/>
         </p:nvSpPr>
@@ -1252,7 +1233,7 @@
       </p:sp>
       <p:sp>
         <p:nvSpPr>
-          <p:cNvPr id="23" name="anchor-axis"/>
+          <p:cNvPr id="22" name="anchor-axis"/>
           <p:cNvSpPr/>
           <p:nvPr/>
         </p:nvSpPr>
@@ -1295,6 +1276,16 @@
 <file path=ppt/slides/slide2.xml><?xml version="1.0" encoding="utf-8"?>
 <p:sld xmlns:p="http://schemas.openxmlformats.org/presentationml/2006/main">
   <p:cSld name="Argument">
+    <p:bg>
+      <p:bgPr>
+        <a:blipFill xmlns:a="http://schemas.openxmlformats.org/drawingml/2006/main">
+          <a:blip xmlns:r="http://schemas.openxmlformats.org/officeDocument/2006/relationships" r:embed="rIdOfficeKitImage7650495d0c3b8602_1"/>
+          <a:stretch>
+            <a:fillRect/>
+          </a:stretch>
+        </a:blipFill>
+      </p:bgPr>
+    </p:bg>
     <p:spTree>
       <p:nvGrpSpPr>
         <p:cNvPr id="1" name=""/>
@@ -1309,38 +1300,9 @@
           <a:chExt cx="0" cy="0"/>
         </a:xfrm>
       </p:grpSpPr>
-      <p:pic>
-        <p:nvPicPr>
-          <p:cNvPr id="2" name="argument-visual-field">
-            <a:extLst xmlns:a="http://schemas.openxmlformats.org/drawingml/2006/main">
-              <a:ext uri="{C183D7F6-B498-43B3-948B-1728B52AA6E4}">
-                <adec:decorative xmlns:adec="http://schemas.microsoft.com/office/drawing/2017/decorative" val="1"/>
-              </a:ext>
-            </a:extLst>
-          </p:cNvPr>
-          <p:cNvPicPr/>
-          <p:nvPr/>
-        </p:nvPicPr>
-        <p:blipFill>
-          <a:blip xmlns:r="http://schemas.openxmlformats.org/officeDocument/2006/relationships" xmlns:a="http://schemas.openxmlformats.org/drawingml/2006/main" r:embed="rIdOfficeKitImage7650495d0c3b8602_1"/>
-          <a:srcRect xmlns:a="http://schemas.openxmlformats.org/drawingml/2006/main" l="0" t="34180" r="0" b="34180"/>
-          <a:stretch xmlns:a="http://schemas.openxmlformats.org/drawingml/2006/main">
-            <a:fillRect/>
-          </a:stretch>
-        </p:blipFill>
-        <p:spPr>
-          <a:xfrm xmlns:a="http://schemas.openxmlformats.org/drawingml/2006/main">
-            <a:off x="0" y="0"/>
-            <a:ext cx="15240000" cy="8572500"/>
-          </a:xfrm>
-          <a:prstGeom xmlns:a="http://schemas.openxmlformats.org/drawingml/2006/main" prst="rect">
-            <a:avLst/>
-          </a:prstGeom>
-        </p:spPr>
-      </p:pic>
-      <p:sp>
-        <p:nvSpPr>
-          <p:cNvPr id="3" name="argument-paper-scrim"/>
+      <p:sp>
+        <p:nvSpPr>
+          <p:cNvPr id="2" name="argument-paper-scrim"/>
           <p:cNvSpPr/>
           <p:nvPr/>
         </p:nvSpPr>
@@ -1378,7 +1340,7 @@
       </p:sp>
       <p:pic>
         <p:nvPicPr>
-          <p:cNvPr id="4" name="argument-photo-band">
+          <p:cNvPr id="3" name="argument-photo-band">
             <a:extLst xmlns:a="http://schemas.openxmlformats.org/drawingml/2006/main">
               <a:ext uri="{C183D7F6-B498-43B3-948B-1728B52AA6E4}">
                 <adec:decorative xmlns:adec="http://schemas.microsoft.com/office/drawing/2017/decorative" val="1"/>
@@ -1407,7 +1369,7 @@
       </p:pic>
       <p:sp>
         <p:nvSpPr>
-          <p:cNvPr id="5" name="argument-photo-scrim"/>
+          <p:cNvPr id="4" name="argument-photo-scrim"/>
           <p:cNvSpPr/>
           <p:nvPr/>
         </p:nvSpPr>
@@ -1445,7 +1407,7 @@
       </p:sp>
       <p:sp>
         <p:nvSpPr>
-          <p:cNvPr id="6" name="argument-photo-rule"/>
+          <p:cNvPr id="5" name="argument-photo-rule"/>
           <p:cNvSpPr/>
           <p:nvPr/>
         </p:nvSpPr>
@@ -1479,7 +1441,7 @@
       </p:sp>
       <p:sp>
         <p:nvSpPr>
-          <p:cNvPr id="7" name="MOONLIT WORK REPORT · ARGUMENT"/>
+          <p:cNvPr id="6" name="MOONLIT WORK REPORT · ARGUMENT"/>
           <p:cNvSpPr txBox="1"/>
           <p:nvPr/>
         </p:nvSpPr>
@@ -1516,7 +1478,7 @@
       </p:sp>
       <p:sp>
         <p:nvSpPr>
-          <p:cNvPr id="8" name="argument-title"/>
+          <p:cNvPr id="7" name="argument-title"/>
           <p:cNvSpPr txBox="1"/>
           <p:nvPr/>
         </p:nvSpPr>
@@ -1553,7 +1515,7 @@
       </p:sp>
       <p:sp>
         <p:nvSpPr>
-          <p:cNvPr id="9" name="argument-basis"/>
+          <p:cNvPr id="8" name="argument-basis"/>
           <p:cNvSpPr txBox="1"/>
           <p:nvPr/>
         </p:nvSpPr>
@@ -1590,7 +1552,7 @@
       </p:sp>
       <p:sp>
         <p:nvSpPr>
-          <p:cNvPr id="10" name="work-status"/>
+          <p:cNvPr id="9" name="work-status"/>
           <p:cNvSpPr txBox="1"/>
           <p:nvPr/>
         </p:nvSpPr>
@@ -1627,7 +1589,7 @@
       </p:sp>
       <p:sp>
         <p:nvSpPr>
-          <p:cNvPr id="11" name="work-headline"/>
+          <p:cNvPr id="10" name="work-headline"/>
           <p:cNvSpPr txBox="1"/>
           <p:nvPr/>
         </p:nvSpPr>
@@ -1664,7 +1626,7 @@
       </p:sp>
       <p:sp>
         <p:nvSpPr>
-          <p:cNvPr id="12" name="work-body"/>
+          <p:cNvPr id="11" name="work-body"/>
           <p:cNvSpPr txBox="1"/>
           <p:nvPr/>
         </p:nvSpPr>
@@ -1701,7 +1663,7 @@
       </p:sp>
       <p:sp>
         <p:nvSpPr>
-          <p:cNvPr id="13" name="work-rail"/>
+          <p:cNvPr id="12" name="work-rail"/>
           <p:cNvSpPr/>
           <p:nvPr/>
         </p:nvSpPr>
@@ -1735,7 +1697,7 @@
       </p:sp>
       <p:sp>
         <p:nvSpPr>
-          <p:cNvPr id="14" name="work-num-0"/>
+          <p:cNvPr id="13" name="work-num-0"/>
           <p:cNvSpPr txBox="1"/>
           <p:nvPr/>
         </p:nvSpPr>
@@ -1772,7 +1734,7 @@
       </p:sp>
       <p:sp>
         <p:nvSpPr>
-          <p:cNvPr id="15" name="work-label-0"/>
+          <p:cNvPr id="14" name="work-label-0"/>
           <p:cNvSpPr txBox="1"/>
           <p:nvPr/>
         </p:nvSpPr>
@@ -1809,7 +1771,7 @@
       </p:sp>
       <p:sp>
         <p:nvSpPr>
-          <p:cNvPr id="16" name="work-text-0"/>
+          <p:cNvPr id="15" name="work-text-0"/>
           <p:cNvSpPr txBox="1"/>
           <p:nvPr/>
         </p:nvSpPr>
@@ -1846,7 +1808,7 @@
       </p:sp>
       <p:sp>
         <p:nvSpPr>
-          <p:cNvPr id="17" name="work-num-1"/>
+          <p:cNvPr id="16" name="work-num-1"/>
           <p:cNvSpPr txBox="1"/>
           <p:nvPr/>
         </p:nvSpPr>
@@ -1883,7 +1845,7 @@
       </p:sp>
       <p:sp>
         <p:nvSpPr>
-          <p:cNvPr id="18" name="work-label-1"/>
+          <p:cNvPr id="17" name="work-label-1"/>
           <p:cNvSpPr txBox="1"/>
           <p:nvPr/>
         </p:nvSpPr>
@@ -1920,7 +1882,7 @@
       </p:sp>
       <p:sp>
         <p:nvSpPr>
-          <p:cNvPr id="19" name="work-text-1"/>
+          <p:cNvPr id="18" name="work-text-1"/>
           <p:cNvSpPr txBox="1"/>
           <p:nvPr/>
         </p:nvSpPr>
@@ -1957,7 +1919,7 @@
       </p:sp>
       <p:sp>
         <p:nvSpPr>
-          <p:cNvPr id="20" name="work-num-2"/>
+          <p:cNvPr id="19" name="work-num-2"/>
           <p:cNvSpPr txBox="1"/>
           <p:nvPr/>
         </p:nvSpPr>
@@ -1994,7 +1956,7 @@
       </p:sp>
       <p:sp>
         <p:nvSpPr>
-          <p:cNvPr id="21" name="work-label-2"/>
+          <p:cNvPr id="20" name="work-label-2"/>
           <p:cNvSpPr txBox="1"/>
           <p:nvPr/>
         </p:nvSpPr>
@@ -2031,7 +1993,7 @@
       </p:sp>
       <p:sp>
         <p:nvSpPr>
-          <p:cNvPr id="22" name="work-text-2"/>
+          <p:cNvPr id="21" name="work-text-2"/>
           <p:cNvSpPr txBox="1"/>
           <p:nvPr/>
         </p:nvSpPr>
@@ -2068,7 +2030,7 @@
       </p:sp>
       <p:sp>
         <p:nvSpPr>
-          <p:cNvPr id="23" name="source"/>
+          <p:cNvPr id="22" name="source"/>
           <p:cNvSpPr txBox="1"/>
           <p:nvPr/>
         </p:nvSpPr>
@@ -2105,7 +2067,7 @@
       </p:sp>
       <p:sp>
         <p:nvSpPr>
-          <p:cNvPr id="24" name="page-number"/>
+          <p:cNvPr id="23" name="page-number"/>
           <p:cNvSpPr txBox="1"/>
           <p:nvPr/>
         </p:nvSpPr>
@@ -2152,6 +2114,16 @@
 <file path=ppt/slides/slide3.xml><?xml version="1.0" encoding="utf-8"?>
 <p:sld xmlns:p="http://schemas.openxmlformats.org/presentationml/2006/main">
   <p:cSld name="Evidence">
+    <p:bg>
+      <p:bgPr>
+        <a:blipFill xmlns:a="http://schemas.openxmlformats.org/drawingml/2006/main">
+          <a:blip xmlns:r="http://schemas.openxmlformats.org/officeDocument/2006/relationships" r:embed="rIdOfficeKitImagee4bd683f73b7a543_1"/>
+          <a:stretch>
+            <a:fillRect/>
+          </a:stretch>
+        </a:blipFill>
+      </p:bgPr>
+    </p:bg>
     <p:spTree>
       <p:nvGrpSpPr>
         <p:cNvPr id="1" name=""/>
@@ -2166,38 +2138,9 @@
           <a:chExt cx="0" cy="0"/>
         </a:xfrm>
       </p:grpSpPr>
-      <p:pic>
-        <p:nvPicPr>
-          <p:cNvPr id="2" name="evidence-visual-field">
-            <a:extLst xmlns:a="http://schemas.openxmlformats.org/drawingml/2006/main">
-              <a:ext uri="{C183D7F6-B498-43B3-948B-1728B52AA6E4}">
-                <adec:decorative xmlns:adec="http://schemas.microsoft.com/office/drawing/2017/decorative" val="1"/>
-              </a:ext>
-            </a:extLst>
-          </p:cNvPr>
-          <p:cNvPicPr/>
-          <p:nvPr/>
-        </p:nvPicPr>
-        <p:blipFill>
-          <a:blip xmlns:r="http://schemas.openxmlformats.org/officeDocument/2006/relationships" xmlns:a="http://schemas.openxmlformats.org/drawingml/2006/main" r:embed="rIdOfficeKitImagee4bd683f73b7a543_1"/>
-          <a:srcRect xmlns:a="http://schemas.openxmlformats.org/drawingml/2006/main" l="0" t="34171" r="0" b="34171"/>
-          <a:stretch xmlns:a="http://schemas.openxmlformats.org/drawingml/2006/main">
-            <a:fillRect/>
-          </a:stretch>
-        </p:blipFill>
-        <p:spPr>
-          <a:xfrm xmlns:a="http://schemas.openxmlformats.org/drawingml/2006/main">
-            <a:off x="0" y="0"/>
-            <a:ext cx="15240000" cy="8572500"/>
-          </a:xfrm>
-          <a:prstGeom xmlns:a="http://schemas.openxmlformats.org/drawingml/2006/main" prst="rect">
-            <a:avLst/>
-          </a:prstGeom>
-        </p:spPr>
-      </p:pic>
-      <p:sp>
-        <p:nvSpPr>
-          <p:cNvPr id="3" name="evidence-paper-scrim"/>
+      <p:sp>
+        <p:nvSpPr>
+          <p:cNvPr id="2" name="evidence-paper-scrim"/>
           <p:cNvSpPr/>
           <p:nvPr/>
         </p:nvSpPr>
@@ -2235,7 +2178,7 @@
       </p:sp>
       <p:pic>
         <p:nvPicPr>
-          <p:cNvPr id="4" name="evidence-photo-band">
+          <p:cNvPr id="3" name="evidence-photo-band">
             <a:extLst xmlns:a="http://schemas.openxmlformats.org/drawingml/2006/main">
               <a:ext uri="{C183D7F6-B498-43B3-948B-1728B52AA6E4}">
                 <adec:decorative xmlns:adec="http://schemas.microsoft.com/office/drawing/2017/decorative" val="1"/>
@@ -2264,7 +2207,7 @@
       </p:pic>
       <p:sp>
         <p:nvSpPr>
-          <p:cNvPr id="5" name="evidence-photo-scrim"/>
+          <p:cNvPr id="4" name="evidence-photo-scrim"/>
           <p:cNvSpPr/>
           <p:nvPr/>
         </p:nvSpPr>
@@ -2302,7 +2245,7 @@
       </p:sp>
       <p:sp>
         <p:nvSpPr>
-          <p:cNvPr id="6" name="evidence-photo-rule"/>
+          <p:cNvPr id="5" name="evidence-photo-rule"/>
           <p:cNvSpPr/>
           <p:nvPr/>
         </p:nvSpPr>
@@ -2336,7 +2279,7 @@
       </p:sp>
       <p:sp>
         <p:nvSpPr>
-          <p:cNvPr id="7" name="MOONLIT WORK REPORT · EVIDENCE"/>
+          <p:cNvPr id="6" name="MOONLIT WORK REPORT · EVIDENCE"/>
           <p:cNvSpPr txBox="1"/>
           <p:nvPr/>
         </p:nvSpPr>
@@ -2373,7 +2316,7 @@
       </p:sp>
       <p:sp>
         <p:nvSpPr>
-          <p:cNvPr id="8" name="evidence-title"/>
+          <p:cNvPr id="7" name="evidence-title"/>
           <p:cNvSpPr txBox="1"/>
           <p:nvPr/>
         </p:nvSpPr>
@@ -2410,7 +2353,7 @@
       </p:sp>
       <p:sp>
         <p:nvSpPr>
-          <p:cNvPr id="9" name="evidence-basis"/>
+          <p:cNvPr id="8" name="evidence-basis"/>
           <p:cNvSpPr txBox="1"/>
           <p:nvPr/>
         </p:nvSpPr>
@@ -2447,7 +2390,7 @@
       </p:sp>
       <p:sp>
         <p:nvSpPr>
-          <p:cNvPr id="10" name="evidence-read-scrim"/>
+          <p:cNvPr id="9" name="evidence-read-scrim"/>
           <p:cNvSpPr/>
           <p:nvPr/>
         </p:nvSpPr>
@@ -2485,7 +2428,7 @@
       </p:sp>
       <p:graphicFrame>
         <p:nvGraphicFramePr>
-          <p:cNvPr id="11" name="dense-primary-chart"/>
+          <p:cNvPr id="10" name="dense-primary-chart"/>
           <p:cNvGraphicFramePr>
             <a:graphicFrameLocks xmlns:a="http://schemas.openxmlformats.org/drawingml/2006/main" noGrp="1"/>
           </p:cNvGraphicFramePr>
@@ -2497,13 +2440,13 @@
         </p:xfrm>
         <a:graphic xmlns:a="http://schemas.openxmlformats.org/drawingml/2006/main">
           <a:graphicData uri="http://schemas.openxmlformats.org/drawingml/2006/chart">
-            <c:chart xmlns:r="http://schemas.openxmlformats.org/officeDocument/2006/relationships" xmlns:c="http://schemas.openxmlformats.org/drawingml/2006/chart" r:id="Rcb6814b7f6fb43ac"/>
+            <c:chart xmlns:r="http://schemas.openxmlformats.org/officeDocument/2006/relationships" xmlns:c="http://schemas.openxmlformats.org/drawingml/2006/chart" r:id="Rd9e8d84f27324285"/>
           </a:graphicData>
         </a:graphic>
       </p:graphicFrame>
       <p:graphicFrame>
         <p:nvGraphicFramePr>
-          <p:cNvPr id="12" name="dense-secondary-chart"/>
+          <p:cNvPr id="11" name="dense-secondary-chart"/>
           <p:cNvGraphicFramePr>
             <a:graphicFrameLocks xmlns:a="http://schemas.openxmlformats.org/drawingml/2006/main" noGrp="1"/>
           </p:cNvGraphicFramePr>
@@ -2515,13 +2458,13 @@
         </p:xfrm>
         <a:graphic xmlns:a="http://schemas.openxmlformats.org/drawingml/2006/main">
           <a:graphicData uri="http://schemas.openxmlformats.org/drawingml/2006/chart">
-            <c:chart xmlns:r="http://schemas.openxmlformats.org/officeDocument/2006/relationships" xmlns:c="http://schemas.openxmlformats.org/drawingml/2006/chart" r:id="Rec7716b500d44531"/>
+            <c:chart xmlns:r="http://schemas.openxmlformats.org/officeDocument/2006/relationships" xmlns:c="http://schemas.openxmlformats.org/drawingml/2006/chart" r:id="Rd957ba775f0c4a80"/>
           </a:graphicData>
         </a:graphic>
       </p:graphicFrame>
       <p:sp>
         <p:nvSpPr>
-          <p:cNvPr id="13" name="dense-read-rule"/>
+          <p:cNvPr id="12" name="dense-read-rule"/>
           <p:cNvSpPr/>
           <p:nvPr/>
         </p:nvSpPr>
@@ -2555,7 +2498,7 @@
       </p:sp>
       <p:sp>
         <p:nvSpPr>
-          <p:cNvPr id="14" name="dense-read-label"/>
+          <p:cNvPr id="13" name="dense-read-label"/>
           <p:cNvSpPr txBox="1"/>
           <p:nvPr/>
         </p:nvSpPr>
@@ -2592,7 +2535,7 @@
       </p:sp>
       <p:sp>
         <p:nvSpPr>
-          <p:cNvPr id="15" name="dense-read-title"/>
+          <p:cNvPr id="14" name="dense-read-title"/>
           <p:cNvSpPr txBox="1"/>
           <p:nvPr/>
         </p:nvSpPr>
@@ -2629,7 +2572,7 @@
       </p:sp>
       <p:sp>
         <p:nvSpPr>
-          <p:cNvPr id="16" name="dense-read-body"/>
+          <p:cNvPr id="15" name="dense-read-body"/>
           <p:cNvSpPr txBox="1"/>
           <p:nvPr/>
         </p:nvSpPr>
@@ -2666,7 +2609,7 @@
       </p:sp>
       <p:sp>
         <p:nvSpPr>
-          <p:cNvPr id="17" name="evidence-band"/>
+          <p:cNvPr id="16" name="evidence-band"/>
           <p:cNvSpPr/>
           <p:nvPr/>
         </p:nvSpPr>
@@ -2702,7 +2645,7 @@
       </p:sp>
       <p:sp>
         <p:nvSpPr>
-          <p:cNvPr id="18" name="evidence-band-text"/>
+          <p:cNvPr id="17" name="evidence-band-text"/>
           <p:cNvSpPr txBox="1"/>
           <p:nvPr/>
         </p:nvSpPr>
@@ -2739,7 +2682,7 @@
       </p:sp>
       <p:sp>
         <p:nvSpPr>
-          <p:cNvPr id="19" name="source"/>
+          <p:cNvPr id="18" name="source"/>
           <p:cNvSpPr txBox="1"/>
           <p:nvPr/>
         </p:nvSpPr>
@@ -2776,7 +2719,7 @@
       </p:sp>
       <p:sp>
         <p:nvSpPr>
-          <p:cNvPr id="20" name="page-number"/>
+          <p:cNvPr id="19" name="page-number"/>
           <p:cNvSpPr txBox="1"/>
           <p:nvPr/>
         </p:nvSpPr>
@@ -3791,6 +3734,16 @@
 <file path=ppt/slides/slide5.xml><?xml version="1.0" encoding="utf-8"?>
 <p:sld xmlns:p="http://schemas.openxmlformats.org/presentationml/2006/main">
   <p:cSld name="Visual carrier">
+    <p:bg>
+      <p:bgPr>
+        <a:blipFill xmlns:a="http://schemas.openxmlformats.org/drawingml/2006/main">
+          <a:blip xmlns:r="http://schemas.openxmlformats.org/officeDocument/2006/relationships" r:embed="rIdOfficeKitImagec7b73f8fac405495_1"/>
+          <a:stretch>
+            <a:fillRect/>
+          </a:stretch>
+        </a:blipFill>
+      </p:bgPr>
+    </p:bg>
     <p:spTree>
       <p:nvGrpSpPr>
         <p:cNvPr id="1" name=""/>
@@ -3805,38 +3758,9 @@
           <a:chExt cx="0" cy="0"/>
         </a:xfrm>
       </p:grpSpPr>
-      <p:pic>
-        <p:nvPicPr>
-          <p:cNvPr id="2" name="visual-field">
-            <a:extLst xmlns:a="http://schemas.openxmlformats.org/drawingml/2006/main">
-              <a:ext uri="{C183D7F6-B498-43B3-948B-1728B52AA6E4}">
-                <adec:decorative xmlns:adec="http://schemas.microsoft.com/office/drawing/2017/decorative" val="1"/>
-              </a:ext>
-            </a:extLst>
-          </p:cNvPr>
-          <p:cNvPicPr/>
-          <p:nvPr/>
-        </p:nvPicPr>
-        <p:blipFill>
-          <a:blip xmlns:r="http://schemas.openxmlformats.org/officeDocument/2006/relationships" xmlns:a="http://schemas.openxmlformats.org/drawingml/2006/main" r:embed="rIdOfficeKitImagec7b73f8fac405495_1"/>
-          <a:srcRect xmlns:a="http://schemas.openxmlformats.org/drawingml/2006/main" l="0" t="34171" r="0" b="34171"/>
-          <a:stretch xmlns:a="http://schemas.openxmlformats.org/drawingml/2006/main">
-            <a:fillRect/>
-          </a:stretch>
-        </p:blipFill>
-        <p:spPr>
-          <a:xfrm xmlns:a="http://schemas.openxmlformats.org/drawingml/2006/main">
-            <a:off x="0" y="0"/>
-            <a:ext cx="15240000" cy="8572500"/>
-          </a:xfrm>
-          <a:prstGeom xmlns:a="http://schemas.openxmlformats.org/drawingml/2006/main" prst="rect">
-            <a:avLst/>
-          </a:prstGeom>
-        </p:spPr>
-      </p:pic>
-      <p:sp>
-        <p:nvSpPr>
-          <p:cNvPr id="3" name="visual-scrim"/>
+      <p:sp>
+        <p:nvSpPr>
+          <p:cNvPr id="2" name="visual-scrim"/>
           <p:cNvSpPr/>
           <p:nvPr/>
         </p:nvSpPr>
@@ -3874,7 +3798,7 @@
       </p:sp>
       <p:sp>
         <p:nvSpPr>
-          <p:cNvPr id="4" name="visual-eyebrow"/>
+          <p:cNvPr id="3" name="visual-eyebrow"/>
           <p:cNvSpPr txBox="1"/>
           <p:nvPr/>
         </p:nvSpPr>
@@ -3911,7 +3835,7 @@
       </p:sp>
       <p:sp>
         <p:nvSpPr>
-          <p:cNvPr id="5" name="visual-title"/>
+          <p:cNvPr id="4" name="visual-title"/>
           <p:cNvSpPr txBox="1"/>
           <p:nvPr/>
         </p:nvSpPr>
@@ -3948,7 +3872,7 @@
       </p:sp>
       <p:sp>
         <p:nvSpPr>
-          <p:cNvPr id="6" name="visual-body"/>
+          <p:cNvPr id="5" name="visual-body"/>
           <p:cNvSpPr txBox="1"/>
           <p:nvPr/>
         </p:nvSpPr>
@@ -3985,7 +3909,7 @@
       </p:sp>
       <p:sp>
         <p:nvSpPr>
-          <p:cNvPr id="7" name="visual-rule"/>
+          <p:cNvPr id="6" name="visual-rule"/>
           <p:cNvSpPr/>
           <p:nvPr/>
         </p:nvSpPr>
@@ -4019,7 +3943,7 @@
       </p:sp>
       <p:sp>
         <p:nvSpPr>
-          <p:cNvPr id="8" name="visual-label"/>
+          <p:cNvPr id="7" name="visual-label"/>
           <p:cNvSpPr txBox="1"/>
           <p:nvPr/>
         </p:nvSpPr>
@@ -4056,7 +3980,7 @@
       </p:sp>
       <p:sp>
         <p:nvSpPr>
-          <p:cNvPr id="9" name="source"/>
+          <p:cNvPr id="8" name="source"/>
           <p:cNvSpPr txBox="1"/>
           <p:nvPr/>
         </p:nvSpPr>
@@ -4093,7 +4017,7 @@
       </p:sp>
       <p:sp>
         <p:nvSpPr>
-          <p:cNvPr id="10" name="page-number"/>
+          <p:cNvPr id="9" name="page-number"/>
           <p:cNvSpPr txBox="1"/>
           <p:nvPr/>
         </p:nvSpPr>
@@ -4140,6 +4064,16 @@
 <file path=ppt/slides/slide6.xml><?xml version="1.0" encoding="utf-8"?>
 <p:sld xmlns:p="http://schemas.openxmlformats.org/presentationml/2006/main">
   <p:cSld name="Decision close">
+    <p:bg>
+      <p:bgPr>
+        <a:blipFill xmlns:a="http://schemas.openxmlformats.org/drawingml/2006/main">
+          <a:blip xmlns:r="http://schemas.openxmlformats.org/officeDocument/2006/relationships" r:embed="rIdOfficeKitImaged71bfa074cda59bb_1"/>
+          <a:stretch>
+            <a:fillRect/>
+          </a:stretch>
+        </a:blipFill>
+      </p:bgPr>
+    </p:bg>
     <p:spTree>
       <p:nvGrpSpPr>
         <p:cNvPr id="1" name=""/>
@@ -4154,38 +4088,9 @@
           <a:chExt cx="0" cy="0"/>
         </a:xfrm>
       </p:grpSpPr>
-      <p:pic>
-        <p:nvPicPr>
-          <p:cNvPr id="2" name="close-visual-field">
-            <a:extLst xmlns:a="http://schemas.openxmlformats.org/drawingml/2006/main">
-              <a:ext uri="{C183D7F6-B498-43B3-948B-1728B52AA6E4}">
-                <adec:decorative xmlns:adec="http://schemas.microsoft.com/office/drawing/2017/decorative" val="1"/>
-              </a:ext>
-            </a:extLst>
-          </p:cNvPr>
-          <p:cNvPicPr/>
-          <p:nvPr/>
-        </p:nvPicPr>
-        <p:blipFill>
-          <a:blip xmlns:r="http://schemas.openxmlformats.org/officeDocument/2006/relationships" xmlns:a="http://schemas.openxmlformats.org/drawingml/2006/main" r:embed="rIdOfficeKitImaged71bfa074cda59bb_1"/>
-          <a:srcRect xmlns:a="http://schemas.openxmlformats.org/drawingml/2006/main" l="0" t="34180" r="0" b="34180"/>
-          <a:stretch xmlns:a="http://schemas.openxmlformats.org/drawingml/2006/main">
-            <a:fillRect/>
-          </a:stretch>
-        </p:blipFill>
-        <p:spPr>
-          <a:xfrm xmlns:a="http://schemas.openxmlformats.org/drawingml/2006/main">
-            <a:off x="0" y="0"/>
-            <a:ext cx="15240000" cy="8572500"/>
-          </a:xfrm>
-          <a:prstGeom xmlns:a="http://schemas.openxmlformats.org/drawingml/2006/main" prst="rect">
-            <a:avLst/>
-          </a:prstGeom>
-        </p:spPr>
-      </p:pic>
-      <p:sp>
-        <p:nvSpPr>
-          <p:cNvPr id="3" name="close-paper-scrim"/>
+      <p:sp>
+        <p:nvSpPr>
+          <p:cNvPr id="2" name="close-paper-scrim"/>
           <p:cNvSpPr/>
           <p:nvPr/>
         </p:nvSpPr>
@@ -4223,7 +4128,7 @@
       </p:sp>
       <p:pic>
         <p:nvPicPr>
-          <p:cNvPr id="4" name="close-photo-band">
+          <p:cNvPr id="3" name="close-photo-band">
             <a:extLst xmlns:a="http://schemas.openxmlformats.org/drawingml/2006/main">
               <a:ext uri="{C183D7F6-B498-43B3-948B-1728B52AA6E4}">
                 <adec:decorative xmlns:adec="http://schemas.microsoft.com/office/drawing/2017/decorative" val="1"/>
@@ -4252,7 +4157,7 @@
       </p:pic>
       <p:sp>
         <p:nvSpPr>
-          <p:cNvPr id="5" name="close-photo-scrim"/>
+          <p:cNvPr id="4" name="close-photo-scrim"/>
           <p:cNvSpPr/>
           <p:nvPr/>
         </p:nvSpPr>
@@ -4290,7 +4195,7 @@
       </p:sp>
       <p:sp>
         <p:nvSpPr>
-          <p:cNvPr id="6" name="close-photo-rule"/>
+          <p:cNvPr id="5" name="close-photo-rule"/>
           <p:cNvSpPr/>
           <p:nvPr/>
         </p:nvSpPr>
@@ -4324,7 +4229,7 @@
       </p:sp>
       <p:sp>
         <p:nvSpPr>
-          <p:cNvPr id="7" name="MOONLIT WORK REPORT · CLOSE"/>
+          <p:cNvPr id="6" name="MOONLIT WORK REPORT · CLOSE"/>
           <p:cNvSpPr txBox="1"/>
           <p:nvPr/>
         </p:nvSpPr>
@@ -4361,7 +4266,7 @@
       </p:sp>
       <p:sp>
         <p:nvSpPr>
-          <p:cNvPr id="8" name="close-title"/>
+          <p:cNvPr id="7" name="close-title"/>
           <p:cNvSpPr txBox="1"/>
           <p:nvPr/>
         </p:nvSpPr>
@@ -4398,7 +4303,7 @@
       </p:sp>
       <p:sp>
         <p:nvSpPr>
-          <p:cNvPr id="9" name="close-basis"/>
+          <p:cNvPr id="8" name="close-basis"/>
           <p:cNvSpPr txBox="1"/>
           <p:nvPr/>
         </p:nvSpPr>
@@ -4435,7 +4340,7 @@
       </p:sp>
       <p:sp>
         <p:nvSpPr>
-          <p:cNvPr id="10" name="close-number-0"/>
+          <p:cNvPr id="9" name="close-number-0"/>
           <p:cNvSpPr txBox="1"/>
           <p:nvPr/>
         </p:nvSpPr>
@@ -4472,7 +4377,7 @@
       </p:sp>
       <p:sp>
         <p:nvSpPr>
-          <p:cNvPr id="11" name="close-row-rule-0"/>
+          <p:cNvPr id="10" name="close-row-rule-0"/>
           <p:cNvSpPr/>
           <p:nvPr/>
         </p:nvSpPr>
@@ -4506,7 +4411,7 @@
       </p:sp>
       <p:sp>
         <p:nvSpPr>
-          <p:cNvPr id="12" name="close-label-0"/>
+          <p:cNvPr id="11" name="close-label-0"/>
           <p:cNvSpPr txBox="1"/>
           <p:nvPr/>
         </p:nvSpPr>
@@ -4543,7 +4448,7 @@
       </p:sp>
       <p:sp>
         <p:nvSpPr>
-          <p:cNvPr id="13" name="close-text-0"/>
+          <p:cNvPr id="12" name="close-text-0"/>
           <p:cNvSpPr txBox="1"/>
           <p:nvPr/>
         </p:nvSpPr>
@@ -4580,7 +4485,7 @@
       </p:sp>
       <p:sp>
         <p:nvSpPr>
-          <p:cNvPr id="14" name="close-number-1"/>
+          <p:cNvPr id="13" name="close-number-1"/>
           <p:cNvSpPr txBox="1"/>
           <p:nvPr/>
         </p:nvSpPr>
@@ -4617,7 +4522,7 @@
       </p:sp>
       <p:sp>
         <p:nvSpPr>
-          <p:cNvPr id="15" name="close-row-rule-1"/>
+          <p:cNvPr id="14" name="close-row-rule-1"/>
           <p:cNvSpPr/>
           <p:nvPr/>
         </p:nvSpPr>
@@ -4651,7 +4556,7 @@
       </p:sp>
       <p:sp>
         <p:nvSpPr>
-          <p:cNvPr id="16" name="close-label-1"/>
+          <p:cNvPr id="15" name="close-label-1"/>
           <p:cNvSpPr txBox="1"/>
           <p:nvPr/>
         </p:nvSpPr>
@@ -4688,7 +4593,7 @@
       </p:sp>
       <p:sp>
         <p:nvSpPr>
-          <p:cNvPr id="17" name="close-text-1"/>
+          <p:cNvPr id="16" name="close-text-1"/>
           <p:cNvSpPr txBox="1"/>
           <p:nvPr/>
         </p:nvSpPr>
@@ -4725,7 +4630,7 @@
       </p:sp>
       <p:sp>
         <p:nvSpPr>
-          <p:cNvPr id="18" name="close-number-2"/>
+          <p:cNvPr id="17" name="close-number-2"/>
           <p:cNvSpPr txBox="1"/>
           <p:nvPr/>
         </p:nvSpPr>
@@ -4762,7 +4667,7 @@
       </p:sp>
       <p:sp>
         <p:nvSpPr>
-          <p:cNvPr id="19" name="close-row-rule-2"/>
+          <p:cNvPr id="18" name="close-row-rule-2"/>
           <p:cNvSpPr/>
           <p:nvPr/>
         </p:nvSpPr>
@@ -4796,7 +4701,7 @@
       </p:sp>
       <p:sp>
         <p:nvSpPr>
-          <p:cNvPr id="20" name="close-label-2"/>
+          <p:cNvPr id="19" name="close-label-2"/>
           <p:cNvSpPr txBox="1"/>
           <p:nvPr/>
         </p:nvSpPr>
@@ -4833,7 +4738,7 @@
       </p:sp>
       <p:sp>
         <p:nvSpPr>
-          <p:cNvPr id="21" name="close-text-2"/>
+          <p:cNvPr id="20" name="close-text-2"/>
           <p:cNvSpPr txBox="1"/>
           <p:nvPr/>
         </p:nvSpPr>
@@ -4870,7 +4775,7 @@
       </p:sp>
       <p:sp>
         <p:nvSpPr>
-          <p:cNvPr id="22" name="next-panel"/>
+          <p:cNvPr id="21" name="next-panel"/>
           <p:cNvSpPr/>
           <p:nvPr/>
         </p:nvSpPr>
@@ -4906,7 +4811,7 @@
       </p:sp>
       <p:sp>
         <p:nvSpPr>
-          <p:cNvPr id="23" name="next-label"/>
+          <p:cNvPr id="22" name="next-label"/>
           <p:cNvSpPr txBox="1"/>
           <p:nvPr/>
         </p:nvSpPr>
@@ -4943,7 +4848,7 @@
       </p:sp>
       <p:sp>
         <p:nvSpPr>
-          <p:cNvPr id="24" name="next-text"/>
+          <p:cNvPr id="23" name="next-text"/>
           <p:cNvSpPr txBox="1"/>
           <p:nvPr/>
         </p:nvSpPr>
@@ -4980,7 +4885,7 @@
       </p:sp>
       <p:sp>
         <p:nvSpPr>
-          <p:cNvPr id="25" name="next-foot"/>
+          <p:cNvPr id="24" name="next-foot"/>
           <p:cNvSpPr txBox="1"/>
           <p:nvPr/>
         </p:nvSpPr>
@@ -5017,7 +4922,7 @@
       </p:sp>
       <p:sp>
         <p:nvSpPr>
-          <p:cNvPr id="26" name="source"/>
+          <p:cNvPr id="25" name="source"/>
           <p:cNvSpPr txBox="1"/>
           <p:nvPr/>
         </p:nvSpPr>
@@ -5054,7 +4959,7 @@
       </p:sp>
       <p:sp>
         <p:nvSpPr>
-          <p:cNvPr id="27" name="page-number"/>
+          <p:cNvPr id="26" name="page-number"/>
           <p:cNvSpPr txBox="1"/>
           <p:nvPr/>
         </p:nvSpPr>

--- a/skills/presentation-template-library/skills/artifact-template-moonlit-work-report/assets/reference.pptx
+++ b/skills/presentation-template-library/skills/artifact-template-moonlit-work-report/assets/reference.pptx
@@ -484,6 +484,801 @@
     <p:bg>
       <p:bgPr>
         <a:blipFill xmlns:a="http://schemas.openxmlformats.org/drawingml/2006/main">
+          <a:blip xmlns:r="http://schemas.openxmlformats.org/officeDocument/2006/relationships" r:embed="rIdOfficeKitImage33b8c33a8fc3d613_1"/>
+          <a:stretch>
+            <a:fillRect/>
+          </a:stretch>
+        </a:blipFill>
+      </p:bgPr>
+    </p:bg>
+    <p:spTree>
+      <p:nvGrpSpPr>
+        <p:cNvPr id="1" name=""/>
+        <p:cNvGrpSpPr/>
+        <p:nvPr/>
+      </p:nvGrpSpPr>
+      <p:grpSpPr>
+        <a:xfrm xmlns:a="http://schemas.openxmlformats.org/drawingml/2006/main">
+          <a:off x="0" y="0"/>
+          <a:ext cx="0" cy="0"/>
+          <a:chOff x="0" y="0"/>
+          <a:chExt cx="0" cy="0"/>
+        </a:xfrm>
+      </p:grpSpPr>
+      <p:sp>
+        <p:nvSpPr>
+          <p:cNvPr id="2" name="cover-paper-scrim"/>
+          <p:cNvSpPr/>
+          <p:nvPr/>
+        </p:nvSpPr>
+        <p:spPr>
+          <a:xfrm xmlns:a="http://schemas.openxmlformats.org/drawingml/2006/main">
+            <a:off x="0" y="0"/>
+            <a:ext cx="9525000" cy="8572500"/>
+          </a:xfrm>
+          <a:prstGeom xmlns:a="http://schemas.openxmlformats.org/drawingml/2006/main" prst="rect">
+            <a:avLst/>
+          </a:prstGeom>
+          <a:solidFill xmlns:a="http://schemas.openxmlformats.org/drawingml/2006/main">
+            <a:srgbClr val="FFFFFF">
+              <a:alpha val="100000"/>
+            </a:srgbClr>
+          </a:solidFill>
+          <a:ln xmlns:a="http://schemas.openxmlformats.org/drawingml/2006/main" w="0">
+            <a:solidFill>
+              <a:srgbClr val="FFFFFF"/>
+            </a:solidFill>
+            <a:prstDash val="solid"/>
+          </a:ln>
+        </p:spPr>
+        <p:txBody>
+          <a:bodyPr xmlns:a="http://schemas.openxmlformats.org/drawingml/2006/main" wrap="square" lIns="0" tIns="0" rIns="0" bIns="0" anchor="t"/>
+          <a:lstStyle xmlns:a="http://schemas.openxmlformats.org/drawingml/2006/main"/>
+          <a:p xmlns:a="http://schemas.openxmlformats.org/drawingml/2006/main">
+            <a:r>
+              <a:rPr lang="en-US"/>
+              <a:t/>
+            </a:r>
+            <a:endParaRPr lang="en-US"/>
+          </a:p>
+        </p:txBody>
+      </p:sp>
+      <p:sp>
+        <p:nvSpPr>
+          <p:cNvPr id="3" name="top-rule"/>
+          <p:cNvSpPr/>
+          <p:nvPr/>
+        </p:nvSpPr>
+        <p:spPr>
+          <a:xfrm xmlns:a="http://schemas.openxmlformats.org/drawingml/2006/main">
+            <a:off x="838200" y="666750"/>
+            <a:ext cx="13563600" cy="0"/>
+          </a:xfrm>
+          <a:prstGeom xmlns:a="http://schemas.openxmlformats.org/drawingml/2006/main" prst="line">
+            <a:avLst/>
+          </a:prstGeom>
+          <a:noFill xmlns:a="http://schemas.openxmlformats.org/drawingml/2006/main"/>
+          <a:ln xmlns:a="http://schemas.openxmlformats.org/drawingml/2006/main" w="38100">
+            <a:solidFill>
+              <a:srgbClr val="8B6BE8"/>
+            </a:solidFill>
+            <a:prstDash val="solid"/>
+          </a:ln>
+        </p:spPr>
+        <p:txBody>
+          <a:bodyPr xmlns:a="http://schemas.openxmlformats.org/drawingml/2006/main" wrap="square" lIns="0" tIns="0" rIns="0" bIns="0" anchor="t"/>
+          <a:lstStyle xmlns:a="http://schemas.openxmlformats.org/drawingml/2006/main"/>
+          <a:p xmlns:a="http://schemas.openxmlformats.org/drawingml/2006/main">
+            <a:r>
+              <a:rPr lang="en-US"/>
+              <a:t/>
+            </a:r>
+            <a:endParaRPr lang="en-US"/>
+          </a:p>
+        </p:txBody>
+      </p:sp>
+      <p:sp>
+        <p:nvSpPr>
+          <p:cNvPr id="4" name="eyebrow"/>
+          <p:cNvSpPr txBox="1"/>
+          <p:nvPr/>
+        </p:nvSpPr>
+        <p:spPr>
+          <a:xfrm xmlns:a="http://schemas.openxmlformats.org/drawingml/2006/main">
+            <a:off x="914400" y="895350"/>
+            <a:ext cx="7239000" cy="228600"/>
+          </a:xfrm>
+          <a:prstGeom xmlns:a="http://schemas.openxmlformats.org/drawingml/2006/main" prst="rect">
+            <a:avLst/>
+          </a:prstGeom>
+          <a:noFill xmlns:a="http://schemas.openxmlformats.org/drawingml/2006/main"/>
+          <a:ln xmlns:a="http://schemas.openxmlformats.org/drawingml/2006/main" w="0">
+            <a:noFill/>
+          </a:ln>
+        </p:spPr>
+        <p:txBody>
+          <a:bodyPr xmlns:a="http://schemas.openxmlformats.org/drawingml/2006/main" wrap="square" lIns="0" tIns="0" rIns="0" bIns="0" anchor="t"/>
+          <a:lstStyle xmlns:a="http://schemas.openxmlformats.org/drawingml/2006/main"/>
+          <a:p xmlns:a="http://schemas.openxmlformats.org/drawingml/2006/main">
+            <a:r>
+              <a:rPr lang="en-US" sz="1200" b="1">
+                <a:solidFill>
+                  <a:srgbClr val="8B6BE8"/>
+                </a:solidFill>
+                <a:latin typeface="Arial"/>
+                <a:ea typeface="Arial"/>
+              </a:rPr>
+              <a:t>WORK · OFFICEKIT CALIBRATION</a:t>
+            </a:r>
+            <a:endParaRPr lang="en-US"/>
+          </a:p>
+        </p:txBody>
+      </p:sp>
+      <p:sp>
+        <p:nvSpPr>
+          <p:cNvPr id="5" name="cover-title"/>
+          <p:cNvSpPr txBox="1"/>
+          <p:nvPr/>
+        </p:nvSpPr>
+        <p:spPr>
+          <a:xfrm xmlns:a="http://schemas.openxmlformats.org/drawingml/2006/main">
+            <a:off x="914400" y="1571625"/>
+            <a:ext cx="8382000" cy="1066800"/>
+          </a:xfrm>
+          <a:prstGeom xmlns:a="http://schemas.openxmlformats.org/drawingml/2006/main" prst="rect">
+            <a:avLst/>
+          </a:prstGeom>
+          <a:noFill xmlns:a="http://schemas.openxmlformats.org/drawingml/2006/main"/>
+          <a:ln xmlns:a="http://schemas.openxmlformats.org/drawingml/2006/main" w="0">
+            <a:noFill/>
+          </a:ln>
+        </p:spPr>
+        <p:txBody>
+          <a:bodyPr xmlns:a="http://schemas.openxmlformats.org/drawingml/2006/main" wrap="square" lIns="0" tIns="0" rIns="0" bIns="0" anchor="t"/>
+          <a:lstStyle xmlns:a="http://schemas.openxmlformats.org/drawingml/2006/main"/>
+          <a:p xmlns:a="http://schemas.openxmlformats.org/drawingml/2006/main">
+            <a:r>
+              <a:rPr lang="en-US" sz="3600" b="1">
+                <a:solidFill>
+                  <a:srgbClr val="1D2330"/>
+                </a:solidFill>
+                <a:latin typeface="Arial"/>
+                <a:ea typeface="Arial"/>
+              </a:rPr>
+              <a:t>Moonlit Work Report: a claim worth testing</a:t>
+            </a:r>
+            <a:endParaRPr lang="en-US"/>
+          </a:p>
+        </p:txBody>
+      </p:sp>
+      <p:sp>
+        <p:nvSpPr>
+          <p:cNvPr id="6" name="cover-subtitle"/>
+          <p:cNvSpPr txBox="1"/>
+          <p:nvPr/>
+        </p:nvSpPr>
+        <p:spPr>
+          <a:xfrm xmlns:a="http://schemas.openxmlformats.org/drawingml/2006/main">
+            <a:off x="952500" y="2857500"/>
+            <a:ext cx="6858000" cy="323850"/>
+          </a:xfrm>
+          <a:prstGeom xmlns:a="http://schemas.openxmlformats.org/drawingml/2006/main" prst="rect">
+            <a:avLst/>
+          </a:prstGeom>
+          <a:noFill xmlns:a="http://schemas.openxmlformats.org/drawingml/2006/main"/>
+          <a:ln xmlns:a="http://schemas.openxmlformats.org/drawingml/2006/main" w="0">
+            <a:noFill/>
+          </a:ln>
+        </p:spPr>
+        <p:txBody>
+          <a:bodyPr xmlns:a="http://schemas.openxmlformats.org/drawingml/2006/main" wrap="square" lIns="0" tIns="0" rIns="0" bIns="0" anchor="t"/>
+          <a:lstStyle xmlns:a="http://schemas.openxmlformats.org/drawingml/2006/main"/>
+          <a:p xmlns:a="http://schemas.openxmlformats.org/drawingml/2006/main">
+            <a:r>
+              <a:rPr lang="en-US" sz="1725">
+                <a:solidFill>
+                  <a:srgbClr val="8B6BE8"/>
+                </a:solidFill>
+                <a:latin typeface="Arial"/>
+                <a:ea typeface="Arial"/>
+              </a:rPr>
+              <a:t>A clean-room reference for evidence, direction, and a decision.</a:t>
+            </a:r>
+            <a:endParaRPr lang="en-US"/>
+          </a:p>
+        </p:txBody>
+      </p:sp>
+      <p:sp>
+        <p:nvSpPr>
+          <p:cNvPr id="7" name="cover-rule"/>
+          <p:cNvSpPr/>
+          <p:nvPr/>
+        </p:nvSpPr>
+        <p:spPr>
+          <a:xfrm xmlns:a="http://schemas.openxmlformats.org/drawingml/2006/main">
+            <a:off x="914400" y="3524250"/>
+            <a:ext cx="7658100" cy="0"/>
+          </a:xfrm>
+          <a:prstGeom xmlns:a="http://schemas.openxmlformats.org/drawingml/2006/main" prst="line">
+            <a:avLst/>
+          </a:prstGeom>
+          <a:noFill xmlns:a="http://schemas.openxmlformats.org/drawingml/2006/main"/>
+          <a:ln xmlns:a="http://schemas.openxmlformats.org/drawingml/2006/main" w="25400">
+            <a:solidFill>
+              <a:srgbClr val="93959C"/>
+            </a:solidFill>
+            <a:prstDash val="solid"/>
+          </a:ln>
+        </p:spPr>
+        <p:txBody>
+          <a:bodyPr xmlns:a="http://schemas.openxmlformats.org/drawingml/2006/main" wrap="square" lIns="0" tIns="0" rIns="0" bIns="0" anchor="t"/>
+          <a:lstStyle xmlns:a="http://schemas.openxmlformats.org/drawingml/2006/main"/>
+          <a:p xmlns:a="http://schemas.openxmlformats.org/drawingml/2006/main">
+            <a:r>
+              <a:rPr lang="en-US"/>
+              <a:t/>
+            </a:r>
+            <a:endParaRPr lang="en-US"/>
+          </a:p>
+        </p:txBody>
+      </p:sp>
+      <p:sp>
+        <p:nvSpPr>
+          <p:cNvPr id="8" name="cover-basis"/>
+          <p:cNvSpPr txBox="1"/>
+          <p:nvPr/>
+        </p:nvSpPr>
+        <p:spPr>
+          <a:xfrm xmlns:a="http://schemas.openxmlformats.org/drawingml/2006/main">
+            <a:off x="952500" y="3762375"/>
+            <a:ext cx="7810500" cy="266700"/>
+          </a:xfrm>
+          <a:prstGeom xmlns:a="http://schemas.openxmlformats.org/drawingml/2006/main" prst="rect">
+            <a:avLst/>
+          </a:prstGeom>
+          <a:noFill xmlns:a="http://schemas.openxmlformats.org/drawingml/2006/main"/>
+          <a:ln xmlns:a="http://schemas.openxmlformats.org/drawingml/2006/main" w="0">
+            <a:noFill/>
+          </a:ln>
+        </p:spPr>
+        <p:txBody>
+          <a:bodyPr xmlns:a="http://schemas.openxmlformats.org/drawingml/2006/main" wrap="square" lIns="0" tIns="0" rIns="0" bIns="0" anchor="t"/>
+          <a:lstStyle xmlns:a="http://schemas.openxmlformats.org/drawingml/2006/main"/>
+          <a:p xmlns:a="http://schemas.openxmlformats.org/drawingml/2006/main">
+            <a:r>
+              <a:rPr lang="en-US" sz="1350">
+                <a:solidFill>
+                  <a:srgbClr val="1D2330"/>
+                </a:solidFill>
+                <a:latin typeface="Arial"/>
+                <a:ea typeface="Arial"/>
+              </a:rPr>
+              <a:t>One visual language · four page roles · native editable objects</a:t>
+            </a:r>
+            <a:endParaRPr lang="en-US"/>
+          </a:p>
+        </p:txBody>
+      </p:sp>
+      <p:sp>
+        <p:nvSpPr>
+          <p:cNvPr id="9" name="cover-thesis"/>
+          <p:cNvSpPr txBox="1"/>
+          <p:nvPr/>
+        </p:nvSpPr>
+        <p:spPr>
+          <a:xfrm xmlns:a="http://schemas.openxmlformats.org/drawingml/2006/main">
+            <a:off x="952500" y="4810125"/>
+            <a:ext cx="6667500" cy="628650"/>
+          </a:xfrm>
+          <a:prstGeom xmlns:a="http://schemas.openxmlformats.org/drawingml/2006/main" prst="rect">
+            <a:avLst/>
+          </a:prstGeom>
+          <a:noFill xmlns:a="http://schemas.openxmlformats.org/drawingml/2006/main"/>
+          <a:ln xmlns:a="http://schemas.openxmlformats.org/drawingml/2006/main" w="0">
+            <a:noFill/>
+          </a:ln>
+        </p:spPr>
+        <p:txBody>
+          <a:bodyPr xmlns:a="http://schemas.openxmlformats.org/drawingml/2006/main" wrap="square" lIns="0" tIns="0" rIns="0" bIns="0" anchor="t"/>
+          <a:lstStyle xmlns:a="http://schemas.openxmlformats.org/drawingml/2006/main"/>
+          <a:p xmlns:a="http://schemas.openxmlformats.org/drawingml/2006/main">
+            <a:r>
+              <a:rPr lang="en-US" sz="1875" b="1">
+                <a:solidFill>
+                  <a:srgbClr val="1D2330"/>
+                </a:solidFill>
+                <a:latin typeface="Arial"/>
+                <a:ea typeface="Arial"/>
+              </a:rPr>
+              <a:t>A visible operating signal creates a shared next action.</a:t>
+            </a:r>
+            <a:endParaRPr lang="en-US"/>
+          </a:p>
+        </p:txBody>
+      </p:sp>
+      <p:sp>
+        <p:nvSpPr>
+          <p:cNvPr id="10" name="cover-source"/>
+          <p:cNvSpPr txBox="1"/>
+          <p:nvPr/>
+        </p:nvSpPr>
+        <p:spPr>
+          <a:xfrm xmlns:a="http://schemas.openxmlformats.org/drawingml/2006/main">
+            <a:off x="952500" y="7315200"/>
+            <a:ext cx="9048750" cy="228600"/>
+          </a:xfrm>
+          <a:prstGeom xmlns:a="http://schemas.openxmlformats.org/drawingml/2006/main" prst="rect">
+            <a:avLst/>
+          </a:prstGeom>
+          <a:noFill xmlns:a="http://schemas.openxmlformats.org/drawingml/2006/main"/>
+          <a:ln xmlns:a="http://schemas.openxmlformats.org/drawingml/2006/main" w="0">
+            <a:noFill/>
+          </a:ln>
+        </p:spPr>
+        <p:txBody>
+          <a:bodyPr xmlns:a="http://schemas.openxmlformats.org/drawingml/2006/main" wrap="square" lIns="0" tIns="0" rIns="0" bIns="0" anchor="t"/>
+          <a:lstStyle xmlns:a="http://schemas.openxmlformats.org/drawingml/2006/main"/>
+          <a:p xmlns:a="http://schemas.openxmlformats.org/drawingml/2006/main">
+            <a:r>
+              <a:rPr lang="en-US" sz="1050">
+                <a:solidFill>
+                  <a:srgbClr val="93959C"/>
+                </a:solidFill>
+                <a:latin typeface="Arial"/>
+                <a:ea typeface="Arial"/>
+              </a:rPr>
+              <a:t>OfficeKit original clean-room calibration · fictional content · 2026-08-29</a:t>
+            </a:r>
+            <a:endParaRPr lang="en-US"/>
+          </a:p>
+        </p:txBody>
+      </p:sp>
+      <p:sp>
+        <p:nvSpPr>
+          <p:cNvPr id="11" name="page-number"/>
+          <p:cNvSpPr txBox="1"/>
+          <p:nvPr/>
+        </p:nvSpPr>
+        <p:spPr>
+          <a:xfrm xmlns:a="http://schemas.openxmlformats.org/drawingml/2006/main">
+            <a:off x="13335000" y="7810500"/>
+            <a:ext cx="952500" cy="209550"/>
+          </a:xfrm>
+          <a:prstGeom xmlns:a="http://schemas.openxmlformats.org/drawingml/2006/main" prst="rect">
+            <a:avLst/>
+          </a:prstGeom>
+          <a:noFill xmlns:a="http://schemas.openxmlformats.org/drawingml/2006/main"/>
+          <a:ln xmlns:a="http://schemas.openxmlformats.org/drawingml/2006/main" w="0">
+            <a:noFill/>
+          </a:ln>
+        </p:spPr>
+        <p:txBody>
+          <a:bodyPr xmlns:a="http://schemas.openxmlformats.org/drawingml/2006/main" wrap="square" lIns="0" tIns="0" rIns="0" bIns="0" anchor="t"/>
+          <a:lstStyle xmlns:a="http://schemas.openxmlformats.org/drawingml/2006/main"/>
+          <a:p xmlns:a="http://schemas.openxmlformats.org/drawingml/2006/main">
+            <a:pPr algn="r"/>
+            <a:r>
+              <a:rPr lang="en-US" sz="1050">
+                <a:solidFill>
+                  <a:srgbClr val="93959C"/>
+                </a:solidFill>
+                <a:latin typeface="Arial"/>
+                <a:ea typeface="Arial"/>
+              </a:rPr>
+              <a:t>1 / 6</a:t>
+            </a:r>
+            <a:endParaRPr lang="en-US"/>
+          </a:p>
+        </p:txBody>
+      </p:sp>
+      <p:sp>
+        <p:nvSpPr>
+          <p:cNvPr id="12" name="anchor-field"/>
+          <p:cNvSpPr/>
+          <p:nvPr/>
+        </p:nvSpPr>
+        <p:spPr>
+          <a:xfrm xmlns:a="http://schemas.openxmlformats.org/drawingml/2006/main">
+            <a:off x="11620500" y="1790700"/>
+            <a:ext cx="2095500" cy="2286000"/>
+          </a:xfrm>
+          <a:prstGeom xmlns:a="http://schemas.openxmlformats.org/drawingml/2006/main" prst="rect">
+            <a:avLst/>
+          </a:prstGeom>
+          <a:solidFill xmlns:a="http://schemas.openxmlformats.org/drawingml/2006/main">
+            <a:srgbClr val="F3F5F8"/>
+          </a:solidFill>
+          <a:ln xmlns:a="http://schemas.openxmlformats.org/drawingml/2006/main" w="25400">
+            <a:solidFill>
+              <a:srgbClr val="8B6BE8"/>
+            </a:solidFill>
+            <a:prstDash val="solid"/>
+          </a:ln>
+        </p:spPr>
+        <p:txBody>
+          <a:bodyPr xmlns:a="http://schemas.openxmlformats.org/drawingml/2006/main" wrap="square" lIns="0" tIns="0" rIns="0" bIns="0" anchor="t"/>
+          <a:lstStyle xmlns:a="http://schemas.openxmlformats.org/drawingml/2006/main"/>
+          <a:p xmlns:a="http://schemas.openxmlformats.org/drawingml/2006/main">
+            <a:r>
+              <a:rPr lang="en-US"/>
+              <a:t/>
+            </a:r>
+            <a:endParaRPr lang="en-US"/>
+          </a:p>
+        </p:txBody>
+      </p:sp>
+      <p:sp>
+        <p:nvSpPr>
+          <p:cNvPr id="13" name="anchor-grid-0-0"/>
+          <p:cNvSpPr/>
+          <p:nvPr/>
+        </p:nvSpPr>
+        <p:spPr>
+          <a:xfrm xmlns:a="http://schemas.openxmlformats.org/drawingml/2006/main">
+            <a:off x="11925300" y="2152650"/>
+            <a:ext cx="266700" cy="285750"/>
+          </a:xfrm>
+          <a:prstGeom xmlns:a="http://schemas.openxmlformats.org/drawingml/2006/main" prst="rect">
+            <a:avLst/>
+          </a:prstGeom>
+          <a:solidFill xmlns:a="http://schemas.openxmlformats.org/drawingml/2006/main">
+            <a:srgbClr val="8B6BE8"/>
+          </a:solidFill>
+          <a:ln xmlns:a="http://schemas.openxmlformats.org/drawingml/2006/main" w="12700">
+            <a:solidFill>
+              <a:srgbClr val="8B6BE8"/>
+            </a:solidFill>
+            <a:prstDash val="solid"/>
+          </a:ln>
+        </p:spPr>
+        <p:txBody>
+          <a:bodyPr xmlns:a="http://schemas.openxmlformats.org/drawingml/2006/main" wrap="square" lIns="0" tIns="0" rIns="0" bIns="0" anchor="t"/>
+          <a:lstStyle xmlns:a="http://schemas.openxmlformats.org/drawingml/2006/main"/>
+          <a:p xmlns:a="http://schemas.openxmlformats.org/drawingml/2006/main">
+            <a:r>
+              <a:rPr lang="en-US"/>
+              <a:t/>
+            </a:r>
+            <a:endParaRPr lang="en-US"/>
+          </a:p>
+        </p:txBody>
+      </p:sp>
+      <p:sp>
+        <p:nvSpPr>
+          <p:cNvPr id="14" name="anchor-grid-0-1"/>
+          <p:cNvSpPr/>
+          <p:nvPr/>
+        </p:nvSpPr>
+        <p:spPr>
+          <a:xfrm xmlns:a="http://schemas.openxmlformats.org/drawingml/2006/main">
+            <a:off x="12420600" y="2152650"/>
+            <a:ext cx="266700" cy="285750"/>
+          </a:xfrm>
+          <a:prstGeom xmlns:a="http://schemas.openxmlformats.org/drawingml/2006/main" prst="rect">
+            <a:avLst/>
+          </a:prstGeom>
+          <a:solidFill xmlns:a="http://schemas.openxmlformats.org/drawingml/2006/main">
+            <a:srgbClr val="8B6BE8"/>
+          </a:solidFill>
+          <a:ln xmlns:a="http://schemas.openxmlformats.org/drawingml/2006/main" w="12700">
+            <a:solidFill>
+              <a:srgbClr val="8B6BE8"/>
+            </a:solidFill>
+            <a:prstDash val="solid"/>
+          </a:ln>
+        </p:spPr>
+        <p:txBody>
+          <a:bodyPr xmlns:a="http://schemas.openxmlformats.org/drawingml/2006/main" wrap="square" lIns="0" tIns="0" rIns="0" bIns="0" anchor="t"/>
+          <a:lstStyle xmlns:a="http://schemas.openxmlformats.org/drawingml/2006/main"/>
+          <a:p xmlns:a="http://schemas.openxmlformats.org/drawingml/2006/main">
+            <a:r>
+              <a:rPr lang="en-US"/>
+              <a:t/>
+            </a:r>
+            <a:endParaRPr lang="en-US"/>
+          </a:p>
+        </p:txBody>
+      </p:sp>
+      <p:sp>
+        <p:nvSpPr>
+          <p:cNvPr id="15" name="anchor-grid-0-2"/>
+          <p:cNvSpPr/>
+          <p:nvPr/>
+        </p:nvSpPr>
+        <p:spPr>
+          <a:xfrm xmlns:a="http://schemas.openxmlformats.org/drawingml/2006/main">
+            <a:off x="12915900" y="2152650"/>
+            <a:ext cx="266700" cy="285750"/>
+          </a:xfrm>
+          <a:prstGeom xmlns:a="http://schemas.openxmlformats.org/drawingml/2006/main" prst="rect">
+            <a:avLst/>
+          </a:prstGeom>
+          <a:solidFill xmlns:a="http://schemas.openxmlformats.org/drawingml/2006/main">
+            <a:srgbClr val="FFFFFF"/>
+          </a:solidFill>
+          <a:ln xmlns:a="http://schemas.openxmlformats.org/drawingml/2006/main" w="12700">
+            <a:solidFill>
+              <a:srgbClr val="8B6BE8"/>
+            </a:solidFill>
+            <a:prstDash val="solid"/>
+          </a:ln>
+        </p:spPr>
+        <p:txBody>
+          <a:bodyPr xmlns:a="http://schemas.openxmlformats.org/drawingml/2006/main" wrap="square" lIns="0" tIns="0" rIns="0" bIns="0" anchor="t"/>
+          <a:lstStyle xmlns:a="http://schemas.openxmlformats.org/drawingml/2006/main"/>
+          <a:p xmlns:a="http://schemas.openxmlformats.org/drawingml/2006/main">
+            <a:r>
+              <a:rPr lang="en-US"/>
+              <a:t/>
+            </a:r>
+            <a:endParaRPr lang="en-US"/>
+          </a:p>
+        </p:txBody>
+      </p:sp>
+      <p:sp>
+        <p:nvSpPr>
+          <p:cNvPr id="16" name="anchor-grid-1-0"/>
+          <p:cNvSpPr/>
+          <p:nvPr/>
+        </p:nvSpPr>
+        <p:spPr>
+          <a:xfrm xmlns:a="http://schemas.openxmlformats.org/drawingml/2006/main">
+            <a:off x="11925300" y="2686050"/>
+            <a:ext cx="266700" cy="285750"/>
+          </a:xfrm>
+          <a:prstGeom xmlns:a="http://schemas.openxmlformats.org/drawingml/2006/main" prst="rect">
+            <a:avLst/>
+          </a:prstGeom>
+          <a:solidFill xmlns:a="http://schemas.openxmlformats.org/drawingml/2006/main">
+            <a:srgbClr val="8B6BE8"/>
+          </a:solidFill>
+          <a:ln xmlns:a="http://schemas.openxmlformats.org/drawingml/2006/main" w="12700">
+            <a:solidFill>
+              <a:srgbClr val="8B6BE8"/>
+            </a:solidFill>
+            <a:prstDash val="solid"/>
+          </a:ln>
+        </p:spPr>
+        <p:txBody>
+          <a:bodyPr xmlns:a="http://schemas.openxmlformats.org/drawingml/2006/main" wrap="square" lIns="0" tIns="0" rIns="0" bIns="0" anchor="t"/>
+          <a:lstStyle xmlns:a="http://schemas.openxmlformats.org/drawingml/2006/main"/>
+          <a:p xmlns:a="http://schemas.openxmlformats.org/drawingml/2006/main">
+            <a:r>
+              <a:rPr lang="en-US"/>
+              <a:t/>
+            </a:r>
+            <a:endParaRPr lang="en-US"/>
+          </a:p>
+        </p:txBody>
+      </p:sp>
+      <p:sp>
+        <p:nvSpPr>
+          <p:cNvPr id="17" name="anchor-grid-1-1"/>
+          <p:cNvSpPr/>
+          <p:nvPr/>
+        </p:nvSpPr>
+        <p:spPr>
+          <a:xfrm xmlns:a="http://schemas.openxmlformats.org/drawingml/2006/main">
+            <a:off x="12420600" y="2686050"/>
+            <a:ext cx="266700" cy="285750"/>
+          </a:xfrm>
+          <a:prstGeom xmlns:a="http://schemas.openxmlformats.org/drawingml/2006/main" prst="rect">
+            <a:avLst/>
+          </a:prstGeom>
+          <a:solidFill xmlns:a="http://schemas.openxmlformats.org/drawingml/2006/main">
+            <a:srgbClr val="8B6BE8"/>
+          </a:solidFill>
+          <a:ln xmlns:a="http://schemas.openxmlformats.org/drawingml/2006/main" w="12700">
+            <a:solidFill>
+              <a:srgbClr val="8B6BE8"/>
+            </a:solidFill>
+            <a:prstDash val="solid"/>
+          </a:ln>
+        </p:spPr>
+        <p:txBody>
+          <a:bodyPr xmlns:a="http://schemas.openxmlformats.org/drawingml/2006/main" wrap="square" lIns="0" tIns="0" rIns="0" bIns="0" anchor="t"/>
+          <a:lstStyle xmlns:a="http://schemas.openxmlformats.org/drawingml/2006/main"/>
+          <a:p xmlns:a="http://schemas.openxmlformats.org/drawingml/2006/main">
+            <a:r>
+              <a:rPr lang="en-US"/>
+              <a:t/>
+            </a:r>
+            <a:endParaRPr lang="en-US"/>
+          </a:p>
+        </p:txBody>
+      </p:sp>
+      <p:sp>
+        <p:nvSpPr>
+          <p:cNvPr id="18" name="anchor-grid-1-2"/>
+          <p:cNvSpPr/>
+          <p:nvPr/>
+        </p:nvSpPr>
+        <p:spPr>
+          <a:xfrm xmlns:a="http://schemas.openxmlformats.org/drawingml/2006/main">
+            <a:off x="12915900" y="2686050"/>
+            <a:ext cx="266700" cy="285750"/>
+          </a:xfrm>
+          <a:prstGeom xmlns:a="http://schemas.openxmlformats.org/drawingml/2006/main" prst="rect">
+            <a:avLst/>
+          </a:prstGeom>
+          <a:solidFill xmlns:a="http://schemas.openxmlformats.org/drawingml/2006/main">
+            <a:srgbClr val="FFFFFF"/>
+          </a:solidFill>
+          <a:ln xmlns:a="http://schemas.openxmlformats.org/drawingml/2006/main" w="12700">
+            <a:solidFill>
+              <a:srgbClr val="8B6BE8"/>
+            </a:solidFill>
+            <a:prstDash val="solid"/>
+          </a:ln>
+        </p:spPr>
+        <p:txBody>
+          <a:bodyPr xmlns:a="http://schemas.openxmlformats.org/drawingml/2006/main" wrap="square" lIns="0" tIns="0" rIns="0" bIns="0" anchor="t"/>
+          <a:lstStyle xmlns:a="http://schemas.openxmlformats.org/drawingml/2006/main"/>
+          <a:p xmlns:a="http://schemas.openxmlformats.org/drawingml/2006/main">
+            <a:r>
+              <a:rPr lang="en-US"/>
+              <a:t/>
+            </a:r>
+            <a:endParaRPr lang="en-US"/>
+          </a:p>
+        </p:txBody>
+      </p:sp>
+      <p:sp>
+        <p:nvSpPr>
+          <p:cNvPr id="19" name="anchor-grid-2-0"/>
+          <p:cNvSpPr/>
+          <p:nvPr/>
+        </p:nvSpPr>
+        <p:spPr>
+          <a:xfrm xmlns:a="http://schemas.openxmlformats.org/drawingml/2006/main">
+            <a:off x="11925300" y="3219450"/>
+            <a:ext cx="266700" cy="285750"/>
+          </a:xfrm>
+          <a:prstGeom xmlns:a="http://schemas.openxmlformats.org/drawingml/2006/main" prst="rect">
+            <a:avLst/>
+          </a:prstGeom>
+          <a:solidFill xmlns:a="http://schemas.openxmlformats.org/drawingml/2006/main">
+            <a:srgbClr val="8B6BE8"/>
+          </a:solidFill>
+          <a:ln xmlns:a="http://schemas.openxmlformats.org/drawingml/2006/main" w="12700">
+            <a:solidFill>
+              <a:srgbClr val="8B6BE8"/>
+            </a:solidFill>
+            <a:prstDash val="solid"/>
+          </a:ln>
+        </p:spPr>
+        <p:txBody>
+          <a:bodyPr xmlns:a="http://schemas.openxmlformats.org/drawingml/2006/main" wrap="square" lIns="0" tIns="0" rIns="0" bIns="0" anchor="t"/>
+          <a:lstStyle xmlns:a="http://schemas.openxmlformats.org/drawingml/2006/main"/>
+          <a:p xmlns:a="http://schemas.openxmlformats.org/drawingml/2006/main">
+            <a:r>
+              <a:rPr lang="en-US"/>
+              <a:t/>
+            </a:r>
+            <a:endParaRPr lang="en-US"/>
+          </a:p>
+        </p:txBody>
+      </p:sp>
+      <p:sp>
+        <p:nvSpPr>
+          <p:cNvPr id="20" name="anchor-grid-2-1"/>
+          <p:cNvSpPr/>
+          <p:nvPr/>
+        </p:nvSpPr>
+        <p:spPr>
+          <a:xfrm xmlns:a="http://schemas.openxmlformats.org/drawingml/2006/main">
+            <a:off x="12420600" y="3219450"/>
+            <a:ext cx="266700" cy="285750"/>
+          </a:xfrm>
+          <a:prstGeom xmlns:a="http://schemas.openxmlformats.org/drawingml/2006/main" prst="rect">
+            <a:avLst/>
+          </a:prstGeom>
+          <a:solidFill xmlns:a="http://schemas.openxmlformats.org/drawingml/2006/main">
+            <a:srgbClr val="8B6BE8"/>
+          </a:solidFill>
+          <a:ln xmlns:a="http://schemas.openxmlformats.org/drawingml/2006/main" w="12700">
+            <a:solidFill>
+              <a:srgbClr val="8B6BE8"/>
+            </a:solidFill>
+            <a:prstDash val="solid"/>
+          </a:ln>
+        </p:spPr>
+        <p:txBody>
+          <a:bodyPr xmlns:a="http://schemas.openxmlformats.org/drawingml/2006/main" wrap="square" lIns="0" tIns="0" rIns="0" bIns="0" anchor="t"/>
+          <a:lstStyle xmlns:a="http://schemas.openxmlformats.org/drawingml/2006/main"/>
+          <a:p xmlns:a="http://schemas.openxmlformats.org/drawingml/2006/main">
+            <a:r>
+              <a:rPr lang="en-US"/>
+              <a:t/>
+            </a:r>
+            <a:endParaRPr lang="en-US"/>
+          </a:p>
+        </p:txBody>
+      </p:sp>
+      <p:sp>
+        <p:nvSpPr>
+          <p:cNvPr id="21" name="anchor-grid-2-2"/>
+          <p:cNvSpPr/>
+          <p:nvPr/>
+        </p:nvSpPr>
+        <p:spPr>
+          <a:xfrm xmlns:a="http://schemas.openxmlformats.org/drawingml/2006/main">
+            <a:off x="12915900" y="3219450"/>
+            <a:ext cx="266700" cy="285750"/>
+          </a:xfrm>
+          <a:prstGeom xmlns:a="http://schemas.openxmlformats.org/drawingml/2006/main" prst="rect">
+            <a:avLst/>
+          </a:prstGeom>
+          <a:solidFill xmlns:a="http://schemas.openxmlformats.org/drawingml/2006/main">
+            <a:srgbClr val="FFFFFF"/>
+          </a:solidFill>
+          <a:ln xmlns:a="http://schemas.openxmlformats.org/drawingml/2006/main" w="12700">
+            <a:solidFill>
+              <a:srgbClr val="8B6BE8"/>
+            </a:solidFill>
+            <a:prstDash val="solid"/>
+          </a:ln>
+        </p:spPr>
+        <p:txBody>
+          <a:bodyPr xmlns:a="http://schemas.openxmlformats.org/drawingml/2006/main" wrap="square" lIns="0" tIns="0" rIns="0" bIns="0" anchor="t"/>
+          <a:lstStyle xmlns:a="http://schemas.openxmlformats.org/drawingml/2006/main"/>
+          <a:p xmlns:a="http://schemas.openxmlformats.org/drawingml/2006/main">
+            <a:r>
+              <a:rPr lang="en-US"/>
+              <a:t/>
+            </a:r>
+            <a:endParaRPr lang="en-US"/>
+          </a:p>
+        </p:txBody>
+      </p:sp>
+      <p:sp>
+        <p:nvSpPr>
+          <p:cNvPr id="22" name="anchor-axis"/>
+          <p:cNvSpPr/>
+          <p:nvPr/>
+        </p:nvSpPr>
+        <p:spPr>
+          <a:xfrm xmlns:a="http://schemas.openxmlformats.org/drawingml/2006/main">
+            <a:off x="12668250" y="1638300"/>
+            <a:ext cx="0" cy="2743200"/>
+          </a:xfrm>
+          <a:prstGeom xmlns:a="http://schemas.openxmlformats.org/drawingml/2006/main" prst="line">
+            <a:avLst/>
+          </a:prstGeom>
+          <a:noFill xmlns:a="http://schemas.openxmlformats.org/drawingml/2006/main"/>
+          <a:ln xmlns:a="http://schemas.openxmlformats.org/drawingml/2006/main" w="50800">
+            <a:solidFill>
+              <a:srgbClr val="1D2330"/>
+            </a:solidFill>
+            <a:prstDash val="solid"/>
+          </a:ln>
+        </p:spPr>
+        <p:txBody>
+          <a:bodyPr xmlns:a="http://schemas.openxmlformats.org/drawingml/2006/main" wrap="square" lIns="0" tIns="0" rIns="0" bIns="0" anchor="t"/>
+          <a:lstStyle xmlns:a="http://schemas.openxmlformats.org/drawingml/2006/main"/>
+          <a:p xmlns:a="http://schemas.openxmlformats.org/drawingml/2006/main">
+            <a:r>
+              <a:rPr lang="en-US"/>
+              <a:t/>
+            </a:r>
+            <a:endParaRPr lang="en-US"/>
+          </a:p>
+        </p:txBody>
+      </p:sp>
+    </p:spTree>
+  </p:cSld>
+  <p:clrMapOvr>
+    <a:masterClrMapping xmlns:a="http://schemas.openxmlformats.org/drawingml/2006/main"/>
+  </p:clrMapOvr>
+</p:sld>
+</file>
+
+<file path=ppt/slides/slide2.xml><?xml version="1.0" encoding="utf-8"?>
+<p:sld xmlns:p="http://schemas.openxmlformats.org/presentationml/2006/main">
+  <p:cSld name="Argument">
+    <p:bg>
+      <p:bgPr>
+        <a:blipFill xmlns:a="http://schemas.openxmlformats.org/drawingml/2006/main">
           <a:blip xmlns:r="http://schemas.openxmlformats.org/officeDocument/2006/relationships" r:embed="rIdOfficeKitImageb7d7d39d00e5a7e4_1"/>
           <a:stretch>
             <a:fillRect/>
@@ -507,21 +1302,21 @@
       </p:grpSpPr>
       <p:sp>
         <p:nvSpPr>
-          <p:cNvPr id="2" name="cover-paper-scrim"/>
+          <p:cNvPr id="2" name="argument-paper-scrim"/>
           <p:cNvSpPr/>
           <p:nvPr/>
         </p:nvSpPr>
         <p:spPr>
           <a:xfrm xmlns:a="http://schemas.openxmlformats.org/drawingml/2006/main">
             <a:off x="0" y="0"/>
-            <a:ext cx="9525000" cy="8572500"/>
+            <a:ext cx="7429500" cy="8572500"/>
           </a:xfrm>
           <a:prstGeom xmlns:a="http://schemas.openxmlformats.org/drawingml/2006/main" prst="rect">
             <a:avLst/>
           </a:prstGeom>
           <a:solidFill xmlns:a="http://schemas.openxmlformats.org/drawingml/2006/main">
             <a:srgbClr val="FFFFFF">
-              <a:alpha val="100000"/>
+              <a:alpha val="96000"/>
             </a:srgbClr>
           </a:solidFill>
           <a:ln xmlns:a="http://schemas.openxmlformats.org/drawingml/2006/main" w="0">
@@ -543,16 +1338,83 @@
           </a:p>
         </p:txBody>
       </p:sp>
-      <p:sp>
-        <p:nvSpPr>
-          <p:cNvPr id="3" name="top-rule"/>
+      <p:pic>
+        <p:nvPicPr>
+          <p:cNvPr id="3" name="argument-photo-band">
+            <a:extLst xmlns:a="http://schemas.openxmlformats.org/drawingml/2006/main">
+              <a:ext uri="{C183D7F6-B498-43B3-948B-1728B52AA6E4}">
+                <adec:decorative xmlns:adec="http://schemas.microsoft.com/office/drawing/2017/decorative" val="1"/>
+              </a:ext>
+            </a:extLst>
+          </p:cNvPr>
+          <p:cNvPicPr/>
+          <p:nvPr/>
+        </p:nvPicPr>
+        <p:blipFill>
+          <a:blip xmlns:r="http://schemas.openxmlformats.org/officeDocument/2006/relationships" xmlns:a="http://schemas.openxmlformats.org/drawingml/2006/main" r:embed="rIdOfficeKitImageaeb6f74d36d260d0_1"/>
+          <a:srcRect xmlns:a="http://schemas.openxmlformats.org/drawingml/2006/main" l="0" t="47258" r="0" b="47258"/>
+          <a:stretch xmlns:a="http://schemas.openxmlformats.org/drawingml/2006/main">
+            <a:fillRect/>
+          </a:stretch>
+        </p:blipFill>
+        <p:spPr>
+          <a:xfrm xmlns:a="http://schemas.openxmlformats.org/drawingml/2006/main">
+            <a:off x="0" y="0"/>
+            <a:ext cx="15240000" cy="1485900"/>
+          </a:xfrm>
+          <a:prstGeom xmlns:a="http://schemas.openxmlformats.org/drawingml/2006/main" prst="rect">
+            <a:avLst/>
+          </a:prstGeom>
+        </p:spPr>
+      </p:pic>
+      <p:sp>
+        <p:nvSpPr>
+          <p:cNvPr id="4" name="argument-photo-scrim"/>
           <p:cNvSpPr/>
           <p:nvPr/>
         </p:nvSpPr>
         <p:spPr>
           <a:xfrm xmlns:a="http://schemas.openxmlformats.org/drawingml/2006/main">
-            <a:off x="838200" y="666750"/>
-            <a:ext cx="13563600" cy="0"/>
+            <a:off x="0" y="0"/>
+            <a:ext cx="15240000" cy="1485900"/>
+          </a:xfrm>
+          <a:prstGeom xmlns:a="http://schemas.openxmlformats.org/drawingml/2006/main" prst="rect">
+            <a:avLst/>
+          </a:prstGeom>
+          <a:solidFill xmlns:a="http://schemas.openxmlformats.org/drawingml/2006/main">
+            <a:srgbClr val="1D2330">
+              <a:alpha val="62000"/>
+            </a:srgbClr>
+          </a:solidFill>
+          <a:ln xmlns:a="http://schemas.openxmlformats.org/drawingml/2006/main" w="0">
+            <a:solidFill>
+              <a:srgbClr val="1D2330"/>
+            </a:solidFill>
+            <a:prstDash val="solid"/>
+          </a:ln>
+        </p:spPr>
+        <p:txBody>
+          <a:bodyPr xmlns:a="http://schemas.openxmlformats.org/drawingml/2006/main" wrap="square" lIns="0" tIns="0" rIns="0" bIns="0" anchor="t"/>
+          <a:lstStyle xmlns:a="http://schemas.openxmlformats.org/drawingml/2006/main"/>
+          <a:p xmlns:a="http://schemas.openxmlformats.org/drawingml/2006/main">
+            <a:r>
+              <a:rPr lang="en-US"/>
+              <a:t/>
+            </a:r>
+            <a:endParaRPr lang="en-US"/>
+          </a:p>
+        </p:txBody>
+      </p:sp>
+      <p:sp>
+        <p:nvSpPr>
+          <p:cNvPr id="5" name="argument-photo-rule"/>
+          <p:cNvSpPr/>
+          <p:nvPr/>
+        </p:nvSpPr>
+        <p:spPr>
+          <a:xfrm xmlns:a="http://schemas.openxmlformats.org/drawingml/2006/main">
+            <a:off x="914400" y="1438275"/>
+            <a:ext cx="13411200" cy="0"/>
           </a:xfrm>
           <a:prstGeom xmlns:a="http://schemas.openxmlformats.org/drawingml/2006/main" prst="line">
             <a:avLst/>
@@ -579,125 +1441,236 @@
       </p:sp>
       <p:sp>
         <p:nvSpPr>
-          <p:cNvPr id="4" name="eyebrow"/>
-          <p:cNvSpPr txBox="1"/>
-          <p:nvPr/>
-        </p:nvSpPr>
-        <p:spPr>
-          <a:xfrm xmlns:a="http://schemas.openxmlformats.org/drawingml/2006/main">
-            <a:off x="914400" y="895350"/>
-            <a:ext cx="7239000" cy="228600"/>
-          </a:xfrm>
-          <a:prstGeom xmlns:a="http://schemas.openxmlformats.org/drawingml/2006/main" prst="rect">
-            <a:avLst/>
-          </a:prstGeom>
-          <a:noFill xmlns:a="http://schemas.openxmlformats.org/drawingml/2006/main"/>
-          <a:ln xmlns:a="http://schemas.openxmlformats.org/drawingml/2006/main" w="0">
-            <a:noFill/>
-          </a:ln>
-        </p:spPr>
-        <p:txBody>
-          <a:bodyPr xmlns:a="http://schemas.openxmlformats.org/drawingml/2006/main" wrap="square" lIns="0" tIns="0" rIns="0" bIns="0" anchor="t"/>
-          <a:lstStyle xmlns:a="http://schemas.openxmlformats.org/drawingml/2006/main"/>
-          <a:p xmlns:a="http://schemas.openxmlformats.org/drawingml/2006/main">
-            <a:r>
-              <a:rPr lang="en-US" sz="1200" b="1">
+          <p:cNvPr id="6" name="MOONLIT WORK REPORT · ARGUMENT"/>
+          <p:cNvSpPr txBox="1"/>
+          <p:nvPr/>
+        </p:nvSpPr>
+        <p:spPr>
+          <a:xfrm xmlns:a="http://schemas.openxmlformats.org/drawingml/2006/main">
+            <a:off x="914400" y="228600"/>
+            <a:ext cx="9525000" cy="190500"/>
+          </a:xfrm>
+          <a:prstGeom xmlns:a="http://schemas.openxmlformats.org/drawingml/2006/main" prst="rect">
+            <a:avLst/>
+          </a:prstGeom>
+          <a:noFill xmlns:a="http://schemas.openxmlformats.org/drawingml/2006/main"/>
+          <a:ln xmlns:a="http://schemas.openxmlformats.org/drawingml/2006/main" w="0">
+            <a:noFill/>
+          </a:ln>
+        </p:spPr>
+        <p:txBody>
+          <a:bodyPr xmlns:a="http://schemas.openxmlformats.org/drawingml/2006/main" wrap="square" lIns="0" tIns="0" rIns="0" bIns="0" anchor="t"/>
+          <a:lstStyle xmlns:a="http://schemas.openxmlformats.org/drawingml/2006/main"/>
+          <a:p xmlns:a="http://schemas.openxmlformats.org/drawingml/2006/main">
+            <a:r>
+              <a:rPr lang="en-US" sz="1050" b="1">
                 <a:solidFill>
                   <a:srgbClr val="8B6BE8"/>
                 </a:solidFill>
                 <a:latin typeface="Arial"/>
                 <a:ea typeface="Arial"/>
               </a:rPr>
-              <a:t>WORK · OFFICEKIT CALIBRATION</a:t>
-            </a:r>
-            <a:endParaRPr lang="en-US"/>
-          </a:p>
-        </p:txBody>
-      </p:sp>
-      <p:sp>
-        <p:nvSpPr>
-          <p:cNvPr id="5" name="cover-title"/>
-          <p:cNvSpPr txBox="1"/>
-          <p:nvPr/>
-        </p:nvSpPr>
-        <p:spPr>
-          <a:xfrm xmlns:a="http://schemas.openxmlformats.org/drawingml/2006/main">
-            <a:off x="914400" y="1571625"/>
-            <a:ext cx="8382000" cy="1066800"/>
-          </a:xfrm>
-          <a:prstGeom xmlns:a="http://schemas.openxmlformats.org/drawingml/2006/main" prst="rect">
-            <a:avLst/>
-          </a:prstGeom>
-          <a:noFill xmlns:a="http://schemas.openxmlformats.org/drawingml/2006/main"/>
-          <a:ln xmlns:a="http://schemas.openxmlformats.org/drawingml/2006/main" w="0">
-            <a:noFill/>
-          </a:ln>
-        </p:spPr>
-        <p:txBody>
-          <a:bodyPr xmlns:a="http://schemas.openxmlformats.org/drawingml/2006/main" wrap="square" lIns="0" tIns="0" rIns="0" bIns="0" anchor="t"/>
-          <a:lstStyle xmlns:a="http://schemas.openxmlformats.org/drawingml/2006/main"/>
-          <a:p xmlns:a="http://schemas.openxmlformats.org/drawingml/2006/main">
-            <a:r>
-              <a:rPr lang="en-US" sz="3600" b="1">
+              <a:t>MOONLIT WORK REPORT · ARGUMENT</a:t>
+            </a:r>
+            <a:endParaRPr lang="en-US"/>
+          </a:p>
+        </p:txBody>
+      </p:sp>
+      <p:sp>
+        <p:nvSpPr>
+          <p:cNvPr id="7" name="argument-title"/>
+          <p:cNvSpPr txBox="1"/>
+          <p:nvPr/>
+        </p:nvSpPr>
+        <p:spPr>
+          <a:xfrm xmlns:a="http://schemas.openxmlformats.org/drawingml/2006/main">
+            <a:off x="914400" y="495300"/>
+            <a:ext cx="12001500" cy="457200"/>
+          </a:xfrm>
+          <a:prstGeom xmlns:a="http://schemas.openxmlformats.org/drawingml/2006/main" prst="rect">
+            <a:avLst/>
+          </a:prstGeom>
+          <a:noFill xmlns:a="http://schemas.openxmlformats.org/drawingml/2006/main"/>
+          <a:ln xmlns:a="http://schemas.openxmlformats.org/drawingml/2006/main" w="0">
+            <a:noFill/>
+          </a:ln>
+        </p:spPr>
+        <p:txBody>
+          <a:bodyPr xmlns:a="http://schemas.openxmlformats.org/drawingml/2006/main" wrap="square" lIns="0" tIns="0" rIns="0" bIns="0" anchor="t"/>
+          <a:lstStyle xmlns:a="http://schemas.openxmlformats.org/drawingml/2006/main"/>
+          <a:p xmlns:a="http://schemas.openxmlformats.org/drawingml/2006/main">
+            <a:r>
+              <a:rPr lang="en-US" sz="2550" b="1">
+                <a:solidFill>
+                  <a:srgbClr val="FFFFFF"/>
+                </a:solidFill>
+                <a:latin typeface="Arial"/>
+                <a:ea typeface="Arial"/>
+              </a:rPr>
+              <a:t>The constraint owns the page</a:t>
+            </a:r>
+            <a:endParaRPr lang="en-US"/>
+          </a:p>
+        </p:txBody>
+      </p:sp>
+      <p:sp>
+        <p:nvSpPr>
+          <p:cNvPr id="8" name="argument-basis"/>
+          <p:cNvSpPr txBox="1"/>
+          <p:nvPr/>
+        </p:nvSpPr>
+        <p:spPr>
+          <a:xfrm xmlns:a="http://schemas.openxmlformats.org/drawingml/2006/main">
+            <a:off x="952500" y="1066800"/>
+            <a:ext cx="11049000" cy="228600"/>
+          </a:xfrm>
+          <a:prstGeom xmlns:a="http://schemas.openxmlformats.org/drawingml/2006/main" prst="rect">
+            <a:avLst/>
+          </a:prstGeom>
+          <a:noFill xmlns:a="http://schemas.openxmlformats.org/drawingml/2006/main"/>
+          <a:ln xmlns:a="http://schemas.openxmlformats.org/drawingml/2006/main" w="0">
+            <a:noFill/>
+          </a:ln>
+        </p:spPr>
+        <p:txBody>
+          <a:bodyPr xmlns:a="http://schemas.openxmlformats.org/drawingml/2006/main" wrap="square" lIns="0" tIns="0" rIns="0" bIns="0" anchor="t"/>
+          <a:lstStyle xmlns:a="http://schemas.openxmlformats.org/drawingml/2006/main"/>
+          <a:p xmlns:a="http://schemas.openxmlformats.org/drawingml/2006/main">
+            <a:r>
+              <a:rPr lang="en-US" sz="1200">
+                <a:solidFill>
+                  <a:srgbClr val="F0F3F2"/>
+                </a:solidFill>
+                <a:latin typeface="Arial"/>
+                <a:ea typeface="Arial"/>
+              </a:rPr>
+              <a:t>Status, cause, owner and date stay together.</a:t>
+            </a:r>
+            <a:endParaRPr lang="en-US"/>
+          </a:p>
+        </p:txBody>
+      </p:sp>
+      <p:sp>
+        <p:nvSpPr>
+          <p:cNvPr id="9" name="work-status"/>
+          <p:cNvSpPr txBox="1"/>
+          <p:nvPr/>
+        </p:nvSpPr>
+        <p:spPr>
+          <a:xfrm xmlns:a="http://schemas.openxmlformats.org/drawingml/2006/main">
+            <a:off x="1104900" y="3352800"/>
+            <a:ext cx="2857500" cy="228600"/>
+          </a:xfrm>
+          <a:prstGeom xmlns:a="http://schemas.openxmlformats.org/drawingml/2006/main" prst="rect">
+            <a:avLst/>
+          </a:prstGeom>
+          <a:noFill xmlns:a="http://schemas.openxmlformats.org/drawingml/2006/main"/>
+          <a:ln xmlns:a="http://schemas.openxmlformats.org/drawingml/2006/main" w="0">
+            <a:noFill/>
+          </a:ln>
+        </p:spPr>
+        <p:txBody>
+          <a:bodyPr xmlns:a="http://schemas.openxmlformats.org/drawingml/2006/main" wrap="square" lIns="0" tIns="0" rIns="0" bIns="0" anchor="t"/>
+          <a:lstStyle xmlns:a="http://schemas.openxmlformats.org/drawingml/2006/main"/>
+          <a:p xmlns:a="http://schemas.openxmlformats.org/drawingml/2006/main">
+            <a:r>
+              <a:rPr lang="en-US" sz="1125" b="1">
+                <a:solidFill>
+                  <a:srgbClr val="8B6BE8"/>
+                </a:solidFill>
+                <a:latin typeface="Arial"/>
+                <a:ea typeface="Arial"/>
+              </a:rPr>
+              <a:t>OPERATING SIGNAL</a:t>
+            </a:r>
+            <a:endParaRPr lang="en-US"/>
+          </a:p>
+        </p:txBody>
+      </p:sp>
+      <p:sp>
+        <p:nvSpPr>
+          <p:cNvPr id="10" name="work-headline"/>
+          <p:cNvSpPr txBox="1"/>
+          <p:nvPr/>
+        </p:nvSpPr>
+        <p:spPr>
+          <a:xfrm xmlns:a="http://schemas.openxmlformats.org/drawingml/2006/main">
+            <a:off x="1104900" y="3790950"/>
+            <a:ext cx="6667500" cy="723900"/>
+          </a:xfrm>
+          <a:prstGeom xmlns:a="http://schemas.openxmlformats.org/drawingml/2006/main" prst="rect">
+            <a:avLst/>
+          </a:prstGeom>
+          <a:noFill xmlns:a="http://schemas.openxmlformats.org/drawingml/2006/main"/>
+          <a:ln xmlns:a="http://schemas.openxmlformats.org/drawingml/2006/main" w="0">
+            <a:noFill/>
+          </a:ln>
+        </p:spPr>
+        <p:txBody>
+          <a:bodyPr xmlns:a="http://schemas.openxmlformats.org/drawingml/2006/main" wrap="square" lIns="0" tIns="0" rIns="0" bIns="0" anchor="t"/>
+          <a:lstStyle xmlns:a="http://schemas.openxmlformats.org/drawingml/2006/main"/>
+          <a:p xmlns:a="http://schemas.openxmlformats.org/drawingml/2006/main">
+            <a:r>
+              <a:rPr lang="en-US" sz="2550" b="1">
                 <a:solidFill>
                   <a:srgbClr val="1D2330"/>
                 </a:solidFill>
                 <a:latin typeface="Arial"/>
                 <a:ea typeface="Arial"/>
               </a:rPr>
-              <a:t>Moonlit Work Report: a claim worth testing</a:t>
-            </a:r>
-            <a:endParaRPr lang="en-US"/>
-          </a:p>
-        </p:txBody>
-      </p:sp>
-      <p:sp>
-        <p:nvSpPr>
-          <p:cNvPr id="6" name="cover-subtitle"/>
-          <p:cNvSpPr txBox="1"/>
-          <p:nvPr/>
-        </p:nvSpPr>
-        <p:spPr>
-          <a:xfrm xmlns:a="http://schemas.openxmlformats.org/drawingml/2006/main">
-            <a:off x="952500" y="2857500"/>
-            <a:ext cx="6858000" cy="323850"/>
-          </a:xfrm>
-          <a:prstGeom xmlns:a="http://schemas.openxmlformats.org/drawingml/2006/main" prst="rect">
-            <a:avLst/>
-          </a:prstGeom>
-          <a:noFill xmlns:a="http://schemas.openxmlformats.org/drawingml/2006/main"/>
-          <a:ln xmlns:a="http://schemas.openxmlformats.org/drawingml/2006/main" w="0">
-            <a:noFill/>
-          </a:ln>
-        </p:spPr>
-        <p:txBody>
-          <a:bodyPr xmlns:a="http://schemas.openxmlformats.org/drawingml/2006/main" wrap="square" lIns="0" tIns="0" rIns="0" bIns="0" anchor="t"/>
-          <a:lstStyle xmlns:a="http://schemas.openxmlformats.org/drawingml/2006/main"/>
-          <a:p xmlns:a="http://schemas.openxmlformats.org/drawingml/2006/main">
-            <a:r>
-              <a:rPr lang="en-US" sz="1725">
-                <a:solidFill>
-                  <a:srgbClr val="8B6BE8"/>
-                </a:solidFill>
-                <a:latin typeface="Arial"/>
-                <a:ea typeface="Arial"/>
-              </a:rPr>
-              <a:t>A clean-room reference for evidence, direction, and a decision.</a:t>
-            </a:r>
-            <a:endParaRPr lang="en-US"/>
-          </a:p>
-        </p:txBody>
-      </p:sp>
-      <p:sp>
-        <p:nvSpPr>
-          <p:cNvPr id="7" name="cover-rule"/>
+              <a:t>The queue is healthy; the handoff is not.</a:t>
+            </a:r>
+            <a:endParaRPr lang="en-US"/>
+          </a:p>
+        </p:txBody>
+      </p:sp>
+      <p:sp>
+        <p:nvSpPr>
+          <p:cNvPr id="11" name="work-body"/>
+          <p:cNvSpPr txBox="1"/>
+          <p:nvPr/>
+        </p:nvSpPr>
+        <p:spPr>
+          <a:xfrm xmlns:a="http://schemas.openxmlformats.org/drawingml/2006/main">
+            <a:off x="1104900" y="4762500"/>
+            <a:ext cx="6191250" cy="400050"/>
+          </a:xfrm>
+          <a:prstGeom xmlns:a="http://schemas.openxmlformats.org/drawingml/2006/main" prst="rect">
+            <a:avLst/>
+          </a:prstGeom>
+          <a:noFill xmlns:a="http://schemas.openxmlformats.org/drawingml/2006/main"/>
+          <a:ln xmlns:a="http://schemas.openxmlformats.org/drawingml/2006/main" w="0">
+            <a:noFill/>
+          </a:ln>
+        </p:spPr>
+        <p:txBody>
+          <a:bodyPr xmlns:a="http://schemas.openxmlformats.org/drawingml/2006/main" wrap="square" lIns="0" tIns="0" rIns="0" bIns="0" anchor="t"/>
+          <a:lstStyle xmlns:a="http://schemas.openxmlformats.org/drawingml/2006/main"/>
+          <a:p xmlns:a="http://schemas.openxmlformats.org/drawingml/2006/main">
+            <a:r>
+              <a:rPr lang="en-US" sz="1575">
+                <a:solidFill>
+                  <a:srgbClr val="1D2330"/>
+                </a:solidFill>
+                <a:latin typeface="Arial"/>
+                <a:ea typeface="Arial"/>
+              </a:rPr>
+              <a:t>Three visible signals point to one owner and one date.</a:t>
+            </a:r>
+            <a:endParaRPr lang="en-US"/>
+          </a:p>
+        </p:txBody>
+      </p:sp>
+      <p:sp>
+        <p:nvSpPr>
+          <p:cNvPr id="12" name="work-rail"/>
           <p:cNvSpPr/>
           <p:nvPr/>
         </p:nvSpPr>
         <p:spPr>
           <a:xfrm xmlns:a="http://schemas.openxmlformats.org/drawingml/2006/main">
-            <a:off x="914400" y="3524250"/>
-            <a:ext cx="7658100" cy="0"/>
+            <a:off x="10001250" y="3333750"/>
+            <a:ext cx="0" cy="2381250"/>
           </a:xfrm>
           <a:prstGeom xmlns:a="http://schemas.openxmlformats.org/drawingml/2006/main" prst="line">
             <a:avLst/>
@@ -724,88 +1697,347 @@
       </p:sp>
       <p:sp>
         <p:nvSpPr>
-          <p:cNvPr id="8" name="cover-basis"/>
-          <p:cNvSpPr txBox="1"/>
-          <p:nvPr/>
-        </p:nvSpPr>
-        <p:spPr>
-          <a:xfrm xmlns:a="http://schemas.openxmlformats.org/drawingml/2006/main">
-            <a:off x="952500" y="3762375"/>
-            <a:ext cx="7810500" cy="266700"/>
-          </a:xfrm>
-          <a:prstGeom xmlns:a="http://schemas.openxmlformats.org/drawingml/2006/main" prst="rect">
-            <a:avLst/>
-          </a:prstGeom>
-          <a:noFill xmlns:a="http://schemas.openxmlformats.org/drawingml/2006/main"/>
-          <a:ln xmlns:a="http://schemas.openxmlformats.org/drawingml/2006/main" w="0">
-            <a:noFill/>
-          </a:ln>
-        </p:spPr>
-        <p:txBody>
-          <a:bodyPr xmlns:a="http://schemas.openxmlformats.org/drawingml/2006/main" wrap="square" lIns="0" tIns="0" rIns="0" bIns="0" anchor="t"/>
-          <a:lstStyle xmlns:a="http://schemas.openxmlformats.org/drawingml/2006/main"/>
-          <a:p xmlns:a="http://schemas.openxmlformats.org/drawingml/2006/main">
-            <a:r>
-              <a:rPr lang="en-US" sz="1350">
+          <p:cNvPr id="13" name="work-num-0"/>
+          <p:cNvSpPr txBox="1"/>
+          <p:nvPr/>
+        </p:nvSpPr>
+        <p:spPr>
+          <a:xfrm xmlns:a="http://schemas.openxmlformats.org/drawingml/2006/main">
+            <a:off x="10477500" y="3448050"/>
+            <a:ext cx="571500" cy="228600"/>
+          </a:xfrm>
+          <a:prstGeom xmlns:a="http://schemas.openxmlformats.org/drawingml/2006/main" prst="rect">
+            <a:avLst/>
+          </a:prstGeom>
+          <a:noFill xmlns:a="http://schemas.openxmlformats.org/drawingml/2006/main"/>
+          <a:ln xmlns:a="http://schemas.openxmlformats.org/drawingml/2006/main" w="0">
+            <a:noFill/>
+          </a:ln>
+        </p:spPr>
+        <p:txBody>
+          <a:bodyPr xmlns:a="http://schemas.openxmlformats.org/drawingml/2006/main" wrap="square" lIns="0" tIns="0" rIns="0" bIns="0" anchor="t"/>
+          <a:lstStyle xmlns:a="http://schemas.openxmlformats.org/drawingml/2006/main"/>
+          <a:p xmlns:a="http://schemas.openxmlformats.org/drawingml/2006/main">
+            <a:r>
+              <a:rPr lang="en-US" sz="1350" b="1">
+                <a:solidFill>
+                  <a:srgbClr val="8B6BE8"/>
+                </a:solidFill>
+                <a:latin typeface="Arial"/>
+                <a:ea typeface="Arial"/>
+              </a:rPr>
+              <a:t>01</a:t>
+            </a:r>
+            <a:endParaRPr lang="en-US"/>
+          </a:p>
+        </p:txBody>
+      </p:sp>
+      <p:sp>
+        <p:nvSpPr>
+          <p:cNvPr id="14" name="work-label-0"/>
+          <p:cNvSpPr txBox="1"/>
+          <p:nvPr/>
+        </p:nvSpPr>
+        <p:spPr>
+          <a:xfrm xmlns:a="http://schemas.openxmlformats.org/drawingml/2006/main">
+            <a:off x="11144250" y="3448050"/>
+            <a:ext cx="1428750" cy="228600"/>
+          </a:xfrm>
+          <a:prstGeom xmlns:a="http://schemas.openxmlformats.org/drawingml/2006/main" prst="rect">
+            <a:avLst/>
+          </a:prstGeom>
+          <a:noFill xmlns:a="http://schemas.openxmlformats.org/drawingml/2006/main"/>
+          <a:ln xmlns:a="http://schemas.openxmlformats.org/drawingml/2006/main" w="0">
+            <a:noFill/>
+          </a:ln>
+        </p:spPr>
+        <p:txBody>
+          <a:bodyPr xmlns:a="http://schemas.openxmlformats.org/drawingml/2006/main" wrap="square" lIns="0" tIns="0" rIns="0" bIns="0" anchor="t"/>
+          <a:lstStyle xmlns:a="http://schemas.openxmlformats.org/drawingml/2006/main"/>
+          <a:p xmlns:a="http://schemas.openxmlformats.org/drawingml/2006/main">
+            <a:r>
+              <a:rPr lang="en-US" sz="1350" b="1">
                 <a:solidFill>
                   <a:srgbClr val="1D2330"/>
                 </a:solidFill>
                 <a:latin typeface="Arial"/>
                 <a:ea typeface="Arial"/>
               </a:rPr>
-              <a:t>One visual language · four page roles · native editable objects</a:t>
-            </a:r>
-            <a:endParaRPr lang="en-US"/>
-          </a:p>
-        </p:txBody>
-      </p:sp>
-      <p:sp>
-        <p:nvSpPr>
-          <p:cNvPr id="9" name="cover-thesis"/>
-          <p:cNvSpPr txBox="1"/>
-          <p:nvPr/>
-        </p:nvSpPr>
-        <p:spPr>
-          <a:xfrm xmlns:a="http://schemas.openxmlformats.org/drawingml/2006/main">
-            <a:off x="952500" y="4810125"/>
-            <a:ext cx="6667500" cy="628650"/>
-          </a:xfrm>
-          <a:prstGeom xmlns:a="http://schemas.openxmlformats.org/drawingml/2006/main" prst="rect">
-            <a:avLst/>
-          </a:prstGeom>
-          <a:noFill xmlns:a="http://schemas.openxmlformats.org/drawingml/2006/main"/>
-          <a:ln xmlns:a="http://schemas.openxmlformats.org/drawingml/2006/main" w="0">
-            <a:noFill/>
-          </a:ln>
-        </p:spPr>
-        <p:txBody>
-          <a:bodyPr xmlns:a="http://schemas.openxmlformats.org/drawingml/2006/main" wrap="square" lIns="0" tIns="0" rIns="0" bIns="0" anchor="t"/>
-          <a:lstStyle xmlns:a="http://schemas.openxmlformats.org/drawingml/2006/main"/>
-          <a:p xmlns:a="http://schemas.openxmlformats.org/drawingml/2006/main">
-            <a:r>
-              <a:rPr lang="en-US" sz="1875" b="1">
+              <a:t>Queue</a:t>
+            </a:r>
+            <a:endParaRPr lang="en-US"/>
+          </a:p>
+        </p:txBody>
+      </p:sp>
+      <p:sp>
+        <p:nvSpPr>
+          <p:cNvPr id="15" name="work-text-0"/>
+          <p:cNvSpPr txBox="1"/>
+          <p:nvPr/>
+        </p:nvSpPr>
+        <p:spPr>
+          <a:xfrm xmlns:a="http://schemas.openxmlformats.org/drawingml/2006/main">
+            <a:off x="12668250" y="3448050"/>
+            <a:ext cx="1143000" cy="228600"/>
+          </a:xfrm>
+          <a:prstGeom xmlns:a="http://schemas.openxmlformats.org/drawingml/2006/main" prst="rect">
+            <a:avLst/>
+          </a:prstGeom>
+          <a:noFill xmlns:a="http://schemas.openxmlformats.org/drawingml/2006/main"/>
+          <a:ln xmlns:a="http://schemas.openxmlformats.org/drawingml/2006/main" w="0">
+            <a:noFill/>
+          </a:ln>
+        </p:spPr>
+        <p:txBody>
+          <a:bodyPr xmlns:a="http://schemas.openxmlformats.org/drawingml/2006/main" wrap="square" lIns="0" tIns="0" rIns="0" bIns="0" anchor="t"/>
+          <a:lstStyle xmlns:a="http://schemas.openxmlformats.org/drawingml/2006/main"/>
+          <a:p xmlns:a="http://schemas.openxmlformats.org/drawingml/2006/main">
+            <a:r>
+              <a:rPr lang="en-US" sz="1200">
+                <a:solidFill>
+                  <a:srgbClr val="93959C"/>
+                </a:solidFill>
+                <a:latin typeface="Arial"/>
+                <a:ea typeface="Arial"/>
+              </a:rPr>
+              <a:t>On target</a:t>
+            </a:r>
+            <a:endParaRPr lang="en-US"/>
+          </a:p>
+        </p:txBody>
+      </p:sp>
+      <p:sp>
+        <p:nvSpPr>
+          <p:cNvPr id="16" name="work-num-1"/>
+          <p:cNvSpPr txBox="1"/>
+          <p:nvPr/>
+        </p:nvSpPr>
+        <p:spPr>
+          <a:xfrm xmlns:a="http://schemas.openxmlformats.org/drawingml/2006/main">
+            <a:off x="10477500" y="4229100"/>
+            <a:ext cx="571500" cy="228600"/>
+          </a:xfrm>
+          <a:prstGeom xmlns:a="http://schemas.openxmlformats.org/drawingml/2006/main" prst="rect">
+            <a:avLst/>
+          </a:prstGeom>
+          <a:noFill xmlns:a="http://schemas.openxmlformats.org/drawingml/2006/main"/>
+          <a:ln xmlns:a="http://schemas.openxmlformats.org/drawingml/2006/main" w="0">
+            <a:noFill/>
+          </a:ln>
+        </p:spPr>
+        <p:txBody>
+          <a:bodyPr xmlns:a="http://schemas.openxmlformats.org/drawingml/2006/main" wrap="square" lIns="0" tIns="0" rIns="0" bIns="0" anchor="t"/>
+          <a:lstStyle xmlns:a="http://schemas.openxmlformats.org/drawingml/2006/main"/>
+          <a:p xmlns:a="http://schemas.openxmlformats.org/drawingml/2006/main">
+            <a:r>
+              <a:rPr lang="en-US" sz="1350" b="1">
+                <a:solidFill>
+                  <a:srgbClr val="8B6BE8"/>
+                </a:solidFill>
+                <a:latin typeface="Arial"/>
+                <a:ea typeface="Arial"/>
+              </a:rPr>
+              <a:t>02</a:t>
+            </a:r>
+            <a:endParaRPr lang="en-US"/>
+          </a:p>
+        </p:txBody>
+      </p:sp>
+      <p:sp>
+        <p:nvSpPr>
+          <p:cNvPr id="17" name="work-label-1"/>
+          <p:cNvSpPr txBox="1"/>
+          <p:nvPr/>
+        </p:nvSpPr>
+        <p:spPr>
+          <a:xfrm xmlns:a="http://schemas.openxmlformats.org/drawingml/2006/main">
+            <a:off x="11144250" y="4229100"/>
+            <a:ext cx="1428750" cy="228600"/>
+          </a:xfrm>
+          <a:prstGeom xmlns:a="http://schemas.openxmlformats.org/drawingml/2006/main" prst="rect">
+            <a:avLst/>
+          </a:prstGeom>
+          <a:noFill xmlns:a="http://schemas.openxmlformats.org/drawingml/2006/main"/>
+          <a:ln xmlns:a="http://schemas.openxmlformats.org/drawingml/2006/main" w="0">
+            <a:noFill/>
+          </a:ln>
+        </p:spPr>
+        <p:txBody>
+          <a:bodyPr xmlns:a="http://schemas.openxmlformats.org/drawingml/2006/main" wrap="square" lIns="0" tIns="0" rIns="0" bIns="0" anchor="t"/>
+          <a:lstStyle xmlns:a="http://schemas.openxmlformats.org/drawingml/2006/main"/>
+          <a:p xmlns:a="http://schemas.openxmlformats.org/drawingml/2006/main">
+            <a:r>
+              <a:rPr lang="en-US" sz="1350" b="1">
                 <a:solidFill>
                   <a:srgbClr val="1D2330"/>
                 </a:solidFill>
                 <a:latin typeface="Arial"/>
                 <a:ea typeface="Arial"/>
               </a:rPr>
-              <a:t>A visible operating signal creates a shared next action.</a:t>
-            </a:r>
-            <a:endParaRPr lang="en-US"/>
-          </a:p>
-        </p:txBody>
-      </p:sp>
-      <p:sp>
-        <p:nvSpPr>
-          <p:cNvPr id="10" name="cover-source"/>
-          <p:cNvSpPr txBox="1"/>
-          <p:nvPr/>
-        </p:nvSpPr>
-        <p:spPr>
-          <a:xfrm xmlns:a="http://schemas.openxmlformats.org/drawingml/2006/main">
-            <a:off x="952500" y="7315200"/>
-            <a:ext cx="9048750" cy="228600"/>
+              <a:t>Handoff</a:t>
+            </a:r>
+            <a:endParaRPr lang="en-US"/>
+          </a:p>
+        </p:txBody>
+      </p:sp>
+      <p:sp>
+        <p:nvSpPr>
+          <p:cNvPr id="18" name="work-text-1"/>
+          <p:cNvSpPr txBox="1"/>
+          <p:nvPr/>
+        </p:nvSpPr>
+        <p:spPr>
+          <a:xfrm xmlns:a="http://schemas.openxmlformats.org/drawingml/2006/main">
+            <a:off x="12668250" y="4229100"/>
+            <a:ext cx="1143000" cy="228600"/>
+          </a:xfrm>
+          <a:prstGeom xmlns:a="http://schemas.openxmlformats.org/drawingml/2006/main" prst="rect">
+            <a:avLst/>
+          </a:prstGeom>
+          <a:noFill xmlns:a="http://schemas.openxmlformats.org/drawingml/2006/main"/>
+          <a:ln xmlns:a="http://schemas.openxmlformats.org/drawingml/2006/main" w="0">
+            <a:noFill/>
+          </a:ln>
+        </p:spPr>
+        <p:txBody>
+          <a:bodyPr xmlns:a="http://schemas.openxmlformats.org/drawingml/2006/main" wrap="square" lIns="0" tIns="0" rIns="0" bIns="0" anchor="t"/>
+          <a:lstStyle xmlns:a="http://schemas.openxmlformats.org/drawingml/2006/main"/>
+          <a:p xmlns:a="http://schemas.openxmlformats.org/drawingml/2006/main">
+            <a:r>
+              <a:rPr lang="en-US" sz="1200">
+                <a:solidFill>
+                  <a:srgbClr val="8B6BE8"/>
+                </a:solidFill>
+                <a:latin typeface="Arial"/>
+                <a:ea typeface="Arial"/>
+              </a:rPr>
+              <a:t>At risk</a:t>
+            </a:r>
+            <a:endParaRPr lang="en-US"/>
+          </a:p>
+        </p:txBody>
+      </p:sp>
+      <p:sp>
+        <p:nvSpPr>
+          <p:cNvPr id="19" name="work-num-2"/>
+          <p:cNvSpPr txBox="1"/>
+          <p:nvPr/>
+        </p:nvSpPr>
+        <p:spPr>
+          <a:xfrm xmlns:a="http://schemas.openxmlformats.org/drawingml/2006/main">
+            <a:off x="10477500" y="5010150"/>
+            <a:ext cx="571500" cy="228600"/>
+          </a:xfrm>
+          <a:prstGeom xmlns:a="http://schemas.openxmlformats.org/drawingml/2006/main" prst="rect">
+            <a:avLst/>
+          </a:prstGeom>
+          <a:noFill xmlns:a="http://schemas.openxmlformats.org/drawingml/2006/main"/>
+          <a:ln xmlns:a="http://schemas.openxmlformats.org/drawingml/2006/main" w="0">
+            <a:noFill/>
+          </a:ln>
+        </p:spPr>
+        <p:txBody>
+          <a:bodyPr xmlns:a="http://schemas.openxmlformats.org/drawingml/2006/main" wrap="square" lIns="0" tIns="0" rIns="0" bIns="0" anchor="t"/>
+          <a:lstStyle xmlns:a="http://schemas.openxmlformats.org/drawingml/2006/main"/>
+          <a:p xmlns:a="http://schemas.openxmlformats.org/drawingml/2006/main">
+            <a:r>
+              <a:rPr lang="en-US" sz="1350" b="1">
+                <a:solidFill>
+                  <a:srgbClr val="8B6BE8"/>
+                </a:solidFill>
+                <a:latin typeface="Arial"/>
+                <a:ea typeface="Arial"/>
+              </a:rPr>
+              <a:t>03</a:t>
+            </a:r>
+            <a:endParaRPr lang="en-US"/>
+          </a:p>
+        </p:txBody>
+      </p:sp>
+      <p:sp>
+        <p:nvSpPr>
+          <p:cNvPr id="20" name="work-label-2"/>
+          <p:cNvSpPr txBox="1"/>
+          <p:nvPr/>
+        </p:nvSpPr>
+        <p:spPr>
+          <a:xfrm xmlns:a="http://schemas.openxmlformats.org/drawingml/2006/main">
+            <a:off x="11144250" y="5010150"/>
+            <a:ext cx="1428750" cy="228600"/>
+          </a:xfrm>
+          <a:prstGeom xmlns:a="http://schemas.openxmlformats.org/drawingml/2006/main" prst="rect">
+            <a:avLst/>
+          </a:prstGeom>
+          <a:noFill xmlns:a="http://schemas.openxmlformats.org/drawingml/2006/main"/>
+          <a:ln xmlns:a="http://schemas.openxmlformats.org/drawingml/2006/main" w="0">
+            <a:noFill/>
+          </a:ln>
+        </p:spPr>
+        <p:txBody>
+          <a:bodyPr xmlns:a="http://schemas.openxmlformats.org/drawingml/2006/main" wrap="square" lIns="0" tIns="0" rIns="0" bIns="0" anchor="t"/>
+          <a:lstStyle xmlns:a="http://schemas.openxmlformats.org/drawingml/2006/main"/>
+          <a:p xmlns:a="http://schemas.openxmlformats.org/drawingml/2006/main">
+            <a:r>
+              <a:rPr lang="en-US" sz="1350" b="1">
+                <a:solidFill>
+                  <a:srgbClr val="1D2330"/>
+                </a:solidFill>
+                <a:latin typeface="Arial"/>
+                <a:ea typeface="Arial"/>
+              </a:rPr>
+              <a:t>Owner</a:t>
+            </a:r>
+            <a:endParaRPr lang="en-US"/>
+          </a:p>
+        </p:txBody>
+      </p:sp>
+      <p:sp>
+        <p:nvSpPr>
+          <p:cNvPr id="21" name="work-text-2"/>
+          <p:cNvSpPr txBox="1"/>
+          <p:nvPr/>
+        </p:nvSpPr>
+        <p:spPr>
+          <a:xfrm xmlns:a="http://schemas.openxmlformats.org/drawingml/2006/main">
+            <a:off x="12668250" y="5010150"/>
+            <a:ext cx="1143000" cy="228600"/>
+          </a:xfrm>
+          <a:prstGeom xmlns:a="http://schemas.openxmlformats.org/drawingml/2006/main" prst="rect">
+            <a:avLst/>
+          </a:prstGeom>
+          <a:noFill xmlns:a="http://schemas.openxmlformats.org/drawingml/2006/main"/>
+          <a:ln xmlns:a="http://schemas.openxmlformats.org/drawingml/2006/main" w="0">
+            <a:noFill/>
+          </a:ln>
+        </p:spPr>
+        <p:txBody>
+          <a:bodyPr xmlns:a="http://schemas.openxmlformats.org/drawingml/2006/main" wrap="square" lIns="0" tIns="0" rIns="0" bIns="0" anchor="t"/>
+          <a:lstStyle xmlns:a="http://schemas.openxmlformats.org/drawingml/2006/main"/>
+          <a:p xmlns:a="http://schemas.openxmlformats.org/drawingml/2006/main">
+            <a:r>
+              <a:rPr lang="en-US" sz="1200">
+                <a:solidFill>
+                  <a:srgbClr val="93959C"/>
+                </a:solidFill>
+                <a:latin typeface="Arial"/>
+                <a:ea typeface="Arial"/>
+              </a:rPr>
+              <a:t>Named</a:t>
+            </a:r>
+            <a:endParaRPr lang="en-US"/>
+          </a:p>
+        </p:txBody>
+      </p:sp>
+      <p:sp>
+        <p:nvSpPr>
+          <p:cNvPr id="22" name="source"/>
+          <p:cNvSpPr txBox="1"/>
+          <p:nvPr/>
+        </p:nvSpPr>
+        <p:spPr>
+          <a:xfrm xmlns:a="http://schemas.openxmlformats.org/drawingml/2006/main">
+            <a:off x="914400" y="7810500"/>
+            <a:ext cx="10953750" cy="209550"/>
           </a:xfrm>
           <a:prstGeom xmlns:a="http://schemas.openxmlformats.org/drawingml/2006/main" prst="rect">
             <a:avLst/>
@@ -827,15 +2059,15 @@
                 <a:latin typeface="Arial"/>
                 <a:ea typeface="Arial"/>
               </a:rPr>
-              <a:t>OfficeKit original clean-room calibration · fictional content · 2026-08-29</a:t>
-            </a:r>
-            <a:endParaRPr lang="en-US"/>
-          </a:p>
-        </p:txBody>
-      </p:sp>
-      <p:sp>
-        <p:nvSpPr>
-          <p:cNvPr id="11" name="page-number"/>
+              <a:t>Source: illustrative calibration brief · every claim is fictional and bounded</a:t>
+            </a:r>
+            <a:endParaRPr lang="en-US"/>
+          </a:p>
+        </p:txBody>
+      </p:sp>
+      <p:sp>
+        <p:nvSpPr>
+          <p:cNvPr id="23" name="page-number"/>
           <p:cNvSpPr txBox="1"/>
           <p:nvPr/>
         </p:nvSpPr>
@@ -865,401 +2097,7 @@
                 <a:latin typeface="Arial"/>
                 <a:ea typeface="Arial"/>
               </a:rPr>
-              <a:t>1 / 6</a:t>
-            </a:r>
-            <a:endParaRPr lang="en-US"/>
-          </a:p>
-        </p:txBody>
-      </p:sp>
-      <p:sp>
-        <p:nvSpPr>
-          <p:cNvPr id="12" name="anchor-field"/>
-          <p:cNvSpPr/>
-          <p:nvPr/>
-        </p:nvSpPr>
-        <p:spPr>
-          <a:xfrm xmlns:a="http://schemas.openxmlformats.org/drawingml/2006/main">
-            <a:off x="11620500" y="1790700"/>
-            <a:ext cx="2095500" cy="2286000"/>
-          </a:xfrm>
-          <a:prstGeom xmlns:a="http://schemas.openxmlformats.org/drawingml/2006/main" prst="rect">
-            <a:avLst/>
-          </a:prstGeom>
-          <a:solidFill xmlns:a="http://schemas.openxmlformats.org/drawingml/2006/main">
-            <a:srgbClr val="F3F5F8"/>
-          </a:solidFill>
-          <a:ln xmlns:a="http://schemas.openxmlformats.org/drawingml/2006/main" w="25400">
-            <a:solidFill>
-              <a:srgbClr val="8B6BE8"/>
-            </a:solidFill>
-            <a:prstDash val="solid"/>
-          </a:ln>
-        </p:spPr>
-        <p:txBody>
-          <a:bodyPr xmlns:a="http://schemas.openxmlformats.org/drawingml/2006/main" wrap="square" lIns="0" tIns="0" rIns="0" bIns="0" anchor="t"/>
-          <a:lstStyle xmlns:a="http://schemas.openxmlformats.org/drawingml/2006/main"/>
-          <a:p xmlns:a="http://schemas.openxmlformats.org/drawingml/2006/main">
-            <a:r>
-              <a:rPr lang="en-US"/>
-              <a:t/>
-            </a:r>
-            <a:endParaRPr lang="en-US"/>
-          </a:p>
-        </p:txBody>
-      </p:sp>
-      <p:sp>
-        <p:nvSpPr>
-          <p:cNvPr id="13" name="anchor-grid-0-0"/>
-          <p:cNvSpPr/>
-          <p:nvPr/>
-        </p:nvSpPr>
-        <p:spPr>
-          <a:xfrm xmlns:a="http://schemas.openxmlformats.org/drawingml/2006/main">
-            <a:off x="11925300" y="2152650"/>
-            <a:ext cx="266700" cy="285750"/>
-          </a:xfrm>
-          <a:prstGeom xmlns:a="http://schemas.openxmlformats.org/drawingml/2006/main" prst="rect">
-            <a:avLst/>
-          </a:prstGeom>
-          <a:solidFill xmlns:a="http://schemas.openxmlformats.org/drawingml/2006/main">
-            <a:srgbClr val="8B6BE8"/>
-          </a:solidFill>
-          <a:ln xmlns:a="http://schemas.openxmlformats.org/drawingml/2006/main" w="12700">
-            <a:solidFill>
-              <a:srgbClr val="8B6BE8"/>
-            </a:solidFill>
-            <a:prstDash val="solid"/>
-          </a:ln>
-        </p:spPr>
-        <p:txBody>
-          <a:bodyPr xmlns:a="http://schemas.openxmlformats.org/drawingml/2006/main" wrap="square" lIns="0" tIns="0" rIns="0" bIns="0" anchor="t"/>
-          <a:lstStyle xmlns:a="http://schemas.openxmlformats.org/drawingml/2006/main"/>
-          <a:p xmlns:a="http://schemas.openxmlformats.org/drawingml/2006/main">
-            <a:r>
-              <a:rPr lang="en-US"/>
-              <a:t/>
-            </a:r>
-            <a:endParaRPr lang="en-US"/>
-          </a:p>
-        </p:txBody>
-      </p:sp>
-      <p:sp>
-        <p:nvSpPr>
-          <p:cNvPr id="14" name="anchor-grid-0-1"/>
-          <p:cNvSpPr/>
-          <p:nvPr/>
-        </p:nvSpPr>
-        <p:spPr>
-          <a:xfrm xmlns:a="http://schemas.openxmlformats.org/drawingml/2006/main">
-            <a:off x="12420600" y="2152650"/>
-            <a:ext cx="266700" cy="285750"/>
-          </a:xfrm>
-          <a:prstGeom xmlns:a="http://schemas.openxmlformats.org/drawingml/2006/main" prst="rect">
-            <a:avLst/>
-          </a:prstGeom>
-          <a:solidFill xmlns:a="http://schemas.openxmlformats.org/drawingml/2006/main">
-            <a:srgbClr val="8B6BE8"/>
-          </a:solidFill>
-          <a:ln xmlns:a="http://schemas.openxmlformats.org/drawingml/2006/main" w="12700">
-            <a:solidFill>
-              <a:srgbClr val="8B6BE8"/>
-            </a:solidFill>
-            <a:prstDash val="solid"/>
-          </a:ln>
-        </p:spPr>
-        <p:txBody>
-          <a:bodyPr xmlns:a="http://schemas.openxmlformats.org/drawingml/2006/main" wrap="square" lIns="0" tIns="0" rIns="0" bIns="0" anchor="t"/>
-          <a:lstStyle xmlns:a="http://schemas.openxmlformats.org/drawingml/2006/main"/>
-          <a:p xmlns:a="http://schemas.openxmlformats.org/drawingml/2006/main">
-            <a:r>
-              <a:rPr lang="en-US"/>
-              <a:t/>
-            </a:r>
-            <a:endParaRPr lang="en-US"/>
-          </a:p>
-        </p:txBody>
-      </p:sp>
-      <p:sp>
-        <p:nvSpPr>
-          <p:cNvPr id="15" name="anchor-grid-0-2"/>
-          <p:cNvSpPr/>
-          <p:nvPr/>
-        </p:nvSpPr>
-        <p:spPr>
-          <a:xfrm xmlns:a="http://schemas.openxmlformats.org/drawingml/2006/main">
-            <a:off x="12915900" y="2152650"/>
-            <a:ext cx="266700" cy="285750"/>
-          </a:xfrm>
-          <a:prstGeom xmlns:a="http://schemas.openxmlformats.org/drawingml/2006/main" prst="rect">
-            <a:avLst/>
-          </a:prstGeom>
-          <a:solidFill xmlns:a="http://schemas.openxmlformats.org/drawingml/2006/main">
-            <a:srgbClr val="FFFFFF"/>
-          </a:solidFill>
-          <a:ln xmlns:a="http://schemas.openxmlformats.org/drawingml/2006/main" w="12700">
-            <a:solidFill>
-              <a:srgbClr val="8B6BE8"/>
-            </a:solidFill>
-            <a:prstDash val="solid"/>
-          </a:ln>
-        </p:spPr>
-        <p:txBody>
-          <a:bodyPr xmlns:a="http://schemas.openxmlformats.org/drawingml/2006/main" wrap="square" lIns="0" tIns="0" rIns="0" bIns="0" anchor="t"/>
-          <a:lstStyle xmlns:a="http://schemas.openxmlformats.org/drawingml/2006/main"/>
-          <a:p xmlns:a="http://schemas.openxmlformats.org/drawingml/2006/main">
-            <a:r>
-              <a:rPr lang="en-US"/>
-              <a:t/>
-            </a:r>
-            <a:endParaRPr lang="en-US"/>
-          </a:p>
-        </p:txBody>
-      </p:sp>
-      <p:sp>
-        <p:nvSpPr>
-          <p:cNvPr id="16" name="anchor-grid-1-0"/>
-          <p:cNvSpPr/>
-          <p:nvPr/>
-        </p:nvSpPr>
-        <p:spPr>
-          <a:xfrm xmlns:a="http://schemas.openxmlformats.org/drawingml/2006/main">
-            <a:off x="11925300" y="2686050"/>
-            <a:ext cx="266700" cy="285750"/>
-          </a:xfrm>
-          <a:prstGeom xmlns:a="http://schemas.openxmlformats.org/drawingml/2006/main" prst="rect">
-            <a:avLst/>
-          </a:prstGeom>
-          <a:solidFill xmlns:a="http://schemas.openxmlformats.org/drawingml/2006/main">
-            <a:srgbClr val="8B6BE8"/>
-          </a:solidFill>
-          <a:ln xmlns:a="http://schemas.openxmlformats.org/drawingml/2006/main" w="12700">
-            <a:solidFill>
-              <a:srgbClr val="8B6BE8"/>
-            </a:solidFill>
-            <a:prstDash val="solid"/>
-          </a:ln>
-        </p:spPr>
-        <p:txBody>
-          <a:bodyPr xmlns:a="http://schemas.openxmlformats.org/drawingml/2006/main" wrap="square" lIns="0" tIns="0" rIns="0" bIns="0" anchor="t"/>
-          <a:lstStyle xmlns:a="http://schemas.openxmlformats.org/drawingml/2006/main"/>
-          <a:p xmlns:a="http://schemas.openxmlformats.org/drawingml/2006/main">
-            <a:r>
-              <a:rPr lang="en-US"/>
-              <a:t/>
-            </a:r>
-            <a:endParaRPr lang="en-US"/>
-          </a:p>
-        </p:txBody>
-      </p:sp>
-      <p:sp>
-        <p:nvSpPr>
-          <p:cNvPr id="17" name="anchor-grid-1-1"/>
-          <p:cNvSpPr/>
-          <p:nvPr/>
-        </p:nvSpPr>
-        <p:spPr>
-          <a:xfrm xmlns:a="http://schemas.openxmlformats.org/drawingml/2006/main">
-            <a:off x="12420600" y="2686050"/>
-            <a:ext cx="266700" cy="285750"/>
-          </a:xfrm>
-          <a:prstGeom xmlns:a="http://schemas.openxmlformats.org/drawingml/2006/main" prst="rect">
-            <a:avLst/>
-          </a:prstGeom>
-          <a:solidFill xmlns:a="http://schemas.openxmlformats.org/drawingml/2006/main">
-            <a:srgbClr val="8B6BE8"/>
-          </a:solidFill>
-          <a:ln xmlns:a="http://schemas.openxmlformats.org/drawingml/2006/main" w="12700">
-            <a:solidFill>
-              <a:srgbClr val="8B6BE8"/>
-            </a:solidFill>
-            <a:prstDash val="solid"/>
-          </a:ln>
-        </p:spPr>
-        <p:txBody>
-          <a:bodyPr xmlns:a="http://schemas.openxmlformats.org/drawingml/2006/main" wrap="square" lIns="0" tIns="0" rIns="0" bIns="0" anchor="t"/>
-          <a:lstStyle xmlns:a="http://schemas.openxmlformats.org/drawingml/2006/main"/>
-          <a:p xmlns:a="http://schemas.openxmlformats.org/drawingml/2006/main">
-            <a:r>
-              <a:rPr lang="en-US"/>
-              <a:t/>
-            </a:r>
-            <a:endParaRPr lang="en-US"/>
-          </a:p>
-        </p:txBody>
-      </p:sp>
-      <p:sp>
-        <p:nvSpPr>
-          <p:cNvPr id="18" name="anchor-grid-1-2"/>
-          <p:cNvSpPr/>
-          <p:nvPr/>
-        </p:nvSpPr>
-        <p:spPr>
-          <a:xfrm xmlns:a="http://schemas.openxmlformats.org/drawingml/2006/main">
-            <a:off x="12915900" y="2686050"/>
-            <a:ext cx="266700" cy="285750"/>
-          </a:xfrm>
-          <a:prstGeom xmlns:a="http://schemas.openxmlformats.org/drawingml/2006/main" prst="rect">
-            <a:avLst/>
-          </a:prstGeom>
-          <a:solidFill xmlns:a="http://schemas.openxmlformats.org/drawingml/2006/main">
-            <a:srgbClr val="FFFFFF"/>
-          </a:solidFill>
-          <a:ln xmlns:a="http://schemas.openxmlformats.org/drawingml/2006/main" w="12700">
-            <a:solidFill>
-              <a:srgbClr val="8B6BE8"/>
-            </a:solidFill>
-            <a:prstDash val="solid"/>
-          </a:ln>
-        </p:spPr>
-        <p:txBody>
-          <a:bodyPr xmlns:a="http://schemas.openxmlformats.org/drawingml/2006/main" wrap="square" lIns="0" tIns="0" rIns="0" bIns="0" anchor="t"/>
-          <a:lstStyle xmlns:a="http://schemas.openxmlformats.org/drawingml/2006/main"/>
-          <a:p xmlns:a="http://schemas.openxmlformats.org/drawingml/2006/main">
-            <a:r>
-              <a:rPr lang="en-US"/>
-              <a:t/>
-            </a:r>
-            <a:endParaRPr lang="en-US"/>
-          </a:p>
-        </p:txBody>
-      </p:sp>
-      <p:sp>
-        <p:nvSpPr>
-          <p:cNvPr id="19" name="anchor-grid-2-0"/>
-          <p:cNvSpPr/>
-          <p:nvPr/>
-        </p:nvSpPr>
-        <p:spPr>
-          <a:xfrm xmlns:a="http://schemas.openxmlformats.org/drawingml/2006/main">
-            <a:off x="11925300" y="3219450"/>
-            <a:ext cx="266700" cy="285750"/>
-          </a:xfrm>
-          <a:prstGeom xmlns:a="http://schemas.openxmlformats.org/drawingml/2006/main" prst="rect">
-            <a:avLst/>
-          </a:prstGeom>
-          <a:solidFill xmlns:a="http://schemas.openxmlformats.org/drawingml/2006/main">
-            <a:srgbClr val="8B6BE8"/>
-          </a:solidFill>
-          <a:ln xmlns:a="http://schemas.openxmlformats.org/drawingml/2006/main" w="12700">
-            <a:solidFill>
-              <a:srgbClr val="8B6BE8"/>
-            </a:solidFill>
-            <a:prstDash val="solid"/>
-          </a:ln>
-        </p:spPr>
-        <p:txBody>
-          <a:bodyPr xmlns:a="http://schemas.openxmlformats.org/drawingml/2006/main" wrap="square" lIns="0" tIns="0" rIns="0" bIns="0" anchor="t"/>
-          <a:lstStyle xmlns:a="http://schemas.openxmlformats.org/drawingml/2006/main"/>
-          <a:p xmlns:a="http://schemas.openxmlformats.org/drawingml/2006/main">
-            <a:r>
-              <a:rPr lang="en-US"/>
-              <a:t/>
-            </a:r>
-            <a:endParaRPr lang="en-US"/>
-          </a:p>
-        </p:txBody>
-      </p:sp>
-      <p:sp>
-        <p:nvSpPr>
-          <p:cNvPr id="20" name="anchor-grid-2-1"/>
-          <p:cNvSpPr/>
-          <p:nvPr/>
-        </p:nvSpPr>
-        <p:spPr>
-          <a:xfrm xmlns:a="http://schemas.openxmlformats.org/drawingml/2006/main">
-            <a:off x="12420600" y="3219450"/>
-            <a:ext cx="266700" cy="285750"/>
-          </a:xfrm>
-          <a:prstGeom xmlns:a="http://schemas.openxmlformats.org/drawingml/2006/main" prst="rect">
-            <a:avLst/>
-          </a:prstGeom>
-          <a:solidFill xmlns:a="http://schemas.openxmlformats.org/drawingml/2006/main">
-            <a:srgbClr val="8B6BE8"/>
-          </a:solidFill>
-          <a:ln xmlns:a="http://schemas.openxmlformats.org/drawingml/2006/main" w="12700">
-            <a:solidFill>
-              <a:srgbClr val="8B6BE8"/>
-            </a:solidFill>
-            <a:prstDash val="solid"/>
-          </a:ln>
-        </p:spPr>
-        <p:txBody>
-          <a:bodyPr xmlns:a="http://schemas.openxmlformats.org/drawingml/2006/main" wrap="square" lIns="0" tIns="0" rIns="0" bIns="0" anchor="t"/>
-          <a:lstStyle xmlns:a="http://schemas.openxmlformats.org/drawingml/2006/main"/>
-          <a:p xmlns:a="http://schemas.openxmlformats.org/drawingml/2006/main">
-            <a:r>
-              <a:rPr lang="en-US"/>
-              <a:t/>
-            </a:r>
-            <a:endParaRPr lang="en-US"/>
-          </a:p>
-        </p:txBody>
-      </p:sp>
-      <p:sp>
-        <p:nvSpPr>
-          <p:cNvPr id="21" name="anchor-grid-2-2"/>
-          <p:cNvSpPr/>
-          <p:nvPr/>
-        </p:nvSpPr>
-        <p:spPr>
-          <a:xfrm xmlns:a="http://schemas.openxmlformats.org/drawingml/2006/main">
-            <a:off x="12915900" y="3219450"/>
-            <a:ext cx="266700" cy="285750"/>
-          </a:xfrm>
-          <a:prstGeom xmlns:a="http://schemas.openxmlformats.org/drawingml/2006/main" prst="rect">
-            <a:avLst/>
-          </a:prstGeom>
-          <a:solidFill xmlns:a="http://schemas.openxmlformats.org/drawingml/2006/main">
-            <a:srgbClr val="FFFFFF"/>
-          </a:solidFill>
-          <a:ln xmlns:a="http://schemas.openxmlformats.org/drawingml/2006/main" w="12700">
-            <a:solidFill>
-              <a:srgbClr val="8B6BE8"/>
-            </a:solidFill>
-            <a:prstDash val="solid"/>
-          </a:ln>
-        </p:spPr>
-        <p:txBody>
-          <a:bodyPr xmlns:a="http://schemas.openxmlformats.org/drawingml/2006/main" wrap="square" lIns="0" tIns="0" rIns="0" bIns="0" anchor="t"/>
-          <a:lstStyle xmlns:a="http://schemas.openxmlformats.org/drawingml/2006/main"/>
-          <a:p xmlns:a="http://schemas.openxmlformats.org/drawingml/2006/main">
-            <a:r>
-              <a:rPr lang="en-US"/>
-              <a:t/>
-            </a:r>
-            <a:endParaRPr lang="en-US"/>
-          </a:p>
-        </p:txBody>
-      </p:sp>
-      <p:sp>
-        <p:nvSpPr>
-          <p:cNvPr id="22" name="anchor-axis"/>
-          <p:cNvSpPr/>
-          <p:nvPr/>
-        </p:nvSpPr>
-        <p:spPr>
-          <a:xfrm xmlns:a="http://schemas.openxmlformats.org/drawingml/2006/main">
-            <a:off x="12668250" y="1638300"/>
-            <a:ext cx="0" cy="2743200"/>
-          </a:xfrm>
-          <a:prstGeom xmlns:a="http://schemas.openxmlformats.org/drawingml/2006/main" prst="line">
-            <a:avLst/>
-          </a:prstGeom>
-          <a:noFill xmlns:a="http://schemas.openxmlformats.org/drawingml/2006/main"/>
-          <a:ln xmlns:a="http://schemas.openxmlformats.org/drawingml/2006/main" w="50800">
-            <a:solidFill>
-              <a:srgbClr val="1D2330"/>
-            </a:solidFill>
-            <a:prstDash val="solid"/>
-          </a:ln>
-        </p:spPr>
-        <p:txBody>
-          <a:bodyPr xmlns:a="http://schemas.openxmlformats.org/drawingml/2006/main" wrap="square" lIns="0" tIns="0" rIns="0" bIns="0" anchor="t"/>
-          <a:lstStyle xmlns:a="http://schemas.openxmlformats.org/drawingml/2006/main"/>
-          <a:p xmlns:a="http://schemas.openxmlformats.org/drawingml/2006/main">
-            <a:r>
-              <a:rPr lang="en-US"/>
-              <a:t/>
+              <a:t>2 / 6</a:t>
             </a:r>
             <a:endParaRPr lang="en-US"/>
           </a:p>
@@ -1273,13 +2111,13 @@
 </p:sld>
 </file>
 
-<file path=ppt/slides/slide2.xml><?xml version="1.0" encoding="utf-8"?>
+<file path=ppt/slides/slide3.xml><?xml version="1.0" encoding="utf-8"?>
 <p:sld xmlns:p="http://schemas.openxmlformats.org/presentationml/2006/main">
-  <p:cSld name="Argument">
+  <p:cSld name="Evidence">
     <p:bg>
       <p:bgPr>
         <a:blipFill xmlns:a="http://schemas.openxmlformats.org/drawingml/2006/main">
-          <a:blip xmlns:r="http://schemas.openxmlformats.org/officeDocument/2006/relationships" r:embed="rIdOfficeKitImage7650495d0c3b8602_1"/>
+          <a:blip xmlns:r="http://schemas.openxmlformats.org/officeDocument/2006/relationships" r:embed="rIdOfficeKitImage8fbc298f8d1b7a3c_1"/>
           <a:stretch>
             <a:fillRect/>
           </a:stretch>
@@ -1302,844 +2140,6 @@
       </p:grpSpPr>
       <p:sp>
         <p:nvSpPr>
-          <p:cNvPr id="2" name="argument-paper-scrim"/>
-          <p:cNvSpPr/>
-          <p:nvPr/>
-        </p:nvSpPr>
-        <p:spPr>
-          <a:xfrm xmlns:a="http://schemas.openxmlformats.org/drawingml/2006/main">
-            <a:off x="0" y="0"/>
-            <a:ext cx="7429500" cy="8572500"/>
-          </a:xfrm>
-          <a:prstGeom xmlns:a="http://schemas.openxmlformats.org/drawingml/2006/main" prst="rect">
-            <a:avLst/>
-          </a:prstGeom>
-          <a:solidFill xmlns:a="http://schemas.openxmlformats.org/drawingml/2006/main">
-            <a:srgbClr val="FFFFFF">
-              <a:alpha val="96000"/>
-            </a:srgbClr>
-          </a:solidFill>
-          <a:ln xmlns:a="http://schemas.openxmlformats.org/drawingml/2006/main" w="0">
-            <a:solidFill>
-              <a:srgbClr val="FFFFFF"/>
-            </a:solidFill>
-            <a:prstDash val="solid"/>
-          </a:ln>
-        </p:spPr>
-        <p:txBody>
-          <a:bodyPr xmlns:a="http://schemas.openxmlformats.org/drawingml/2006/main" wrap="square" lIns="0" tIns="0" rIns="0" bIns="0" anchor="t"/>
-          <a:lstStyle xmlns:a="http://schemas.openxmlformats.org/drawingml/2006/main"/>
-          <a:p xmlns:a="http://schemas.openxmlformats.org/drawingml/2006/main">
-            <a:r>
-              <a:rPr lang="en-US"/>
-              <a:t/>
-            </a:r>
-            <a:endParaRPr lang="en-US"/>
-          </a:p>
-        </p:txBody>
-      </p:sp>
-      <p:pic>
-        <p:nvPicPr>
-          <p:cNvPr id="3" name="argument-photo-band">
-            <a:extLst xmlns:a="http://schemas.openxmlformats.org/drawingml/2006/main">
-              <a:ext uri="{C183D7F6-B498-43B3-948B-1728B52AA6E4}">
-                <adec:decorative xmlns:adec="http://schemas.microsoft.com/office/drawing/2017/decorative" val="1"/>
-              </a:ext>
-            </a:extLst>
-          </p:cNvPr>
-          <p:cNvPicPr/>
-          <p:nvPr/>
-        </p:nvPicPr>
-        <p:blipFill>
-          <a:blip xmlns:r="http://schemas.openxmlformats.org/officeDocument/2006/relationships" xmlns:a="http://schemas.openxmlformats.org/drawingml/2006/main" r:embed="rIdOfficeKitImage7650495d0c3b8602_1"/>
-          <a:srcRect xmlns:a="http://schemas.openxmlformats.org/drawingml/2006/main" l="0" t="47258" r="0" b="47258"/>
-          <a:stretch xmlns:a="http://schemas.openxmlformats.org/drawingml/2006/main">
-            <a:fillRect/>
-          </a:stretch>
-        </p:blipFill>
-        <p:spPr>
-          <a:xfrm xmlns:a="http://schemas.openxmlformats.org/drawingml/2006/main">
-            <a:off x="0" y="0"/>
-            <a:ext cx="15240000" cy="1485900"/>
-          </a:xfrm>
-          <a:prstGeom xmlns:a="http://schemas.openxmlformats.org/drawingml/2006/main" prst="rect">
-            <a:avLst/>
-          </a:prstGeom>
-        </p:spPr>
-      </p:pic>
-      <p:sp>
-        <p:nvSpPr>
-          <p:cNvPr id="4" name="argument-photo-scrim"/>
-          <p:cNvSpPr/>
-          <p:nvPr/>
-        </p:nvSpPr>
-        <p:spPr>
-          <a:xfrm xmlns:a="http://schemas.openxmlformats.org/drawingml/2006/main">
-            <a:off x="0" y="0"/>
-            <a:ext cx="15240000" cy="1485900"/>
-          </a:xfrm>
-          <a:prstGeom xmlns:a="http://schemas.openxmlformats.org/drawingml/2006/main" prst="rect">
-            <a:avLst/>
-          </a:prstGeom>
-          <a:solidFill xmlns:a="http://schemas.openxmlformats.org/drawingml/2006/main">
-            <a:srgbClr val="1D2330">
-              <a:alpha val="62000"/>
-            </a:srgbClr>
-          </a:solidFill>
-          <a:ln xmlns:a="http://schemas.openxmlformats.org/drawingml/2006/main" w="0">
-            <a:solidFill>
-              <a:srgbClr val="1D2330"/>
-            </a:solidFill>
-            <a:prstDash val="solid"/>
-          </a:ln>
-        </p:spPr>
-        <p:txBody>
-          <a:bodyPr xmlns:a="http://schemas.openxmlformats.org/drawingml/2006/main" wrap="square" lIns="0" tIns="0" rIns="0" bIns="0" anchor="t"/>
-          <a:lstStyle xmlns:a="http://schemas.openxmlformats.org/drawingml/2006/main"/>
-          <a:p xmlns:a="http://schemas.openxmlformats.org/drawingml/2006/main">
-            <a:r>
-              <a:rPr lang="en-US"/>
-              <a:t/>
-            </a:r>
-            <a:endParaRPr lang="en-US"/>
-          </a:p>
-        </p:txBody>
-      </p:sp>
-      <p:sp>
-        <p:nvSpPr>
-          <p:cNvPr id="5" name="argument-photo-rule"/>
-          <p:cNvSpPr/>
-          <p:nvPr/>
-        </p:nvSpPr>
-        <p:spPr>
-          <a:xfrm xmlns:a="http://schemas.openxmlformats.org/drawingml/2006/main">
-            <a:off x="914400" y="1438275"/>
-            <a:ext cx="13411200" cy="0"/>
-          </a:xfrm>
-          <a:prstGeom xmlns:a="http://schemas.openxmlformats.org/drawingml/2006/main" prst="line">
-            <a:avLst/>
-          </a:prstGeom>
-          <a:noFill xmlns:a="http://schemas.openxmlformats.org/drawingml/2006/main"/>
-          <a:ln xmlns:a="http://schemas.openxmlformats.org/drawingml/2006/main" w="38100">
-            <a:solidFill>
-              <a:srgbClr val="8B6BE8"/>
-            </a:solidFill>
-            <a:prstDash val="solid"/>
-          </a:ln>
-        </p:spPr>
-        <p:txBody>
-          <a:bodyPr xmlns:a="http://schemas.openxmlformats.org/drawingml/2006/main" wrap="square" lIns="0" tIns="0" rIns="0" bIns="0" anchor="t"/>
-          <a:lstStyle xmlns:a="http://schemas.openxmlformats.org/drawingml/2006/main"/>
-          <a:p xmlns:a="http://schemas.openxmlformats.org/drawingml/2006/main">
-            <a:r>
-              <a:rPr lang="en-US"/>
-              <a:t/>
-            </a:r>
-            <a:endParaRPr lang="en-US"/>
-          </a:p>
-        </p:txBody>
-      </p:sp>
-      <p:sp>
-        <p:nvSpPr>
-          <p:cNvPr id="6" name="MOONLIT WORK REPORT · ARGUMENT"/>
-          <p:cNvSpPr txBox="1"/>
-          <p:nvPr/>
-        </p:nvSpPr>
-        <p:spPr>
-          <a:xfrm xmlns:a="http://schemas.openxmlformats.org/drawingml/2006/main">
-            <a:off x="914400" y="228600"/>
-            <a:ext cx="9525000" cy="190500"/>
-          </a:xfrm>
-          <a:prstGeom xmlns:a="http://schemas.openxmlformats.org/drawingml/2006/main" prst="rect">
-            <a:avLst/>
-          </a:prstGeom>
-          <a:noFill xmlns:a="http://schemas.openxmlformats.org/drawingml/2006/main"/>
-          <a:ln xmlns:a="http://schemas.openxmlformats.org/drawingml/2006/main" w="0">
-            <a:noFill/>
-          </a:ln>
-        </p:spPr>
-        <p:txBody>
-          <a:bodyPr xmlns:a="http://schemas.openxmlformats.org/drawingml/2006/main" wrap="square" lIns="0" tIns="0" rIns="0" bIns="0" anchor="t"/>
-          <a:lstStyle xmlns:a="http://schemas.openxmlformats.org/drawingml/2006/main"/>
-          <a:p xmlns:a="http://schemas.openxmlformats.org/drawingml/2006/main">
-            <a:r>
-              <a:rPr lang="en-US" sz="1050" b="1">
-                <a:solidFill>
-                  <a:srgbClr val="8B6BE8"/>
-                </a:solidFill>
-                <a:latin typeface="Arial"/>
-                <a:ea typeface="Arial"/>
-              </a:rPr>
-              <a:t>MOONLIT WORK REPORT · ARGUMENT</a:t>
-            </a:r>
-            <a:endParaRPr lang="en-US"/>
-          </a:p>
-        </p:txBody>
-      </p:sp>
-      <p:sp>
-        <p:nvSpPr>
-          <p:cNvPr id="7" name="argument-title"/>
-          <p:cNvSpPr txBox="1"/>
-          <p:nvPr/>
-        </p:nvSpPr>
-        <p:spPr>
-          <a:xfrm xmlns:a="http://schemas.openxmlformats.org/drawingml/2006/main">
-            <a:off x="914400" y="495300"/>
-            <a:ext cx="12001500" cy="457200"/>
-          </a:xfrm>
-          <a:prstGeom xmlns:a="http://schemas.openxmlformats.org/drawingml/2006/main" prst="rect">
-            <a:avLst/>
-          </a:prstGeom>
-          <a:noFill xmlns:a="http://schemas.openxmlformats.org/drawingml/2006/main"/>
-          <a:ln xmlns:a="http://schemas.openxmlformats.org/drawingml/2006/main" w="0">
-            <a:noFill/>
-          </a:ln>
-        </p:spPr>
-        <p:txBody>
-          <a:bodyPr xmlns:a="http://schemas.openxmlformats.org/drawingml/2006/main" wrap="square" lIns="0" tIns="0" rIns="0" bIns="0" anchor="t"/>
-          <a:lstStyle xmlns:a="http://schemas.openxmlformats.org/drawingml/2006/main"/>
-          <a:p xmlns:a="http://schemas.openxmlformats.org/drawingml/2006/main">
-            <a:r>
-              <a:rPr lang="en-US" sz="2550" b="1">
-                <a:solidFill>
-                  <a:srgbClr val="FFFFFF"/>
-                </a:solidFill>
-                <a:latin typeface="Arial"/>
-                <a:ea typeface="Arial"/>
-              </a:rPr>
-              <a:t>The constraint owns the page</a:t>
-            </a:r>
-            <a:endParaRPr lang="en-US"/>
-          </a:p>
-        </p:txBody>
-      </p:sp>
-      <p:sp>
-        <p:nvSpPr>
-          <p:cNvPr id="8" name="argument-basis"/>
-          <p:cNvSpPr txBox="1"/>
-          <p:nvPr/>
-        </p:nvSpPr>
-        <p:spPr>
-          <a:xfrm xmlns:a="http://schemas.openxmlformats.org/drawingml/2006/main">
-            <a:off x="952500" y="1066800"/>
-            <a:ext cx="11049000" cy="228600"/>
-          </a:xfrm>
-          <a:prstGeom xmlns:a="http://schemas.openxmlformats.org/drawingml/2006/main" prst="rect">
-            <a:avLst/>
-          </a:prstGeom>
-          <a:noFill xmlns:a="http://schemas.openxmlformats.org/drawingml/2006/main"/>
-          <a:ln xmlns:a="http://schemas.openxmlformats.org/drawingml/2006/main" w="0">
-            <a:noFill/>
-          </a:ln>
-        </p:spPr>
-        <p:txBody>
-          <a:bodyPr xmlns:a="http://schemas.openxmlformats.org/drawingml/2006/main" wrap="square" lIns="0" tIns="0" rIns="0" bIns="0" anchor="t"/>
-          <a:lstStyle xmlns:a="http://schemas.openxmlformats.org/drawingml/2006/main"/>
-          <a:p xmlns:a="http://schemas.openxmlformats.org/drawingml/2006/main">
-            <a:r>
-              <a:rPr lang="en-US" sz="1200">
-                <a:solidFill>
-                  <a:srgbClr val="F0F3F2"/>
-                </a:solidFill>
-                <a:latin typeface="Arial"/>
-                <a:ea typeface="Arial"/>
-              </a:rPr>
-              <a:t>Status, cause, owner and date stay together.</a:t>
-            </a:r>
-            <a:endParaRPr lang="en-US"/>
-          </a:p>
-        </p:txBody>
-      </p:sp>
-      <p:sp>
-        <p:nvSpPr>
-          <p:cNvPr id="9" name="work-status"/>
-          <p:cNvSpPr txBox="1"/>
-          <p:nvPr/>
-        </p:nvSpPr>
-        <p:spPr>
-          <a:xfrm xmlns:a="http://schemas.openxmlformats.org/drawingml/2006/main">
-            <a:off x="1104900" y="3352800"/>
-            <a:ext cx="2857500" cy="228600"/>
-          </a:xfrm>
-          <a:prstGeom xmlns:a="http://schemas.openxmlformats.org/drawingml/2006/main" prst="rect">
-            <a:avLst/>
-          </a:prstGeom>
-          <a:noFill xmlns:a="http://schemas.openxmlformats.org/drawingml/2006/main"/>
-          <a:ln xmlns:a="http://schemas.openxmlformats.org/drawingml/2006/main" w="0">
-            <a:noFill/>
-          </a:ln>
-        </p:spPr>
-        <p:txBody>
-          <a:bodyPr xmlns:a="http://schemas.openxmlformats.org/drawingml/2006/main" wrap="square" lIns="0" tIns="0" rIns="0" bIns="0" anchor="t"/>
-          <a:lstStyle xmlns:a="http://schemas.openxmlformats.org/drawingml/2006/main"/>
-          <a:p xmlns:a="http://schemas.openxmlformats.org/drawingml/2006/main">
-            <a:r>
-              <a:rPr lang="en-US" sz="1125" b="1">
-                <a:solidFill>
-                  <a:srgbClr val="8B6BE8"/>
-                </a:solidFill>
-                <a:latin typeface="Arial"/>
-                <a:ea typeface="Arial"/>
-              </a:rPr>
-              <a:t>OPERATING SIGNAL</a:t>
-            </a:r>
-            <a:endParaRPr lang="en-US"/>
-          </a:p>
-        </p:txBody>
-      </p:sp>
-      <p:sp>
-        <p:nvSpPr>
-          <p:cNvPr id="10" name="work-headline"/>
-          <p:cNvSpPr txBox="1"/>
-          <p:nvPr/>
-        </p:nvSpPr>
-        <p:spPr>
-          <a:xfrm xmlns:a="http://schemas.openxmlformats.org/drawingml/2006/main">
-            <a:off x="1104900" y="3790950"/>
-            <a:ext cx="6667500" cy="723900"/>
-          </a:xfrm>
-          <a:prstGeom xmlns:a="http://schemas.openxmlformats.org/drawingml/2006/main" prst="rect">
-            <a:avLst/>
-          </a:prstGeom>
-          <a:noFill xmlns:a="http://schemas.openxmlformats.org/drawingml/2006/main"/>
-          <a:ln xmlns:a="http://schemas.openxmlformats.org/drawingml/2006/main" w="0">
-            <a:noFill/>
-          </a:ln>
-        </p:spPr>
-        <p:txBody>
-          <a:bodyPr xmlns:a="http://schemas.openxmlformats.org/drawingml/2006/main" wrap="square" lIns="0" tIns="0" rIns="0" bIns="0" anchor="t"/>
-          <a:lstStyle xmlns:a="http://schemas.openxmlformats.org/drawingml/2006/main"/>
-          <a:p xmlns:a="http://schemas.openxmlformats.org/drawingml/2006/main">
-            <a:r>
-              <a:rPr lang="en-US" sz="2550" b="1">
-                <a:solidFill>
-                  <a:srgbClr val="1D2330"/>
-                </a:solidFill>
-                <a:latin typeface="Arial"/>
-                <a:ea typeface="Arial"/>
-              </a:rPr>
-              <a:t>The queue is healthy; the handoff is not.</a:t>
-            </a:r>
-            <a:endParaRPr lang="en-US"/>
-          </a:p>
-        </p:txBody>
-      </p:sp>
-      <p:sp>
-        <p:nvSpPr>
-          <p:cNvPr id="11" name="work-body"/>
-          <p:cNvSpPr txBox="1"/>
-          <p:nvPr/>
-        </p:nvSpPr>
-        <p:spPr>
-          <a:xfrm xmlns:a="http://schemas.openxmlformats.org/drawingml/2006/main">
-            <a:off x="1104900" y="4762500"/>
-            <a:ext cx="6191250" cy="400050"/>
-          </a:xfrm>
-          <a:prstGeom xmlns:a="http://schemas.openxmlformats.org/drawingml/2006/main" prst="rect">
-            <a:avLst/>
-          </a:prstGeom>
-          <a:noFill xmlns:a="http://schemas.openxmlformats.org/drawingml/2006/main"/>
-          <a:ln xmlns:a="http://schemas.openxmlformats.org/drawingml/2006/main" w="0">
-            <a:noFill/>
-          </a:ln>
-        </p:spPr>
-        <p:txBody>
-          <a:bodyPr xmlns:a="http://schemas.openxmlformats.org/drawingml/2006/main" wrap="square" lIns="0" tIns="0" rIns="0" bIns="0" anchor="t"/>
-          <a:lstStyle xmlns:a="http://schemas.openxmlformats.org/drawingml/2006/main"/>
-          <a:p xmlns:a="http://schemas.openxmlformats.org/drawingml/2006/main">
-            <a:r>
-              <a:rPr lang="en-US" sz="1575">
-                <a:solidFill>
-                  <a:srgbClr val="1D2330"/>
-                </a:solidFill>
-                <a:latin typeface="Arial"/>
-                <a:ea typeface="Arial"/>
-              </a:rPr>
-              <a:t>Three visible signals point to one owner and one date.</a:t>
-            </a:r>
-            <a:endParaRPr lang="en-US"/>
-          </a:p>
-        </p:txBody>
-      </p:sp>
-      <p:sp>
-        <p:nvSpPr>
-          <p:cNvPr id="12" name="work-rail"/>
-          <p:cNvSpPr/>
-          <p:nvPr/>
-        </p:nvSpPr>
-        <p:spPr>
-          <a:xfrm xmlns:a="http://schemas.openxmlformats.org/drawingml/2006/main">
-            <a:off x="10001250" y="3333750"/>
-            <a:ext cx="0" cy="2381250"/>
-          </a:xfrm>
-          <a:prstGeom xmlns:a="http://schemas.openxmlformats.org/drawingml/2006/main" prst="line">
-            <a:avLst/>
-          </a:prstGeom>
-          <a:noFill xmlns:a="http://schemas.openxmlformats.org/drawingml/2006/main"/>
-          <a:ln xmlns:a="http://schemas.openxmlformats.org/drawingml/2006/main" w="25400">
-            <a:solidFill>
-              <a:srgbClr val="93959C"/>
-            </a:solidFill>
-            <a:prstDash val="solid"/>
-          </a:ln>
-        </p:spPr>
-        <p:txBody>
-          <a:bodyPr xmlns:a="http://schemas.openxmlformats.org/drawingml/2006/main" wrap="square" lIns="0" tIns="0" rIns="0" bIns="0" anchor="t"/>
-          <a:lstStyle xmlns:a="http://schemas.openxmlformats.org/drawingml/2006/main"/>
-          <a:p xmlns:a="http://schemas.openxmlformats.org/drawingml/2006/main">
-            <a:r>
-              <a:rPr lang="en-US"/>
-              <a:t/>
-            </a:r>
-            <a:endParaRPr lang="en-US"/>
-          </a:p>
-        </p:txBody>
-      </p:sp>
-      <p:sp>
-        <p:nvSpPr>
-          <p:cNvPr id="13" name="work-num-0"/>
-          <p:cNvSpPr txBox="1"/>
-          <p:nvPr/>
-        </p:nvSpPr>
-        <p:spPr>
-          <a:xfrm xmlns:a="http://schemas.openxmlformats.org/drawingml/2006/main">
-            <a:off x="10477500" y="3448050"/>
-            <a:ext cx="571500" cy="228600"/>
-          </a:xfrm>
-          <a:prstGeom xmlns:a="http://schemas.openxmlformats.org/drawingml/2006/main" prst="rect">
-            <a:avLst/>
-          </a:prstGeom>
-          <a:noFill xmlns:a="http://schemas.openxmlformats.org/drawingml/2006/main"/>
-          <a:ln xmlns:a="http://schemas.openxmlformats.org/drawingml/2006/main" w="0">
-            <a:noFill/>
-          </a:ln>
-        </p:spPr>
-        <p:txBody>
-          <a:bodyPr xmlns:a="http://schemas.openxmlformats.org/drawingml/2006/main" wrap="square" lIns="0" tIns="0" rIns="0" bIns="0" anchor="t"/>
-          <a:lstStyle xmlns:a="http://schemas.openxmlformats.org/drawingml/2006/main"/>
-          <a:p xmlns:a="http://schemas.openxmlformats.org/drawingml/2006/main">
-            <a:r>
-              <a:rPr lang="en-US" sz="1350" b="1">
-                <a:solidFill>
-                  <a:srgbClr val="8B6BE8"/>
-                </a:solidFill>
-                <a:latin typeface="Arial"/>
-                <a:ea typeface="Arial"/>
-              </a:rPr>
-              <a:t>01</a:t>
-            </a:r>
-            <a:endParaRPr lang="en-US"/>
-          </a:p>
-        </p:txBody>
-      </p:sp>
-      <p:sp>
-        <p:nvSpPr>
-          <p:cNvPr id="14" name="work-label-0"/>
-          <p:cNvSpPr txBox="1"/>
-          <p:nvPr/>
-        </p:nvSpPr>
-        <p:spPr>
-          <a:xfrm xmlns:a="http://schemas.openxmlformats.org/drawingml/2006/main">
-            <a:off x="11144250" y="3448050"/>
-            <a:ext cx="1428750" cy="228600"/>
-          </a:xfrm>
-          <a:prstGeom xmlns:a="http://schemas.openxmlformats.org/drawingml/2006/main" prst="rect">
-            <a:avLst/>
-          </a:prstGeom>
-          <a:noFill xmlns:a="http://schemas.openxmlformats.org/drawingml/2006/main"/>
-          <a:ln xmlns:a="http://schemas.openxmlformats.org/drawingml/2006/main" w="0">
-            <a:noFill/>
-          </a:ln>
-        </p:spPr>
-        <p:txBody>
-          <a:bodyPr xmlns:a="http://schemas.openxmlformats.org/drawingml/2006/main" wrap="square" lIns="0" tIns="0" rIns="0" bIns="0" anchor="t"/>
-          <a:lstStyle xmlns:a="http://schemas.openxmlformats.org/drawingml/2006/main"/>
-          <a:p xmlns:a="http://schemas.openxmlformats.org/drawingml/2006/main">
-            <a:r>
-              <a:rPr lang="en-US" sz="1350" b="1">
-                <a:solidFill>
-                  <a:srgbClr val="1D2330"/>
-                </a:solidFill>
-                <a:latin typeface="Arial"/>
-                <a:ea typeface="Arial"/>
-              </a:rPr>
-              <a:t>Queue</a:t>
-            </a:r>
-            <a:endParaRPr lang="en-US"/>
-          </a:p>
-        </p:txBody>
-      </p:sp>
-      <p:sp>
-        <p:nvSpPr>
-          <p:cNvPr id="15" name="work-text-0"/>
-          <p:cNvSpPr txBox="1"/>
-          <p:nvPr/>
-        </p:nvSpPr>
-        <p:spPr>
-          <a:xfrm xmlns:a="http://schemas.openxmlformats.org/drawingml/2006/main">
-            <a:off x="12668250" y="3448050"/>
-            <a:ext cx="1143000" cy="228600"/>
-          </a:xfrm>
-          <a:prstGeom xmlns:a="http://schemas.openxmlformats.org/drawingml/2006/main" prst="rect">
-            <a:avLst/>
-          </a:prstGeom>
-          <a:noFill xmlns:a="http://schemas.openxmlformats.org/drawingml/2006/main"/>
-          <a:ln xmlns:a="http://schemas.openxmlformats.org/drawingml/2006/main" w="0">
-            <a:noFill/>
-          </a:ln>
-        </p:spPr>
-        <p:txBody>
-          <a:bodyPr xmlns:a="http://schemas.openxmlformats.org/drawingml/2006/main" wrap="square" lIns="0" tIns="0" rIns="0" bIns="0" anchor="t"/>
-          <a:lstStyle xmlns:a="http://schemas.openxmlformats.org/drawingml/2006/main"/>
-          <a:p xmlns:a="http://schemas.openxmlformats.org/drawingml/2006/main">
-            <a:r>
-              <a:rPr lang="en-US" sz="1200">
-                <a:solidFill>
-                  <a:srgbClr val="93959C"/>
-                </a:solidFill>
-                <a:latin typeface="Arial"/>
-                <a:ea typeface="Arial"/>
-              </a:rPr>
-              <a:t>On target</a:t>
-            </a:r>
-            <a:endParaRPr lang="en-US"/>
-          </a:p>
-        </p:txBody>
-      </p:sp>
-      <p:sp>
-        <p:nvSpPr>
-          <p:cNvPr id="16" name="work-num-1"/>
-          <p:cNvSpPr txBox="1"/>
-          <p:nvPr/>
-        </p:nvSpPr>
-        <p:spPr>
-          <a:xfrm xmlns:a="http://schemas.openxmlformats.org/drawingml/2006/main">
-            <a:off x="10477500" y="4229100"/>
-            <a:ext cx="571500" cy="228600"/>
-          </a:xfrm>
-          <a:prstGeom xmlns:a="http://schemas.openxmlformats.org/drawingml/2006/main" prst="rect">
-            <a:avLst/>
-          </a:prstGeom>
-          <a:noFill xmlns:a="http://schemas.openxmlformats.org/drawingml/2006/main"/>
-          <a:ln xmlns:a="http://schemas.openxmlformats.org/drawingml/2006/main" w="0">
-            <a:noFill/>
-          </a:ln>
-        </p:spPr>
-        <p:txBody>
-          <a:bodyPr xmlns:a="http://schemas.openxmlformats.org/drawingml/2006/main" wrap="square" lIns="0" tIns="0" rIns="0" bIns="0" anchor="t"/>
-          <a:lstStyle xmlns:a="http://schemas.openxmlformats.org/drawingml/2006/main"/>
-          <a:p xmlns:a="http://schemas.openxmlformats.org/drawingml/2006/main">
-            <a:r>
-              <a:rPr lang="en-US" sz="1350" b="1">
-                <a:solidFill>
-                  <a:srgbClr val="8B6BE8"/>
-                </a:solidFill>
-                <a:latin typeface="Arial"/>
-                <a:ea typeface="Arial"/>
-              </a:rPr>
-              <a:t>02</a:t>
-            </a:r>
-            <a:endParaRPr lang="en-US"/>
-          </a:p>
-        </p:txBody>
-      </p:sp>
-      <p:sp>
-        <p:nvSpPr>
-          <p:cNvPr id="17" name="work-label-1"/>
-          <p:cNvSpPr txBox="1"/>
-          <p:nvPr/>
-        </p:nvSpPr>
-        <p:spPr>
-          <a:xfrm xmlns:a="http://schemas.openxmlformats.org/drawingml/2006/main">
-            <a:off x="11144250" y="4229100"/>
-            <a:ext cx="1428750" cy="228600"/>
-          </a:xfrm>
-          <a:prstGeom xmlns:a="http://schemas.openxmlformats.org/drawingml/2006/main" prst="rect">
-            <a:avLst/>
-          </a:prstGeom>
-          <a:noFill xmlns:a="http://schemas.openxmlformats.org/drawingml/2006/main"/>
-          <a:ln xmlns:a="http://schemas.openxmlformats.org/drawingml/2006/main" w="0">
-            <a:noFill/>
-          </a:ln>
-        </p:spPr>
-        <p:txBody>
-          <a:bodyPr xmlns:a="http://schemas.openxmlformats.org/drawingml/2006/main" wrap="square" lIns="0" tIns="0" rIns="0" bIns="0" anchor="t"/>
-          <a:lstStyle xmlns:a="http://schemas.openxmlformats.org/drawingml/2006/main"/>
-          <a:p xmlns:a="http://schemas.openxmlformats.org/drawingml/2006/main">
-            <a:r>
-              <a:rPr lang="en-US" sz="1350" b="1">
-                <a:solidFill>
-                  <a:srgbClr val="1D2330"/>
-                </a:solidFill>
-                <a:latin typeface="Arial"/>
-                <a:ea typeface="Arial"/>
-              </a:rPr>
-              <a:t>Handoff</a:t>
-            </a:r>
-            <a:endParaRPr lang="en-US"/>
-          </a:p>
-        </p:txBody>
-      </p:sp>
-      <p:sp>
-        <p:nvSpPr>
-          <p:cNvPr id="18" name="work-text-1"/>
-          <p:cNvSpPr txBox="1"/>
-          <p:nvPr/>
-        </p:nvSpPr>
-        <p:spPr>
-          <a:xfrm xmlns:a="http://schemas.openxmlformats.org/drawingml/2006/main">
-            <a:off x="12668250" y="4229100"/>
-            <a:ext cx="1143000" cy="228600"/>
-          </a:xfrm>
-          <a:prstGeom xmlns:a="http://schemas.openxmlformats.org/drawingml/2006/main" prst="rect">
-            <a:avLst/>
-          </a:prstGeom>
-          <a:noFill xmlns:a="http://schemas.openxmlformats.org/drawingml/2006/main"/>
-          <a:ln xmlns:a="http://schemas.openxmlformats.org/drawingml/2006/main" w="0">
-            <a:noFill/>
-          </a:ln>
-        </p:spPr>
-        <p:txBody>
-          <a:bodyPr xmlns:a="http://schemas.openxmlformats.org/drawingml/2006/main" wrap="square" lIns="0" tIns="0" rIns="0" bIns="0" anchor="t"/>
-          <a:lstStyle xmlns:a="http://schemas.openxmlformats.org/drawingml/2006/main"/>
-          <a:p xmlns:a="http://schemas.openxmlformats.org/drawingml/2006/main">
-            <a:r>
-              <a:rPr lang="en-US" sz="1200">
-                <a:solidFill>
-                  <a:srgbClr val="8B6BE8"/>
-                </a:solidFill>
-                <a:latin typeface="Arial"/>
-                <a:ea typeface="Arial"/>
-              </a:rPr>
-              <a:t>At risk</a:t>
-            </a:r>
-            <a:endParaRPr lang="en-US"/>
-          </a:p>
-        </p:txBody>
-      </p:sp>
-      <p:sp>
-        <p:nvSpPr>
-          <p:cNvPr id="19" name="work-num-2"/>
-          <p:cNvSpPr txBox="1"/>
-          <p:nvPr/>
-        </p:nvSpPr>
-        <p:spPr>
-          <a:xfrm xmlns:a="http://schemas.openxmlformats.org/drawingml/2006/main">
-            <a:off x="10477500" y="5010150"/>
-            <a:ext cx="571500" cy="228600"/>
-          </a:xfrm>
-          <a:prstGeom xmlns:a="http://schemas.openxmlformats.org/drawingml/2006/main" prst="rect">
-            <a:avLst/>
-          </a:prstGeom>
-          <a:noFill xmlns:a="http://schemas.openxmlformats.org/drawingml/2006/main"/>
-          <a:ln xmlns:a="http://schemas.openxmlformats.org/drawingml/2006/main" w="0">
-            <a:noFill/>
-          </a:ln>
-        </p:spPr>
-        <p:txBody>
-          <a:bodyPr xmlns:a="http://schemas.openxmlformats.org/drawingml/2006/main" wrap="square" lIns="0" tIns="0" rIns="0" bIns="0" anchor="t"/>
-          <a:lstStyle xmlns:a="http://schemas.openxmlformats.org/drawingml/2006/main"/>
-          <a:p xmlns:a="http://schemas.openxmlformats.org/drawingml/2006/main">
-            <a:r>
-              <a:rPr lang="en-US" sz="1350" b="1">
-                <a:solidFill>
-                  <a:srgbClr val="8B6BE8"/>
-                </a:solidFill>
-                <a:latin typeface="Arial"/>
-                <a:ea typeface="Arial"/>
-              </a:rPr>
-              <a:t>03</a:t>
-            </a:r>
-            <a:endParaRPr lang="en-US"/>
-          </a:p>
-        </p:txBody>
-      </p:sp>
-      <p:sp>
-        <p:nvSpPr>
-          <p:cNvPr id="20" name="work-label-2"/>
-          <p:cNvSpPr txBox="1"/>
-          <p:nvPr/>
-        </p:nvSpPr>
-        <p:spPr>
-          <a:xfrm xmlns:a="http://schemas.openxmlformats.org/drawingml/2006/main">
-            <a:off x="11144250" y="5010150"/>
-            <a:ext cx="1428750" cy="228600"/>
-          </a:xfrm>
-          <a:prstGeom xmlns:a="http://schemas.openxmlformats.org/drawingml/2006/main" prst="rect">
-            <a:avLst/>
-          </a:prstGeom>
-          <a:noFill xmlns:a="http://schemas.openxmlformats.org/drawingml/2006/main"/>
-          <a:ln xmlns:a="http://schemas.openxmlformats.org/drawingml/2006/main" w="0">
-            <a:noFill/>
-          </a:ln>
-        </p:spPr>
-        <p:txBody>
-          <a:bodyPr xmlns:a="http://schemas.openxmlformats.org/drawingml/2006/main" wrap="square" lIns="0" tIns="0" rIns="0" bIns="0" anchor="t"/>
-          <a:lstStyle xmlns:a="http://schemas.openxmlformats.org/drawingml/2006/main"/>
-          <a:p xmlns:a="http://schemas.openxmlformats.org/drawingml/2006/main">
-            <a:r>
-              <a:rPr lang="en-US" sz="1350" b="1">
-                <a:solidFill>
-                  <a:srgbClr val="1D2330"/>
-                </a:solidFill>
-                <a:latin typeface="Arial"/>
-                <a:ea typeface="Arial"/>
-              </a:rPr>
-              <a:t>Owner</a:t>
-            </a:r>
-            <a:endParaRPr lang="en-US"/>
-          </a:p>
-        </p:txBody>
-      </p:sp>
-      <p:sp>
-        <p:nvSpPr>
-          <p:cNvPr id="21" name="work-text-2"/>
-          <p:cNvSpPr txBox="1"/>
-          <p:nvPr/>
-        </p:nvSpPr>
-        <p:spPr>
-          <a:xfrm xmlns:a="http://schemas.openxmlformats.org/drawingml/2006/main">
-            <a:off x="12668250" y="5010150"/>
-            <a:ext cx="1143000" cy="228600"/>
-          </a:xfrm>
-          <a:prstGeom xmlns:a="http://schemas.openxmlformats.org/drawingml/2006/main" prst="rect">
-            <a:avLst/>
-          </a:prstGeom>
-          <a:noFill xmlns:a="http://schemas.openxmlformats.org/drawingml/2006/main"/>
-          <a:ln xmlns:a="http://schemas.openxmlformats.org/drawingml/2006/main" w="0">
-            <a:noFill/>
-          </a:ln>
-        </p:spPr>
-        <p:txBody>
-          <a:bodyPr xmlns:a="http://schemas.openxmlformats.org/drawingml/2006/main" wrap="square" lIns="0" tIns="0" rIns="0" bIns="0" anchor="t"/>
-          <a:lstStyle xmlns:a="http://schemas.openxmlformats.org/drawingml/2006/main"/>
-          <a:p xmlns:a="http://schemas.openxmlformats.org/drawingml/2006/main">
-            <a:r>
-              <a:rPr lang="en-US" sz="1200">
-                <a:solidFill>
-                  <a:srgbClr val="93959C"/>
-                </a:solidFill>
-                <a:latin typeface="Arial"/>
-                <a:ea typeface="Arial"/>
-              </a:rPr>
-              <a:t>Named</a:t>
-            </a:r>
-            <a:endParaRPr lang="en-US"/>
-          </a:p>
-        </p:txBody>
-      </p:sp>
-      <p:sp>
-        <p:nvSpPr>
-          <p:cNvPr id="22" name="source"/>
-          <p:cNvSpPr txBox="1"/>
-          <p:nvPr/>
-        </p:nvSpPr>
-        <p:spPr>
-          <a:xfrm xmlns:a="http://schemas.openxmlformats.org/drawingml/2006/main">
-            <a:off x="914400" y="7810500"/>
-            <a:ext cx="10953750" cy="209550"/>
-          </a:xfrm>
-          <a:prstGeom xmlns:a="http://schemas.openxmlformats.org/drawingml/2006/main" prst="rect">
-            <a:avLst/>
-          </a:prstGeom>
-          <a:noFill xmlns:a="http://schemas.openxmlformats.org/drawingml/2006/main"/>
-          <a:ln xmlns:a="http://schemas.openxmlformats.org/drawingml/2006/main" w="0">
-            <a:noFill/>
-          </a:ln>
-        </p:spPr>
-        <p:txBody>
-          <a:bodyPr xmlns:a="http://schemas.openxmlformats.org/drawingml/2006/main" wrap="square" lIns="0" tIns="0" rIns="0" bIns="0" anchor="t"/>
-          <a:lstStyle xmlns:a="http://schemas.openxmlformats.org/drawingml/2006/main"/>
-          <a:p xmlns:a="http://schemas.openxmlformats.org/drawingml/2006/main">
-            <a:r>
-              <a:rPr lang="en-US" sz="1050">
-                <a:solidFill>
-                  <a:srgbClr val="93959C"/>
-                </a:solidFill>
-                <a:latin typeface="Arial"/>
-                <a:ea typeface="Arial"/>
-              </a:rPr>
-              <a:t>Source: illustrative calibration brief · every claim is fictional and bounded</a:t>
-            </a:r>
-            <a:endParaRPr lang="en-US"/>
-          </a:p>
-        </p:txBody>
-      </p:sp>
-      <p:sp>
-        <p:nvSpPr>
-          <p:cNvPr id="23" name="page-number"/>
-          <p:cNvSpPr txBox="1"/>
-          <p:nvPr/>
-        </p:nvSpPr>
-        <p:spPr>
-          <a:xfrm xmlns:a="http://schemas.openxmlformats.org/drawingml/2006/main">
-            <a:off x="13335000" y="7810500"/>
-            <a:ext cx="952500" cy="209550"/>
-          </a:xfrm>
-          <a:prstGeom xmlns:a="http://schemas.openxmlformats.org/drawingml/2006/main" prst="rect">
-            <a:avLst/>
-          </a:prstGeom>
-          <a:noFill xmlns:a="http://schemas.openxmlformats.org/drawingml/2006/main"/>
-          <a:ln xmlns:a="http://schemas.openxmlformats.org/drawingml/2006/main" w="0">
-            <a:noFill/>
-          </a:ln>
-        </p:spPr>
-        <p:txBody>
-          <a:bodyPr xmlns:a="http://schemas.openxmlformats.org/drawingml/2006/main" wrap="square" lIns="0" tIns="0" rIns="0" bIns="0" anchor="t"/>
-          <a:lstStyle xmlns:a="http://schemas.openxmlformats.org/drawingml/2006/main"/>
-          <a:p xmlns:a="http://schemas.openxmlformats.org/drawingml/2006/main">
-            <a:pPr algn="r"/>
-            <a:r>
-              <a:rPr lang="en-US" sz="1050">
-                <a:solidFill>
-                  <a:srgbClr val="93959C"/>
-                </a:solidFill>
-                <a:latin typeface="Arial"/>
-                <a:ea typeface="Arial"/>
-              </a:rPr>
-              <a:t>2 / 6</a:t>
-            </a:r>
-            <a:endParaRPr lang="en-US"/>
-          </a:p>
-        </p:txBody>
-      </p:sp>
-    </p:spTree>
-  </p:cSld>
-  <p:clrMapOvr>
-    <a:masterClrMapping xmlns:a="http://schemas.openxmlformats.org/drawingml/2006/main"/>
-  </p:clrMapOvr>
-</p:sld>
-</file>
-
-<file path=ppt/slides/slide3.xml><?xml version="1.0" encoding="utf-8"?>
-<p:sld xmlns:p="http://schemas.openxmlformats.org/presentationml/2006/main">
-  <p:cSld name="Evidence">
-    <p:bg>
-      <p:bgPr>
-        <a:blipFill xmlns:a="http://schemas.openxmlformats.org/drawingml/2006/main">
-          <a:blip xmlns:r="http://schemas.openxmlformats.org/officeDocument/2006/relationships" r:embed="rIdOfficeKitImagee4bd683f73b7a543_1"/>
-          <a:stretch>
-            <a:fillRect/>
-          </a:stretch>
-        </a:blipFill>
-      </p:bgPr>
-    </p:bg>
-    <p:spTree>
-      <p:nvGrpSpPr>
-        <p:cNvPr id="1" name=""/>
-        <p:cNvGrpSpPr/>
-        <p:nvPr/>
-      </p:nvGrpSpPr>
-      <p:grpSpPr>
-        <a:xfrm xmlns:a="http://schemas.openxmlformats.org/drawingml/2006/main">
-          <a:off x="0" y="0"/>
-          <a:ext cx="0" cy="0"/>
-          <a:chOff x="0" y="0"/>
-          <a:chExt cx="0" cy="0"/>
-        </a:xfrm>
-      </p:grpSpPr>
-      <p:sp>
-        <p:nvSpPr>
           <p:cNvPr id="2" name="evidence-paper-scrim"/>
           <p:cNvSpPr/>
           <p:nvPr/>
@@ -2189,7 +2189,7 @@
           <p:nvPr/>
         </p:nvPicPr>
         <p:blipFill>
-          <a:blip xmlns:r="http://schemas.openxmlformats.org/officeDocument/2006/relationships" xmlns:a="http://schemas.openxmlformats.org/drawingml/2006/main" r:embed="rIdOfficeKitImagee4bd683f73b7a543_1"/>
+          <a:blip xmlns:r="http://schemas.openxmlformats.org/officeDocument/2006/relationships" xmlns:a="http://schemas.openxmlformats.org/drawingml/2006/main" r:embed="rIdOfficeKitImagec237998db8bee20d_1"/>
           <a:srcRect xmlns:a="http://schemas.openxmlformats.org/drawingml/2006/main" l="0" t="47256" r="0" b="47256"/>
           <a:stretch xmlns:a="http://schemas.openxmlformats.org/drawingml/2006/main">
             <a:fillRect/>
@@ -2440,7 +2440,7 @@
         </p:xfrm>
         <a:graphic xmlns:a="http://schemas.openxmlformats.org/drawingml/2006/main">
           <a:graphicData uri="http://schemas.openxmlformats.org/drawingml/2006/chart">
-            <c:chart xmlns:r="http://schemas.openxmlformats.org/officeDocument/2006/relationships" xmlns:c="http://schemas.openxmlformats.org/drawingml/2006/chart" r:id="Rd9e8d84f27324285"/>
+            <c:chart xmlns:r="http://schemas.openxmlformats.org/officeDocument/2006/relationships" xmlns:c="http://schemas.openxmlformats.org/drawingml/2006/chart" r:id="R58a8bce28ad34aab"/>
           </a:graphicData>
         </a:graphic>
       </p:graphicFrame>
@@ -2458,7 +2458,7 @@
         </p:xfrm>
         <a:graphic xmlns:a="http://schemas.openxmlformats.org/drawingml/2006/main">
           <a:graphicData uri="http://schemas.openxmlformats.org/drawingml/2006/chart">
-            <c:chart xmlns:r="http://schemas.openxmlformats.org/officeDocument/2006/relationships" xmlns:c="http://schemas.openxmlformats.org/drawingml/2006/chart" r:id="Rd957ba775f0c4a80"/>
+            <c:chart xmlns:r="http://schemas.openxmlformats.org/officeDocument/2006/relationships" xmlns:c="http://schemas.openxmlformats.org/drawingml/2006/chart" r:id="R041090ee63a74a3f"/>
           </a:graphicData>
         </a:graphic>
       </p:graphicFrame>
@@ -2829,8 +2829,8 @@
           <p:nvPr/>
         </p:nvPicPr>
         <p:blipFill>
-          <a:blip xmlns:r="http://schemas.openxmlformats.org/officeDocument/2006/relationships" xmlns:a="http://schemas.openxmlformats.org/drawingml/2006/main" r:embed="rIdOfficeKitImage59ee3aa5202fd02f_1"/>
-          <a:srcRect xmlns:a="http://schemas.openxmlformats.org/drawingml/2006/main" l="0" t="47258" r="0" b="47258"/>
+          <a:blip xmlns:r="http://schemas.openxmlformats.org/officeDocument/2006/relationships" xmlns:a="http://schemas.openxmlformats.org/drawingml/2006/main" r:embed="rIdOfficeKitImage2930549abca3ae00_1"/>
+          <a:srcRect xmlns:a="http://schemas.openxmlformats.org/drawingml/2006/main" l="0" t="47256" r="0" b="47256"/>
           <a:stretch xmlns:a="http://schemas.openxmlformats.org/drawingml/2006/main">
             <a:fillRect/>
           </a:stretch>
@@ -3737,7 +3737,7 @@
     <p:bg>
       <p:bgPr>
         <a:blipFill xmlns:a="http://schemas.openxmlformats.org/drawingml/2006/main">
-          <a:blip xmlns:r="http://schemas.openxmlformats.org/officeDocument/2006/relationships" r:embed="rIdOfficeKitImagec7b73f8fac405495_1"/>
+          <a:blip xmlns:r="http://schemas.openxmlformats.org/officeDocument/2006/relationships" r:embed="rIdOfficeKitImage6af8c9b5dff6e3a3_1"/>
           <a:stretch>
             <a:fillRect/>
           </a:stretch>
@@ -4067,7 +4067,7 @@
     <p:bg>
       <p:bgPr>
         <a:blipFill xmlns:a="http://schemas.openxmlformats.org/drawingml/2006/main">
-          <a:blip xmlns:r="http://schemas.openxmlformats.org/officeDocument/2006/relationships" r:embed="rIdOfficeKitImaged71bfa074cda59bb_1"/>
+          <a:blip xmlns:r="http://schemas.openxmlformats.org/officeDocument/2006/relationships" r:embed="rIdOfficeKitImage7650495d0c3b8602_1"/>
           <a:stretch>
             <a:fillRect/>
           </a:stretch>
@@ -4139,8 +4139,8 @@
           <p:nvPr/>
         </p:nvPicPr>
         <p:blipFill>
-          <a:blip xmlns:r="http://schemas.openxmlformats.org/officeDocument/2006/relationships" xmlns:a="http://schemas.openxmlformats.org/drawingml/2006/main" r:embed="rIdOfficeKitImaged71bfa074cda59bb_1"/>
-          <a:srcRect xmlns:a="http://schemas.openxmlformats.org/drawingml/2006/main" l="0" t="47258" r="0" b="47258"/>
+          <a:blip xmlns:r="http://schemas.openxmlformats.org/officeDocument/2006/relationships" xmlns:a="http://schemas.openxmlformats.org/drawingml/2006/main" r:embed="rIdOfficeKitImagee4bd683f73b7a543_1"/>
+          <a:srcRect xmlns:a="http://schemas.openxmlformats.org/drawingml/2006/main" l="0" t="47256" r="0" b="47256"/>
           <a:stretch xmlns:a="http://schemas.openxmlformats.org/drawingml/2006/main">
             <a:fillRect/>
           </a:stretch>

--- a/skills/presentation-template-library/skills/artifact-template-moonlit-work-report/assets/reference.pptx
+++ b/skills/presentation-template-library/skills/artifact-template-moonlit-work-report/assets/reference.pptx
@@ -484,7 +484,7 @@
     <p:bg>
       <p:bgPr>
         <a:blipFill xmlns:a="http://schemas.openxmlformats.org/drawingml/2006/main">
-          <a:blip xmlns:r="http://schemas.openxmlformats.org/officeDocument/2006/relationships" r:embed="rIdOfficeKitImage33b8c33a8fc3d613_1"/>
+          <a:blip xmlns:r="http://schemas.openxmlformats.org/officeDocument/2006/relationships" r:embed="rIdOfficeKitImage026be3a43029630d_1"/>
           <a:stretch>
             <a:fillRect/>
           </a:stretch>
@@ -1279,7 +1279,7 @@
     <p:bg>
       <p:bgPr>
         <a:blipFill xmlns:a="http://schemas.openxmlformats.org/drawingml/2006/main">
-          <a:blip xmlns:r="http://schemas.openxmlformats.org/officeDocument/2006/relationships" r:embed="rIdOfficeKitImageb7d7d39d00e5a7e4_1"/>
+          <a:blip xmlns:r="http://schemas.openxmlformats.org/officeDocument/2006/relationships" r:embed="rIdOfficeKitImaged71bfa074cda59bb_1"/>
           <a:stretch>
             <a:fillRect/>
           </a:stretch>
@@ -1351,7 +1351,7 @@
           <p:nvPr/>
         </p:nvPicPr>
         <p:blipFill>
-          <a:blip xmlns:r="http://schemas.openxmlformats.org/officeDocument/2006/relationships" xmlns:a="http://schemas.openxmlformats.org/drawingml/2006/main" r:embed="rIdOfficeKitImageaeb6f74d36d260d0_1"/>
+          <a:blip xmlns:r="http://schemas.openxmlformats.org/officeDocument/2006/relationships" xmlns:a="http://schemas.openxmlformats.org/drawingml/2006/main" r:embed="rIdOfficeKitImage59ee3aa5202fd02f_1"/>
           <a:srcRect xmlns:a="http://schemas.openxmlformats.org/drawingml/2006/main" l="0" t="47258" r="0" b="47258"/>
           <a:stretch xmlns:a="http://schemas.openxmlformats.org/drawingml/2006/main">
             <a:fillRect/>
@@ -2117,7 +2117,7 @@
     <p:bg>
       <p:bgPr>
         <a:blipFill xmlns:a="http://schemas.openxmlformats.org/drawingml/2006/main">
-          <a:blip xmlns:r="http://schemas.openxmlformats.org/officeDocument/2006/relationships" r:embed="rIdOfficeKitImage8fbc298f8d1b7a3c_1"/>
+          <a:blip xmlns:r="http://schemas.openxmlformats.org/officeDocument/2006/relationships" r:embed="rIdOfficeKitImage083106afebc7d419_1"/>
           <a:stretch>
             <a:fillRect/>
           </a:stretch>
@@ -2189,8 +2189,8 @@
           <p:nvPr/>
         </p:nvPicPr>
         <p:blipFill>
-          <a:blip xmlns:r="http://schemas.openxmlformats.org/officeDocument/2006/relationships" xmlns:a="http://schemas.openxmlformats.org/drawingml/2006/main" r:embed="rIdOfficeKitImagec237998db8bee20d_1"/>
-          <a:srcRect xmlns:a="http://schemas.openxmlformats.org/drawingml/2006/main" l="0" t="47256" r="0" b="47256"/>
+          <a:blip xmlns:r="http://schemas.openxmlformats.org/officeDocument/2006/relationships" xmlns:a="http://schemas.openxmlformats.org/drawingml/2006/main" r:embed="rIdOfficeKitImage56df3e49f11f0ff0_1"/>
+          <a:srcRect xmlns:a="http://schemas.openxmlformats.org/drawingml/2006/main" l="0" t="47258" r="0" b="47258"/>
           <a:stretch xmlns:a="http://schemas.openxmlformats.org/drawingml/2006/main">
             <a:fillRect/>
           </a:stretch>
@@ -2440,7 +2440,7 @@
         </p:xfrm>
         <a:graphic xmlns:a="http://schemas.openxmlformats.org/drawingml/2006/main">
           <a:graphicData uri="http://schemas.openxmlformats.org/drawingml/2006/chart">
-            <c:chart xmlns:r="http://schemas.openxmlformats.org/officeDocument/2006/relationships" xmlns:c="http://schemas.openxmlformats.org/drawingml/2006/chart" r:id="R58a8bce28ad34aab"/>
+            <c:chart xmlns:r="http://schemas.openxmlformats.org/officeDocument/2006/relationships" xmlns:c="http://schemas.openxmlformats.org/drawingml/2006/chart" r:id="R4a5ea4ab2a1942d4"/>
           </a:graphicData>
         </a:graphic>
       </p:graphicFrame>
@@ -2458,7 +2458,7 @@
         </p:xfrm>
         <a:graphic xmlns:a="http://schemas.openxmlformats.org/drawingml/2006/main">
           <a:graphicData uri="http://schemas.openxmlformats.org/drawingml/2006/chart">
-            <c:chart xmlns:r="http://schemas.openxmlformats.org/officeDocument/2006/relationships" xmlns:c="http://schemas.openxmlformats.org/drawingml/2006/chart" r:id="R041090ee63a74a3f"/>
+            <c:chart xmlns:r="http://schemas.openxmlformats.org/officeDocument/2006/relationships" xmlns:c="http://schemas.openxmlformats.org/drawingml/2006/chart" r:id="R2acc09127a7e480f"/>
           </a:graphicData>
         </a:graphic>
       </p:graphicFrame>
@@ -2829,8 +2829,8 @@
           <p:nvPr/>
         </p:nvPicPr>
         <p:blipFill>
-          <a:blip xmlns:r="http://schemas.openxmlformats.org/officeDocument/2006/relationships" xmlns:a="http://schemas.openxmlformats.org/drawingml/2006/main" r:embed="rIdOfficeKitImage2930549abca3ae00_1"/>
-          <a:srcRect xmlns:a="http://schemas.openxmlformats.org/drawingml/2006/main" l="0" t="47256" r="0" b="47256"/>
+          <a:blip xmlns:r="http://schemas.openxmlformats.org/officeDocument/2006/relationships" xmlns:a="http://schemas.openxmlformats.org/drawingml/2006/main" r:embed="rIdOfficeKitImage026be3a43029630d_1"/>
+          <a:srcRect xmlns:a="http://schemas.openxmlformats.org/drawingml/2006/main" l="0" t="47258" r="0" b="47258"/>
           <a:stretch xmlns:a="http://schemas.openxmlformats.org/drawingml/2006/main">
             <a:fillRect/>
           </a:stretch>
@@ -3737,7 +3737,7 @@
     <p:bg>
       <p:bgPr>
         <a:blipFill xmlns:a="http://schemas.openxmlformats.org/drawingml/2006/main">
-          <a:blip xmlns:r="http://schemas.openxmlformats.org/officeDocument/2006/relationships" r:embed="rIdOfficeKitImage6af8c9b5dff6e3a3_1"/>
+          <a:blip xmlns:r="http://schemas.openxmlformats.org/officeDocument/2006/relationships" r:embed="rIdOfficeKitImaged71bfa074cda59bb_1"/>
           <a:stretch>
             <a:fillRect/>
           </a:stretch>
@@ -4067,7 +4067,7 @@
     <p:bg>
       <p:bgPr>
         <a:blipFill xmlns:a="http://schemas.openxmlformats.org/drawingml/2006/main">
-          <a:blip xmlns:r="http://schemas.openxmlformats.org/officeDocument/2006/relationships" r:embed="rIdOfficeKitImage7650495d0c3b8602_1"/>
+          <a:blip xmlns:r="http://schemas.openxmlformats.org/officeDocument/2006/relationships" r:embed="rIdOfficeKitImage59ee3aa5202fd02f_1"/>
           <a:stretch>
             <a:fillRect/>
           </a:stretch>
@@ -4139,8 +4139,8 @@
           <p:nvPr/>
         </p:nvPicPr>
         <p:blipFill>
-          <a:blip xmlns:r="http://schemas.openxmlformats.org/officeDocument/2006/relationships" xmlns:a="http://schemas.openxmlformats.org/drawingml/2006/main" r:embed="rIdOfficeKitImagee4bd683f73b7a543_1"/>
-          <a:srcRect xmlns:a="http://schemas.openxmlformats.org/drawingml/2006/main" l="0" t="47256" r="0" b="47256"/>
+          <a:blip xmlns:r="http://schemas.openxmlformats.org/officeDocument/2006/relationships" xmlns:a="http://schemas.openxmlformats.org/drawingml/2006/main" r:embed="rIdOfficeKitImage083106afebc7d419_1"/>
+          <a:srcRect xmlns:a="http://schemas.openxmlformats.org/drawingml/2006/main" l="0" t="47258" r="0" b="47258"/>
           <a:stretch xmlns:a="http://schemas.openxmlformats.org/drawingml/2006/main">
             <a:fillRect/>
           </a:stretch>

--- a/skills/presentation-template-library/skills/artifact-template-moonlit-work-report/assets/reference.pptx
+++ b/skills/presentation-template-library/skills/artifact-template-moonlit-work-report/assets/reference.pptx
@@ -484,6 +484,801 @@
     <p:bg>
       <p:bgPr>
         <a:blipFill xmlns:a="http://schemas.openxmlformats.org/drawingml/2006/main">
+          <a:blip xmlns:r="http://schemas.openxmlformats.org/officeDocument/2006/relationships" r:embed="rIdOfficeKitImage56df3e49f11f0ff0_1"/>
+          <a:stretch>
+            <a:fillRect/>
+          </a:stretch>
+        </a:blipFill>
+      </p:bgPr>
+    </p:bg>
+    <p:spTree>
+      <p:nvGrpSpPr>
+        <p:cNvPr id="1" name=""/>
+        <p:cNvGrpSpPr/>
+        <p:nvPr/>
+      </p:nvGrpSpPr>
+      <p:grpSpPr>
+        <a:xfrm xmlns:a="http://schemas.openxmlformats.org/drawingml/2006/main">
+          <a:off x="0" y="0"/>
+          <a:ext cx="0" cy="0"/>
+          <a:chOff x="0" y="0"/>
+          <a:chExt cx="0" cy="0"/>
+        </a:xfrm>
+      </p:grpSpPr>
+      <p:sp>
+        <p:nvSpPr>
+          <p:cNvPr id="2" name="cover-paper-scrim"/>
+          <p:cNvSpPr/>
+          <p:nvPr/>
+        </p:nvSpPr>
+        <p:spPr>
+          <a:xfrm xmlns:a="http://schemas.openxmlformats.org/drawingml/2006/main">
+            <a:off x="0" y="0"/>
+            <a:ext cx="9525000" cy="8572500"/>
+          </a:xfrm>
+          <a:prstGeom xmlns:a="http://schemas.openxmlformats.org/drawingml/2006/main" prst="rect">
+            <a:avLst/>
+          </a:prstGeom>
+          <a:solidFill xmlns:a="http://schemas.openxmlformats.org/drawingml/2006/main">
+            <a:srgbClr val="FFFFFF">
+              <a:alpha val="100000"/>
+            </a:srgbClr>
+          </a:solidFill>
+          <a:ln xmlns:a="http://schemas.openxmlformats.org/drawingml/2006/main" w="0">
+            <a:solidFill>
+              <a:srgbClr val="FFFFFF"/>
+            </a:solidFill>
+            <a:prstDash val="solid"/>
+          </a:ln>
+        </p:spPr>
+        <p:txBody>
+          <a:bodyPr xmlns:a="http://schemas.openxmlformats.org/drawingml/2006/main" wrap="square" lIns="0" tIns="0" rIns="0" bIns="0" anchor="t"/>
+          <a:lstStyle xmlns:a="http://schemas.openxmlformats.org/drawingml/2006/main"/>
+          <a:p xmlns:a="http://schemas.openxmlformats.org/drawingml/2006/main">
+            <a:r>
+              <a:rPr lang="en-US"/>
+              <a:t/>
+            </a:r>
+            <a:endParaRPr lang="en-US"/>
+          </a:p>
+        </p:txBody>
+      </p:sp>
+      <p:sp>
+        <p:nvSpPr>
+          <p:cNvPr id="3" name="top-rule"/>
+          <p:cNvSpPr/>
+          <p:nvPr/>
+        </p:nvSpPr>
+        <p:spPr>
+          <a:xfrm xmlns:a="http://schemas.openxmlformats.org/drawingml/2006/main">
+            <a:off x="838200" y="666750"/>
+            <a:ext cx="13563600" cy="0"/>
+          </a:xfrm>
+          <a:prstGeom xmlns:a="http://schemas.openxmlformats.org/drawingml/2006/main" prst="line">
+            <a:avLst/>
+          </a:prstGeom>
+          <a:noFill xmlns:a="http://schemas.openxmlformats.org/drawingml/2006/main"/>
+          <a:ln xmlns:a="http://schemas.openxmlformats.org/drawingml/2006/main" w="38100">
+            <a:solidFill>
+              <a:srgbClr val="8B6BE8"/>
+            </a:solidFill>
+            <a:prstDash val="solid"/>
+          </a:ln>
+        </p:spPr>
+        <p:txBody>
+          <a:bodyPr xmlns:a="http://schemas.openxmlformats.org/drawingml/2006/main" wrap="square" lIns="0" tIns="0" rIns="0" bIns="0" anchor="t"/>
+          <a:lstStyle xmlns:a="http://schemas.openxmlformats.org/drawingml/2006/main"/>
+          <a:p xmlns:a="http://schemas.openxmlformats.org/drawingml/2006/main">
+            <a:r>
+              <a:rPr lang="en-US"/>
+              <a:t/>
+            </a:r>
+            <a:endParaRPr lang="en-US"/>
+          </a:p>
+        </p:txBody>
+      </p:sp>
+      <p:sp>
+        <p:nvSpPr>
+          <p:cNvPr id="4" name="eyebrow"/>
+          <p:cNvSpPr txBox="1"/>
+          <p:nvPr/>
+        </p:nvSpPr>
+        <p:spPr>
+          <a:xfrm xmlns:a="http://schemas.openxmlformats.org/drawingml/2006/main">
+            <a:off x="914400" y="895350"/>
+            <a:ext cx="7239000" cy="228600"/>
+          </a:xfrm>
+          <a:prstGeom xmlns:a="http://schemas.openxmlformats.org/drawingml/2006/main" prst="rect">
+            <a:avLst/>
+          </a:prstGeom>
+          <a:noFill xmlns:a="http://schemas.openxmlformats.org/drawingml/2006/main"/>
+          <a:ln xmlns:a="http://schemas.openxmlformats.org/drawingml/2006/main" w="0">
+            <a:noFill/>
+          </a:ln>
+        </p:spPr>
+        <p:txBody>
+          <a:bodyPr xmlns:a="http://schemas.openxmlformats.org/drawingml/2006/main" wrap="square" lIns="0" tIns="0" rIns="0" bIns="0" anchor="t"/>
+          <a:lstStyle xmlns:a="http://schemas.openxmlformats.org/drawingml/2006/main"/>
+          <a:p xmlns:a="http://schemas.openxmlformats.org/drawingml/2006/main">
+            <a:r>
+              <a:rPr lang="en-US" sz="1200" b="1">
+                <a:solidFill>
+                  <a:srgbClr val="8B6BE8"/>
+                </a:solidFill>
+                <a:latin typeface="Arial"/>
+                <a:ea typeface="Arial"/>
+              </a:rPr>
+              <a:t>WORK · OFFICEKIT CALIBRATION</a:t>
+            </a:r>
+            <a:endParaRPr lang="en-US"/>
+          </a:p>
+        </p:txBody>
+      </p:sp>
+      <p:sp>
+        <p:nvSpPr>
+          <p:cNvPr id="5" name="cover-title"/>
+          <p:cNvSpPr txBox="1"/>
+          <p:nvPr/>
+        </p:nvSpPr>
+        <p:spPr>
+          <a:xfrm xmlns:a="http://schemas.openxmlformats.org/drawingml/2006/main">
+            <a:off x="914400" y="1571625"/>
+            <a:ext cx="8382000" cy="1066800"/>
+          </a:xfrm>
+          <a:prstGeom xmlns:a="http://schemas.openxmlformats.org/drawingml/2006/main" prst="rect">
+            <a:avLst/>
+          </a:prstGeom>
+          <a:noFill xmlns:a="http://schemas.openxmlformats.org/drawingml/2006/main"/>
+          <a:ln xmlns:a="http://schemas.openxmlformats.org/drawingml/2006/main" w="0">
+            <a:noFill/>
+          </a:ln>
+        </p:spPr>
+        <p:txBody>
+          <a:bodyPr xmlns:a="http://schemas.openxmlformats.org/drawingml/2006/main" wrap="square" lIns="0" tIns="0" rIns="0" bIns="0" anchor="t"/>
+          <a:lstStyle xmlns:a="http://schemas.openxmlformats.org/drawingml/2006/main"/>
+          <a:p xmlns:a="http://schemas.openxmlformats.org/drawingml/2006/main">
+            <a:r>
+              <a:rPr lang="en-US" sz="3600" b="1">
+                <a:solidFill>
+                  <a:srgbClr val="1D2330"/>
+                </a:solidFill>
+                <a:latin typeface="Arial"/>
+                <a:ea typeface="Arial"/>
+              </a:rPr>
+              <a:t>Moonlit Work Report: a claim worth testing</a:t>
+            </a:r>
+            <a:endParaRPr lang="en-US"/>
+          </a:p>
+        </p:txBody>
+      </p:sp>
+      <p:sp>
+        <p:nvSpPr>
+          <p:cNvPr id="6" name="cover-subtitle"/>
+          <p:cNvSpPr txBox="1"/>
+          <p:nvPr/>
+        </p:nvSpPr>
+        <p:spPr>
+          <a:xfrm xmlns:a="http://schemas.openxmlformats.org/drawingml/2006/main">
+            <a:off x="952500" y="2857500"/>
+            <a:ext cx="6858000" cy="323850"/>
+          </a:xfrm>
+          <a:prstGeom xmlns:a="http://schemas.openxmlformats.org/drawingml/2006/main" prst="rect">
+            <a:avLst/>
+          </a:prstGeom>
+          <a:noFill xmlns:a="http://schemas.openxmlformats.org/drawingml/2006/main"/>
+          <a:ln xmlns:a="http://schemas.openxmlformats.org/drawingml/2006/main" w="0">
+            <a:noFill/>
+          </a:ln>
+        </p:spPr>
+        <p:txBody>
+          <a:bodyPr xmlns:a="http://schemas.openxmlformats.org/drawingml/2006/main" wrap="square" lIns="0" tIns="0" rIns="0" bIns="0" anchor="t"/>
+          <a:lstStyle xmlns:a="http://schemas.openxmlformats.org/drawingml/2006/main"/>
+          <a:p xmlns:a="http://schemas.openxmlformats.org/drawingml/2006/main">
+            <a:r>
+              <a:rPr lang="en-US" sz="1725">
+                <a:solidFill>
+                  <a:srgbClr val="8B6BE8"/>
+                </a:solidFill>
+                <a:latin typeface="Arial"/>
+                <a:ea typeface="Arial"/>
+              </a:rPr>
+              <a:t>A clean-room reference for evidence, direction, and a decision.</a:t>
+            </a:r>
+            <a:endParaRPr lang="en-US"/>
+          </a:p>
+        </p:txBody>
+      </p:sp>
+      <p:sp>
+        <p:nvSpPr>
+          <p:cNvPr id="7" name="cover-rule"/>
+          <p:cNvSpPr/>
+          <p:nvPr/>
+        </p:nvSpPr>
+        <p:spPr>
+          <a:xfrm xmlns:a="http://schemas.openxmlformats.org/drawingml/2006/main">
+            <a:off x="914400" y="3524250"/>
+            <a:ext cx="7658100" cy="0"/>
+          </a:xfrm>
+          <a:prstGeom xmlns:a="http://schemas.openxmlformats.org/drawingml/2006/main" prst="line">
+            <a:avLst/>
+          </a:prstGeom>
+          <a:noFill xmlns:a="http://schemas.openxmlformats.org/drawingml/2006/main"/>
+          <a:ln xmlns:a="http://schemas.openxmlformats.org/drawingml/2006/main" w="25400">
+            <a:solidFill>
+              <a:srgbClr val="93959C"/>
+            </a:solidFill>
+            <a:prstDash val="solid"/>
+          </a:ln>
+        </p:spPr>
+        <p:txBody>
+          <a:bodyPr xmlns:a="http://schemas.openxmlformats.org/drawingml/2006/main" wrap="square" lIns="0" tIns="0" rIns="0" bIns="0" anchor="t"/>
+          <a:lstStyle xmlns:a="http://schemas.openxmlformats.org/drawingml/2006/main"/>
+          <a:p xmlns:a="http://schemas.openxmlformats.org/drawingml/2006/main">
+            <a:r>
+              <a:rPr lang="en-US"/>
+              <a:t/>
+            </a:r>
+            <a:endParaRPr lang="en-US"/>
+          </a:p>
+        </p:txBody>
+      </p:sp>
+      <p:sp>
+        <p:nvSpPr>
+          <p:cNvPr id="8" name="cover-basis"/>
+          <p:cNvSpPr txBox="1"/>
+          <p:nvPr/>
+        </p:nvSpPr>
+        <p:spPr>
+          <a:xfrm xmlns:a="http://schemas.openxmlformats.org/drawingml/2006/main">
+            <a:off x="952500" y="3762375"/>
+            <a:ext cx="7810500" cy="266700"/>
+          </a:xfrm>
+          <a:prstGeom xmlns:a="http://schemas.openxmlformats.org/drawingml/2006/main" prst="rect">
+            <a:avLst/>
+          </a:prstGeom>
+          <a:noFill xmlns:a="http://schemas.openxmlformats.org/drawingml/2006/main"/>
+          <a:ln xmlns:a="http://schemas.openxmlformats.org/drawingml/2006/main" w="0">
+            <a:noFill/>
+          </a:ln>
+        </p:spPr>
+        <p:txBody>
+          <a:bodyPr xmlns:a="http://schemas.openxmlformats.org/drawingml/2006/main" wrap="square" lIns="0" tIns="0" rIns="0" bIns="0" anchor="t"/>
+          <a:lstStyle xmlns:a="http://schemas.openxmlformats.org/drawingml/2006/main"/>
+          <a:p xmlns:a="http://schemas.openxmlformats.org/drawingml/2006/main">
+            <a:r>
+              <a:rPr lang="en-US" sz="1350">
+                <a:solidFill>
+                  <a:srgbClr val="1D2330"/>
+                </a:solidFill>
+                <a:latin typeface="Arial"/>
+                <a:ea typeface="Arial"/>
+              </a:rPr>
+              <a:t>One visual language · four page roles · native editable objects</a:t>
+            </a:r>
+            <a:endParaRPr lang="en-US"/>
+          </a:p>
+        </p:txBody>
+      </p:sp>
+      <p:sp>
+        <p:nvSpPr>
+          <p:cNvPr id="9" name="cover-thesis"/>
+          <p:cNvSpPr txBox="1"/>
+          <p:nvPr/>
+        </p:nvSpPr>
+        <p:spPr>
+          <a:xfrm xmlns:a="http://schemas.openxmlformats.org/drawingml/2006/main">
+            <a:off x="952500" y="4810125"/>
+            <a:ext cx="6667500" cy="628650"/>
+          </a:xfrm>
+          <a:prstGeom xmlns:a="http://schemas.openxmlformats.org/drawingml/2006/main" prst="rect">
+            <a:avLst/>
+          </a:prstGeom>
+          <a:noFill xmlns:a="http://schemas.openxmlformats.org/drawingml/2006/main"/>
+          <a:ln xmlns:a="http://schemas.openxmlformats.org/drawingml/2006/main" w="0">
+            <a:noFill/>
+          </a:ln>
+        </p:spPr>
+        <p:txBody>
+          <a:bodyPr xmlns:a="http://schemas.openxmlformats.org/drawingml/2006/main" wrap="square" lIns="0" tIns="0" rIns="0" bIns="0" anchor="t"/>
+          <a:lstStyle xmlns:a="http://schemas.openxmlformats.org/drawingml/2006/main"/>
+          <a:p xmlns:a="http://schemas.openxmlformats.org/drawingml/2006/main">
+            <a:r>
+              <a:rPr lang="en-US" sz="1875" b="1">
+                <a:solidFill>
+                  <a:srgbClr val="1D2330"/>
+                </a:solidFill>
+                <a:latin typeface="Arial"/>
+                <a:ea typeface="Arial"/>
+              </a:rPr>
+              <a:t>A visible operating signal creates a shared next action.</a:t>
+            </a:r>
+            <a:endParaRPr lang="en-US"/>
+          </a:p>
+        </p:txBody>
+      </p:sp>
+      <p:sp>
+        <p:nvSpPr>
+          <p:cNvPr id="10" name="cover-source"/>
+          <p:cNvSpPr txBox="1"/>
+          <p:nvPr/>
+        </p:nvSpPr>
+        <p:spPr>
+          <a:xfrm xmlns:a="http://schemas.openxmlformats.org/drawingml/2006/main">
+            <a:off x="952500" y="7315200"/>
+            <a:ext cx="9048750" cy="228600"/>
+          </a:xfrm>
+          <a:prstGeom xmlns:a="http://schemas.openxmlformats.org/drawingml/2006/main" prst="rect">
+            <a:avLst/>
+          </a:prstGeom>
+          <a:noFill xmlns:a="http://schemas.openxmlformats.org/drawingml/2006/main"/>
+          <a:ln xmlns:a="http://schemas.openxmlformats.org/drawingml/2006/main" w="0">
+            <a:noFill/>
+          </a:ln>
+        </p:spPr>
+        <p:txBody>
+          <a:bodyPr xmlns:a="http://schemas.openxmlformats.org/drawingml/2006/main" wrap="square" lIns="0" tIns="0" rIns="0" bIns="0" anchor="t"/>
+          <a:lstStyle xmlns:a="http://schemas.openxmlformats.org/drawingml/2006/main"/>
+          <a:p xmlns:a="http://schemas.openxmlformats.org/drawingml/2006/main">
+            <a:r>
+              <a:rPr lang="en-US" sz="1050">
+                <a:solidFill>
+                  <a:srgbClr val="93959C"/>
+                </a:solidFill>
+                <a:latin typeface="Arial"/>
+                <a:ea typeface="Arial"/>
+              </a:rPr>
+              <a:t>OfficeKit original clean-room calibration · fictional content · 2026-08-29</a:t>
+            </a:r>
+            <a:endParaRPr lang="en-US"/>
+          </a:p>
+        </p:txBody>
+      </p:sp>
+      <p:sp>
+        <p:nvSpPr>
+          <p:cNvPr id="11" name="page-number"/>
+          <p:cNvSpPr txBox="1"/>
+          <p:nvPr/>
+        </p:nvSpPr>
+        <p:spPr>
+          <a:xfrm xmlns:a="http://schemas.openxmlformats.org/drawingml/2006/main">
+            <a:off x="13335000" y="7810500"/>
+            <a:ext cx="952500" cy="209550"/>
+          </a:xfrm>
+          <a:prstGeom xmlns:a="http://schemas.openxmlformats.org/drawingml/2006/main" prst="rect">
+            <a:avLst/>
+          </a:prstGeom>
+          <a:noFill xmlns:a="http://schemas.openxmlformats.org/drawingml/2006/main"/>
+          <a:ln xmlns:a="http://schemas.openxmlformats.org/drawingml/2006/main" w="0">
+            <a:noFill/>
+          </a:ln>
+        </p:spPr>
+        <p:txBody>
+          <a:bodyPr xmlns:a="http://schemas.openxmlformats.org/drawingml/2006/main" wrap="square" lIns="0" tIns="0" rIns="0" bIns="0" anchor="t"/>
+          <a:lstStyle xmlns:a="http://schemas.openxmlformats.org/drawingml/2006/main"/>
+          <a:p xmlns:a="http://schemas.openxmlformats.org/drawingml/2006/main">
+            <a:pPr algn="r"/>
+            <a:r>
+              <a:rPr lang="en-US" sz="1050">
+                <a:solidFill>
+                  <a:srgbClr val="93959C"/>
+                </a:solidFill>
+                <a:latin typeface="Arial"/>
+                <a:ea typeface="Arial"/>
+              </a:rPr>
+              <a:t>1 / 6</a:t>
+            </a:r>
+            <a:endParaRPr lang="en-US"/>
+          </a:p>
+        </p:txBody>
+      </p:sp>
+      <p:sp>
+        <p:nvSpPr>
+          <p:cNvPr id="12" name="anchor-field"/>
+          <p:cNvSpPr/>
+          <p:nvPr/>
+        </p:nvSpPr>
+        <p:spPr>
+          <a:xfrm xmlns:a="http://schemas.openxmlformats.org/drawingml/2006/main">
+            <a:off x="11620500" y="1790700"/>
+            <a:ext cx="2095500" cy="2286000"/>
+          </a:xfrm>
+          <a:prstGeom xmlns:a="http://schemas.openxmlformats.org/drawingml/2006/main" prst="rect">
+            <a:avLst/>
+          </a:prstGeom>
+          <a:solidFill xmlns:a="http://schemas.openxmlformats.org/drawingml/2006/main">
+            <a:srgbClr val="F3F5F8"/>
+          </a:solidFill>
+          <a:ln xmlns:a="http://schemas.openxmlformats.org/drawingml/2006/main" w="25400">
+            <a:solidFill>
+              <a:srgbClr val="8B6BE8"/>
+            </a:solidFill>
+            <a:prstDash val="solid"/>
+          </a:ln>
+        </p:spPr>
+        <p:txBody>
+          <a:bodyPr xmlns:a="http://schemas.openxmlformats.org/drawingml/2006/main" wrap="square" lIns="0" tIns="0" rIns="0" bIns="0" anchor="t"/>
+          <a:lstStyle xmlns:a="http://schemas.openxmlformats.org/drawingml/2006/main"/>
+          <a:p xmlns:a="http://schemas.openxmlformats.org/drawingml/2006/main">
+            <a:r>
+              <a:rPr lang="en-US"/>
+              <a:t/>
+            </a:r>
+            <a:endParaRPr lang="en-US"/>
+          </a:p>
+        </p:txBody>
+      </p:sp>
+      <p:sp>
+        <p:nvSpPr>
+          <p:cNvPr id="13" name="anchor-grid-0-0"/>
+          <p:cNvSpPr/>
+          <p:nvPr/>
+        </p:nvSpPr>
+        <p:spPr>
+          <a:xfrm xmlns:a="http://schemas.openxmlformats.org/drawingml/2006/main">
+            <a:off x="11925300" y="2152650"/>
+            <a:ext cx="266700" cy="285750"/>
+          </a:xfrm>
+          <a:prstGeom xmlns:a="http://schemas.openxmlformats.org/drawingml/2006/main" prst="rect">
+            <a:avLst/>
+          </a:prstGeom>
+          <a:solidFill xmlns:a="http://schemas.openxmlformats.org/drawingml/2006/main">
+            <a:srgbClr val="8B6BE8"/>
+          </a:solidFill>
+          <a:ln xmlns:a="http://schemas.openxmlformats.org/drawingml/2006/main" w="12700">
+            <a:solidFill>
+              <a:srgbClr val="8B6BE8"/>
+            </a:solidFill>
+            <a:prstDash val="solid"/>
+          </a:ln>
+        </p:spPr>
+        <p:txBody>
+          <a:bodyPr xmlns:a="http://schemas.openxmlformats.org/drawingml/2006/main" wrap="square" lIns="0" tIns="0" rIns="0" bIns="0" anchor="t"/>
+          <a:lstStyle xmlns:a="http://schemas.openxmlformats.org/drawingml/2006/main"/>
+          <a:p xmlns:a="http://schemas.openxmlformats.org/drawingml/2006/main">
+            <a:r>
+              <a:rPr lang="en-US"/>
+              <a:t/>
+            </a:r>
+            <a:endParaRPr lang="en-US"/>
+          </a:p>
+        </p:txBody>
+      </p:sp>
+      <p:sp>
+        <p:nvSpPr>
+          <p:cNvPr id="14" name="anchor-grid-0-1"/>
+          <p:cNvSpPr/>
+          <p:nvPr/>
+        </p:nvSpPr>
+        <p:spPr>
+          <a:xfrm xmlns:a="http://schemas.openxmlformats.org/drawingml/2006/main">
+            <a:off x="12420600" y="2152650"/>
+            <a:ext cx="266700" cy="285750"/>
+          </a:xfrm>
+          <a:prstGeom xmlns:a="http://schemas.openxmlformats.org/drawingml/2006/main" prst="rect">
+            <a:avLst/>
+          </a:prstGeom>
+          <a:solidFill xmlns:a="http://schemas.openxmlformats.org/drawingml/2006/main">
+            <a:srgbClr val="8B6BE8"/>
+          </a:solidFill>
+          <a:ln xmlns:a="http://schemas.openxmlformats.org/drawingml/2006/main" w="12700">
+            <a:solidFill>
+              <a:srgbClr val="8B6BE8"/>
+            </a:solidFill>
+            <a:prstDash val="solid"/>
+          </a:ln>
+        </p:spPr>
+        <p:txBody>
+          <a:bodyPr xmlns:a="http://schemas.openxmlformats.org/drawingml/2006/main" wrap="square" lIns="0" tIns="0" rIns="0" bIns="0" anchor="t"/>
+          <a:lstStyle xmlns:a="http://schemas.openxmlformats.org/drawingml/2006/main"/>
+          <a:p xmlns:a="http://schemas.openxmlformats.org/drawingml/2006/main">
+            <a:r>
+              <a:rPr lang="en-US"/>
+              <a:t/>
+            </a:r>
+            <a:endParaRPr lang="en-US"/>
+          </a:p>
+        </p:txBody>
+      </p:sp>
+      <p:sp>
+        <p:nvSpPr>
+          <p:cNvPr id="15" name="anchor-grid-0-2"/>
+          <p:cNvSpPr/>
+          <p:nvPr/>
+        </p:nvSpPr>
+        <p:spPr>
+          <a:xfrm xmlns:a="http://schemas.openxmlformats.org/drawingml/2006/main">
+            <a:off x="12915900" y="2152650"/>
+            <a:ext cx="266700" cy="285750"/>
+          </a:xfrm>
+          <a:prstGeom xmlns:a="http://schemas.openxmlformats.org/drawingml/2006/main" prst="rect">
+            <a:avLst/>
+          </a:prstGeom>
+          <a:solidFill xmlns:a="http://schemas.openxmlformats.org/drawingml/2006/main">
+            <a:srgbClr val="FFFFFF"/>
+          </a:solidFill>
+          <a:ln xmlns:a="http://schemas.openxmlformats.org/drawingml/2006/main" w="12700">
+            <a:solidFill>
+              <a:srgbClr val="8B6BE8"/>
+            </a:solidFill>
+            <a:prstDash val="solid"/>
+          </a:ln>
+        </p:spPr>
+        <p:txBody>
+          <a:bodyPr xmlns:a="http://schemas.openxmlformats.org/drawingml/2006/main" wrap="square" lIns="0" tIns="0" rIns="0" bIns="0" anchor="t"/>
+          <a:lstStyle xmlns:a="http://schemas.openxmlformats.org/drawingml/2006/main"/>
+          <a:p xmlns:a="http://schemas.openxmlformats.org/drawingml/2006/main">
+            <a:r>
+              <a:rPr lang="en-US"/>
+              <a:t/>
+            </a:r>
+            <a:endParaRPr lang="en-US"/>
+          </a:p>
+        </p:txBody>
+      </p:sp>
+      <p:sp>
+        <p:nvSpPr>
+          <p:cNvPr id="16" name="anchor-grid-1-0"/>
+          <p:cNvSpPr/>
+          <p:nvPr/>
+        </p:nvSpPr>
+        <p:spPr>
+          <a:xfrm xmlns:a="http://schemas.openxmlformats.org/drawingml/2006/main">
+            <a:off x="11925300" y="2686050"/>
+            <a:ext cx="266700" cy="285750"/>
+          </a:xfrm>
+          <a:prstGeom xmlns:a="http://schemas.openxmlformats.org/drawingml/2006/main" prst="rect">
+            <a:avLst/>
+          </a:prstGeom>
+          <a:solidFill xmlns:a="http://schemas.openxmlformats.org/drawingml/2006/main">
+            <a:srgbClr val="8B6BE8"/>
+          </a:solidFill>
+          <a:ln xmlns:a="http://schemas.openxmlformats.org/drawingml/2006/main" w="12700">
+            <a:solidFill>
+              <a:srgbClr val="8B6BE8"/>
+            </a:solidFill>
+            <a:prstDash val="solid"/>
+          </a:ln>
+        </p:spPr>
+        <p:txBody>
+          <a:bodyPr xmlns:a="http://schemas.openxmlformats.org/drawingml/2006/main" wrap="square" lIns="0" tIns="0" rIns="0" bIns="0" anchor="t"/>
+          <a:lstStyle xmlns:a="http://schemas.openxmlformats.org/drawingml/2006/main"/>
+          <a:p xmlns:a="http://schemas.openxmlformats.org/drawingml/2006/main">
+            <a:r>
+              <a:rPr lang="en-US"/>
+              <a:t/>
+            </a:r>
+            <a:endParaRPr lang="en-US"/>
+          </a:p>
+        </p:txBody>
+      </p:sp>
+      <p:sp>
+        <p:nvSpPr>
+          <p:cNvPr id="17" name="anchor-grid-1-1"/>
+          <p:cNvSpPr/>
+          <p:nvPr/>
+        </p:nvSpPr>
+        <p:spPr>
+          <a:xfrm xmlns:a="http://schemas.openxmlformats.org/drawingml/2006/main">
+            <a:off x="12420600" y="2686050"/>
+            <a:ext cx="266700" cy="285750"/>
+          </a:xfrm>
+          <a:prstGeom xmlns:a="http://schemas.openxmlformats.org/drawingml/2006/main" prst="rect">
+            <a:avLst/>
+          </a:prstGeom>
+          <a:solidFill xmlns:a="http://schemas.openxmlformats.org/drawingml/2006/main">
+            <a:srgbClr val="8B6BE8"/>
+          </a:solidFill>
+          <a:ln xmlns:a="http://schemas.openxmlformats.org/drawingml/2006/main" w="12700">
+            <a:solidFill>
+              <a:srgbClr val="8B6BE8"/>
+            </a:solidFill>
+            <a:prstDash val="solid"/>
+          </a:ln>
+        </p:spPr>
+        <p:txBody>
+          <a:bodyPr xmlns:a="http://schemas.openxmlformats.org/drawingml/2006/main" wrap="square" lIns="0" tIns="0" rIns="0" bIns="0" anchor="t"/>
+          <a:lstStyle xmlns:a="http://schemas.openxmlformats.org/drawingml/2006/main"/>
+          <a:p xmlns:a="http://schemas.openxmlformats.org/drawingml/2006/main">
+            <a:r>
+              <a:rPr lang="en-US"/>
+              <a:t/>
+            </a:r>
+            <a:endParaRPr lang="en-US"/>
+          </a:p>
+        </p:txBody>
+      </p:sp>
+      <p:sp>
+        <p:nvSpPr>
+          <p:cNvPr id="18" name="anchor-grid-1-2"/>
+          <p:cNvSpPr/>
+          <p:nvPr/>
+        </p:nvSpPr>
+        <p:spPr>
+          <a:xfrm xmlns:a="http://schemas.openxmlformats.org/drawingml/2006/main">
+            <a:off x="12915900" y="2686050"/>
+            <a:ext cx="266700" cy="285750"/>
+          </a:xfrm>
+          <a:prstGeom xmlns:a="http://schemas.openxmlformats.org/drawingml/2006/main" prst="rect">
+            <a:avLst/>
+          </a:prstGeom>
+          <a:solidFill xmlns:a="http://schemas.openxmlformats.org/drawingml/2006/main">
+            <a:srgbClr val="FFFFFF"/>
+          </a:solidFill>
+          <a:ln xmlns:a="http://schemas.openxmlformats.org/drawingml/2006/main" w="12700">
+            <a:solidFill>
+              <a:srgbClr val="8B6BE8"/>
+            </a:solidFill>
+            <a:prstDash val="solid"/>
+          </a:ln>
+        </p:spPr>
+        <p:txBody>
+          <a:bodyPr xmlns:a="http://schemas.openxmlformats.org/drawingml/2006/main" wrap="square" lIns="0" tIns="0" rIns="0" bIns="0" anchor="t"/>
+          <a:lstStyle xmlns:a="http://schemas.openxmlformats.org/drawingml/2006/main"/>
+          <a:p xmlns:a="http://schemas.openxmlformats.org/drawingml/2006/main">
+            <a:r>
+              <a:rPr lang="en-US"/>
+              <a:t/>
+            </a:r>
+            <a:endParaRPr lang="en-US"/>
+          </a:p>
+        </p:txBody>
+      </p:sp>
+      <p:sp>
+        <p:nvSpPr>
+          <p:cNvPr id="19" name="anchor-grid-2-0"/>
+          <p:cNvSpPr/>
+          <p:nvPr/>
+        </p:nvSpPr>
+        <p:spPr>
+          <a:xfrm xmlns:a="http://schemas.openxmlformats.org/drawingml/2006/main">
+            <a:off x="11925300" y="3219450"/>
+            <a:ext cx="266700" cy="285750"/>
+          </a:xfrm>
+          <a:prstGeom xmlns:a="http://schemas.openxmlformats.org/drawingml/2006/main" prst="rect">
+            <a:avLst/>
+          </a:prstGeom>
+          <a:solidFill xmlns:a="http://schemas.openxmlformats.org/drawingml/2006/main">
+            <a:srgbClr val="8B6BE8"/>
+          </a:solidFill>
+          <a:ln xmlns:a="http://schemas.openxmlformats.org/drawingml/2006/main" w="12700">
+            <a:solidFill>
+              <a:srgbClr val="8B6BE8"/>
+            </a:solidFill>
+            <a:prstDash val="solid"/>
+          </a:ln>
+        </p:spPr>
+        <p:txBody>
+          <a:bodyPr xmlns:a="http://schemas.openxmlformats.org/drawingml/2006/main" wrap="square" lIns="0" tIns="0" rIns="0" bIns="0" anchor="t"/>
+          <a:lstStyle xmlns:a="http://schemas.openxmlformats.org/drawingml/2006/main"/>
+          <a:p xmlns:a="http://schemas.openxmlformats.org/drawingml/2006/main">
+            <a:r>
+              <a:rPr lang="en-US"/>
+              <a:t/>
+            </a:r>
+            <a:endParaRPr lang="en-US"/>
+          </a:p>
+        </p:txBody>
+      </p:sp>
+      <p:sp>
+        <p:nvSpPr>
+          <p:cNvPr id="20" name="anchor-grid-2-1"/>
+          <p:cNvSpPr/>
+          <p:nvPr/>
+        </p:nvSpPr>
+        <p:spPr>
+          <a:xfrm xmlns:a="http://schemas.openxmlformats.org/drawingml/2006/main">
+            <a:off x="12420600" y="3219450"/>
+            <a:ext cx="266700" cy="285750"/>
+          </a:xfrm>
+          <a:prstGeom xmlns:a="http://schemas.openxmlformats.org/drawingml/2006/main" prst="rect">
+            <a:avLst/>
+          </a:prstGeom>
+          <a:solidFill xmlns:a="http://schemas.openxmlformats.org/drawingml/2006/main">
+            <a:srgbClr val="8B6BE8"/>
+          </a:solidFill>
+          <a:ln xmlns:a="http://schemas.openxmlformats.org/drawingml/2006/main" w="12700">
+            <a:solidFill>
+              <a:srgbClr val="8B6BE8"/>
+            </a:solidFill>
+            <a:prstDash val="solid"/>
+          </a:ln>
+        </p:spPr>
+        <p:txBody>
+          <a:bodyPr xmlns:a="http://schemas.openxmlformats.org/drawingml/2006/main" wrap="square" lIns="0" tIns="0" rIns="0" bIns="0" anchor="t"/>
+          <a:lstStyle xmlns:a="http://schemas.openxmlformats.org/drawingml/2006/main"/>
+          <a:p xmlns:a="http://schemas.openxmlformats.org/drawingml/2006/main">
+            <a:r>
+              <a:rPr lang="en-US"/>
+              <a:t/>
+            </a:r>
+            <a:endParaRPr lang="en-US"/>
+          </a:p>
+        </p:txBody>
+      </p:sp>
+      <p:sp>
+        <p:nvSpPr>
+          <p:cNvPr id="21" name="anchor-grid-2-2"/>
+          <p:cNvSpPr/>
+          <p:nvPr/>
+        </p:nvSpPr>
+        <p:spPr>
+          <a:xfrm xmlns:a="http://schemas.openxmlformats.org/drawingml/2006/main">
+            <a:off x="12915900" y="3219450"/>
+            <a:ext cx="266700" cy="285750"/>
+          </a:xfrm>
+          <a:prstGeom xmlns:a="http://schemas.openxmlformats.org/drawingml/2006/main" prst="rect">
+            <a:avLst/>
+          </a:prstGeom>
+          <a:solidFill xmlns:a="http://schemas.openxmlformats.org/drawingml/2006/main">
+            <a:srgbClr val="FFFFFF"/>
+          </a:solidFill>
+          <a:ln xmlns:a="http://schemas.openxmlformats.org/drawingml/2006/main" w="12700">
+            <a:solidFill>
+              <a:srgbClr val="8B6BE8"/>
+            </a:solidFill>
+            <a:prstDash val="solid"/>
+          </a:ln>
+        </p:spPr>
+        <p:txBody>
+          <a:bodyPr xmlns:a="http://schemas.openxmlformats.org/drawingml/2006/main" wrap="square" lIns="0" tIns="0" rIns="0" bIns="0" anchor="t"/>
+          <a:lstStyle xmlns:a="http://schemas.openxmlformats.org/drawingml/2006/main"/>
+          <a:p xmlns:a="http://schemas.openxmlformats.org/drawingml/2006/main">
+            <a:r>
+              <a:rPr lang="en-US"/>
+              <a:t/>
+            </a:r>
+            <a:endParaRPr lang="en-US"/>
+          </a:p>
+        </p:txBody>
+      </p:sp>
+      <p:sp>
+        <p:nvSpPr>
+          <p:cNvPr id="22" name="anchor-axis"/>
+          <p:cNvSpPr/>
+          <p:nvPr/>
+        </p:nvSpPr>
+        <p:spPr>
+          <a:xfrm xmlns:a="http://schemas.openxmlformats.org/drawingml/2006/main">
+            <a:off x="12668250" y="1638300"/>
+            <a:ext cx="0" cy="2743200"/>
+          </a:xfrm>
+          <a:prstGeom xmlns:a="http://schemas.openxmlformats.org/drawingml/2006/main" prst="line">
+            <a:avLst/>
+          </a:prstGeom>
+          <a:noFill xmlns:a="http://schemas.openxmlformats.org/drawingml/2006/main"/>
+          <a:ln xmlns:a="http://schemas.openxmlformats.org/drawingml/2006/main" w="50800">
+            <a:solidFill>
+              <a:srgbClr val="1D2330"/>
+            </a:solidFill>
+            <a:prstDash val="solid"/>
+          </a:ln>
+        </p:spPr>
+        <p:txBody>
+          <a:bodyPr xmlns:a="http://schemas.openxmlformats.org/drawingml/2006/main" wrap="square" lIns="0" tIns="0" rIns="0" bIns="0" anchor="t"/>
+          <a:lstStyle xmlns:a="http://schemas.openxmlformats.org/drawingml/2006/main"/>
+          <a:p xmlns:a="http://schemas.openxmlformats.org/drawingml/2006/main">
+            <a:r>
+              <a:rPr lang="en-US"/>
+              <a:t/>
+            </a:r>
+            <a:endParaRPr lang="en-US"/>
+          </a:p>
+        </p:txBody>
+      </p:sp>
+    </p:spTree>
+  </p:cSld>
+  <p:clrMapOvr>
+    <a:masterClrMapping xmlns:a="http://schemas.openxmlformats.org/drawingml/2006/main"/>
+  </p:clrMapOvr>
+</p:sld>
+</file>
+
+<file path=ppt/slides/slide2.xml><?xml version="1.0" encoding="utf-8"?>
+<p:sld xmlns:p="http://schemas.openxmlformats.org/presentationml/2006/main">
+  <p:cSld name="Argument">
+    <p:bg>
+      <p:bgPr>
+        <a:blipFill xmlns:a="http://schemas.openxmlformats.org/drawingml/2006/main">
           <a:blip xmlns:r="http://schemas.openxmlformats.org/officeDocument/2006/relationships" r:embed="rIdOfficeKitImage026be3a43029630d_1"/>
           <a:stretch>
             <a:fillRect/>
@@ -507,21 +1302,21 @@
       </p:grpSpPr>
       <p:sp>
         <p:nvSpPr>
-          <p:cNvPr id="2" name="cover-paper-scrim"/>
+          <p:cNvPr id="2" name="argument-paper-scrim"/>
           <p:cNvSpPr/>
           <p:nvPr/>
         </p:nvSpPr>
         <p:spPr>
           <a:xfrm xmlns:a="http://schemas.openxmlformats.org/drawingml/2006/main">
             <a:off x="0" y="0"/>
-            <a:ext cx="9525000" cy="8572500"/>
+            <a:ext cx="7429500" cy="8572500"/>
           </a:xfrm>
           <a:prstGeom xmlns:a="http://schemas.openxmlformats.org/drawingml/2006/main" prst="rect">
             <a:avLst/>
           </a:prstGeom>
           <a:solidFill xmlns:a="http://schemas.openxmlformats.org/drawingml/2006/main">
             <a:srgbClr val="FFFFFF">
-              <a:alpha val="100000"/>
+              <a:alpha val="96000"/>
             </a:srgbClr>
           </a:solidFill>
           <a:ln xmlns:a="http://schemas.openxmlformats.org/drawingml/2006/main" w="0">
@@ -543,16 +1338,83 @@
           </a:p>
         </p:txBody>
       </p:sp>
-      <p:sp>
-        <p:nvSpPr>
-          <p:cNvPr id="3" name="top-rule"/>
+      <p:pic>
+        <p:nvPicPr>
+          <p:cNvPr id="3" name="argument-photo-band">
+            <a:extLst xmlns:a="http://schemas.openxmlformats.org/drawingml/2006/main">
+              <a:ext uri="{C183D7F6-B498-43B3-948B-1728B52AA6E4}">
+                <adec:decorative xmlns:adec="http://schemas.microsoft.com/office/drawing/2017/decorative" val="1"/>
+              </a:ext>
+            </a:extLst>
+          </p:cNvPr>
+          <p:cNvPicPr/>
+          <p:nvPr/>
+        </p:nvPicPr>
+        <p:blipFill>
+          <a:blip xmlns:r="http://schemas.openxmlformats.org/officeDocument/2006/relationships" xmlns:a="http://schemas.openxmlformats.org/drawingml/2006/main" r:embed="rIdOfficeKitImaged71bfa074cda59bb_1"/>
+          <a:srcRect xmlns:a="http://schemas.openxmlformats.org/drawingml/2006/main" l="0" t="47258" r="0" b="47258"/>
+          <a:stretch xmlns:a="http://schemas.openxmlformats.org/drawingml/2006/main">
+            <a:fillRect/>
+          </a:stretch>
+        </p:blipFill>
+        <p:spPr>
+          <a:xfrm xmlns:a="http://schemas.openxmlformats.org/drawingml/2006/main">
+            <a:off x="0" y="0"/>
+            <a:ext cx="15240000" cy="1485900"/>
+          </a:xfrm>
+          <a:prstGeom xmlns:a="http://schemas.openxmlformats.org/drawingml/2006/main" prst="rect">
+            <a:avLst/>
+          </a:prstGeom>
+        </p:spPr>
+      </p:pic>
+      <p:sp>
+        <p:nvSpPr>
+          <p:cNvPr id="4" name="argument-photo-scrim"/>
           <p:cNvSpPr/>
           <p:nvPr/>
         </p:nvSpPr>
         <p:spPr>
           <a:xfrm xmlns:a="http://schemas.openxmlformats.org/drawingml/2006/main">
-            <a:off x="838200" y="666750"/>
-            <a:ext cx="13563600" cy="0"/>
+            <a:off x="0" y="0"/>
+            <a:ext cx="15240000" cy="1485900"/>
+          </a:xfrm>
+          <a:prstGeom xmlns:a="http://schemas.openxmlformats.org/drawingml/2006/main" prst="rect">
+            <a:avLst/>
+          </a:prstGeom>
+          <a:solidFill xmlns:a="http://schemas.openxmlformats.org/drawingml/2006/main">
+            <a:srgbClr val="1D2330">
+              <a:alpha val="62000"/>
+            </a:srgbClr>
+          </a:solidFill>
+          <a:ln xmlns:a="http://schemas.openxmlformats.org/drawingml/2006/main" w="0">
+            <a:solidFill>
+              <a:srgbClr val="1D2330"/>
+            </a:solidFill>
+            <a:prstDash val="solid"/>
+          </a:ln>
+        </p:spPr>
+        <p:txBody>
+          <a:bodyPr xmlns:a="http://schemas.openxmlformats.org/drawingml/2006/main" wrap="square" lIns="0" tIns="0" rIns="0" bIns="0" anchor="t"/>
+          <a:lstStyle xmlns:a="http://schemas.openxmlformats.org/drawingml/2006/main"/>
+          <a:p xmlns:a="http://schemas.openxmlformats.org/drawingml/2006/main">
+            <a:r>
+              <a:rPr lang="en-US"/>
+              <a:t/>
+            </a:r>
+            <a:endParaRPr lang="en-US"/>
+          </a:p>
+        </p:txBody>
+      </p:sp>
+      <p:sp>
+        <p:nvSpPr>
+          <p:cNvPr id="5" name="argument-photo-rule"/>
+          <p:cNvSpPr/>
+          <p:nvPr/>
+        </p:nvSpPr>
+        <p:spPr>
+          <a:xfrm xmlns:a="http://schemas.openxmlformats.org/drawingml/2006/main">
+            <a:off x="914400" y="1438275"/>
+            <a:ext cx="13411200" cy="0"/>
           </a:xfrm>
           <a:prstGeom xmlns:a="http://schemas.openxmlformats.org/drawingml/2006/main" prst="line">
             <a:avLst/>
@@ -579,125 +1441,236 @@
       </p:sp>
       <p:sp>
         <p:nvSpPr>
-          <p:cNvPr id="4" name="eyebrow"/>
-          <p:cNvSpPr txBox="1"/>
-          <p:nvPr/>
-        </p:nvSpPr>
-        <p:spPr>
-          <a:xfrm xmlns:a="http://schemas.openxmlformats.org/drawingml/2006/main">
-            <a:off x="914400" y="895350"/>
-            <a:ext cx="7239000" cy="228600"/>
-          </a:xfrm>
-          <a:prstGeom xmlns:a="http://schemas.openxmlformats.org/drawingml/2006/main" prst="rect">
-            <a:avLst/>
-          </a:prstGeom>
-          <a:noFill xmlns:a="http://schemas.openxmlformats.org/drawingml/2006/main"/>
-          <a:ln xmlns:a="http://schemas.openxmlformats.org/drawingml/2006/main" w="0">
-            <a:noFill/>
-          </a:ln>
-        </p:spPr>
-        <p:txBody>
-          <a:bodyPr xmlns:a="http://schemas.openxmlformats.org/drawingml/2006/main" wrap="square" lIns="0" tIns="0" rIns="0" bIns="0" anchor="t"/>
-          <a:lstStyle xmlns:a="http://schemas.openxmlformats.org/drawingml/2006/main"/>
-          <a:p xmlns:a="http://schemas.openxmlformats.org/drawingml/2006/main">
-            <a:r>
-              <a:rPr lang="en-US" sz="1200" b="1">
+          <p:cNvPr id="6" name="MOONLIT WORK REPORT · ARGUMENT"/>
+          <p:cNvSpPr txBox="1"/>
+          <p:nvPr/>
+        </p:nvSpPr>
+        <p:spPr>
+          <a:xfrm xmlns:a="http://schemas.openxmlformats.org/drawingml/2006/main">
+            <a:off x="914400" y="228600"/>
+            <a:ext cx="9525000" cy="190500"/>
+          </a:xfrm>
+          <a:prstGeom xmlns:a="http://schemas.openxmlformats.org/drawingml/2006/main" prst="rect">
+            <a:avLst/>
+          </a:prstGeom>
+          <a:noFill xmlns:a="http://schemas.openxmlformats.org/drawingml/2006/main"/>
+          <a:ln xmlns:a="http://schemas.openxmlformats.org/drawingml/2006/main" w="0">
+            <a:noFill/>
+          </a:ln>
+        </p:spPr>
+        <p:txBody>
+          <a:bodyPr xmlns:a="http://schemas.openxmlformats.org/drawingml/2006/main" wrap="square" lIns="0" tIns="0" rIns="0" bIns="0" anchor="t"/>
+          <a:lstStyle xmlns:a="http://schemas.openxmlformats.org/drawingml/2006/main"/>
+          <a:p xmlns:a="http://schemas.openxmlformats.org/drawingml/2006/main">
+            <a:r>
+              <a:rPr lang="en-US" sz="1050" b="1">
                 <a:solidFill>
                   <a:srgbClr val="8B6BE8"/>
                 </a:solidFill>
                 <a:latin typeface="Arial"/>
                 <a:ea typeface="Arial"/>
               </a:rPr>
-              <a:t>WORK · OFFICEKIT CALIBRATION</a:t>
-            </a:r>
-            <a:endParaRPr lang="en-US"/>
-          </a:p>
-        </p:txBody>
-      </p:sp>
-      <p:sp>
-        <p:nvSpPr>
-          <p:cNvPr id="5" name="cover-title"/>
-          <p:cNvSpPr txBox="1"/>
-          <p:nvPr/>
-        </p:nvSpPr>
-        <p:spPr>
-          <a:xfrm xmlns:a="http://schemas.openxmlformats.org/drawingml/2006/main">
-            <a:off x="914400" y="1571625"/>
-            <a:ext cx="8382000" cy="1066800"/>
-          </a:xfrm>
-          <a:prstGeom xmlns:a="http://schemas.openxmlformats.org/drawingml/2006/main" prst="rect">
-            <a:avLst/>
-          </a:prstGeom>
-          <a:noFill xmlns:a="http://schemas.openxmlformats.org/drawingml/2006/main"/>
-          <a:ln xmlns:a="http://schemas.openxmlformats.org/drawingml/2006/main" w="0">
-            <a:noFill/>
-          </a:ln>
-        </p:spPr>
-        <p:txBody>
-          <a:bodyPr xmlns:a="http://schemas.openxmlformats.org/drawingml/2006/main" wrap="square" lIns="0" tIns="0" rIns="0" bIns="0" anchor="t"/>
-          <a:lstStyle xmlns:a="http://schemas.openxmlformats.org/drawingml/2006/main"/>
-          <a:p xmlns:a="http://schemas.openxmlformats.org/drawingml/2006/main">
-            <a:r>
-              <a:rPr lang="en-US" sz="3600" b="1">
+              <a:t>MOONLIT WORK REPORT · ARGUMENT</a:t>
+            </a:r>
+            <a:endParaRPr lang="en-US"/>
+          </a:p>
+        </p:txBody>
+      </p:sp>
+      <p:sp>
+        <p:nvSpPr>
+          <p:cNvPr id="7" name="argument-title"/>
+          <p:cNvSpPr txBox="1"/>
+          <p:nvPr/>
+        </p:nvSpPr>
+        <p:spPr>
+          <a:xfrm xmlns:a="http://schemas.openxmlformats.org/drawingml/2006/main">
+            <a:off x="914400" y="495300"/>
+            <a:ext cx="12001500" cy="457200"/>
+          </a:xfrm>
+          <a:prstGeom xmlns:a="http://schemas.openxmlformats.org/drawingml/2006/main" prst="rect">
+            <a:avLst/>
+          </a:prstGeom>
+          <a:noFill xmlns:a="http://schemas.openxmlformats.org/drawingml/2006/main"/>
+          <a:ln xmlns:a="http://schemas.openxmlformats.org/drawingml/2006/main" w="0">
+            <a:noFill/>
+          </a:ln>
+        </p:spPr>
+        <p:txBody>
+          <a:bodyPr xmlns:a="http://schemas.openxmlformats.org/drawingml/2006/main" wrap="square" lIns="0" tIns="0" rIns="0" bIns="0" anchor="t"/>
+          <a:lstStyle xmlns:a="http://schemas.openxmlformats.org/drawingml/2006/main"/>
+          <a:p xmlns:a="http://schemas.openxmlformats.org/drawingml/2006/main">
+            <a:r>
+              <a:rPr lang="en-US" sz="2550" b="1">
+                <a:solidFill>
+                  <a:srgbClr val="FFFFFF"/>
+                </a:solidFill>
+                <a:latin typeface="Arial"/>
+                <a:ea typeface="Arial"/>
+              </a:rPr>
+              <a:t>The constraint owns the page</a:t>
+            </a:r>
+            <a:endParaRPr lang="en-US"/>
+          </a:p>
+        </p:txBody>
+      </p:sp>
+      <p:sp>
+        <p:nvSpPr>
+          <p:cNvPr id="8" name="argument-basis"/>
+          <p:cNvSpPr txBox="1"/>
+          <p:nvPr/>
+        </p:nvSpPr>
+        <p:spPr>
+          <a:xfrm xmlns:a="http://schemas.openxmlformats.org/drawingml/2006/main">
+            <a:off x="952500" y="1066800"/>
+            <a:ext cx="11049000" cy="228600"/>
+          </a:xfrm>
+          <a:prstGeom xmlns:a="http://schemas.openxmlformats.org/drawingml/2006/main" prst="rect">
+            <a:avLst/>
+          </a:prstGeom>
+          <a:noFill xmlns:a="http://schemas.openxmlformats.org/drawingml/2006/main"/>
+          <a:ln xmlns:a="http://schemas.openxmlformats.org/drawingml/2006/main" w="0">
+            <a:noFill/>
+          </a:ln>
+        </p:spPr>
+        <p:txBody>
+          <a:bodyPr xmlns:a="http://schemas.openxmlformats.org/drawingml/2006/main" wrap="square" lIns="0" tIns="0" rIns="0" bIns="0" anchor="t"/>
+          <a:lstStyle xmlns:a="http://schemas.openxmlformats.org/drawingml/2006/main"/>
+          <a:p xmlns:a="http://schemas.openxmlformats.org/drawingml/2006/main">
+            <a:r>
+              <a:rPr lang="en-US" sz="1200">
+                <a:solidFill>
+                  <a:srgbClr val="F0F3F2"/>
+                </a:solidFill>
+                <a:latin typeface="Arial"/>
+                <a:ea typeface="Arial"/>
+              </a:rPr>
+              <a:t>Status, cause, owner and date stay together.</a:t>
+            </a:r>
+            <a:endParaRPr lang="en-US"/>
+          </a:p>
+        </p:txBody>
+      </p:sp>
+      <p:sp>
+        <p:nvSpPr>
+          <p:cNvPr id="9" name="work-status"/>
+          <p:cNvSpPr txBox="1"/>
+          <p:nvPr/>
+        </p:nvSpPr>
+        <p:spPr>
+          <a:xfrm xmlns:a="http://schemas.openxmlformats.org/drawingml/2006/main">
+            <a:off x="1104900" y="3352800"/>
+            <a:ext cx="2857500" cy="228600"/>
+          </a:xfrm>
+          <a:prstGeom xmlns:a="http://schemas.openxmlformats.org/drawingml/2006/main" prst="rect">
+            <a:avLst/>
+          </a:prstGeom>
+          <a:noFill xmlns:a="http://schemas.openxmlformats.org/drawingml/2006/main"/>
+          <a:ln xmlns:a="http://schemas.openxmlformats.org/drawingml/2006/main" w="0">
+            <a:noFill/>
+          </a:ln>
+        </p:spPr>
+        <p:txBody>
+          <a:bodyPr xmlns:a="http://schemas.openxmlformats.org/drawingml/2006/main" wrap="square" lIns="0" tIns="0" rIns="0" bIns="0" anchor="t"/>
+          <a:lstStyle xmlns:a="http://schemas.openxmlformats.org/drawingml/2006/main"/>
+          <a:p xmlns:a="http://schemas.openxmlformats.org/drawingml/2006/main">
+            <a:r>
+              <a:rPr lang="en-US" sz="1125" b="1">
+                <a:solidFill>
+                  <a:srgbClr val="8B6BE8"/>
+                </a:solidFill>
+                <a:latin typeface="Arial"/>
+                <a:ea typeface="Arial"/>
+              </a:rPr>
+              <a:t>OPERATING SIGNAL</a:t>
+            </a:r>
+            <a:endParaRPr lang="en-US"/>
+          </a:p>
+        </p:txBody>
+      </p:sp>
+      <p:sp>
+        <p:nvSpPr>
+          <p:cNvPr id="10" name="work-headline"/>
+          <p:cNvSpPr txBox="1"/>
+          <p:nvPr/>
+        </p:nvSpPr>
+        <p:spPr>
+          <a:xfrm xmlns:a="http://schemas.openxmlformats.org/drawingml/2006/main">
+            <a:off x="1104900" y="3790950"/>
+            <a:ext cx="6667500" cy="723900"/>
+          </a:xfrm>
+          <a:prstGeom xmlns:a="http://schemas.openxmlformats.org/drawingml/2006/main" prst="rect">
+            <a:avLst/>
+          </a:prstGeom>
+          <a:noFill xmlns:a="http://schemas.openxmlformats.org/drawingml/2006/main"/>
+          <a:ln xmlns:a="http://schemas.openxmlformats.org/drawingml/2006/main" w="0">
+            <a:noFill/>
+          </a:ln>
+        </p:spPr>
+        <p:txBody>
+          <a:bodyPr xmlns:a="http://schemas.openxmlformats.org/drawingml/2006/main" wrap="square" lIns="0" tIns="0" rIns="0" bIns="0" anchor="t"/>
+          <a:lstStyle xmlns:a="http://schemas.openxmlformats.org/drawingml/2006/main"/>
+          <a:p xmlns:a="http://schemas.openxmlformats.org/drawingml/2006/main">
+            <a:r>
+              <a:rPr lang="en-US" sz="2550" b="1">
                 <a:solidFill>
                   <a:srgbClr val="1D2330"/>
                 </a:solidFill>
                 <a:latin typeface="Arial"/>
                 <a:ea typeface="Arial"/>
               </a:rPr>
-              <a:t>Moonlit Work Report: a claim worth testing</a:t>
-            </a:r>
-            <a:endParaRPr lang="en-US"/>
-          </a:p>
-        </p:txBody>
-      </p:sp>
-      <p:sp>
-        <p:nvSpPr>
-          <p:cNvPr id="6" name="cover-subtitle"/>
-          <p:cNvSpPr txBox="1"/>
-          <p:nvPr/>
-        </p:nvSpPr>
-        <p:spPr>
-          <a:xfrm xmlns:a="http://schemas.openxmlformats.org/drawingml/2006/main">
-            <a:off x="952500" y="2857500"/>
-            <a:ext cx="6858000" cy="323850"/>
-          </a:xfrm>
-          <a:prstGeom xmlns:a="http://schemas.openxmlformats.org/drawingml/2006/main" prst="rect">
-            <a:avLst/>
-          </a:prstGeom>
-          <a:noFill xmlns:a="http://schemas.openxmlformats.org/drawingml/2006/main"/>
-          <a:ln xmlns:a="http://schemas.openxmlformats.org/drawingml/2006/main" w="0">
-            <a:noFill/>
-          </a:ln>
-        </p:spPr>
-        <p:txBody>
-          <a:bodyPr xmlns:a="http://schemas.openxmlformats.org/drawingml/2006/main" wrap="square" lIns="0" tIns="0" rIns="0" bIns="0" anchor="t"/>
-          <a:lstStyle xmlns:a="http://schemas.openxmlformats.org/drawingml/2006/main"/>
-          <a:p xmlns:a="http://schemas.openxmlformats.org/drawingml/2006/main">
-            <a:r>
-              <a:rPr lang="en-US" sz="1725">
-                <a:solidFill>
-                  <a:srgbClr val="8B6BE8"/>
-                </a:solidFill>
-                <a:latin typeface="Arial"/>
-                <a:ea typeface="Arial"/>
-              </a:rPr>
-              <a:t>A clean-room reference for evidence, direction, and a decision.</a:t>
-            </a:r>
-            <a:endParaRPr lang="en-US"/>
-          </a:p>
-        </p:txBody>
-      </p:sp>
-      <p:sp>
-        <p:nvSpPr>
-          <p:cNvPr id="7" name="cover-rule"/>
+              <a:t>The queue is healthy; the handoff is not.</a:t>
+            </a:r>
+            <a:endParaRPr lang="en-US"/>
+          </a:p>
+        </p:txBody>
+      </p:sp>
+      <p:sp>
+        <p:nvSpPr>
+          <p:cNvPr id="11" name="work-body"/>
+          <p:cNvSpPr txBox="1"/>
+          <p:nvPr/>
+        </p:nvSpPr>
+        <p:spPr>
+          <a:xfrm xmlns:a="http://schemas.openxmlformats.org/drawingml/2006/main">
+            <a:off x="1104900" y="4762500"/>
+            <a:ext cx="6191250" cy="400050"/>
+          </a:xfrm>
+          <a:prstGeom xmlns:a="http://schemas.openxmlformats.org/drawingml/2006/main" prst="rect">
+            <a:avLst/>
+          </a:prstGeom>
+          <a:noFill xmlns:a="http://schemas.openxmlformats.org/drawingml/2006/main"/>
+          <a:ln xmlns:a="http://schemas.openxmlformats.org/drawingml/2006/main" w="0">
+            <a:noFill/>
+          </a:ln>
+        </p:spPr>
+        <p:txBody>
+          <a:bodyPr xmlns:a="http://schemas.openxmlformats.org/drawingml/2006/main" wrap="square" lIns="0" tIns="0" rIns="0" bIns="0" anchor="t"/>
+          <a:lstStyle xmlns:a="http://schemas.openxmlformats.org/drawingml/2006/main"/>
+          <a:p xmlns:a="http://schemas.openxmlformats.org/drawingml/2006/main">
+            <a:r>
+              <a:rPr lang="en-US" sz="1575">
+                <a:solidFill>
+                  <a:srgbClr val="1D2330"/>
+                </a:solidFill>
+                <a:latin typeface="Arial"/>
+                <a:ea typeface="Arial"/>
+              </a:rPr>
+              <a:t>Three visible signals point to one owner and one date.</a:t>
+            </a:r>
+            <a:endParaRPr lang="en-US"/>
+          </a:p>
+        </p:txBody>
+      </p:sp>
+      <p:sp>
+        <p:nvSpPr>
+          <p:cNvPr id="12" name="work-rail"/>
           <p:cNvSpPr/>
           <p:nvPr/>
         </p:nvSpPr>
         <p:spPr>
           <a:xfrm xmlns:a="http://schemas.openxmlformats.org/drawingml/2006/main">
-            <a:off x="914400" y="3524250"/>
-            <a:ext cx="7658100" cy="0"/>
+            <a:off x="10001250" y="3333750"/>
+            <a:ext cx="0" cy="2381250"/>
           </a:xfrm>
           <a:prstGeom xmlns:a="http://schemas.openxmlformats.org/drawingml/2006/main" prst="line">
             <a:avLst/>
@@ -724,88 +1697,347 @@
       </p:sp>
       <p:sp>
         <p:nvSpPr>
-          <p:cNvPr id="8" name="cover-basis"/>
-          <p:cNvSpPr txBox="1"/>
-          <p:nvPr/>
-        </p:nvSpPr>
-        <p:spPr>
-          <a:xfrm xmlns:a="http://schemas.openxmlformats.org/drawingml/2006/main">
-            <a:off x="952500" y="3762375"/>
-            <a:ext cx="7810500" cy="266700"/>
-          </a:xfrm>
-          <a:prstGeom xmlns:a="http://schemas.openxmlformats.org/drawingml/2006/main" prst="rect">
-            <a:avLst/>
-          </a:prstGeom>
-          <a:noFill xmlns:a="http://schemas.openxmlformats.org/drawingml/2006/main"/>
-          <a:ln xmlns:a="http://schemas.openxmlformats.org/drawingml/2006/main" w="0">
-            <a:noFill/>
-          </a:ln>
-        </p:spPr>
-        <p:txBody>
-          <a:bodyPr xmlns:a="http://schemas.openxmlformats.org/drawingml/2006/main" wrap="square" lIns="0" tIns="0" rIns="0" bIns="0" anchor="t"/>
-          <a:lstStyle xmlns:a="http://schemas.openxmlformats.org/drawingml/2006/main"/>
-          <a:p xmlns:a="http://schemas.openxmlformats.org/drawingml/2006/main">
-            <a:r>
-              <a:rPr lang="en-US" sz="1350">
+          <p:cNvPr id="13" name="work-num-0"/>
+          <p:cNvSpPr txBox="1"/>
+          <p:nvPr/>
+        </p:nvSpPr>
+        <p:spPr>
+          <a:xfrm xmlns:a="http://schemas.openxmlformats.org/drawingml/2006/main">
+            <a:off x="10477500" y="3448050"/>
+            <a:ext cx="571500" cy="228600"/>
+          </a:xfrm>
+          <a:prstGeom xmlns:a="http://schemas.openxmlformats.org/drawingml/2006/main" prst="rect">
+            <a:avLst/>
+          </a:prstGeom>
+          <a:noFill xmlns:a="http://schemas.openxmlformats.org/drawingml/2006/main"/>
+          <a:ln xmlns:a="http://schemas.openxmlformats.org/drawingml/2006/main" w="0">
+            <a:noFill/>
+          </a:ln>
+        </p:spPr>
+        <p:txBody>
+          <a:bodyPr xmlns:a="http://schemas.openxmlformats.org/drawingml/2006/main" wrap="square" lIns="0" tIns="0" rIns="0" bIns="0" anchor="t"/>
+          <a:lstStyle xmlns:a="http://schemas.openxmlformats.org/drawingml/2006/main"/>
+          <a:p xmlns:a="http://schemas.openxmlformats.org/drawingml/2006/main">
+            <a:r>
+              <a:rPr lang="en-US" sz="1350" b="1">
+                <a:solidFill>
+                  <a:srgbClr val="8B6BE8"/>
+                </a:solidFill>
+                <a:latin typeface="Arial"/>
+                <a:ea typeface="Arial"/>
+              </a:rPr>
+              <a:t>01</a:t>
+            </a:r>
+            <a:endParaRPr lang="en-US"/>
+          </a:p>
+        </p:txBody>
+      </p:sp>
+      <p:sp>
+        <p:nvSpPr>
+          <p:cNvPr id="14" name="work-label-0"/>
+          <p:cNvSpPr txBox="1"/>
+          <p:nvPr/>
+        </p:nvSpPr>
+        <p:spPr>
+          <a:xfrm xmlns:a="http://schemas.openxmlformats.org/drawingml/2006/main">
+            <a:off x="11144250" y="3448050"/>
+            <a:ext cx="1428750" cy="228600"/>
+          </a:xfrm>
+          <a:prstGeom xmlns:a="http://schemas.openxmlformats.org/drawingml/2006/main" prst="rect">
+            <a:avLst/>
+          </a:prstGeom>
+          <a:noFill xmlns:a="http://schemas.openxmlformats.org/drawingml/2006/main"/>
+          <a:ln xmlns:a="http://schemas.openxmlformats.org/drawingml/2006/main" w="0">
+            <a:noFill/>
+          </a:ln>
+        </p:spPr>
+        <p:txBody>
+          <a:bodyPr xmlns:a="http://schemas.openxmlformats.org/drawingml/2006/main" wrap="square" lIns="0" tIns="0" rIns="0" bIns="0" anchor="t"/>
+          <a:lstStyle xmlns:a="http://schemas.openxmlformats.org/drawingml/2006/main"/>
+          <a:p xmlns:a="http://schemas.openxmlformats.org/drawingml/2006/main">
+            <a:r>
+              <a:rPr lang="en-US" sz="1350" b="1">
                 <a:solidFill>
                   <a:srgbClr val="1D2330"/>
                 </a:solidFill>
                 <a:latin typeface="Arial"/>
                 <a:ea typeface="Arial"/>
               </a:rPr>
-              <a:t>One visual language · four page roles · native editable objects</a:t>
-            </a:r>
-            <a:endParaRPr lang="en-US"/>
-          </a:p>
-        </p:txBody>
-      </p:sp>
-      <p:sp>
-        <p:nvSpPr>
-          <p:cNvPr id="9" name="cover-thesis"/>
-          <p:cNvSpPr txBox="1"/>
-          <p:nvPr/>
-        </p:nvSpPr>
-        <p:spPr>
-          <a:xfrm xmlns:a="http://schemas.openxmlformats.org/drawingml/2006/main">
-            <a:off x="952500" y="4810125"/>
-            <a:ext cx="6667500" cy="628650"/>
-          </a:xfrm>
-          <a:prstGeom xmlns:a="http://schemas.openxmlformats.org/drawingml/2006/main" prst="rect">
-            <a:avLst/>
-          </a:prstGeom>
-          <a:noFill xmlns:a="http://schemas.openxmlformats.org/drawingml/2006/main"/>
-          <a:ln xmlns:a="http://schemas.openxmlformats.org/drawingml/2006/main" w="0">
-            <a:noFill/>
-          </a:ln>
-        </p:spPr>
-        <p:txBody>
-          <a:bodyPr xmlns:a="http://schemas.openxmlformats.org/drawingml/2006/main" wrap="square" lIns="0" tIns="0" rIns="0" bIns="0" anchor="t"/>
-          <a:lstStyle xmlns:a="http://schemas.openxmlformats.org/drawingml/2006/main"/>
-          <a:p xmlns:a="http://schemas.openxmlformats.org/drawingml/2006/main">
-            <a:r>
-              <a:rPr lang="en-US" sz="1875" b="1">
+              <a:t>Queue</a:t>
+            </a:r>
+            <a:endParaRPr lang="en-US"/>
+          </a:p>
+        </p:txBody>
+      </p:sp>
+      <p:sp>
+        <p:nvSpPr>
+          <p:cNvPr id="15" name="work-text-0"/>
+          <p:cNvSpPr txBox="1"/>
+          <p:nvPr/>
+        </p:nvSpPr>
+        <p:spPr>
+          <a:xfrm xmlns:a="http://schemas.openxmlformats.org/drawingml/2006/main">
+            <a:off x="12668250" y="3448050"/>
+            <a:ext cx="1143000" cy="228600"/>
+          </a:xfrm>
+          <a:prstGeom xmlns:a="http://schemas.openxmlformats.org/drawingml/2006/main" prst="rect">
+            <a:avLst/>
+          </a:prstGeom>
+          <a:noFill xmlns:a="http://schemas.openxmlformats.org/drawingml/2006/main"/>
+          <a:ln xmlns:a="http://schemas.openxmlformats.org/drawingml/2006/main" w="0">
+            <a:noFill/>
+          </a:ln>
+        </p:spPr>
+        <p:txBody>
+          <a:bodyPr xmlns:a="http://schemas.openxmlformats.org/drawingml/2006/main" wrap="square" lIns="0" tIns="0" rIns="0" bIns="0" anchor="t"/>
+          <a:lstStyle xmlns:a="http://schemas.openxmlformats.org/drawingml/2006/main"/>
+          <a:p xmlns:a="http://schemas.openxmlformats.org/drawingml/2006/main">
+            <a:r>
+              <a:rPr lang="en-US" sz="1200">
+                <a:solidFill>
+                  <a:srgbClr val="93959C"/>
+                </a:solidFill>
+                <a:latin typeface="Arial"/>
+                <a:ea typeface="Arial"/>
+              </a:rPr>
+              <a:t>On target</a:t>
+            </a:r>
+            <a:endParaRPr lang="en-US"/>
+          </a:p>
+        </p:txBody>
+      </p:sp>
+      <p:sp>
+        <p:nvSpPr>
+          <p:cNvPr id="16" name="work-num-1"/>
+          <p:cNvSpPr txBox="1"/>
+          <p:nvPr/>
+        </p:nvSpPr>
+        <p:spPr>
+          <a:xfrm xmlns:a="http://schemas.openxmlformats.org/drawingml/2006/main">
+            <a:off x="10477500" y="4229100"/>
+            <a:ext cx="571500" cy="228600"/>
+          </a:xfrm>
+          <a:prstGeom xmlns:a="http://schemas.openxmlformats.org/drawingml/2006/main" prst="rect">
+            <a:avLst/>
+          </a:prstGeom>
+          <a:noFill xmlns:a="http://schemas.openxmlformats.org/drawingml/2006/main"/>
+          <a:ln xmlns:a="http://schemas.openxmlformats.org/drawingml/2006/main" w="0">
+            <a:noFill/>
+          </a:ln>
+        </p:spPr>
+        <p:txBody>
+          <a:bodyPr xmlns:a="http://schemas.openxmlformats.org/drawingml/2006/main" wrap="square" lIns="0" tIns="0" rIns="0" bIns="0" anchor="t"/>
+          <a:lstStyle xmlns:a="http://schemas.openxmlformats.org/drawingml/2006/main"/>
+          <a:p xmlns:a="http://schemas.openxmlformats.org/drawingml/2006/main">
+            <a:r>
+              <a:rPr lang="en-US" sz="1350" b="1">
+                <a:solidFill>
+                  <a:srgbClr val="8B6BE8"/>
+                </a:solidFill>
+                <a:latin typeface="Arial"/>
+                <a:ea typeface="Arial"/>
+              </a:rPr>
+              <a:t>02</a:t>
+            </a:r>
+            <a:endParaRPr lang="en-US"/>
+          </a:p>
+        </p:txBody>
+      </p:sp>
+      <p:sp>
+        <p:nvSpPr>
+          <p:cNvPr id="17" name="work-label-1"/>
+          <p:cNvSpPr txBox="1"/>
+          <p:nvPr/>
+        </p:nvSpPr>
+        <p:spPr>
+          <a:xfrm xmlns:a="http://schemas.openxmlformats.org/drawingml/2006/main">
+            <a:off x="11144250" y="4229100"/>
+            <a:ext cx="1428750" cy="228600"/>
+          </a:xfrm>
+          <a:prstGeom xmlns:a="http://schemas.openxmlformats.org/drawingml/2006/main" prst="rect">
+            <a:avLst/>
+          </a:prstGeom>
+          <a:noFill xmlns:a="http://schemas.openxmlformats.org/drawingml/2006/main"/>
+          <a:ln xmlns:a="http://schemas.openxmlformats.org/drawingml/2006/main" w="0">
+            <a:noFill/>
+          </a:ln>
+        </p:spPr>
+        <p:txBody>
+          <a:bodyPr xmlns:a="http://schemas.openxmlformats.org/drawingml/2006/main" wrap="square" lIns="0" tIns="0" rIns="0" bIns="0" anchor="t"/>
+          <a:lstStyle xmlns:a="http://schemas.openxmlformats.org/drawingml/2006/main"/>
+          <a:p xmlns:a="http://schemas.openxmlformats.org/drawingml/2006/main">
+            <a:r>
+              <a:rPr lang="en-US" sz="1350" b="1">
                 <a:solidFill>
                   <a:srgbClr val="1D2330"/>
                 </a:solidFill>
                 <a:latin typeface="Arial"/>
                 <a:ea typeface="Arial"/>
               </a:rPr>
-              <a:t>A visible operating signal creates a shared next action.</a:t>
-            </a:r>
-            <a:endParaRPr lang="en-US"/>
-          </a:p>
-        </p:txBody>
-      </p:sp>
-      <p:sp>
-        <p:nvSpPr>
-          <p:cNvPr id="10" name="cover-source"/>
-          <p:cNvSpPr txBox="1"/>
-          <p:nvPr/>
-        </p:nvSpPr>
-        <p:spPr>
-          <a:xfrm xmlns:a="http://schemas.openxmlformats.org/drawingml/2006/main">
-            <a:off x="952500" y="7315200"/>
-            <a:ext cx="9048750" cy="228600"/>
+              <a:t>Handoff</a:t>
+            </a:r>
+            <a:endParaRPr lang="en-US"/>
+          </a:p>
+        </p:txBody>
+      </p:sp>
+      <p:sp>
+        <p:nvSpPr>
+          <p:cNvPr id="18" name="work-text-1"/>
+          <p:cNvSpPr txBox="1"/>
+          <p:nvPr/>
+        </p:nvSpPr>
+        <p:spPr>
+          <a:xfrm xmlns:a="http://schemas.openxmlformats.org/drawingml/2006/main">
+            <a:off x="12668250" y="4229100"/>
+            <a:ext cx="1143000" cy="228600"/>
+          </a:xfrm>
+          <a:prstGeom xmlns:a="http://schemas.openxmlformats.org/drawingml/2006/main" prst="rect">
+            <a:avLst/>
+          </a:prstGeom>
+          <a:noFill xmlns:a="http://schemas.openxmlformats.org/drawingml/2006/main"/>
+          <a:ln xmlns:a="http://schemas.openxmlformats.org/drawingml/2006/main" w="0">
+            <a:noFill/>
+          </a:ln>
+        </p:spPr>
+        <p:txBody>
+          <a:bodyPr xmlns:a="http://schemas.openxmlformats.org/drawingml/2006/main" wrap="square" lIns="0" tIns="0" rIns="0" bIns="0" anchor="t"/>
+          <a:lstStyle xmlns:a="http://schemas.openxmlformats.org/drawingml/2006/main"/>
+          <a:p xmlns:a="http://schemas.openxmlformats.org/drawingml/2006/main">
+            <a:r>
+              <a:rPr lang="en-US" sz="1200">
+                <a:solidFill>
+                  <a:srgbClr val="8B6BE8"/>
+                </a:solidFill>
+                <a:latin typeface="Arial"/>
+                <a:ea typeface="Arial"/>
+              </a:rPr>
+              <a:t>At risk</a:t>
+            </a:r>
+            <a:endParaRPr lang="en-US"/>
+          </a:p>
+        </p:txBody>
+      </p:sp>
+      <p:sp>
+        <p:nvSpPr>
+          <p:cNvPr id="19" name="work-num-2"/>
+          <p:cNvSpPr txBox="1"/>
+          <p:nvPr/>
+        </p:nvSpPr>
+        <p:spPr>
+          <a:xfrm xmlns:a="http://schemas.openxmlformats.org/drawingml/2006/main">
+            <a:off x="10477500" y="5010150"/>
+            <a:ext cx="571500" cy="228600"/>
+          </a:xfrm>
+          <a:prstGeom xmlns:a="http://schemas.openxmlformats.org/drawingml/2006/main" prst="rect">
+            <a:avLst/>
+          </a:prstGeom>
+          <a:noFill xmlns:a="http://schemas.openxmlformats.org/drawingml/2006/main"/>
+          <a:ln xmlns:a="http://schemas.openxmlformats.org/drawingml/2006/main" w="0">
+            <a:noFill/>
+          </a:ln>
+        </p:spPr>
+        <p:txBody>
+          <a:bodyPr xmlns:a="http://schemas.openxmlformats.org/drawingml/2006/main" wrap="square" lIns="0" tIns="0" rIns="0" bIns="0" anchor="t"/>
+          <a:lstStyle xmlns:a="http://schemas.openxmlformats.org/drawingml/2006/main"/>
+          <a:p xmlns:a="http://schemas.openxmlformats.org/drawingml/2006/main">
+            <a:r>
+              <a:rPr lang="en-US" sz="1350" b="1">
+                <a:solidFill>
+                  <a:srgbClr val="8B6BE8"/>
+                </a:solidFill>
+                <a:latin typeface="Arial"/>
+                <a:ea typeface="Arial"/>
+              </a:rPr>
+              <a:t>03</a:t>
+            </a:r>
+            <a:endParaRPr lang="en-US"/>
+          </a:p>
+        </p:txBody>
+      </p:sp>
+      <p:sp>
+        <p:nvSpPr>
+          <p:cNvPr id="20" name="work-label-2"/>
+          <p:cNvSpPr txBox="1"/>
+          <p:nvPr/>
+        </p:nvSpPr>
+        <p:spPr>
+          <a:xfrm xmlns:a="http://schemas.openxmlformats.org/drawingml/2006/main">
+            <a:off x="11144250" y="5010150"/>
+            <a:ext cx="1428750" cy="228600"/>
+          </a:xfrm>
+          <a:prstGeom xmlns:a="http://schemas.openxmlformats.org/drawingml/2006/main" prst="rect">
+            <a:avLst/>
+          </a:prstGeom>
+          <a:noFill xmlns:a="http://schemas.openxmlformats.org/drawingml/2006/main"/>
+          <a:ln xmlns:a="http://schemas.openxmlformats.org/drawingml/2006/main" w="0">
+            <a:noFill/>
+          </a:ln>
+        </p:spPr>
+        <p:txBody>
+          <a:bodyPr xmlns:a="http://schemas.openxmlformats.org/drawingml/2006/main" wrap="square" lIns="0" tIns="0" rIns="0" bIns="0" anchor="t"/>
+          <a:lstStyle xmlns:a="http://schemas.openxmlformats.org/drawingml/2006/main"/>
+          <a:p xmlns:a="http://schemas.openxmlformats.org/drawingml/2006/main">
+            <a:r>
+              <a:rPr lang="en-US" sz="1350" b="1">
+                <a:solidFill>
+                  <a:srgbClr val="1D2330"/>
+                </a:solidFill>
+                <a:latin typeface="Arial"/>
+                <a:ea typeface="Arial"/>
+              </a:rPr>
+              <a:t>Owner</a:t>
+            </a:r>
+            <a:endParaRPr lang="en-US"/>
+          </a:p>
+        </p:txBody>
+      </p:sp>
+      <p:sp>
+        <p:nvSpPr>
+          <p:cNvPr id="21" name="work-text-2"/>
+          <p:cNvSpPr txBox="1"/>
+          <p:nvPr/>
+        </p:nvSpPr>
+        <p:spPr>
+          <a:xfrm xmlns:a="http://schemas.openxmlformats.org/drawingml/2006/main">
+            <a:off x="12668250" y="5010150"/>
+            <a:ext cx="1143000" cy="228600"/>
+          </a:xfrm>
+          <a:prstGeom xmlns:a="http://schemas.openxmlformats.org/drawingml/2006/main" prst="rect">
+            <a:avLst/>
+          </a:prstGeom>
+          <a:noFill xmlns:a="http://schemas.openxmlformats.org/drawingml/2006/main"/>
+          <a:ln xmlns:a="http://schemas.openxmlformats.org/drawingml/2006/main" w="0">
+            <a:noFill/>
+          </a:ln>
+        </p:spPr>
+        <p:txBody>
+          <a:bodyPr xmlns:a="http://schemas.openxmlformats.org/drawingml/2006/main" wrap="square" lIns="0" tIns="0" rIns="0" bIns="0" anchor="t"/>
+          <a:lstStyle xmlns:a="http://schemas.openxmlformats.org/drawingml/2006/main"/>
+          <a:p xmlns:a="http://schemas.openxmlformats.org/drawingml/2006/main">
+            <a:r>
+              <a:rPr lang="en-US" sz="1200">
+                <a:solidFill>
+                  <a:srgbClr val="93959C"/>
+                </a:solidFill>
+                <a:latin typeface="Arial"/>
+                <a:ea typeface="Arial"/>
+              </a:rPr>
+              <a:t>Named</a:t>
+            </a:r>
+            <a:endParaRPr lang="en-US"/>
+          </a:p>
+        </p:txBody>
+      </p:sp>
+      <p:sp>
+        <p:nvSpPr>
+          <p:cNvPr id="22" name="source"/>
+          <p:cNvSpPr txBox="1"/>
+          <p:nvPr/>
+        </p:nvSpPr>
+        <p:spPr>
+          <a:xfrm xmlns:a="http://schemas.openxmlformats.org/drawingml/2006/main">
+            <a:off x="914400" y="7810500"/>
+            <a:ext cx="10953750" cy="209550"/>
           </a:xfrm>
           <a:prstGeom xmlns:a="http://schemas.openxmlformats.org/drawingml/2006/main" prst="rect">
             <a:avLst/>
@@ -827,15 +2059,15 @@
                 <a:latin typeface="Arial"/>
                 <a:ea typeface="Arial"/>
               </a:rPr>
-              <a:t>OfficeKit original clean-room calibration · fictional content · 2026-08-29</a:t>
-            </a:r>
-            <a:endParaRPr lang="en-US"/>
-          </a:p>
-        </p:txBody>
-      </p:sp>
-      <p:sp>
-        <p:nvSpPr>
-          <p:cNvPr id="11" name="page-number"/>
+              <a:t>Source: illustrative calibration brief · every claim is fictional and bounded</a:t>
+            </a:r>
+            <a:endParaRPr lang="en-US"/>
+          </a:p>
+        </p:txBody>
+      </p:sp>
+      <p:sp>
+        <p:nvSpPr>
+          <p:cNvPr id="23" name="page-number"/>
           <p:cNvSpPr txBox="1"/>
           <p:nvPr/>
         </p:nvSpPr>
@@ -865,401 +2097,7 @@
                 <a:latin typeface="Arial"/>
                 <a:ea typeface="Arial"/>
               </a:rPr>
-              <a:t>1 / 6</a:t>
-            </a:r>
-            <a:endParaRPr lang="en-US"/>
-          </a:p>
-        </p:txBody>
-      </p:sp>
-      <p:sp>
-        <p:nvSpPr>
-          <p:cNvPr id="12" name="anchor-field"/>
-          <p:cNvSpPr/>
-          <p:nvPr/>
-        </p:nvSpPr>
-        <p:spPr>
-          <a:xfrm xmlns:a="http://schemas.openxmlformats.org/drawingml/2006/main">
-            <a:off x="11620500" y="1790700"/>
-            <a:ext cx="2095500" cy="2286000"/>
-          </a:xfrm>
-          <a:prstGeom xmlns:a="http://schemas.openxmlformats.org/drawingml/2006/main" prst="rect">
-            <a:avLst/>
-          </a:prstGeom>
-          <a:solidFill xmlns:a="http://schemas.openxmlformats.org/drawingml/2006/main">
-            <a:srgbClr val="F3F5F8"/>
-          </a:solidFill>
-          <a:ln xmlns:a="http://schemas.openxmlformats.org/drawingml/2006/main" w="25400">
-            <a:solidFill>
-              <a:srgbClr val="8B6BE8"/>
-            </a:solidFill>
-            <a:prstDash val="solid"/>
-          </a:ln>
-        </p:spPr>
-        <p:txBody>
-          <a:bodyPr xmlns:a="http://schemas.openxmlformats.org/drawingml/2006/main" wrap="square" lIns="0" tIns="0" rIns="0" bIns="0" anchor="t"/>
-          <a:lstStyle xmlns:a="http://schemas.openxmlformats.org/drawingml/2006/main"/>
-          <a:p xmlns:a="http://schemas.openxmlformats.org/drawingml/2006/main">
-            <a:r>
-              <a:rPr lang="en-US"/>
-              <a:t/>
-            </a:r>
-            <a:endParaRPr lang="en-US"/>
-          </a:p>
-        </p:txBody>
-      </p:sp>
-      <p:sp>
-        <p:nvSpPr>
-          <p:cNvPr id="13" name="anchor-grid-0-0"/>
-          <p:cNvSpPr/>
-          <p:nvPr/>
-        </p:nvSpPr>
-        <p:spPr>
-          <a:xfrm xmlns:a="http://schemas.openxmlformats.org/drawingml/2006/main">
-            <a:off x="11925300" y="2152650"/>
-            <a:ext cx="266700" cy="285750"/>
-          </a:xfrm>
-          <a:prstGeom xmlns:a="http://schemas.openxmlformats.org/drawingml/2006/main" prst="rect">
-            <a:avLst/>
-          </a:prstGeom>
-          <a:solidFill xmlns:a="http://schemas.openxmlformats.org/drawingml/2006/main">
-            <a:srgbClr val="8B6BE8"/>
-          </a:solidFill>
-          <a:ln xmlns:a="http://schemas.openxmlformats.org/drawingml/2006/main" w="12700">
-            <a:solidFill>
-              <a:srgbClr val="8B6BE8"/>
-            </a:solidFill>
-            <a:prstDash val="solid"/>
-          </a:ln>
-        </p:spPr>
-        <p:txBody>
-          <a:bodyPr xmlns:a="http://schemas.openxmlformats.org/drawingml/2006/main" wrap="square" lIns="0" tIns="0" rIns="0" bIns="0" anchor="t"/>
-          <a:lstStyle xmlns:a="http://schemas.openxmlformats.org/drawingml/2006/main"/>
-          <a:p xmlns:a="http://schemas.openxmlformats.org/drawingml/2006/main">
-            <a:r>
-              <a:rPr lang="en-US"/>
-              <a:t/>
-            </a:r>
-            <a:endParaRPr lang="en-US"/>
-          </a:p>
-        </p:txBody>
-      </p:sp>
-      <p:sp>
-        <p:nvSpPr>
-          <p:cNvPr id="14" name="anchor-grid-0-1"/>
-          <p:cNvSpPr/>
-          <p:nvPr/>
-        </p:nvSpPr>
-        <p:spPr>
-          <a:xfrm xmlns:a="http://schemas.openxmlformats.org/drawingml/2006/main">
-            <a:off x="12420600" y="2152650"/>
-            <a:ext cx="266700" cy="285750"/>
-          </a:xfrm>
-          <a:prstGeom xmlns:a="http://schemas.openxmlformats.org/drawingml/2006/main" prst="rect">
-            <a:avLst/>
-          </a:prstGeom>
-          <a:solidFill xmlns:a="http://schemas.openxmlformats.org/drawingml/2006/main">
-            <a:srgbClr val="8B6BE8"/>
-          </a:solidFill>
-          <a:ln xmlns:a="http://schemas.openxmlformats.org/drawingml/2006/main" w="12700">
-            <a:solidFill>
-              <a:srgbClr val="8B6BE8"/>
-            </a:solidFill>
-            <a:prstDash val="solid"/>
-          </a:ln>
-        </p:spPr>
-        <p:txBody>
-          <a:bodyPr xmlns:a="http://schemas.openxmlformats.org/drawingml/2006/main" wrap="square" lIns="0" tIns="0" rIns="0" bIns="0" anchor="t"/>
-          <a:lstStyle xmlns:a="http://schemas.openxmlformats.org/drawingml/2006/main"/>
-          <a:p xmlns:a="http://schemas.openxmlformats.org/drawingml/2006/main">
-            <a:r>
-              <a:rPr lang="en-US"/>
-              <a:t/>
-            </a:r>
-            <a:endParaRPr lang="en-US"/>
-          </a:p>
-        </p:txBody>
-      </p:sp>
-      <p:sp>
-        <p:nvSpPr>
-          <p:cNvPr id="15" name="anchor-grid-0-2"/>
-          <p:cNvSpPr/>
-          <p:nvPr/>
-        </p:nvSpPr>
-        <p:spPr>
-          <a:xfrm xmlns:a="http://schemas.openxmlformats.org/drawingml/2006/main">
-            <a:off x="12915900" y="2152650"/>
-            <a:ext cx="266700" cy="285750"/>
-          </a:xfrm>
-          <a:prstGeom xmlns:a="http://schemas.openxmlformats.org/drawingml/2006/main" prst="rect">
-            <a:avLst/>
-          </a:prstGeom>
-          <a:solidFill xmlns:a="http://schemas.openxmlformats.org/drawingml/2006/main">
-            <a:srgbClr val="FFFFFF"/>
-          </a:solidFill>
-          <a:ln xmlns:a="http://schemas.openxmlformats.org/drawingml/2006/main" w="12700">
-            <a:solidFill>
-              <a:srgbClr val="8B6BE8"/>
-            </a:solidFill>
-            <a:prstDash val="solid"/>
-          </a:ln>
-        </p:spPr>
-        <p:txBody>
-          <a:bodyPr xmlns:a="http://schemas.openxmlformats.org/drawingml/2006/main" wrap="square" lIns="0" tIns="0" rIns="0" bIns="0" anchor="t"/>
-          <a:lstStyle xmlns:a="http://schemas.openxmlformats.org/drawingml/2006/main"/>
-          <a:p xmlns:a="http://schemas.openxmlformats.org/drawingml/2006/main">
-            <a:r>
-              <a:rPr lang="en-US"/>
-              <a:t/>
-            </a:r>
-            <a:endParaRPr lang="en-US"/>
-          </a:p>
-        </p:txBody>
-      </p:sp>
-      <p:sp>
-        <p:nvSpPr>
-          <p:cNvPr id="16" name="anchor-grid-1-0"/>
-          <p:cNvSpPr/>
-          <p:nvPr/>
-        </p:nvSpPr>
-        <p:spPr>
-          <a:xfrm xmlns:a="http://schemas.openxmlformats.org/drawingml/2006/main">
-            <a:off x="11925300" y="2686050"/>
-            <a:ext cx="266700" cy="285750"/>
-          </a:xfrm>
-          <a:prstGeom xmlns:a="http://schemas.openxmlformats.org/drawingml/2006/main" prst="rect">
-            <a:avLst/>
-          </a:prstGeom>
-          <a:solidFill xmlns:a="http://schemas.openxmlformats.org/drawingml/2006/main">
-            <a:srgbClr val="8B6BE8"/>
-          </a:solidFill>
-          <a:ln xmlns:a="http://schemas.openxmlformats.org/drawingml/2006/main" w="12700">
-            <a:solidFill>
-              <a:srgbClr val="8B6BE8"/>
-            </a:solidFill>
-            <a:prstDash val="solid"/>
-          </a:ln>
-        </p:spPr>
-        <p:txBody>
-          <a:bodyPr xmlns:a="http://schemas.openxmlformats.org/drawingml/2006/main" wrap="square" lIns="0" tIns="0" rIns="0" bIns="0" anchor="t"/>
-          <a:lstStyle xmlns:a="http://schemas.openxmlformats.org/drawingml/2006/main"/>
-          <a:p xmlns:a="http://schemas.openxmlformats.org/drawingml/2006/main">
-            <a:r>
-              <a:rPr lang="en-US"/>
-              <a:t/>
-            </a:r>
-            <a:endParaRPr lang="en-US"/>
-          </a:p>
-        </p:txBody>
-      </p:sp>
-      <p:sp>
-        <p:nvSpPr>
-          <p:cNvPr id="17" name="anchor-grid-1-1"/>
-          <p:cNvSpPr/>
-          <p:nvPr/>
-        </p:nvSpPr>
-        <p:spPr>
-          <a:xfrm xmlns:a="http://schemas.openxmlformats.org/drawingml/2006/main">
-            <a:off x="12420600" y="2686050"/>
-            <a:ext cx="266700" cy="285750"/>
-          </a:xfrm>
-          <a:prstGeom xmlns:a="http://schemas.openxmlformats.org/drawingml/2006/main" prst="rect">
-            <a:avLst/>
-          </a:prstGeom>
-          <a:solidFill xmlns:a="http://schemas.openxmlformats.org/drawingml/2006/main">
-            <a:srgbClr val="8B6BE8"/>
-          </a:solidFill>
-          <a:ln xmlns:a="http://schemas.openxmlformats.org/drawingml/2006/main" w="12700">
-            <a:solidFill>
-              <a:srgbClr val="8B6BE8"/>
-            </a:solidFill>
-            <a:prstDash val="solid"/>
-          </a:ln>
-        </p:spPr>
-        <p:txBody>
-          <a:bodyPr xmlns:a="http://schemas.openxmlformats.org/drawingml/2006/main" wrap="square" lIns="0" tIns="0" rIns="0" bIns="0" anchor="t"/>
-          <a:lstStyle xmlns:a="http://schemas.openxmlformats.org/drawingml/2006/main"/>
-          <a:p xmlns:a="http://schemas.openxmlformats.org/drawingml/2006/main">
-            <a:r>
-              <a:rPr lang="en-US"/>
-              <a:t/>
-            </a:r>
-            <a:endParaRPr lang="en-US"/>
-          </a:p>
-        </p:txBody>
-      </p:sp>
-      <p:sp>
-        <p:nvSpPr>
-          <p:cNvPr id="18" name="anchor-grid-1-2"/>
-          <p:cNvSpPr/>
-          <p:nvPr/>
-        </p:nvSpPr>
-        <p:spPr>
-          <a:xfrm xmlns:a="http://schemas.openxmlformats.org/drawingml/2006/main">
-            <a:off x="12915900" y="2686050"/>
-            <a:ext cx="266700" cy="285750"/>
-          </a:xfrm>
-          <a:prstGeom xmlns:a="http://schemas.openxmlformats.org/drawingml/2006/main" prst="rect">
-            <a:avLst/>
-          </a:prstGeom>
-          <a:solidFill xmlns:a="http://schemas.openxmlformats.org/drawingml/2006/main">
-            <a:srgbClr val="FFFFFF"/>
-          </a:solidFill>
-          <a:ln xmlns:a="http://schemas.openxmlformats.org/drawingml/2006/main" w="12700">
-            <a:solidFill>
-              <a:srgbClr val="8B6BE8"/>
-            </a:solidFill>
-            <a:prstDash val="solid"/>
-          </a:ln>
-        </p:spPr>
-        <p:txBody>
-          <a:bodyPr xmlns:a="http://schemas.openxmlformats.org/drawingml/2006/main" wrap="square" lIns="0" tIns="0" rIns="0" bIns="0" anchor="t"/>
-          <a:lstStyle xmlns:a="http://schemas.openxmlformats.org/drawingml/2006/main"/>
-          <a:p xmlns:a="http://schemas.openxmlformats.org/drawingml/2006/main">
-            <a:r>
-              <a:rPr lang="en-US"/>
-              <a:t/>
-            </a:r>
-            <a:endParaRPr lang="en-US"/>
-          </a:p>
-        </p:txBody>
-      </p:sp>
-      <p:sp>
-        <p:nvSpPr>
-          <p:cNvPr id="19" name="anchor-grid-2-0"/>
-          <p:cNvSpPr/>
-          <p:nvPr/>
-        </p:nvSpPr>
-        <p:spPr>
-          <a:xfrm xmlns:a="http://schemas.openxmlformats.org/drawingml/2006/main">
-            <a:off x="11925300" y="3219450"/>
-            <a:ext cx="266700" cy="285750"/>
-          </a:xfrm>
-          <a:prstGeom xmlns:a="http://schemas.openxmlformats.org/drawingml/2006/main" prst="rect">
-            <a:avLst/>
-          </a:prstGeom>
-          <a:solidFill xmlns:a="http://schemas.openxmlformats.org/drawingml/2006/main">
-            <a:srgbClr val="8B6BE8"/>
-          </a:solidFill>
-          <a:ln xmlns:a="http://schemas.openxmlformats.org/drawingml/2006/main" w="12700">
-            <a:solidFill>
-              <a:srgbClr val="8B6BE8"/>
-            </a:solidFill>
-            <a:prstDash val="solid"/>
-          </a:ln>
-        </p:spPr>
-        <p:txBody>
-          <a:bodyPr xmlns:a="http://schemas.openxmlformats.org/drawingml/2006/main" wrap="square" lIns="0" tIns="0" rIns="0" bIns="0" anchor="t"/>
-          <a:lstStyle xmlns:a="http://schemas.openxmlformats.org/drawingml/2006/main"/>
-          <a:p xmlns:a="http://schemas.openxmlformats.org/drawingml/2006/main">
-            <a:r>
-              <a:rPr lang="en-US"/>
-              <a:t/>
-            </a:r>
-            <a:endParaRPr lang="en-US"/>
-          </a:p>
-        </p:txBody>
-      </p:sp>
-      <p:sp>
-        <p:nvSpPr>
-          <p:cNvPr id="20" name="anchor-grid-2-1"/>
-          <p:cNvSpPr/>
-          <p:nvPr/>
-        </p:nvSpPr>
-        <p:spPr>
-          <a:xfrm xmlns:a="http://schemas.openxmlformats.org/drawingml/2006/main">
-            <a:off x="12420600" y="3219450"/>
-            <a:ext cx="266700" cy="285750"/>
-          </a:xfrm>
-          <a:prstGeom xmlns:a="http://schemas.openxmlformats.org/drawingml/2006/main" prst="rect">
-            <a:avLst/>
-          </a:prstGeom>
-          <a:solidFill xmlns:a="http://schemas.openxmlformats.org/drawingml/2006/main">
-            <a:srgbClr val="8B6BE8"/>
-          </a:solidFill>
-          <a:ln xmlns:a="http://schemas.openxmlformats.org/drawingml/2006/main" w="12700">
-            <a:solidFill>
-              <a:srgbClr val="8B6BE8"/>
-            </a:solidFill>
-            <a:prstDash val="solid"/>
-          </a:ln>
-        </p:spPr>
-        <p:txBody>
-          <a:bodyPr xmlns:a="http://schemas.openxmlformats.org/drawingml/2006/main" wrap="square" lIns="0" tIns="0" rIns="0" bIns="0" anchor="t"/>
-          <a:lstStyle xmlns:a="http://schemas.openxmlformats.org/drawingml/2006/main"/>
-          <a:p xmlns:a="http://schemas.openxmlformats.org/drawingml/2006/main">
-            <a:r>
-              <a:rPr lang="en-US"/>
-              <a:t/>
-            </a:r>
-            <a:endParaRPr lang="en-US"/>
-          </a:p>
-        </p:txBody>
-      </p:sp>
-      <p:sp>
-        <p:nvSpPr>
-          <p:cNvPr id="21" name="anchor-grid-2-2"/>
-          <p:cNvSpPr/>
-          <p:nvPr/>
-        </p:nvSpPr>
-        <p:spPr>
-          <a:xfrm xmlns:a="http://schemas.openxmlformats.org/drawingml/2006/main">
-            <a:off x="12915900" y="3219450"/>
-            <a:ext cx="266700" cy="285750"/>
-          </a:xfrm>
-          <a:prstGeom xmlns:a="http://schemas.openxmlformats.org/drawingml/2006/main" prst="rect">
-            <a:avLst/>
-          </a:prstGeom>
-          <a:solidFill xmlns:a="http://schemas.openxmlformats.org/drawingml/2006/main">
-            <a:srgbClr val="FFFFFF"/>
-          </a:solidFill>
-          <a:ln xmlns:a="http://schemas.openxmlformats.org/drawingml/2006/main" w="12700">
-            <a:solidFill>
-              <a:srgbClr val="8B6BE8"/>
-            </a:solidFill>
-            <a:prstDash val="solid"/>
-          </a:ln>
-        </p:spPr>
-        <p:txBody>
-          <a:bodyPr xmlns:a="http://schemas.openxmlformats.org/drawingml/2006/main" wrap="square" lIns="0" tIns="0" rIns="0" bIns="0" anchor="t"/>
-          <a:lstStyle xmlns:a="http://schemas.openxmlformats.org/drawingml/2006/main"/>
-          <a:p xmlns:a="http://schemas.openxmlformats.org/drawingml/2006/main">
-            <a:r>
-              <a:rPr lang="en-US"/>
-              <a:t/>
-            </a:r>
-            <a:endParaRPr lang="en-US"/>
-          </a:p>
-        </p:txBody>
-      </p:sp>
-      <p:sp>
-        <p:nvSpPr>
-          <p:cNvPr id="22" name="anchor-axis"/>
-          <p:cNvSpPr/>
-          <p:nvPr/>
-        </p:nvSpPr>
-        <p:spPr>
-          <a:xfrm xmlns:a="http://schemas.openxmlformats.org/drawingml/2006/main">
-            <a:off x="12668250" y="1638300"/>
-            <a:ext cx="0" cy="2743200"/>
-          </a:xfrm>
-          <a:prstGeom xmlns:a="http://schemas.openxmlformats.org/drawingml/2006/main" prst="line">
-            <a:avLst/>
-          </a:prstGeom>
-          <a:noFill xmlns:a="http://schemas.openxmlformats.org/drawingml/2006/main"/>
-          <a:ln xmlns:a="http://schemas.openxmlformats.org/drawingml/2006/main" w="50800">
-            <a:solidFill>
-              <a:srgbClr val="1D2330"/>
-            </a:solidFill>
-            <a:prstDash val="solid"/>
-          </a:ln>
-        </p:spPr>
-        <p:txBody>
-          <a:bodyPr xmlns:a="http://schemas.openxmlformats.org/drawingml/2006/main" wrap="square" lIns="0" tIns="0" rIns="0" bIns="0" anchor="t"/>
-          <a:lstStyle xmlns:a="http://schemas.openxmlformats.org/drawingml/2006/main"/>
-          <a:p xmlns:a="http://schemas.openxmlformats.org/drawingml/2006/main">
-            <a:r>
-              <a:rPr lang="en-US"/>
-              <a:t/>
+              <a:t>2 / 6</a:t>
             </a:r>
             <a:endParaRPr lang="en-US"/>
           </a:p>
@@ -1273,13 +2111,13 @@
 </p:sld>
 </file>
 
-<file path=ppt/slides/slide2.xml><?xml version="1.0" encoding="utf-8"?>
+<file path=ppt/slides/slide3.xml><?xml version="1.0" encoding="utf-8"?>
 <p:sld xmlns:p="http://schemas.openxmlformats.org/presentationml/2006/main">
-  <p:cSld name="Argument">
+  <p:cSld name="Evidence">
     <p:bg>
       <p:bgPr>
         <a:blipFill xmlns:a="http://schemas.openxmlformats.org/drawingml/2006/main">
-          <a:blip xmlns:r="http://schemas.openxmlformats.org/officeDocument/2006/relationships" r:embed="rIdOfficeKitImaged71bfa074cda59bb_1"/>
+          <a:blip xmlns:r="http://schemas.openxmlformats.org/officeDocument/2006/relationships" r:embed="rIdOfficeKitImage59ee3aa5202fd02f_1"/>
           <a:stretch>
             <a:fillRect/>
           </a:stretch>
@@ -1302,844 +2140,6 @@
       </p:grpSpPr>
       <p:sp>
         <p:nvSpPr>
-          <p:cNvPr id="2" name="argument-paper-scrim"/>
-          <p:cNvSpPr/>
-          <p:nvPr/>
-        </p:nvSpPr>
-        <p:spPr>
-          <a:xfrm xmlns:a="http://schemas.openxmlformats.org/drawingml/2006/main">
-            <a:off x="0" y="0"/>
-            <a:ext cx="7429500" cy="8572500"/>
-          </a:xfrm>
-          <a:prstGeom xmlns:a="http://schemas.openxmlformats.org/drawingml/2006/main" prst="rect">
-            <a:avLst/>
-          </a:prstGeom>
-          <a:solidFill xmlns:a="http://schemas.openxmlformats.org/drawingml/2006/main">
-            <a:srgbClr val="FFFFFF">
-              <a:alpha val="96000"/>
-            </a:srgbClr>
-          </a:solidFill>
-          <a:ln xmlns:a="http://schemas.openxmlformats.org/drawingml/2006/main" w="0">
-            <a:solidFill>
-              <a:srgbClr val="FFFFFF"/>
-            </a:solidFill>
-            <a:prstDash val="solid"/>
-          </a:ln>
-        </p:spPr>
-        <p:txBody>
-          <a:bodyPr xmlns:a="http://schemas.openxmlformats.org/drawingml/2006/main" wrap="square" lIns="0" tIns="0" rIns="0" bIns="0" anchor="t"/>
-          <a:lstStyle xmlns:a="http://schemas.openxmlformats.org/drawingml/2006/main"/>
-          <a:p xmlns:a="http://schemas.openxmlformats.org/drawingml/2006/main">
-            <a:r>
-              <a:rPr lang="en-US"/>
-              <a:t/>
-            </a:r>
-            <a:endParaRPr lang="en-US"/>
-          </a:p>
-        </p:txBody>
-      </p:sp>
-      <p:pic>
-        <p:nvPicPr>
-          <p:cNvPr id="3" name="argument-photo-band">
-            <a:extLst xmlns:a="http://schemas.openxmlformats.org/drawingml/2006/main">
-              <a:ext uri="{C183D7F6-B498-43B3-948B-1728B52AA6E4}">
-                <adec:decorative xmlns:adec="http://schemas.microsoft.com/office/drawing/2017/decorative" val="1"/>
-              </a:ext>
-            </a:extLst>
-          </p:cNvPr>
-          <p:cNvPicPr/>
-          <p:nvPr/>
-        </p:nvPicPr>
-        <p:blipFill>
-          <a:blip xmlns:r="http://schemas.openxmlformats.org/officeDocument/2006/relationships" xmlns:a="http://schemas.openxmlformats.org/drawingml/2006/main" r:embed="rIdOfficeKitImage59ee3aa5202fd02f_1"/>
-          <a:srcRect xmlns:a="http://schemas.openxmlformats.org/drawingml/2006/main" l="0" t="47258" r="0" b="47258"/>
-          <a:stretch xmlns:a="http://schemas.openxmlformats.org/drawingml/2006/main">
-            <a:fillRect/>
-          </a:stretch>
-        </p:blipFill>
-        <p:spPr>
-          <a:xfrm xmlns:a="http://schemas.openxmlformats.org/drawingml/2006/main">
-            <a:off x="0" y="0"/>
-            <a:ext cx="15240000" cy="1485900"/>
-          </a:xfrm>
-          <a:prstGeom xmlns:a="http://schemas.openxmlformats.org/drawingml/2006/main" prst="rect">
-            <a:avLst/>
-          </a:prstGeom>
-        </p:spPr>
-      </p:pic>
-      <p:sp>
-        <p:nvSpPr>
-          <p:cNvPr id="4" name="argument-photo-scrim"/>
-          <p:cNvSpPr/>
-          <p:nvPr/>
-        </p:nvSpPr>
-        <p:spPr>
-          <a:xfrm xmlns:a="http://schemas.openxmlformats.org/drawingml/2006/main">
-            <a:off x="0" y="0"/>
-            <a:ext cx="15240000" cy="1485900"/>
-          </a:xfrm>
-          <a:prstGeom xmlns:a="http://schemas.openxmlformats.org/drawingml/2006/main" prst="rect">
-            <a:avLst/>
-          </a:prstGeom>
-          <a:solidFill xmlns:a="http://schemas.openxmlformats.org/drawingml/2006/main">
-            <a:srgbClr val="1D2330">
-              <a:alpha val="62000"/>
-            </a:srgbClr>
-          </a:solidFill>
-          <a:ln xmlns:a="http://schemas.openxmlformats.org/drawingml/2006/main" w="0">
-            <a:solidFill>
-              <a:srgbClr val="1D2330"/>
-            </a:solidFill>
-            <a:prstDash val="solid"/>
-          </a:ln>
-        </p:spPr>
-        <p:txBody>
-          <a:bodyPr xmlns:a="http://schemas.openxmlformats.org/drawingml/2006/main" wrap="square" lIns="0" tIns="0" rIns="0" bIns="0" anchor="t"/>
-          <a:lstStyle xmlns:a="http://schemas.openxmlformats.org/drawingml/2006/main"/>
-          <a:p xmlns:a="http://schemas.openxmlformats.org/drawingml/2006/main">
-            <a:r>
-              <a:rPr lang="en-US"/>
-              <a:t/>
-            </a:r>
-            <a:endParaRPr lang="en-US"/>
-          </a:p>
-        </p:txBody>
-      </p:sp>
-      <p:sp>
-        <p:nvSpPr>
-          <p:cNvPr id="5" name="argument-photo-rule"/>
-          <p:cNvSpPr/>
-          <p:nvPr/>
-        </p:nvSpPr>
-        <p:spPr>
-          <a:xfrm xmlns:a="http://schemas.openxmlformats.org/drawingml/2006/main">
-            <a:off x="914400" y="1438275"/>
-            <a:ext cx="13411200" cy="0"/>
-          </a:xfrm>
-          <a:prstGeom xmlns:a="http://schemas.openxmlformats.org/drawingml/2006/main" prst="line">
-            <a:avLst/>
-          </a:prstGeom>
-          <a:noFill xmlns:a="http://schemas.openxmlformats.org/drawingml/2006/main"/>
-          <a:ln xmlns:a="http://schemas.openxmlformats.org/drawingml/2006/main" w="38100">
-            <a:solidFill>
-              <a:srgbClr val="8B6BE8"/>
-            </a:solidFill>
-            <a:prstDash val="solid"/>
-          </a:ln>
-        </p:spPr>
-        <p:txBody>
-          <a:bodyPr xmlns:a="http://schemas.openxmlformats.org/drawingml/2006/main" wrap="square" lIns="0" tIns="0" rIns="0" bIns="0" anchor="t"/>
-          <a:lstStyle xmlns:a="http://schemas.openxmlformats.org/drawingml/2006/main"/>
-          <a:p xmlns:a="http://schemas.openxmlformats.org/drawingml/2006/main">
-            <a:r>
-              <a:rPr lang="en-US"/>
-              <a:t/>
-            </a:r>
-            <a:endParaRPr lang="en-US"/>
-          </a:p>
-        </p:txBody>
-      </p:sp>
-      <p:sp>
-        <p:nvSpPr>
-          <p:cNvPr id="6" name="MOONLIT WORK REPORT · ARGUMENT"/>
-          <p:cNvSpPr txBox="1"/>
-          <p:nvPr/>
-        </p:nvSpPr>
-        <p:spPr>
-          <a:xfrm xmlns:a="http://schemas.openxmlformats.org/drawingml/2006/main">
-            <a:off x="914400" y="228600"/>
-            <a:ext cx="9525000" cy="190500"/>
-          </a:xfrm>
-          <a:prstGeom xmlns:a="http://schemas.openxmlformats.org/drawingml/2006/main" prst="rect">
-            <a:avLst/>
-          </a:prstGeom>
-          <a:noFill xmlns:a="http://schemas.openxmlformats.org/drawingml/2006/main"/>
-          <a:ln xmlns:a="http://schemas.openxmlformats.org/drawingml/2006/main" w="0">
-            <a:noFill/>
-          </a:ln>
-        </p:spPr>
-        <p:txBody>
-          <a:bodyPr xmlns:a="http://schemas.openxmlformats.org/drawingml/2006/main" wrap="square" lIns="0" tIns="0" rIns="0" bIns="0" anchor="t"/>
-          <a:lstStyle xmlns:a="http://schemas.openxmlformats.org/drawingml/2006/main"/>
-          <a:p xmlns:a="http://schemas.openxmlformats.org/drawingml/2006/main">
-            <a:r>
-              <a:rPr lang="en-US" sz="1050" b="1">
-                <a:solidFill>
-                  <a:srgbClr val="8B6BE8"/>
-                </a:solidFill>
-                <a:latin typeface="Arial"/>
-                <a:ea typeface="Arial"/>
-              </a:rPr>
-              <a:t>MOONLIT WORK REPORT · ARGUMENT</a:t>
-            </a:r>
-            <a:endParaRPr lang="en-US"/>
-          </a:p>
-        </p:txBody>
-      </p:sp>
-      <p:sp>
-        <p:nvSpPr>
-          <p:cNvPr id="7" name="argument-title"/>
-          <p:cNvSpPr txBox="1"/>
-          <p:nvPr/>
-        </p:nvSpPr>
-        <p:spPr>
-          <a:xfrm xmlns:a="http://schemas.openxmlformats.org/drawingml/2006/main">
-            <a:off x="914400" y="495300"/>
-            <a:ext cx="12001500" cy="457200"/>
-          </a:xfrm>
-          <a:prstGeom xmlns:a="http://schemas.openxmlformats.org/drawingml/2006/main" prst="rect">
-            <a:avLst/>
-          </a:prstGeom>
-          <a:noFill xmlns:a="http://schemas.openxmlformats.org/drawingml/2006/main"/>
-          <a:ln xmlns:a="http://schemas.openxmlformats.org/drawingml/2006/main" w="0">
-            <a:noFill/>
-          </a:ln>
-        </p:spPr>
-        <p:txBody>
-          <a:bodyPr xmlns:a="http://schemas.openxmlformats.org/drawingml/2006/main" wrap="square" lIns="0" tIns="0" rIns="0" bIns="0" anchor="t"/>
-          <a:lstStyle xmlns:a="http://schemas.openxmlformats.org/drawingml/2006/main"/>
-          <a:p xmlns:a="http://schemas.openxmlformats.org/drawingml/2006/main">
-            <a:r>
-              <a:rPr lang="en-US" sz="2550" b="1">
-                <a:solidFill>
-                  <a:srgbClr val="FFFFFF"/>
-                </a:solidFill>
-                <a:latin typeface="Arial"/>
-                <a:ea typeface="Arial"/>
-              </a:rPr>
-              <a:t>The constraint owns the page</a:t>
-            </a:r>
-            <a:endParaRPr lang="en-US"/>
-          </a:p>
-        </p:txBody>
-      </p:sp>
-      <p:sp>
-        <p:nvSpPr>
-          <p:cNvPr id="8" name="argument-basis"/>
-          <p:cNvSpPr txBox="1"/>
-          <p:nvPr/>
-        </p:nvSpPr>
-        <p:spPr>
-          <a:xfrm xmlns:a="http://schemas.openxmlformats.org/drawingml/2006/main">
-            <a:off x="952500" y="1066800"/>
-            <a:ext cx="11049000" cy="228600"/>
-          </a:xfrm>
-          <a:prstGeom xmlns:a="http://schemas.openxmlformats.org/drawingml/2006/main" prst="rect">
-            <a:avLst/>
-          </a:prstGeom>
-          <a:noFill xmlns:a="http://schemas.openxmlformats.org/drawingml/2006/main"/>
-          <a:ln xmlns:a="http://schemas.openxmlformats.org/drawingml/2006/main" w="0">
-            <a:noFill/>
-          </a:ln>
-        </p:spPr>
-        <p:txBody>
-          <a:bodyPr xmlns:a="http://schemas.openxmlformats.org/drawingml/2006/main" wrap="square" lIns="0" tIns="0" rIns="0" bIns="0" anchor="t"/>
-          <a:lstStyle xmlns:a="http://schemas.openxmlformats.org/drawingml/2006/main"/>
-          <a:p xmlns:a="http://schemas.openxmlformats.org/drawingml/2006/main">
-            <a:r>
-              <a:rPr lang="en-US" sz="1200">
-                <a:solidFill>
-                  <a:srgbClr val="F0F3F2"/>
-                </a:solidFill>
-                <a:latin typeface="Arial"/>
-                <a:ea typeface="Arial"/>
-              </a:rPr>
-              <a:t>Status, cause, owner and date stay together.</a:t>
-            </a:r>
-            <a:endParaRPr lang="en-US"/>
-          </a:p>
-        </p:txBody>
-      </p:sp>
-      <p:sp>
-        <p:nvSpPr>
-          <p:cNvPr id="9" name="work-status"/>
-          <p:cNvSpPr txBox="1"/>
-          <p:nvPr/>
-        </p:nvSpPr>
-        <p:spPr>
-          <a:xfrm xmlns:a="http://schemas.openxmlformats.org/drawingml/2006/main">
-            <a:off x="1104900" y="3352800"/>
-            <a:ext cx="2857500" cy="228600"/>
-          </a:xfrm>
-          <a:prstGeom xmlns:a="http://schemas.openxmlformats.org/drawingml/2006/main" prst="rect">
-            <a:avLst/>
-          </a:prstGeom>
-          <a:noFill xmlns:a="http://schemas.openxmlformats.org/drawingml/2006/main"/>
-          <a:ln xmlns:a="http://schemas.openxmlformats.org/drawingml/2006/main" w="0">
-            <a:noFill/>
-          </a:ln>
-        </p:spPr>
-        <p:txBody>
-          <a:bodyPr xmlns:a="http://schemas.openxmlformats.org/drawingml/2006/main" wrap="square" lIns="0" tIns="0" rIns="0" bIns="0" anchor="t"/>
-          <a:lstStyle xmlns:a="http://schemas.openxmlformats.org/drawingml/2006/main"/>
-          <a:p xmlns:a="http://schemas.openxmlformats.org/drawingml/2006/main">
-            <a:r>
-              <a:rPr lang="en-US" sz="1125" b="1">
-                <a:solidFill>
-                  <a:srgbClr val="8B6BE8"/>
-                </a:solidFill>
-                <a:latin typeface="Arial"/>
-                <a:ea typeface="Arial"/>
-              </a:rPr>
-              <a:t>OPERATING SIGNAL</a:t>
-            </a:r>
-            <a:endParaRPr lang="en-US"/>
-          </a:p>
-        </p:txBody>
-      </p:sp>
-      <p:sp>
-        <p:nvSpPr>
-          <p:cNvPr id="10" name="work-headline"/>
-          <p:cNvSpPr txBox="1"/>
-          <p:nvPr/>
-        </p:nvSpPr>
-        <p:spPr>
-          <a:xfrm xmlns:a="http://schemas.openxmlformats.org/drawingml/2006/main">
-            <a:off x="1104900" y="3790950"/>
-            <a:ext cx="6667500" cy="723900"/>
-          </a:xfrm>
-          <a:prstGeom xmlns:a="http://schemas.openxmlformats.org/drawingml/2006/main" prst="rect">
-            <a:avLst/>
-          </a:prstGeom>
-          <a:noFill xmlns:a="http://schemas.openxmlformats.org/drawingml/2006/main"/>
-          <a:ln xmlns:a="http://schemas.openxmlformats.org/drawingml/2006/main" w="0">
-            <a:noFill/>
-          </a:ln>
-        </p:spPr>
-        <p:txBody>
-          <a:bodyPr xmlns:a="http://schemas.openxmlformats.org/drawingml/2006/main" wrap="square" lIns="0" tIns="0" rIns="0" bIns="0" anchor="t"/>
-          <a:lstStyle xmlns:a="http://schemas.openxmlformats.org/drawingml/2006/main"/>
-          <a:p xmlns:a="http://schemas.openxmlformats.org/drawingml/2006/main">
-            <a:r>
-              <a:rPr lang="en-US" sz="2550" b="1">
-                <a:solidFill>
-                  <a:srgbClr val="1D2330"/>
-                </a:solidFill>
-                <a:latin typeface="Arial"/>
-                <a:ea typeface="Arial"/>
-              </a:rPr>
-              <a:t>The queue is healthy; the handoff is not.</a:t>
-            </a:r>
-            <a:endParaRPr lang="en-US"/>
-          </a:p>
-        </p:txBody>
-      </p:sp>
-      <p:sp>
-        <p:nvSpPr>
-          <p:cNvPr id="11" name="work-body"/>
-          <p:cNvSpPr txBox="1"/>
-          <p:nvPr/>
-        </p:nvSpPr>
-        <p:spPr>
-          <a:xfrm xmlns:a="http://schemas.openxmlformats.org/drawingml/2006/main">
-            <a:off x="1104900" y="4762500"/>
-            <a:ext cx="6191250" cy="400050"/>
-          </a:xfrm>
-          <a:prstGeom xmlns:a="http://schemas.openxmlformats.org/drawingml/2006/main" prst="rect">
-            <a:avLst/>
-          </a:prstGeom>
-          <a:noFill xmlns:a="http://schemas.openxmlformats.org/drawingml/2006/main"/>
-          <a:ln xmlns:a="http://schemas.openxmlformats.org/drawingml/2006/main" w="0">
-            <a:noFill/>
-          </a:ln>
-        </p:spPr>
-        <p:txBody>
-          <a:bodyPr xmlns:a="http://schemas.openxmlformats.org/drawingml/2006/main" wrap="square" lIns="0" tIns="0" rIns="0" bIns="0" anchor="t"/>
-          <a:lstStyle xmlns:a="http://schemas.openxmlformats.org/drawingml/2006/main"/>
-          <a:p xmlns:a="http://schemas.openxmlformats.org/drawingml/2006/main">
-            <a:r>
-              <a:rPr lang="en-US" sz="1575">
-                <a:solidFill>
-                  <a:srgbClr val="1D2330"/>
-                </a:solidFill>
-                <a:latin typeface="Arial"/>
-                <a:ea typeface="Arial"/>
-              </a:rPr>
-              <a:t>Three visible signals point to one owner and one date.</a:t>
-            </a:r>
-            <a:endParaRPr lang="en-US"/>
-          </a:p>
-        </p:txBody>
-      </p:sp>
-      <p:sp>
-        <p:nvSpPr>
-          <p:cNvPr id="12" name="work-rail"/>
-          <p:cNvSpPr/>
-          <p:nvPr/>
-        </p:nvSpPr>
-        <p:spPr>
-          <a:xfrm xmlns:a="http://schemas.openxmlformats.org/drawingml/2006/main">
-            <a:off x="10001250" y="3333750"/>
-            <a:ext cx="0" cy="2381250"/>
-          </a:xfrm>
-          <a:prstGeom xmlns:a="http://schemas.openxmlformats.org/drawingml/2006/main" prst="line">
-            <a:avLst/>
-          </a:prstGeom>
-          <a:noFill xmlns:a="http://schemas.openxmlformats.org/drawingml/2006/main"/>
-          <a:ln xmlns:a="http://schemas.openxmlformats.org/drawingml/2006/main" w="25400">
-            <a:solidFill>
-              <a:srgbClr val="93959C"/>
-            </a:solidFill>
-            <a:prstDash val="solid"/>
-          </a:ln>
-        </p:spPr>
-        <p:txBody>
-          <a:bodyPr xmlns:a="http://schemas.openxmlformats.org/drawingml/2006/main" wrap="square" lIns="0" tIns="0" rIns="0" bIns="0" anchor="t"/>
-          <a:lstStyle xmlns:a="http://schemas.openxmlformats.org/drawingml/2006/main"/>
-          <a:p xmlns:a="http://schemas.openxmlformats.org/drawingml/2006/main">
-            <a:r>
-              <a:rPr lang="en-US"/>
-              <a:t/>
-            </a:r>
-            <a:endParaRPr lang="en-US"/>
-          </a:p>
-        </p:txBody>
-      </p:sp>
-      <p:sp>
-        <p:nvSpPr>
-          <p:cNvPr id="13" name="work-num-0"/>
-          <p:cNvSpPr txBox="1"/>
-          <p:nvPr/>
-        </p:nvSpPr>
-        <p:spPr>
-          <a:xfrm xmlns:a="http://schemas.openxmlformats.org/drawingml/2006/main">
-            <a:off x="10477500" y="3448050"/>
-            <a:ext cx="571500" cy="228600"/>
-          </a:xfrm>
-          <a:prstGeom xmlns:a="http://schemas.openxmlformats.org/drawingml/2006/main" prst="rect">
-            <a:avLst/>
-          </a:prstGeom>
-          <a:noFill xmlns:a="http://schemas.openxmlformats.org/drawingml/2006/main"/>
-          <a:ln xmlns:a="http://schemas.openxmlformats.org/drawingml/2006/main" w="0">
-            <a:noFill/>
-          </a:ln>
-        </p:spPr>
-        <p:txBody>
-          <a:bodyPr xmlns:a="http://schemas.openxmlformats.org/drawingml/2006/main" wrap="square" lIns="0" tIns="0" rIns="0" bIns="0" anchor="t"/>
-          <a:lstStyle xmlns:a="http://schemas.openxmlformats.org/drawingml/2006/main"/>
-          <a:p xmlns:a="http://schemas.openxmlformats.org/drawingml/2006/main">
-            <a:r>
-              <a:rPr lang="en-US" sz="1350" b="1">
-                <a:solidFill>
-                  <a:srgbClr val="8B6BE8"/>
-                </a:solidFill>
-                <a:latin typeface="Arial"/>
-                <a:ea typeface="Arial"/>
-              </a:rPr>
-              <a:t>01</a:t>
-            </a:r>
-            <a:endParaRPr lang="en-US"/>
-          </a:p>
-        </p:txBody>
-      </p:sp>
-      <p:sp>
-        <p:nvSpPr>
-          <p:cNvPr id="14" name="work-label-0"/>
-          <p:cNvSpPr txBox="1"/>
-          <p:nvPr/>
-        </p:nvSpPr>
-        <p:spPr>
-          <a:xfrm xmlns:a="http://schemas.openxmlformats.org/drawingml/2006/main">
-            <a:off x="11144250" y="3448050"/>
-            <a:ext cx="1428750" cy="228600"/>
-          </a:xfrm>
-          <a:prstGeom xmlns:a="http://schemas.openxmlformats.org/drawingml/2006/main" prst="rect">
-            <a:avLst/>
-          </a:prstGeom>
-          <a:noFill xmlns:a="http://schemas.openxmlformats.org/drawingml/2006/main"/>
-          <a:ln xmlns:a="http://schemas.openxmlformats.org/drawingml/2006/main" w="0">
-            <a:noFill/>
-          </a:ln>
-        </p:spPr>
-        <p:txBody>
-          <a:bodyPr xmlns:a="http://schemas.openxmlformats.org/drawingml/2006/main" wrap="square" lIns="0" tIns="0" rIns="0" bIns="0" anchor="t"/>
-          <a:lstStyle xmlns:a="http://schemas.openxmlformats.org/drawingml/2006/main"/>
-          <a:p xmlns:a="http://schemas.openxmlformats.org/drawingml/2006/main">
-            <a:r>
-              <a:rPr lang="en-US" sz="1350" b="1">
-                <a:solidFill>
-                  <a:srgbClr val="1D2330"/>
-                </a:solidFill>
-                <a:latin typeface="Arial"/>
-                <a:ea typeface="Arial"/>
-              </a:rPr>
-              <a:t>Queue</a:t>
-            </a:r>
-            <a:endParaRPr lang="en-US"/>
-          </a:p>
-        </p:txBody>
-      </p:sp>
-      <p:sp>
-        <p:nvSpPr>
-          <p:cNvPr id="15" name="work-text-0"/>
-          <p:cNvSpPr txBox="1"/>
-          <p:nvPr/>
-        </p:nvSpPr>
-        <p:spPr>
-          <a:xfrm xmlns:a="http://schemas.openxmlformats.org/drawingml/2006/main">
-            <a:off x="12668250" y="3448050"/>
-            <a:ext cx="1143000" cy="228600"/>
-          </a:xfrm>
-          <a:prstGeom xmlns:a="http://schemas.openxmlformats.org/drawingml/2006/main" prst="rect">
-            <a:avLst/>
-          </a:prstGeom>
-          <a:noFill xmlns:a="http://schemas.openxmlformats.org/drawingml/2006/main"/>
-          <a:ln xmlns:a="http://schemas.openxmlformats.org/drawingml/2006/main" w="0">
-            <a:noFill/>
-          </a:ln>
-        </p:spPr>
-        <p:txBody>
-          <a:bodyPr xmlns:a="http://schemas.openxmlformats.org/drawingml/2006/main" wrap="square" lIns="0" tIns="0" rIns="0" bIns="0" anchor="t"/>
-          <a:lstStyle xmlns:a="http://schemas.openxmlformats.org/drawingml/2006/main"/>
-          <a:p xmlns:a="http://schemas.openxmlformats.org/drawingml/2006/main">
-            <a:r>
-              <a:rPr lang="en-US" sz="1200">
-                <a:solidFill>
-                  <a:srgbClr val="93959C"/>
-                </a:solidFill>
-                <a:latin typeface="Arial"/>
-                <a:ea typeface="Arial"/>
-              </a:rPr>
-              <a:t>On target</a:t>
-            </a:r>
-            <a:endParaRPr lang="en-US"/>
-          </a:p>
-        </p:txBody>
-      </p:sp>
-      <p:sp>
-        <p:nvSpPr>
-          <p:cNvPr id="16" name="work-num-1"/>
-          <p:cNvSpPr txBox="1"/>
-          <p:nvPr/>
-        </p:nvSpPr>
-        <p:spPr>
-          <a:xfrm xmlns:a="http://schemas.openxmlformats.org/drawingml/2006/main">
-            <a:off x="10477500" y="4229100"/>
-            <a:ext cx="571500" cy="228600"/>
-          </a:xfrm>
-          <a:prstGeom xmlns:a="http://schemas.openxmlformats.org/drawingml/2006/main" prst="rect">
-            <a:avLst/>
-          </a:prstGeom>
-          <a:noFill xmlns:a="http://schemas.openxmlformats.org/drawingml/2006/main"/>
-          <a:ln xmlns:a="http://schemas.openxmlformats.org/drawingml/2006/main" w="0">
-            <a:noFill/>
-          </a:ln>
-        </p:spPr>
-        <p:txBody>
-          <a:bodyPr xmlns:a="http://schemas.openxmlformats.org/drawingml/2006/main" wrap="square" lIns="0" tIns="0" rIns="0" bIns="0" anchor="t"/>
-          <a:lstStyle xmlns:a="http://schemas.openxmlformats.org/drawingml/2006/main"/>
-          <a:p xmlns:a="http://schemas.openxmlformats.org/drawingml/2006/main">
-            <a:r>
-              <a:rPr lang="en-US" sz="1350" b="1">
-                <a:solidFill>
-                  <a:srgbClr val="8B6BE8"/>
-                </a:solidFill>
-                <a:latin typeface="Arial"/>
-                <a:ea typeface="Arial"/>
-              </a:rPr>
-              <a:t>02</a:t>
-            </a:r>
-            <a:endParaRPr lang="en-US"/>
-          </a:p>
-        </p:txBody>
-      </p:sp>
-      <p:sp>
-        <p:nvSpPr>
-          <p:cNvPr id="17" name="work-label-1"/>
-          <p:cNvSpPr txBox="1"/>
-          <p:nvPr/>
-        </p:nvSpPr>
-        <p:spPr>
-          <a:xfrm xmlns:a="http://schemas.openxmlformats.org/drawingml/2006/main">
-            <a:off x="11144250" y="4229100"/>
-            <a:ext cx="1428750" cy="228600"/>
-          </a:xfrm>
-          <a:prstGeom xmlns:a="http://schemas.openxmlformats.org/drawingml/2006/main" prst="rect">
-            <a:avLst/>
-          </a:prstGeom>
-          <a:noFill xmlns:a="http://schemas.openxmlformats.org/drawingml/2006/main"/>
-          <a:ln xmlns:a="http://schemas.openxmlformats.org/drawingml/2006/main" w="0">
-            <a:noFill/>
-          </a:ln>
-        </p:spPr>
-        <p:txBody>
-          <a:bodyPr xmlns:a="http://schemas.openxmlformats.org/drawingml/2006/main" wrap="square" lIns="0" tIns="0" rIns="0" bIns="0" anchor="t"/>
-          <a:lstStyle xmlns:a="http://schemas.openxmlformats.org/drawingml/2006/main"/>
-          <a:p xmlns:a="http://schemas.openxmlformats.org/drawingml/2006/main">
-            <a:r>
-              <a:rPr lang="en-US" sz="1350" b="1">
-                <a:solidFill>
-                  <a:srgbClr val="1D2330"/>
-                </a:solidFill>
-                <a:latin typeface="Arial"/>
-                <a:ea typeface="Arial"/>
-              </a:rPr>
-              <a:t>Handoff</a:t>
-            </a:r>
-            <a:endParaRPr lang="en-US"/>
-          </a:p>
-        </p:txBody>
-      </p:sp>
-      <p:sp>
-        <p:nvSpPr>
-          <p:cNvPr id="18" name="work-text-1"/>
-          <p:cNvSpPr txBox="1"/>
-          <p:nvPr/>
-        </p:nvSpPr>
-        <p:spPr>
-          <a:xfrm xmlns:a="http://schemas.openxmlformats.org/drawingml/2006/main">
-            <a:off x="12668250" y="4229100"/>
-            <a:ext cx="1143000" cy="228600"/>
-          </a:xfrm>
-          <a:prstGeom xmlns:a="http://schemas.openxmlformats.org/drawingml/2006/main" prst="rect">
-            <a:avLst/>
-          </a:prstGeom>
-          <a:noFill xmlns:a="http://schemas.openxmlformats.org/drawingml/2006/main"/>
-          <a:ln xmlns:a="http://schemas.openxmlformats.org/drawingml/2006/main" w="0">
-            <a:noFill/>
-          </a:ln>
-        </p:spPr>
-        <p:txBody>
-          <a:bodyPr xmlns:a="http://schemas.openxmlformats.org/drawingml/2006/main" wrap="square" lIns="0" tIns="0" rIns="0" bIns="0" anchor="t"/>
-          <a:lstStyle xmlns:a="http://schemas.openxmlformats.org/drawingml/2006/main"/>
-          <a:p xmlns:a="http://schemas.openxmlformats.org/drawingml/2006/main">
-            <a:r>
-              <a:rPr lang="en-US" sz="1200">
-                <a:solidFill>
-                  <a:srgbClr val="8B6BE8"/>
-                </a:solidFill>
-                <a:latin typeface="Arial"/>
-                <a:ea typeface="Arial"/>
-              </a:rPr>
-              <a:t>At risk</a:t>
-            </a:r>
-            <a:endParaRPr lang="en-US"/>
-          </a:p>
-        </p:txBody>
-      </p:sp>
-      <p:sp>
-        <p:nvSpPr>
-          <p:cNvPr id="19" name="work-num-2"/>
-          <p:cNvSpPr txBox="1"/>
-          <p:nvPr/>
-        </p:nvSpPr>
-        <p:spPr>
-          <a:xfrm xmlns:a="http://schemas.openxmlformats.org/drawingml/2006/main">
-            <a:off x="10477500" y="5010150"/>
-            <a:ext cx="571500" cy="228600"/>
-          </a:xfrm>
-          <a:prstGeom xmlns:a="http://schemas.openxmlformats.org/drawingml/2006/main" prst="rect">
-            <a:avLst/>
-          </a:prstGeom>
-          <a:noFill xmlns:a="http://schemas.openxmlformats.org/drawingml/2006/main"/>
-          <a:ln xmlns:a="http://schemas.openxmlformats.org/drawingml/2006/main" w="0">
-            <a:noFill/>
-          </a:ln>
-        </p:spPr>
-        <p:txBody>
-          <a:bodyPr xmlns:a="http://schemas.openxmlformats.org/drawingml/2006/main" wrap="square" lIns="0" tIns="0" rIns="0" bIns="0" anchor="t"/>
-          <a:lstStyle xmlns:a="http://schemas.openxmlformats.org/drawingml/2006/main"/>
-          <a:p xmlns:a="http://schemas.openxmlformats.org/drawingml/2006/main">
-            <a:r>
-              <a:rPr lang="en-US" sz="1350" b="1">
-                <a:solidFill>
-                  <a:srgbClr val="8B6BE8"/>
-                </a:solidFill>
-                <a:latin typeface="Arial"/>
-                <a:ea typeface="Arial"/>
-              </a:rPr>
-              <a:t>03</a:t>
-            </a:r>
-            <a:endParaRPr lang="en-US"/>
-          </a:p>
-        </p:txBody>
-      </p:sp>
-      <p:sp>
-        <p:nvSpPr>
-          <p:cNvPr id="20" name="work-label-2"/>
-          <p:cNvSpPr txBox="1"/>
-          <p:nvPr/>
-        </p:nvSpPr>
-        <p:spPr>
-          <a:xfrm xmlns:a="http://schemas.openxmlformats.org/drawingml/2006/main">
-            <a:off x="11144250" y="5010150"/>
-            <a:ext cx="1428750" cy="228600"/>
-          </a:xfrm>
-          <a:prstGeom xmlns:a="http://schemas.openxmlformats.org/drawingml/2006/main" prst="rect">
-            <a:avLst/>
-          </a:prstGeom>
-          <a:noFill xmlns:a="http://schemas.openxmlformats.org/drawingml/2006/main"/>
-          <a:ln xmlns:a="http://schemas.openxmlformats.org/drawingml/2006/main" w="0">
-            <a:noFill/>
-          </a:ln>
-        </p:spPr>
-        <p:txBody>
-          <a:bodyPr xmlns:a="http://schemas.openxmlformats.org/drawingml/2006/main" wrap="square" lIns="0" tIns="0" rIns="0" bIns="0" anchor="t"/>
-          <a:lstStyle xmlns:a="http://schemas.openxmlformats.org/drawingml/2006/main"/>
-          <a:p xmlns:a="http://schemas.openxmlformats.org/drawingml/2006/main">
-            <a:r>
-              <a:rPr lang="en-US" sz="1350" b="1">
-                <a:solidFill>
-                  <a:srgbClr val="1D2330"/>
-                </a:solidFill>
-                <a:latin typeface="Arial"/>
-                <a:ea typeface="Arial"/>
-              </a:rPr>
-              <a:t>Owner</a:t>
-            </a:r>
-            <a:endParaRPr lang="en-US"/>
-          </a:p>
-        </p:txBody>
-      </p:sp>
-      <p:sp>
-        <p:nvSpPr>
-          <p:cNvPr id="21" name="work-text-2"/>
-          <p:cNvSpPr txBox="1"/>
-          <p:nvPr/>
-        </p:nvSpPr>
-        <p:spPr>
-          <a:xfrm xmlns:a="http://schemas.openxmlformats.org/drawingml/2006/main">
-            <a:off x="12668250" y="5010150"/>
-            <a:ext cx="1143000" cy="228600"/>
-          </a:xfrm>
-          <a:prstGeom xmlns:a="http://schemas.openxmlformats.org/drawingml/2006/main" prst="rect">
-            <a:avLst/>
-          </a:prstGeom>
-          <a:noFill xmlns:a="http://schemas.openxmlformats.org/drawingml/2006/main"/>
-          <a:ln xmlns:a="http://schemas.openxmlformats.org/drawingml/2006/main" w="0">
-            <a:noFill/>
-          </a:ln>
-        </p:spPr>
-        <p:txBody>
-          <a:bodyPr xmlns:a="http://schemas.openxmlformats.org/drawingml/2006/main" wrap="square" lIns="0" tIns="0" rIns="0" bIns="0" anchor="t"/>
-          <a:lstStyle xmlns:a="http://schemas.openxmlformats.org/drawingml/2006/main"/>
-          <a:p xmlns:a="http://schemas.openxmlformats.org/drawingml/2006/main">
-            <a:r>
-              <a:rPr lang="en-US" sz="1200">
-                <a:solidFill>
-                  <a:srgbClr val="93959C"/>
-                </a:solidFill>
-                <a:latin typeface="Arial"/>
-                <a:ea typeface="Arial"/>
-              </a:rPr>
-              <a:t>Named</a:t>
-            </a:r>
-            <a:endParaRPr lang="en-US"/>
-          </a:p>
-        </p:txBody>
-      </p:sp>
-      <p:sp>
-        <p:nvSpPr>
-          <p:cNvPr id="22" name="source"/>
-          <p:cNvSpPr txBox="1"/>
-          <p:nvPr/>
-        </p:nvSpPr>
-        <p:spPr>
-          <a:xfrm xmlns:a="http://schemas.openxmlformats.org/drawingml/2006/main">
-            <a:off x="914400" y="7810500"/>
-            <a:ext cx="10953750" cy="209550"/>
-          </a:xfrm>
-          <a:prstGeom xmlns:a="http://schemas.openxmlformats.org/drawingml/2006/main" prst="rect">
-            <a:avLst/>
-          </a:prstGeom>
-          <a:noFill xmlns:a="http://schemas.openxmlformats.org/drawingml/2006/main"/>
-          <a:ln xmlns:a="http://schemas.openxmlformats.org/drawingml/2006/main" w="0">
-            <a:noFill/>
-          </a:ln>
-        </p:spPr>
-        <p:txBody>
-          <a:bodyPr xmlns:a="http://schemas.openxmlformats.org/drawingml/2006/main" wrap="square" lIns="0" tIns="0" rIns="0" bIns="0" anchor="t"/>
-          <a:lstStyle xmlns:a="http://schemas.openxmlformats.org/drawingml/2006/main"/>
-          <a:p xmlns:a="http://schemas.openxmlformats.org/drawingml/2006/main">
-            <a:r>
-              <a:rPr lang="en-US" sz="1050">
-                <a:solidFill>
-                  <a:srgbClr val="93959C"/>
-                </a:solidFill>
-                <a:latin typeface="Arial"/>
-                <a:ea typeface="Arial"/>
-              </a:rPr>
-              <a:t>Source: illustrative calibration brief · every claim is fictional and bounded</a:t>
-            </a:r>
-            <a:endParaRPr lang="en-US"/>
-          </a:p>
-        </p:txBody>
-      </p:sp>
-      <p:sp>
-        <p:nvSpPr>
-          <p:cNvPr id="23" name="page-number"/>
-          <p:cNvSpPr txBox="1"/>
-          <p:nvPr/>
-        </p:nvSpPr>
-        <p:spPr>
-          <a:xfrm xmlns:a="http://schemas.openxmlformats.org/drawingml/2006/main">
-            <a:off x="13335000" y="7810500"/>
-            <a:ext cx="952500" cy="209550"/>
-          </a:xfrm>
-          <a:prstGeom xmlns:a="http://schemas.openxmlformats.org/drawingml/2006/main" prst="rect">
-            <a:avLst/>
-          </a:prstGeom>
-          <a:noFill xmlns:a="http://schemas.openxmlformats.org/drawingml/2006/main"/>
-          <a:ln xmlns:a="http://schemas.openxmlformats.org/drawingml/2006/main" w="0">
-            <a:noFill/>
-          </a:ln>
-        </p:spPr>
-        <p:txBody>
-          <a:bodyPr xmlns:a="http://schemas.openxmlformats.org/drawingml/2006/main" wrap="square" lIns="0" tIns="0" rIns="0" bIns="0" anchor="t"/>
-          <a:lstStyle xmlns:a="http://schemas.openxmlformats.org/drawingml/2006/main"/>
-          <a:p xmlns:a="http://schemas.openxmlformats.org/drawingml/2006/main">
-            <a:pPr algn="r"/>
-            <a:r>
-              <a:rPr lang="en-US" sz="1050">
-                <a:solidFill>
-                  <a:srgbClr val="93959C"/>
-                </a:solidFill>
-                <a:latin typeface="Arial"/>
-                <a:ea typeface="Arial"/>
-              </a:rPr>
-              <a:t>2 / 6</a:t>
-            </a:r>
-            <a:endParaRPr lang="en-US"/>
-          </a:p>
-        </p:txBody>
-      </p:sp>
-    </p:spTree>
-  </p:cSld>
-  <p:clrMapOvr>
-    <a:masterClrMapping xmlns:a="http://schemas.openxmlformats.org/drawingml/2006/main"/>
-  </p:clrMapOvr>
-</p:sld>
-</file>
-
-<file path=ppt/slides/slide3.xml><?xml version="1.0" encoding="utf-8"?>
-<p:sld xmlns:p="http://schemas.openxmlformats.org/presentationml/2006/main">
-  <p:cSld name="Evidence">
-    <p:bg>
-      <p:bgPr>
-        <a:blipFill xmlns:a="http://schemas.openxmlformats.org/drawingml/2006/main">
-          <a:blip xmlns:r="http://schemas.openxmlformats.org/officeDocument/2006/relationships" r:embed="rIdOfficeKitImage083106afebc7d419_1"/>
-          <a:stretch>
-            <a:fillRect/>
-          </a:stretch>
-        </a:blipFill>
-      </p:bgPr>
-    </p:bg>
-    <p:spTree>
-      <p:nvGrpSpPr>
-        <p:cNvPr id="1" name=""/>
-        <p:cNvGrpSpPr/>
-        <p:nvPr/>
-      </p:nvGrpSpPr>
-      <p:grpSpPr>
-        <a:xfrm xmlns:a="http://schemas.openxmlformats.org/drawingml/2006/main">
-          <a:off x="0" y="0"/>
-          <a:ext cx="0" cy="0"/>
-          <a:chOff x="0" y="0"/>
-          <a:chExt cx="0" cy="0"/>
-        </a:xfrm>
-      </p:grpSpPr>
-      <p:sp>
-        <p:nvSpPr>
           <p:cNvPr id="2" name="evidence-paper-scrim"/>
           <p:cNvSpPr/>
           <p:nvPr/>
@@ -2189,7 +2189,7 @@
           <p:nvPr/>
         </p:nvPicPr>
         <p:blipFill>
-          <a:blip xmlns:r="http://schemas.openxmlformats.org/officeDocument/2006/relationships" xmlns:a="http://schemas.openxmlformats.org/drawingml/2006/main" r:embed="rIdOfficeKitImage56df3e49f11f0ff0_1"/>
+          <a:blip xmlns:r="http://schemas.openxmlformats.org/officeDocument/2006/relationships" xmlns:a="http://schemas.openxmlformats.org/drawingml/2006/main" r:embed="rIdOfficeKitImage083106afebc7d419_1"/>
           <a:srcRect xmlns:a="http://schemas.openxmlformats.org/drawingml/2006/main" l="0" t="47258" r="0" b="47258"/>
           <a:stretch xmlns:a="http://schemas.openxmlformats.org/drawingml/2006/main">
             <a:fillRect/>
@@ -2440,7 +2440,7 @@
         </p:xfrm>
         <a:graphic xmlns:a="http://schemas.openxmlformats.org/drawingml/2006/main">
           <a:graphicData uri="http://schemas.openxmlformats.org/drawingml/2006/chart">
-            <c:chart xmlns:r="http://schemas.openxmlformats.org/officeDocument/2006/relationships" xmlns:c="http://schemas.openxmlformats.org/drawingml/2006/chart" r:id="R4a5ea4ab2a1942d4"/>
+            <c:chart xmlns:r="http://schemas.openxmlformats.org/officeDocument/2006/relationships" xmlns:c="http://schemas.openxmlformats.org/drawingml/2006/chart" r:id="R270a436d433e4175"/>
           </a:graphicData>
         </a:graphic>
       </p:graphicFrame>
@@ -2458,7 +2458,7 @@
         </p:xfrm>
         <a:graphic xmlns:a="http://schemas.openxmlformats.org/drawingml/2006/main">
           <a:graphicData uri="http://schemas.openxmlformats.org/drawingml/2006/chart">
-            <c:chart xmlns:r="http://schemas.openxmlformats.org/officeDocument/2006/relationships" xmlns:c="http://schemas.openxmlformats.org/drawingml/2006/chart" r:id="R2acc09127a7e480f"/>
+            <c:chart xmlns:r="http://schemas.openxmlformats.org/officeDocument/2006/relationships" xmlns:c="http://schemas.openxmlformats.org/drawingml/2006/chart" r:id="R5c5cab46a44844ee"/>
           </a:graphicData>
         </a:graphic>
       </p:graphicFrame>
@@ -2829,7 +2829,7 @@
           <p:nvPr/>
         </p:nvPicPr>
         <p:blipFill>
-          <a:blip xmlns:r="http://schemas.openxmlformats.org/officeDocument/2006/relationships" xmlns:a="http://schemas.openxmlformats.org/drawingml/2006/main" r:embed="rIdOfficeKitImage026be3a43029630d_1"/>
+          <a:blip xmlns:r="http://schemas.openxmlformats.org/officeDocument/2006/relationships" xmlns:a="http://schemas.openxmlformats.org/drawingml/2006/main" r:embed="rIdOfficeKitImage56df3e49f11f0ff0_1"/>
           <a:srcRect xmlns:a="http://schemas.openxmlformats.org/drawingml/2006/main" l="0" t="47258" r="0" b="47258"/>
           <a:stretch xmlns:a="http://schemas.openxmlformats.org/drawingml/2006/main">
             <a:fillRect/>
@@ -3734,6 +3734,336 @@
 <file path=ppt/slides/slide5.xml><?xml version="1.0" encoding="utf-8"?>
 <p:sld xmlns:p="http://schemas.openxmlformats.org/presentationml/2006/main">
   <p:cSld name="Visual carrier">
+    <p:bg>
+      <p:bgPr>
+        <a:blipFill xmlns:a="http://schemas.openxmlformats.org/drawingml/2006/main">
+          <a:blip xmlns:r="http://schemas.openxmlformats.org/officeDocument/2006/relationships" r:embed="rIdOfficeKitImage026be3a43029630d_1"/>
+          <a:stretch>
+            <a:fillRect/>
+          </a:stretch>
+        </a:blipFill>
+      </p:bgPr>
+    </p:bg>
+    <p:spTree>
+      <p:nvGrpSpPr>
+        <p:cNvPr id="1" name=""/>
+        <p:cNvGrpSpPr/>
+        <p:nvPr/>
+      </p:nvGrpSpPr>
+      <p:grpSpPr>
+        <a:xfrm xmlns:a="http://schemas.openxmlformats.org/drawingml/2006/main">
+          <a:off x="0" y="0"/>
+          <a:ext cx="0" cy="0"/>
+          <a:chOff x="0" y="0"/>
+          <a:chExt cx="0" cy="0"/>
+        </a:xfrm>
+      </p:grpSpPr>
+      <p:sp>
+        <p:nvSpPr>
+          <p:cNvPr id="2" name="visual-scrim"/>
+          <p:cNvSpPr/>
+          <p:nvPr/>
+        </p:nvSpPr>
+        <p:spPr>
+          <a:xfrm xmlns:a="http://schemas.openxmlformats.org/drawingml/2006/main">
+            <a:off x="0" y="0"/>
+            <a:ext cx="6858000" cy="8572500"/>
+          </a:xfrm>
+          <a:prstGeom xmlns:a="http://schemas.openxmlformats.org/drawingml/2006/main" prst="rect">
+            <a:avLst/>
+          </a:prstGeom>
+          <a:solidFill xmlns:a="http://schemas.openxmlformats.org/drawingml/2006/main">
+            <a:srgbClr val="FFFFFF">
+              <a:alpha val="94000"/>
+            </a:srgbClr>
+          </a:solidFill>
+          <a:ln xmlns:a="http://schemas.openxmlformats.org/drawingml/2006/main" w="0">
+            <a:solidFill>
+              <a:srgbClr val="FFFFFF"/>
+            </a:solidFill>
+            <a:prstDash val="solid"/>
+          </a:ln>
+        </p:spPr>
+        <p:txBody>
+          <a:bodyPr xmlns:a="http://schemas.openxmlformats.org/drawingml/2006/main" wrap="square" lIns="0" tIns="0" rIns="0" bIns="0" anchor="t"/>
+          <a:lstStyle xmlns:a="http://schemas.openxmlformats.org/drawingml/2006/main"/>
+          <a:p xmlns:a="http://schemas.openxmlformats.org/drawingml/2006/main">
+            <a:r>
+              <a:rPr lang="en-US"/>
+              <a:t/>
+            </a:r>
+            <a:endParaRPr lang="en-US"/>
+          </a:p>
+        </p:txBody>
+      </p:sp>
+      <p:sp>
+        <p:nvSpPr>
+          <p:cNvPr id="3" name="visual-eyebrow"/>
+          <p:cNvSpPr txBox="1"/>
+          <p:nvPr/>
+        </p:nvSpPr>
+        <p:spPr>
+          <a:xfrm xmlns:a="http://schemas.openxmlformats.org/drawingml/2006/main">
+            <a:off x="914400" y="895350"/>
+            <a:ext cx="6667500" cy="228600"/>
+          </a:xfrm>
+          <a:prstGeom xmlns:a="http://schemas.openxmlformats.org/drawingml/2006/main" prst="rect">
+            <a:avLst/>
+          </a:prstGeom>
+          <a:noFill xmlns:a="http://schemas.openxmlformats.org/drawingml/2006/main"/>
+          <a:ln xmlns:a="http://schemas.openxmlformats.org/drawingml/2006/main" w="0">
+            <a:noFill/>
+          </a:ln>
+        </p:spPr>
+        <p:txBody>
+          <a:bodyPr xmlns:a="http://schemas.openxmlformats.org/drawingml/2006/main" wrap="square" lIns="0" tIns="0" rIns="0" bIns="0" anchor="t"/>
+          <a:lstStyle xmlns:a="http://schemas.openxmlformats.org/drawingml/2006/main"/>
+          <a:p xmlns:a="http://schemas.openxmlformats.org/drawingml/2006/main">
+            <a:r>
+              <a:rPr lang="en-US" sz="1200" b="1">
+                <a:solidFill>
+                  <a:srgbClr val="8B6BE8"/>
+                </a:solidFill>
+                <a:latin typeface="Arial"/>
+                <a:ea typeface="Arial"/>
+              </a:rPr>
+              <a:t>MOONLIT WORK REPORT · VISUAL CARRIER</a:t>
+            </a:r>
+            <a:endParaRPr lang="en-US"/>
+          </a:p>
+        </p:txBody>
+      </p:sp>
+      <p:sp>
+        <p:nvSpPr>
+          <p:cNvPr id="4" name="visual-title"/>
+          <p:cNvSpPr txBox="1"/>
+          <p:nvPr/>
+        </p:nvSpPr>
+        <p:spPr>
+          <a:xfrm xmlns:a="http://schemas.openxmlformats.org/drawingml/2006/main">
+            <a:off x="914400" y="1638300"/>
+            <a:ext cx="5334000" cy="1143000"/>
+          </a:xfrm>
+          <a:prstGeom xmlns:a="http://schemas.openxmlformats.org/drawingml/2006/main" prst="rect">
+            <a:avLst/>
+          </a:prstGeom>
+          <a:noFill xmlns:a="http://schemas.openxmlformats.org/drawingml/2006/main"/>
+          <a:ln xmlns:a="http://schemas.openxmlformats.org/drawingml/2006/main" w="0">
+            <a:noFill/>
+          </a:ln>
+        </p:spPr>
+        <p:txBody>
+          <a:bodyPr xmlns:a="http://schemas.openxmlformats.org/drawingml/2006/main" wrap="square" lIns="0" tIns="0" rIns="0" bIns="0" anchor="t"/>
+          <a:lstStyle xmlns:a="http://schemas.openxmlformats.org/drawingml/2006/main"/>
+          <a:p xmlns:a="http://schemas.openxmlformats.org/drawingml/2006/main">
+            <a:r>
+              <a:rPr lang="en-US" sz="3300" b="1">
+                <a:solidFill>
+                  <a:srgbClr val="1D2330"/>
+                </a:solidFill>
+                <a:latin typeface="Arial"/>
+                <a:ea typeface="Arial"/>
+              </a:rPr>
+              <a:t>Show the operating shape</a:t>
+            </a:r>
+            <a:endParaRPr lang="en-US"/>
+          </a:p>
+        </p:txBody>
+      </p:sp>
+      <p:sp>
+        <p:nvSpPr>
+          <p:cNvPr id="5" name="visual-body"/>
+          <p:cNvSpPr txBox="1"/>
+          <p:nvPr/>
+        </p:nvSpPr>
+        <p:spPr>
+          <a:xfrm xmlns:a="http://schemas.openxmlformats.org/drawingml/2006/main">
+            <a:off x="914400" y="3219450"/>
+            <a:ext cx="4762500" cy="685800"/>
+          </a:xfrm>
+          <a:prstGeom xmlns:a="http://schemas.openxmlformats.org/drawingml/2006/main" prst="rect">
+            <a:avLst/>
+          </a:prstGeom>
+          <a:noFill xmlns:a="http://schemas.openxmlformats.org/drawingml/2006/main"/>
+          <a:ln xmlns:a="http://schemas.openxmlformats.org/drawingml/2006/main" w="0">
+            <a:noFill/>
+          </a:ln>
+        </p:spPr>
+        <p:txBody>
+          <a:bodyPr xmlns:a="http://schemas.openxmlformats.org/drawingml/2006/main" wrap="square" lIns="0" tIns="0" rIns="0" bIns="0" anchor="t"/>
+          <a:lstStyle xmlns:a="http://schemas.openxmlformats.org/drawingml/2006/main"/>
+          <a:p xmlns:a="http://schemas.openxmlformats.org/drawingml/2006/main">
+            <a:r>
+              <a:rPr lang="en-US" sz="1800">
+                <a:solidFill>
+                  <a:srgbClr val="1D2330"/>
+                </a:solidFill>
+                <a:latin typeface="Arial"/>
+                <a:ea typeface="Arial"/>
+              </a:rPr>
+              <a:t>The image carries context; the page names the move.</a:t>
+            </a:r>
+            <a:endParaRPr lang="en-US"/>
+          </a:p>
+        </p:txBody>
+      </p:sp>
+      <p:sp>
+        <p:nvSpPr>
+          <p:cNvPr id="6" name="visual-rule"/>
+          <p:cNvSpPr/>
+          <p:nvPr/>
+        </p:nvSpPr>
+        <p:spPr>
+          <a:xfrm xmlns:a="http://schemas.openxmlformats.org/drawingml/2006/main">
+            <a:off x="914400" y="4476750"/>
+            <a:ext cx="4419600" cy="0"/>
+          </a:xfrm>
+          <a:prstGeom xmlns:a="http://schemas.openxmlformats.org/drawingml/2006/main" prst="line">
+            <a:avLst/>
+          </a:prstGeom>
+          <a:noFill xmlns:a="http://schemas.openxmlformats.org/drawingml/2006/main"/>
+          <a:ln xmlns:a="http://schemas.openxmlformats.org/drawingml/2006/main" w="38100">
+            <a:solidFill>
+              <a:srgbClr val="8B6BE8"/>
+            </a:solidFill>
+            <a:prstDash val="solid"/>
+          </a:ln>
+        </p:spPr>
+        <p:txBody>
+          <a:bodyPr xmlns:a="http://schemas.openxmlformats.org/drawingml/2006/main" wrap="square" lIns="0" tIns="0" rIns="0" bIns="0" anchor="t"/>
+          <a:lstStyle xmlns:a="http://schemas.openxmlformats.org/drawingml/2006/main"/>
+          <a:p xmlns:a="http://schemas.openxmlformats.org/drawingml/2006/main">
+            <a:r>
+              <a:rPr lang="en-US"/>
+              <a:t/>
+            </a:r>
+            <a:endParaRPr lang="en-US"/>
+          </a:p>
+        </p:txBody>
+      </p:sp>
+      <p:sp>
+        <p:nvSpPr>
+          <p:cNvPr id="7" name="visual-label"/>
+          <p:cNvSpPr txBox="1"/>
+          <p:nvPr/>
+        </p:nvSpPr>
+        <p:spPr>
+          <a:xfrm xmlns:a="http://schemas.openxmlformats.org/drawingml/2006/main">
+            <a:off x="914400" y="4819650"/>
+            <a:ext cx="4953000" cy="228600"/>
+          </a:xfrm>
+          <a:prstGeom xmlns:a="http://schemas.openxmlformats.org/drawingml/2006/main" prst="rect">
+            <a:avLst/>
+          </a:prstGeom>
+          <a:noFill xmlns:a="http://schemas.openxmlformats.org/drawingml/2006/main"/>
+          <a:ln xmlns:a="http://schemas.openxmlformats.org/drawingml/2006/main" w="0">
+            <a:noFill/>
+          </a:ln>
+        </p:spPr>
+        <p:txBody>
+          <a:bodyPr xmlns:a="http://schemas.openxmlformats.org/drawingml/2006/main" wrap="square" lIns="0" tIns="0" rIns="0" bIns="0" anchor="t"/>
+          <a:lstStyle xmlns:a="http://schemas.openxmlformats.org/drawingml/2006/main"/>
+          <a:p xmlns:a="http://schemas.openxmlformats.org/drawingml/2006/main">
+            <a:r>
+              <a:rPr lang="en-US" sz="1200" b="1">
+                <a:solidFill>
+                  <a:srgbClr val="8B6BE8"/>
+                </a:solidFill>
+                <a:latin typeface="Arial"/>
+                <a:ea typeface="Arial"/>
+              </a:rPr>
+              <a:t>THE IMAGE IS EVIDENCE, NOT FILL</a:t>
+            </a:r>
+            <a:endParaRPr lang="en-US"/>
+          </a:p>
+        </p:txBody>
+      </p:sp>
+      <p:sp>
+        <p:nvSpPr>
+          <p:cNvPr id="8" name="source"/>
+          <p:cNvSpPr txBox="1"/>
+          <p:nvPr/>
+        </p:nvSpPr>
+        <p:spPr>
+          <a:xfrm xmlns:a="http://schemas.openxmlformats.org/drawingml/2006/main">
+            <a:off x="914400" y="7829550"/>
+            <a:ext cx="10953750" cy="209550"/>
+          </a:xfrm>
+          <a:prstGeom xmlns:a="http://schemas.openxmlformats.org/drawingml/2006/main" prst="rect">
+            <a:avLst/>
+          </a:prstGeom>
+          <a:noFill xmlns:a="http://schemas.openxmlformats.org/drawingml/2006/main"/>
+          <a:ln xmlns:a="http://schemas.openxmlformats.org/drawingml/2006/main" w="0">
+            <a:noFill/>
+          </a:ln>
+        </p:spPr>
+        <p:txBody>
+          <a:bodyPr xmlns:a="http://schemas.openxmlformats.org/drawingml/2006/main" wrap="square" lIns="0" tIns="0" rIns="0" bIns="0" anchor="t"/>
+          <a:lstStyle xmlns:a="http://schemas.openxmlformats.org/drawingml/2006/main"/>
+          <a:p xmlns:a="http://schemas.openxmlformats.org/drawingml/2006/main">
+            <a:r>
+              <a:rPr lang="en-US" sz="1050">
+                <a:solidFill>
+                  <a:srgbClr val="93959C"/>
+                </a:solidFill>
+                <a:latin typeface="Arial"/>
+                <a:ea typeface="Arial"/>
+              </a:rPr>
+              <a:t>OfficeKit original clean-room visual field · fictional content</a:t>
+            </a:r>
+            <a:endParaRPr lang="en-US"/>
+          </a:p>
+        </p:txBody>
+      </p:sp>
+      <p:sp>
+        <p:nvSpPr>
+          <p:cNvPr id="9" name="page-number"/>
+          <p:cNvSpPr txBox="1"/>
+          <p:nvPr/>
+        </p:nvSpPr>
+        <p:spPr>
+          <a:xfrm xmlns:a="http://schemas.openxmlformats.org/drawingml/2006/main">
+            <a:off x="13335000" y="7829550"/>
+            <a:ext cx="952500" cy="209550"/>
+          </a:xfrm>
+          <a:prstGeom xmlns:a="http://schemas.openxmlformats.org/drawingml/2006/main" prst="rect">
+            <a:avLst/>
+          </a:prstGeom>
+          <a:noFill xmlns:a="http://schemas.openxmlformats.org/drawingml/2006/main"/>
+          <a:ln xmlns:a="http://schemas.openxmlformats.org/drawingml/2006/main" w="0">
+            <a:noFill/>
+          </a:ln>
+        </p:spPr>
+        <p:txBody>
+          <a:bodyPr xmlns:a="http://schemas.openxmlformats.org/drawingml/2006/main" wrap="square" lIns="0" tIns="0" rIns="0" bIns="0" anchor="t"/>
+          <a:lstStyle xmlns:a="http://schemas.openxmlformats.org/drawingml/2006/main"/>
+          <a:p xmlns:a="http://schemas.openxmlformats.org/drawingml/2006/main">
+            <a:pPr algn="r"/>
+            <a:r>
+              <a:rPr lang="en-US" sz="1050">
+                <a:solidFill>
+                  <a:srgbClr val="93959C"/>
+                </a:solidFill>
+                <a:latin typeface="Arial"/>
+                <a:ea typeface="Arial"/>
+              </a:rPr>
+              <a:t>5 / 6</a:t>
+            </a:r>
+            <a:endParaRPr lang="en-US"/>
+          </a:p>
+        </p:txBody>
+      </p:sp>
+    </p:spTree>
+  </p:cSld>
+  <p:clrMapOvr>
+    <a:masterClrMapping xmlns:a="http://schemas.openxmlformats.org/drawingml/2006/main"/>
+  </p:clrMapOvr>
+</p:sld>
+</file>
+
+<file path=ppt/slides/slide6.xml><?xml version="1.0" encoding="utf-8"?>
+<p:sld xmlns:p="http://schemas.openxmlformats.org/presentationml/2006/main">
+  <p:cSld name="Decision close">
     <p:bg>
       <p:bgPr>
         <a:blipFill xmlns:a="http://schemas.openxmlformats.org/drawingml/2006/main">
@@ -3760,336 +4090,6 @@
       </p:grpSpPr>
       <p:sp>
         <p:nvSpPr>
-          <p:cNvPr id="2" name="visual-scrim"/>
-          <p:cNvSpPr/>
-          <p:nvPr/>
-        </p:nvSpPr>
-        <p:spPr>
-          <a:xfrm xmlns:a="http://schemas.openxmlformats.org/drawingml/2006/main">
-            <a:off x="0" y="0"/>
-            <a:ext cx="6858000" cy="8572500"/>
-          </a:xfrm>
-          <a:prstGeom xmlns:a="http://schemas.openxmlformats.org/drawingml/2006/main" prst="rect">
-            <a:avLst/>
-          </a:prstGeom>
-          <a:solidFill xmlns:a="http://schemas.openxmlformats.org/drawingml/2006/main">
-            <a:srgbClr val="FFFFFF">
-              <a:alpha val="94000"/>
-            </a:srgbClr>
-          </a:solidFill>
-          <a:ln xmlns:a="http://schemas.openxmlformats.org/drawingml/2006/main" w="0">
-            <a:solidFill>
-              <a:srgbClr val="FFFFFF"/>
-            </a:solidFill>
-            <a:prstDash val="solid"/>
-          </a:ln>
-        </p:spPr>
-        <p:txBody>
-          <a:bodyPr xmlns:a="http://schemas.openxmlformats.org/drawingml/2006/main" wrap="square" lIns="0" tIns="0" rIns="0" bIns="0" anchor="t"/>
-          <a:lstStyle xmlns:a="http://schemas.openxmlformats.org/drawingml/2006/main"/>
-          <a:p xmlns:a="http://schemas.openxmlformats.org/drawingml/2006/main">
-            <a:r>
-              <a:rPr lang="en-US"/>
-              <a:t/>
-            </a:r>
-            <a:endParaRPr lang="en-US"/>
-          </a:p>
-        </p:txBody>
-      </p:sp>
-      <p:sp>
-        <p:nvSpPr>
-          <p:cNvPr id="3" name="visual-eyebrow"/>
-          <p:cNvSpPr txBox="1"/>
-          <p:nvPr/>
-        </p:nvSpPr>
-        <p:spPr>
-          <a:xfrm xmlns:a="http://schemas.openxmlformats.org/drawingml/2006/main">
-            <a:off x="914400" y="895350"/>
-            <a:ext cx="6667500" cy="228600"/>
-          </a:xfrm>
-          <a:prstGeom xmlns:a="http://schemas.openxmlformats.org/drawingml/2006/main" prst="rect">
-            <a:avLst/>
-          </a:prstGeom>
-          <a:noFill xmlns:a="http://schemas.openxmlformats.org/drawingml/2006/main"/>
-          <a:ln xmlns:a="http://schemas.openxmlformats.org/drawingml/2006/main" w="0">
-            <a:noFill/>
-          </a:ln>
-        </p:spPr>
-        <p:txBody>
-          <a:bodyPr xmlns:a="http://schemas.openxmlformats.org/drawingml/2006/main" wrap="square" lIns="0" tIns="0" rIns="0" bIns="0" anchor="t"/>
-          <a:lstStyle xmlns:a="http://schemas.openxmlformats.org/drawingml/2006/main"/>
-          <a:p xmlns:a="http://schemas.openxmlformats.org/drawingml/2006/main">
-            <a:r>
-              <a:rPr lang="en-US" sz="1200" b="1">
-                <a:solidFill>
-                  <a:srgbClr val="8B6BE8"/>
-                </a:solidFill>
-                <a:latin typeface="Arial"/>
-                <a:ea typeface="Arial"/>
-              </a:rPr>
-              <a:t>MOONLIT WORK REPORT · VISUAL CARRIER</a:t>
-            </a:r>
-            <a:endParaRPr lang="en-US"/>
-          </a:p>
-        </p:txBody>
-      </p:sp>
-      <p:sp>
-        <p:nvSpPr>
-          <p:cNvPr id="4" name="visual-title"/>
-          <p:cNvSpPr txBox="1"/>
-          <p:nvPr/>
-        </p:nvSpPr>
-        <p:spPr>
-          <a:xfrm xmlns:a="http://schemas.openxmlformats.org/drawingml/2006/main">
-            <a:off x="914400" y="1638300"/>
-            <a:ext cx="5334000" cy="1143000"/>
-          </a:xfrm>
-          <a:prstGeom xmlns:a="http://schemas.openxmlformats.org/drawingml/2006/main" prst="rect">
-            <a:avLst/>
-          </a:prstGeom>
-          <a:noFill xmlns:a="http://schemas.openxmlformats.org/drawingml/2006/main"/>
-          <a:ln xmlns:a="http://schemas.openxmlformats.org/drawingml/2006/main" w="0">
-            <a:noFill/>
-          </a:ln>
-        </p:spPr>
-        <p:txBody>
-          <a:bodyPr xmlns:a="http://schemas.openxmlformats.org/drawingml/2006/main" wrap="square" lIns="0" tIns="0" rIns="0" bIns="0" anchor="t"/>
-          <a:lstStyle xmlns:a="http://schemas.openxmlformats.org/drawingml/2006/main"/>
-          <a:p xmlns:a="http://schemas.openxmlformats.org/drawingml/2006/main">
-            <a:r>
-              <a:rPr lang="en-US" sz="3300" b="1">
-                <a:solidFill>
-                  <a:srgbClr val="1D2330"/>
-                </a:solidFill>
-                <a:latin typeface="Arial"/>
-                <a:ea typeface="Arial"/>
-              </a:rPr>
-              <a:t>Show the operating shape</a:t>
-            </a:r>
-            <a:endParaRPr lang="en-US"/>
-          </a:p>
-        </p:txBody>
-      </p:sp>
-      <p:sp>
-        <p:nvSpPr>
-          <p:cNvPr id="5" name="visual-body"/>
-          <p:cNvSpPr txBox="1"/>
-          <p:nvPr/>
-        </p:nvSpPr>
-        <p:spPr>
-          <a:xfrm xmlns:a="http://schemas.openxmlformats.org/drawingml/2006/main">
-            <a:off x="914400" y="3219450"/>
-            <a:ext cx="4762500" cy="685800"/>
-          </a:xfrm>
-          <a:prstGeom xmlns:a="http://schemas.openxmlformats.org/drawingml/2006/main" prst="rect">
-            <a:avLst/>
-          </a:prstGeom>
-          <a:noFill xmlns:a="http://schemas.openxmlformats.org/drawingml/2006/main"/>
-          <a:ln xmlns:a="http://schemas.openxmlformats.org/drawingml/2006/main" w="0">
-            <a:noFill/>
-          </a:ln>
-        </p:spPr>
-        <p:txBody>
-          <a:bodyPr xmlns:a="http://schemas.openxmlformats.org/drawingml/2006/main" wrap="square" lIns="0" tIns="0" rIns="0" bIns="0" anchor="t"/>
-          <a:lstStyle xmlns:a="http://schemas.openxmlformats.org/drawingml/2006/main"/>
-          <a:p xmlns:a="http://schemas.openxmlformats.org/drawingml/2006/main">
-            <a:r>
-              <a:rPr lang="en-US" sz="1800">
-                <a:solidFill>
-                  <a:srgbClr val="1D2330"/>
-                </a:solidFill>
-                <a:latin typeface="Arial"/>
-                <a:ea typeface="Arial"/>
-              </a:rPr>
-              <a:t>The image carries context; the page names the move.</a:t>
-            </a:r>
-            <a:endParaRPr lang="en-US"/>
-          </a:p>
-        </p:txBody>
-      </p:sp>
-      <p:sp>
-        <p:nvSpPr>
-          <p:cNvPr id="6" name="visual-rule"/>
-          <p:cNvSpPr/>
-          <p:nvPr/>
-        </p:nvSpPr>
-        <p:spPr>
-          <a:xfrm xmlns:a="http://schemas.openxmlformats.org/drawingml/2006/main">
-            <a:off x="914400" y="4476750"/>
-            <a:ext cx="4419600" cy="0"/>
-          </a:xfrm>
-          <a:prstGeom xmlns:a="http://schemas.openxmlformats.org/drawingml/2006/main" prst="line">
-            <a:avLst/>
-          </a:prstGeom>
-          <a:noFill xmlns:a="http://schemas.openxmlformats.org/drawingml/2006/main"/>
-          <a:ln xmlns:a="http://schemas.openxmlformats.org/drawingml/2006/main" w="38100">
-            <a:solidFill>
-              <a:srgbClr val="8B6BE8"/>
-            </a:solidFill>
-            <a:prstDash val="solid"/>
-          </a:ln>
-        </p:spPr>
-        <p:txBody>
-          <a:bodyPr xmlns:a="http://schemas.openxmlformats.org/drawingml/2006/main" wrap="square" lIns="0" tIns="0" rIns="0" bIns="0" anchor="t"/>
-          <a:lstStyle xmlns:a="http://schemas.openxmlformats.org/drawingml/2006/main"/>
-          <a:p xmlns:a="http://schemas.openxmlformats.org/drawingml/2006/main">
-            <a:r>
-              <a:rPr lang="en-US"/>
-              <a:t/>
-            </a:r>
-            <a:endParaRPr lang="en-US"/>
-          </a:p>
-        </p:txBody>
-      </p:sp>
-      <p:sp>
-        <p:nvSpPr>
-          <p:cNvPr id="7" name="visual-label"/>
-          <p:cNvSpPr txBox="1"/>
-          <p:nvPr/>
-        </p:nvSpPr>
-        <p:spPr>
-          <a:xfrm xmlns:a="http://schemas.openxmlformats.org/drawingml/2006/main">
-            <a:off x="914400" y="4819650"/>
-            <a:ext cx="4953000" cy="228600"/>
-          </a:xfrm>
-          <a:prstGeom xmlns:a="http://schemas.openxmlformats.org/drawingml/2006/main" prst="rect">
-            <a:avLst/>
-          </a:prstGeom>
-          <a:noFill xmlns:a="http://schemas.openxmlformats.org/drawingml/2006/main"/>
-          <a:ln xmlns:a="http://schemas.openxmlformats.org/drawingml/2006/main" w="0">
-            <a:noFill/>
-          </a:ln>
-        </p:spPr>
-        <p:txBody>
-          <a:bodyPr xmlns:a="http://schemas.openxmlformats.org/drawingml/2006/main" wrap="square" lIns="0" tIns="0" rIns="0" bIns="0" anchor="t"/>
-          <a:lstStyle xmlns:a="http://schemas.openxmlformats.org/drawingml/2006/main"/>
-          <a:p xmlns:a="http://schemas.openxmlformats.org/drawingml/2006/main">
-            <a:r>
-              <a:rPr lang="en-US" sz="1200" b="1">
-                <a:solidFill>
-                  <a:srgbClr val="8B6BE8"/>
-                </a:solidFill>
-                <a:latin typeface="Arial"/>
-                <a:ea typeface="Arial"/>
-              </a:rPr>
-              <a:t>THE IMAGE IS EVIDENCE, NOT FILL</a:t>
-            </a:r>
-            <a:endParaRPr lang="en-US"/>
-          </a:p>
-        </p:txBody>
-      </p:sp>
-      <p:sp>
-        <p:nvSpPr>
-          <p:cNvPr id="8" name="source"/>
-          <p:cNvSpPr txBox="1"/>
-          <p:nvPr/>
-        </p:nvSpPr>
-        <p:spPr>
-          <a:xfrm xmlns:a="http://schemas.openxmlformats.org/drawingml/2006/main">
-            <a:off x="914400" y="7829550"/>
-            <a:ext cx="10953750" cy="209550"/>
-          </a:xfrm>
-          <a:prstGeom xmlns:a="http://schemas.openxmlformats.org/drawingml/2006/main" prst="rect">
-            <a:avLst/>
-          </a:prstGeom>
-          <a:noFill xmlns:a="http://schemas.openxmlformats.org/drawingml/2006/main"/>
-          <a:ln xmlns:a="http://schemas.openxmlformats.org/drawingml/2006/main" w="0">
-            <a:noFill/>
-          </a:ln>
-        </p:spPr>
-        <p:txBody>
-          <a:bodyPr xmlns:a="http://schemas.openxmlformats.org/drawingml/2006/main" wrap="square" lIns="0" tIns="0" rIns="0" bIns="0" anchor="t"/>
-          <a:lstStyle xmlns:a="http://schemas.openxmlformats.org/drawingml/2006/main"/>
-          <a:p xmlns:a="http://schemas.openxmlformats.org/drawingml/2006/main">
-            <a:r>
-              <a:rPr lang="en-US" sz="1050">
-                <a:solidFill>
-                  <a:srgbClr val="93959C"/>
-                </a:solidFill>
-                <a:latin typeface="Arial"/>
-                <a:ea typeface="Arial"/>
-              </a:rPr>
-              <a:t>OfficeKit original clean-room visual field · fictional content</a:t>
-            </a:r>
-            <a:endParaRPr lang="en-US"/>
-          </a:p>
-        </p:txBody>
-      </p:sp>
-      <p:sp>
-        <p:nvSpPr>
-          <p:cNvPr id="9" name="page-number"/>
-          <p:cNvSpPr txBox="1"/>
-          <p:nvPr/>
-        </p:nvSpPr>
-        <p:spPr>
-          <a:xfrm xmlns:a="http://schemas.openxmlformats.org/drawingml/2006/main">
-            <a:off x="13335000" y="7829550"/>
-            <a:ext cx="952500" cy="209550"/>
-          </a:xfrm>
-          <a:prstGeom xmlns:a="http://schemas.openxmlformats.org/drawingml/2006/main" prst="rect">
-            <a:avLst/>
-          </a:prstGeom>
-          <a:noFill xmlns:a="http://schemas.openxmlformats.org/drawingml/2006/main"/>
-          <a:ln xmlns:a="http://schemas.openxmlformats.org/drawingml/2006/main" w="0">
-            <a:noFill/>
-          </a:ln>
-        </p:spPr>
-        <p:txBody>
-          <a:bodyPr xmlns:a="http://schemas.openxmlformats.org/drawingml/2006/main" wrap="square" lIns="0" tIns="0" rIns="0" bIns="0" anchor="t"/>
-          <a:lstStyle xmlns:a="http://schemas.openxmlformats.org/drawingml/2006/main"/>
-          <a:p xmlns:a="http://schemas.openxmlformats.org/drawingml/2006/main">
-            <a:pPr algn="r"/>
-            <a:r>
-              <a:rPr lang="en-US" sz="1050">
-                <a:solidFill>
-                  <a:srgbClr val="93959C"/>
-                </a:solidFill>
-                <a:latin typeface="Arial"/>
-                <a:ea typeface="Arial"/>
-              </a:rPr>
-              <a:t>5 / 6</a:t>
-            </a:r>
-            <a:endParaRPr lang="en-US"/>
-          </a:p>
-        </p:txBody>
-      </p:sp>
-    </p:spTree>
-  </p:cSld>
-  <p:clrMapOvr>
-    <a:masterClrMapping xmlns:a="http://schemas.openxmlformats.org/drawingml/2006/main"/>
-  </p:clrMapOvr>
-</p:sld>
-</file>
-
-<file path=ppt/slides/slide6.xml><?xml version="1.0" encoding="utf-8"?>
-<p:sld xmlns:p="http://schemas.openxmlformats.org/presentationml/2006/main">
-  <p:cSld name="Decision close">
-    <p:bg>
-      <p:bgPr>
-        <a:blipFill xmlns:a="http://schemas.openxmlformats.org/drawingml/2006/main">
-          <a:blip xmlns:r="http://schemas.openxmlformats.org/officeDocument/2006/relationships" r:embed="rIdOfficeKitImage59ee3aa5202fd02f_1"/>
-          <a:stretch>
-            <a:fillRect/>
-          </a:stretch>
-        </a:blipFill>
-      </p:bgPr>
-    </p:bg>
-    <p:spTree>
-      <p:nvGrpSpPr>
-        <p:cNvPr id="1" name=""/>
-        <p:cNvGrpSpPr/>
-        <p:nvPr/>
-      </p:nvGrpSpPr>
-      <p:grpSpPr>
-        <a:xfrm xmlns:a="http://schemas.openxmlformats.org/drawingml/2006/main">
-          <a:off x="0" y="0"/>
-          <a:ext cx="0" cy="0"/>
-          <a:chOff x="0" y="0"/>
-          <a:chExt cx="0" cy="0"/>
-        </a:xfrm>
-      </p:grpSpPr>
-      <p:sp>
-        <p:nvSpPr>
           <p:cNvPr id="2" name="close-paper-scrim"/>
           <p:cNvSpPr/>
           <p:nvPr/>
@@ -4139,7 +4139,7 @@
           <p:nvPr/>
         </p:nvPicPr>
         <p:blipFill>
-          <a:blip xmlns:r="http://schemas.openxmlformats.org/officeDocument/2006/relationships" xmlns:a="http://schemas.openxmlformats.org/drawingml/2006/main" r:embed="rIdOfficeKitImage083106afebc7d419_1"/>
+          <a:blip xmlns:r="http://schemas.openxmlformats.org/officeDocument/2006/relationships" xmlns:a="http://schemas.openxmlformats.org/drawingml/2006/main" r:embed="rIdOfficeKitImage59ee3aa5202fd02f_1"/>
           <a:srcRect xmlns:a="http://schemas.openxmlformats.org/drawingml/2006/main" l="0" t="47258" r="0" b="47258"/>
           <a:stretch xmlns:a="http://schemas.openxmlformats.org/drawingml/2006/main">
             <a:fillRect/>

--- a/skills/presentation-template-library/skills/artifact-template-moonlit-work-report/assets/reference.pptx
+++ b/skills/presentation-template-library/skills/artifact-template-moonlit-work-report/assets/reference.pptx
@@ -2440,7 +2440,7 @@
         </p:xfrm>
         <a:graphic xmlns:a="http://schemas.openxmlformats.org/drawingml/2006/main">
           <a:graphicData uri="http://schemas.openxmlformats.org/drawingml/2006/chart">
-            <c:chart xmlns:r="http://schemas.openxmlformats.org/officeDocument/2006/relationships" xmlns:c="http://schemas.openxmlformats.org/drawingml/2006/chart" r:id="R270a436d433e4175"/>
+            <c:chart xmlns:r="http://schemas.openxmlformats.org/officeDocument/2006/relationships" xmlns:c="http://schemas.openxmlformats.org/drawingml/2006/chart" r:id="Rabb9d5e8662c42c6"/>
           </a:graphicData>
         </a:graphic>
       </p:graphicFrame>
@@ -2458,7 +2458,7 @@
         </p:xfrm>
         <a:graphic xmlns:a="http://schemas.openxmlformats.org/drawingml/2006/main">
           <a:graphicData uri="http://schemas.openxmlformats.org/drawingml/2006/chart">
-            <c:chart xmlns:r="http://schemas.openxmlformats.org/officeDocument/2006/relationships" xmlns:c="http://schemas.openxmlformats.org/drawingml/2006/chart" r:id="R5c5cab46a44844ee"/>
+            <c:chart xmlns:r="http://schemas.openxmlformats.org/officeDocument/2006/relationships" xmlns:c="http://schemas.openxmlformats.org/drawingml/2006/chart" r:id="Rc6761d6a3f384aaf"/>
           </a:graphicData>
         </a:graphic>
       </p:graphicFrame>
@@ -2829,8 +2829,8 @@
           <p:nvPr/>
         </p:nvPicPr>
         <p:blipFill>
-          <a:blip xmlns:r="http://schemas.openxmlformats.org/officeDocument/2006/relationships" xmlns:a="http://schemas.openxmlformats.org/drawingml/2006/main" r:embed="rIdOfficeKitImage56df3e49f11f0ff0_1"/>
-          <a:srcRect xmlns:a="http://schemas.openxmlformats.org/drawingml/2006/main" l="0" t="47258" r="0" b="47258"/>
+          <a:blip xmlns:r="http://schemas.openxmlformats.org/officeDocument/2006/relationships" xmlns:a="http://schemas.openxmlformats.org/drawingml/2006/main" r:embed="rIdOfficeKitImaged3ade97fd9ca0fdd_1"/>
+          <a:srcRect xmlns:a="http://schemas.openxmlformats.org/drawingml/2006/main" l="0" t="47256" r="0" b="47256"/>
           <a:stretch xmlns:a="http://schemas.openxmlformats.org/drawingml/2006/main">
             <a:fillRect/>
           </a:stretch>
@@ -3734,6 +3734,336 @@
 <file path=ppt/slides/slide5.xml><?xml version="1.0" encoding="utf-8"?>
 <p:sld xmlns:p="http://schemas.openxmlformats.org/presentationml/2006/main">
   <p:cSld name="Visual carrier">
+    <p:bg>
+      <p:bgPr>
+        <a:blipFill xmlns:a="http://schemas.openxmlformats.org/drawingml/2006/main">
+          <a:blip xmlns:r="http://schemas.openxmlformats.org/officeDocument/2006/relationships" r:embed="rIdOfficeKitImage56df3e49f11f0ff0_1"/>
+          <a:stretch>
+            <a:fillRect/>
+          </a:stretch>
+        </a:blipFill>
+      </p:bgPr>
+    </p:bg>
+    <p:spTree>
+      <p:nvGrpSpPr>
+        <p:cNvPr id="1" name=""/>
+        <p:cNvGrpSpPr/>
+        <p:nvPr/>
+      </p:nvGrpSpPr>
+      <p:grpSpPr>
+        <a:xfrm xmlns:a="http://schemas.openxmlformats.org/drawingml/2006/main">
+          <a:off x="0" y="0"/>
+          <a:ext cx="0" cy="0"/>
+          <a:chOff x="0" y="0"/>
+          <a:chExt cx="0" cy="0"/>
+        </a:xfrm>
+      </p:grpSpPr>
+      <p:sp>
+        <p:nvSpPr>
+          <p:cNvPr id="2" name="visual-scrim"/>
+          <p:cNvSpPr/>
+          <p:nvPr/>
+        </p:nvSpPr>
+        <p:spPr>
+          <a:xfrm xmlns:a="http://schemas.openxmlformats.org/drawingml/2006/main">
+            <a:off x="0" y="0"/>
+            <a:ext cx="6858000" cy="8572500"/>
+          </a:xfrm>
+          <a:prstGeom xmlns:a="http://schemas.openxmlformats.org/drawingml/2006/main" prst="rect">
+            <a:avLst/>
+          </a:prstGeom>
+          <a:solidFill xmlns:a="http://schemas.openxmlformats.org/drawingml/2006/main">
+            <a:srgbClr val="FFFFFF">
+              <a:alpha val="94000"/>
+            </a:srgbClr>
+          </a:solidFill>
+          <a:ln xmlns:a="http://schemas.openxmlformats.org/drawingml/2006/main" w="0">
+            <a:solidFill>
+              <a:srgbClr val="FFFFFF"/>
+            </a:solidFill>
+            <a:prstDash val="solid"/>
+          </a:ln>
+        </p:spPr>
+        <p:txBody>
+          <a:bodyPr xmlns:a="http://schemas.openxmlformats.org/drawingml/2006/main" wrap="square" lIns="0" tIns="0" rIns="0" bIns="0" anchor="t"/>
+          <a:lstStyle xmlns:a="http://schemas.openxmlformats.org/drawingml/2006/main"/>
+          <a:p xmlns:a="http://schemas.openxmlformats.org/drawingml/2006/main">
+            <a:r>
+              <a:rPr lang="en-US"/>
+              <a:t/>
+            </a:r>
+            <a:endParaRPr lang="en-US"/>
+          </a:p>
+        </p:txBody>
+      </p:sp>
+      <p:sp>
+        <p:nvSpPr>
+          <p:cNvPr id="3" name="visual-eyebrow"/>
+          <p:cNvSpPr txBox="1"/>
+          <p:nvPr/>
+        </p:nvSpPr>
+        <p:spPr>
+          <a:xfrm xmlns:a="http://schemas.openxmlformats.org/drawingml/2006/main">
+            <a:off x="914400" y="895350"/>
+            <a:ext cx="6667500" cy="228600"/>
+          </a:xfrm>
+          <a:prstGeom xmlns:a="http://schemas.openxmlformats.org/drawingml/2006/main" prst="rect">
+            <a:avLst/>
+          </a:prstGeom>
+          <a:noFill xmlns:a="http://schemas.openxmlformats.org/drawingml/2006/main"/>
+          <a:ln xmlns:a="http://schemas.openxmlformats.org/drawingml/2006/main" w="0">
+            <a:noFill/>
+          </a:ln>
+        </p:spPr>
+        <p:txBody>
+          <a:bodyPr xmlns:a="http://schemas.openxmlformats.org/drawingml/2006/main" wrap="square" lIns="0" tIns="0" rIns="0" bIns="0" anchor="t"/>
+          <a:lstStyle xmlns:a="http://schemas.openxmlformats.org/drawingml/2006/main"/>
+          <a:p xmlns:a="http://schemas.openxmlformats.org/drawingml/2006/main">
+            <a:r>
+              <a:rPr lang="en-US" sz="1200" b="1">
+                <a:solidFill>
+                  <a:srgbClr val="8B6BE8"/>
+                </a:solidFill>
+                <a:latin typeface="Arial"/>
+                <a:ea typeface="Arial"/>
+              </a:rPr>
+              <a:t>MOONLIT WORK REPORT · VISUAL CARRIER</a:t>
+            </a:r>
+            <a:endParaRPr lang="en-US"/>
+          </a:p>
+        </p:txBody>
+      </p:sp>
+      <p:sp>
+        <p:nvSpPr>
+          <p:cNvPr id="4" name="visual-title"/>
+          <p:cNvSpPr txBox="1"/>
+          <p:nvPr/>
+        </p:nvSpPr>
+        <p:spPr>
+          <a:xfrm xmlns:a="http://schemas.openxmlformats.org/drawingml/2006/main">
+            <a:off x="914400" y="1638300"/>
+            <a:ext cx="5334000" cy="1143000"/>
+          </a:xfrm>
+          <a:prstGeom xmlns:a="http://schemas.openxmlformats.org/drawingml/2006/main" prst="rect">
+            <a:avLst/>
+          </a:prstGeom>
+          <a:noFill xmlns:a="http://schemas.openxmlformats.org/drawingml/2006/main"/>
+          <a:ln xmlns:a="http://schemas.openxmlformats.org/drawingml/2006/main" w="0">
+            <a:noFill/>
+          </a:ln>
+        </p:spPr>
+        <p:txBody>
+          <a:bodyPr xmlns:a="http://schemas.openxmlformats.org/drawingml/2006/main" wrap="square" lIns="0" tIns="0" rIns="0" bIns="0" anchor="t"/>
+          <a:lstStyle xmlns:a="http://schemas.openxmlformats.org/drawingml/2006/main"/>
+          <a:p xmlns:a="http://schemas.openxmlformats.org/drawingml/2006/main">
+            <a:r>
+              <a:rPr lang="en-US" sz="3300" b="1">
+                <a:solidFill>
+                  <a:srgbClr val="1D2330"/>
+                </a:solidFill>
+                <a:latin typeface="Arial"/>
+                <a:ea typeface="Arial"/>
+              </a:rPr>
+              <a:t>Show the operating shape</a:t>
+            </a:r>
+            <a:endParaRPr lang="en-US"/>
+          </a:p>
+        </p:txBody>
+      </p:sp>
+      <p:sp>
+        <p:nvSpPr>
+          <p:cNvPr id="5" name="visual-body"/>
+          <p:cNvSpPr txBox="1"/>
+          <p:nvPr/>
+        </p:nvSpPr>
+        <p:spPr>
+          <a:xfrm xmlns:a="http://schemas.openxmlformats.org/drawingml/2006/main">
+            <a:off x="914400" y="3219450"/>
+            <a:ext cx="4762500" cy="685800"/>
+          </a:xfrm>
+          <a:prstGeom xmlns:a="http://schemas.openxmlformats.org/drawingml/2006/main" prst="rect">
+            <a:avLst/>
+          </a:prstGeom>
+          <a:noFill xmlns:a="http://schemas.openxmlformats.org/drawingml/2006/main"/>
+          <a:ln xmlns:a="http://schemas.openxmlformats.org/drawingml/2006/main" w="0">
+            <a:noFill/>
+          </a:ln>
+        </p:spPr>
+        <p:txBody>
+          <a:bodyPr xmlns:a="http://schemas.openxmlformats.org/drawingml/2006/main" wrap="square" lIns="0" tIns="0" rIns="0" bIns="0" anchor="t"/>
+          <a:lstStyle xmlns:a="http://schemas.openxmlformats.org/drawingml/2006/main"/>
+          <a:p xmlns:a="http://schemas.openxmlformats.org/drawingml/2006/main">
+            <a:r>
+              <a:rPr lang="en-US" sz="1800">
+                <a:solidFill>
+                  <a:srgbClr val="1D2330"/>
+                </a:solidFill>
+                <a:latin typeface="Arial"/>
+                <a:ea typeface="Arial"/>
+              </a:rPr>
+              <a:t>The image carries context; the page names the move.</a:t>
+            </a:r>
+            <a:endParaRPr lang="en-US"/>
+          </a:p>
+        </p:txBody>
+      </p:sp>
+      <p:sp>
+        <p:nvSpPr>
+          <p:cNvPr id="6" name="visual-rule"/>
+          <p:cNvSpPr/>
+          <p:nvPr/>
+        </p:nvSpPr>
+        <p:spPr>
+          <a:xfrm xmlns:a="http://schemas.openxmlformats.org/drawingml/2006/main">
+            <a:off x="914400" y="4476750"/>
+            <a:ext cx="4419600" cy="0"/>
+          </a:xfrm>
+          <a:prstGeom xmlns:a="http://schemas.openxmlformats.org/drawingml/2006/main" prst="line">
+            <a:avLst/>
+          </a:prstGeom>
+          <a:noFill xmlns:a="http://schemas.openxmlformats.org/drawingml/2006/main"/>
+          <a:ln xmlns:a="http://schemas.openxmlformats.org/drawingml/2006/main" w="38100">
+            <a:solidFill>
+              <a:srgbClr val="8B6BE8"/>
+            </a:solidFill>
+            <a:prstDash val="solid"/>
+          </a:ln>
+        </p:spPr>
+        <p:txBody>
+          <a:bodyPr xmlns:a="http://schemas.openxmlformats.org/drawingml/2006/main" wrap="square" lIns="0" tIns="0" rIns="0" bIns="0" anchor="t"/>
+          <a:lstStyle xmlns:a="http://schemas.openxmlformats.org/drawingml/2006/main"/>
+          <a:p xmlns:a="http://schemas.openxmlformats.org/drawingml/2006/main">
+            <a:r>
+              <a:rPr lang="en-US"/>
+              <a:t/>
+            </a:r>
+            <a:endParaRPr lang="en-US"/>
+          </a:p>
+        </p:txBody>
+      </p:sp>
+      <p:sp>
+        <p:nvSpPr>
+          <p:cNvPr id="7" name="visual-label"/>
+          <p:cNvSpPr txBox="1"/>
+          <p:nvPr/>
+        </p:nvSpPr>
+        <p:spPr>
+          <a:xfrm xmlns:a="http://schemas.openxmlformats.org/drawingml/2006/main">
+            <a:off x="914400" y="4819650"/>
+            <a:ext cx="4953000" cy="228600"/>
+          </a:xfrm>
+          <a:prstGeom xmlns:a="http://schemas.openxmlformats.org/drawingml/2006/main" prst="rect">
+            <a:avLst/>
+          </a:prstGeom>
+          <a:noFill xmlns:a="http://schemas.openxmlformats.org/drawingml/2006/main"/>
+          <a:ln xmlns:a="http://schemas.openxmlformats.org/drawingml/2006/main" w="0">
+            <a:noFill/>
+          </a:ln>
+        </p:spPr>
+        <p:txBody>
+          <a:bodyPr xmlns:a="http://schemas.openxmlformats.org/drawingml/2006/main" wrap="square" lIns="0" tIns="0" rIns="0" bIns="0" anchor="t"/>
+          <a:lstStyle xmlns:a="http://schemas.openxmlformats.org/drawingml/2006/main"/>
+          <a:p xmlns:a="http://schemas.openxmlformats.org/drawingml/2006/main">
+            <a:r>
+              <a:rPr lang="en-US" sz="1200" b="1">
+                <a:solidFill>
+                  <a:srgbClr val="8B6BE8"/>
+                </a:solidFill>
+                <a:latin typeface="Arial"/>
+                <a:ea typeface="Arial"/>
+              </a:rPr>
+              <a:t>THE IMAGE IS EVIDENCE, NOT FILL</a:t>
+            </a:r>
+            <a:endParaRPr lang="en-US"/>
+          </a:p>
+        </p:txBody>
+      </p:sp>
+      <p:sp>
+        <p:nvSpPr>
+          <p:cNvPr id="8" name="source"/>
+          <p:cNvSpPr txBox="1"/>
+          <p:nvPr/>
+        </p:nvSpPr>
+        <p:spPr>
+          <a:xfrm xmlns:a="http://schemas.openxmlformats.org/drawingml/2006/main">
+            <a:off x="914400" y="7829550"/>
+            <a:ext cx="10953750" cy="209550"/>
+          </a:xfrm>
+          <a:prstGeom xmlns:a="http://schemas.openxmlformats.org/drawingml/2006/main" prst="rect">
+            <a:avLst/>
+          </a:prstGeom>
+          <a:noFill xmlns:a="http://schemas.openxmlformats.org/drawingml/2006/main"/>
+          <a:ln xmlns:a="http://schemas.openxmlformats.org/drawingml/2006/main" w="0">
+            <a:noFill/>
+          </a:ln>
+        </p:spPr>
+        <p:txBody>
+          <a:bodyPr xmlns:a="http://schemas.openxmlformats.org/drawingml/2006/main" wrap="square" lIns="0" tIns="0" rIns="0" bIns="0" anchor="t"/>
+          <a:lstStyle xmlns:a="http://schemas.openxmlformats.org/drawingml/2006/main"/>
+          <a:p xmlns:a="http://schemas.openxmlformats.org/drawingml/2006/main">
+            <a:r>
+              <a:rPr lang="en-US" sz="1050">
+                <a:solidFill>
+                  <a:srgbClr val="93959C"/>
+                </a:solidFill>
+                <a:latin typeface="Arial"/>
+                <a:ea typeface="Arial"/>
+              </a:rPr>
+              <a:t>OfficeKit original clean-room visual field · fictional content</a:t>
+            </a:r>
+            <a:endParaRPr lang="en-US"/>
+          </a:p>
+        </p:txBody>
+      </p:sp>
+      <p:sp>
+        <p:nvSpPr>
+          <p:cNvPr id="9" name="page-number"/>
+          <p:cNvSpPr txBox="1"/>
+          <p:nvPr/>
+        </p:nvSpPr>
+        <p:spPr>
+          <a:xfrm xmlns:a="http://schemas.openxmlformats.org/drawingml/2006/main">
+            <a:off x="13335000" y="7829550"/>
+            <a:ext cx="952500" cy="209550"/>
+          </a:xfrm>
+          <a:prstGeom xmlns:a="http://schemas.openxmlformats.org/drawingml/2006/main" prst="rect">
+            <a:avLst/>
+          </a:prstGeom>
+          <a:noFill xmlns:a="http://schemas.openxmlformats.org/drawingml/2006/main"/>
+          <a:ln xmlns:a="http://schemas.openxmlformats.org/drawingml/2006/main" w="0">
+            <a:noFill/>
+          </a:ln>
+        </p:spPr>
+        <p:txBody>
+          <a:bodyPr xmlns:a="http://schemas.openxmlformats.org/drawingml/2006/main" wrap="square" lIns="0" tIns="0" rIns="0" bIns="0" anchor="t"/>
+          <a:lstStyle xmlns:a="http://schemas.openxmlformats.org/drawingml/2006/main"/>
+          <a:p xmlns:a="http://schemas.openxmlformats.org/drawingml/2006/main">
+            <a:pPr algn="r"/>
+            <a:r>
+              <a:rPr lang="en-US" sz="1050">
+                <a:solidFill>
+                  <a:srgbClr val="93959C"/>
+                </a:solidFill>
+                <a:latin typeface="Arial"/>
+                <a:ea typeface="Arial"/>
+              </a:rPr>
+              <a:t>5 / 6</a:t>
+            </a:r>
+            <a:endParaRPr lang="en-US"/>
+          </a:p>
+        </p:txBody>
+      </p:sp>
+    </p:spTree>
+  </p:cSld>
+  <p:clrMapOvr>
+    <a:masterClrMapping xmlns:a="http://schemas.openxmlformats.org/drawingml/2006/main"/>
+  </p:clrMapOvr>
+</p:sld>
+</file>
+
+<file path=ppt/slides/slide6.xml><?xml version="1.0" encoding="utf-8"?>
+<p:sld xmlns:p="http://schemas.openxmlformats.org/presentationml/2006/main">
+  <p:cSld name="Decision close">
     <p:bg>
       <p:bgPr>
         <a:blipFill xmlns:a="http://schemas.openxmlformats.org/drawingml/2006/main">
@@ -3760,336 +4090,6 @@
       </p:grpSpPr>
       <p:sp>
         <p:nvSpPr>
-          <p:cNvPr id="2" name="visual-scrim"/>
-          <p:cNvSpPr/>
-          <p:nvPr/>
-        </p:nvSpPr>
-        <p:spPr>
-          <a:xfrm xmlns:a="http://schemas.openxmlformats.org/drawingml/2006/main">
-            <a:off x="0" y="0"/>
-            <a:ext cx="6858000" cy="8572500"/>
-          </a:xfrm>
-          <a:prstGeom xmlns:a="http://schemas.openxmlformats.org/drawingml/2006/main" prst="rect">
-            <a:avLst/>
-          </a:prstGeom>
-          <a:solidFill xmlns:a="http://schemas.openxmlformats.org/drawingml/2006/main">
-            <a:srgbClr val="FFFFFF">
-              <a:alpha val="94000"/>
-            </a:srgbClr>
-          </a:solidFill>
-          <a:ln xmlns:a="http://schemas.openxmlformats.org/drawingml/2006/main" w="0">
-            <a:solidFill>
-              <a:srgbClr val="FFFFFF"/>
-            </a:solidFill>
-            <a:prstDash val="solid"/>
-          </a:ln>
-        </p:spPr>
-        <p:txBody>
-          <a:bodyPr xmlns:a="http://schemas.openxmlformats.org/drawingml/2006/main" wrap="square" lIns="0" tIns="0" rIns="0" bIns="0" anchor="t"/>
-          <a:lstStyle xmlns:a="http://schemas.openxmlformats.org/drawingml/2006/main"/>
-          <a:p xmlns:a="http://schemas.openxmlformats.org/drawingml/2006/main">
-            <a:r>
-              <a:rPr lang="en-US"/>
-              <a:t/>
-            </a:r>
-            <a:endParaRPr lang="en-US"/>
-          </a:p>
-        </p:txBody>
-      </p:sp>
-      <p:sp>
-        <p:nvSpPr>
-          <p:cNvPr id="3" name="visual-eyebrow"/>
-          <p:cNvSpPr txBox="1"/>
-          <p:nvPr/>
-        </p:nvSpPr>
-        <p:spPr>
-          <a:xfrm xmlns:a="http://schemas.openxmlformats.org/drawingml/2006/main">
-            <a:off x="914400" y="895350"/>
-            <a:ext cx="6667500" cy="228600"/>
-          </a:xfrm>
-          <a:prstGeom xmlns:a="http://schemas.openxmlformats.org/drawingml/2006/main" prst="rect">
-            <a:avLst/>
-          </a:prstGeom>
-          <a:noFill xmlns:a="http://schemas.openxmlformats.org/drawingml/2006/main"/>
-          <a:ln xmlns:a="http://schemas.openxmlformats.org/drawingml/2006/main" w="0">
-            <a:noFill/>
-          </a:ln>
-        </p:spPr>
-        <p:txBody>
-          <a:bodyPr xmlns:a="http://schemas.openxmlformats.org/drawingml/2006/main" wrap="square" lIns="0" tIns="0" rIns="0" bIns="0" anchor="t"/>
-          <a:lstStyle xmlns:a="http://schemas.openxmlformats.org/drawingml/2006/main"/>
-          <a:p xmlns:a="http://schemas.openxmlformats.org/drawingml/2006/main">
-            <a:r>
-              <a:rPr lang="en-US" sz="1200" b="1">
-                <a:solidFill>
-                  <a:srgbClr val="8B6BE8"/>
-                </a:solidFill>
-                <a:latin typeface="Arial"/>
-                <a:ea typeface="Arial"/>
-              </a:rPr>
-              <a:t>MOONLIT WORK REPORT · VISUAL CARRIER</a:t>
-            </a:r>
-            <a:endParaRPr lang="en-US"/>
-          </a:p>
-        </p:txBody>
-      </p:sp>
-      <p:sp>
-        <p:nvSpPr>
-          <p:cNvPr id="4" name="visual-title"/>
-          <p:cNvSpPr txBox="1"/>
-          <p:nvPr/>
-        </p:nvSpPr>
-        <p:spPr>
-          <a:xfrm xmlns:a="http://schemas.openxmlformats.org/drawingml/2006/main">
-            <a:off x="914400" y="1638300"/>
-            <a:ext cx="5334000" cy="1143000"/>
-          </a:xfrm>
-          <a:prstGeom xmlns:a="http://schemas.openxmlformats.org/drawingml/2006/main" prst="rect">
-            <a:avLst/>
-          </a:prstGeom>
-          <a:noFill xmlns:a="http://schemas.openxmlformats.org/drawingml/2006/main"/>
-          <a:ln xmlns:a="http://schemas.openxmlformats.org/drawingml/2006/main" w="0">
-            <a:noFill/>
-          </a:ln>
-        </p:spPr>
-        <p:txBody>
-          <a:bodyPr xmlns:a="http://schemas.openxmlformats.org/drawingml/2006/main" wrap="square" lIns="0" tIns="0" rIns="0" bIns="0" anchor="t"/>
-          <a:lstStyle xmlns:a="http://schemas.openxmlformats.org/drawingml/2006/main"/>
-          <a:p xmlns:a="http://schemas.openxmlformats.org/drawingml/2006/main">
-            <a:r>
-              <a:rPr lang="en-US" sz="3300" b="1">
-                <a:solidFill>
-                  <a:srgbClr val="1D2330"/>
-                </a:solidFill>
-                <a:latin typeface="Arial"/>
-                <a:ea typeface="Arial"/>
-              </a:rPr>
-              <a:t>Show the operating shape</a:t>
-            </a:r>
-            <a:endParaRPr lang="en-US"/>
-          </a:p>
-        </p:txBody>
-      </p:sp>
-      <p:sp>
-        <p:nvSpPr>
-          <p:cNvPr id="5" name="visual-body"/>
-          <p:cNvSpPr txBox="1"/>
-          <p:nvPr/>
-        </p:nvSpPr>
-        <p:spPr>
-          <a:xfrm xmlns:a="http://schemas.openxmlformats.org/drawingml/2006/main">
-            <a:off x="914400" y="3219450"/>
-            <a:ext cx="4762500" cy="685800"/>
-          </a:xfrm>
-          <a:prstGeom xmlns:a="http://schemas.openxmlformats.org/drawingml/2006/main" prst="rect">
-            <a:avLst/>
-          </a:prstGeom>
-          <a:noFill xmlns:a="http://schemas.openxmlformats.org/drawingml/2006/main"/>
-          <a:ln xmlns:a="http://schemas.openxmlformats.org/drawingml/2006/main" w="0">
-            <a:noFill/>
-          </a:ln>
-        </p:spPr>
-        <p:txBody>
-          <a:bodyPr xmlns:a="http://schemas.openxmlformats.org/drawingml/2006/main" wrap="square" lIns="0" tIns="0" rIns="0" bIns="0" anchor="t"/>
-          <a:lstStyle xmlns:a="http://schemas.openxmlformats.org/drawingml/2006/main"/>
-          <a:p xmlns:a="http://schemas.openxmlformats.org/drawingml/2006/main">
-            <a:r>
-              <a:rPr lang="en-US" sz="1800">
-                <a:solidFill>
-                  <a:srgbClr val="1D2330"/>
-                </a:solidFill>
-                <a:latin typeface="Arial"/>
-                <a:ea typeface="Arial"/>
-              </a:rPr>
-              <a:t>The image carries context; the page names the move.</a:t>
-            </a:r>
-            <a:endParaRPr lang="en-US"/>
-          </a:p>
-        </p:txBody>
-      </p:sp>
-      <p:sp>
-        <p:nvSpPr>
-          <p:cNvPr id="6" name="visual-rule"/>
-          <p:cNvSpPr/>
-          <p:nvPr/>
-        </p:nvSpPr>
-        <p:spPr>
-          <a:xfrm xmlns:a="http://schemas.openxmlformats.org/drawingml/2006/main">
-            <a:off x="914400" y="4476750"/>
-            <a:ext cx="4419600" cy="0"/>
-          </a:xfrm>
-          <a:prstGeom xmlns:a="http://schemas.openxmlformats.org/drawingml/2006/main" prst="line">
-            <a:avLst/>
-          </a:prstGeom>
-          <a:noFill xmlns:a="http://schemas.openxmlformats.org/drawingml/2006/main"/>
-          <a:ln xmlns:a="http://schemas.openxmlformats.org/drawingml/2006/main" w="38100">
-            <a:solidFill>
-              <a:srgbClr val="8B6BE8"/>
-            </a:solidFill>
-            <a:prstDash val="solid"/>
-          </a:ln>
-        </p:spPr>
-        <p:txBody>
-          <a:bodyPr xmlns:a="http://schemas.openxmlformats.org/drawingml/2006/main" wrap="square" lIns="0" tIns="0" rIns="0" bIns="0" anchor="t"/>
-          <a:lstStyle xmlns:a="http://schemas.openxmlformats.org/drawingml/2006/main"/>
-          <a:p xmlns:a="http://schemas.openxmlformats.org/drawingml/2006/main">
-            <a:r>
-              <a:rPr lang="en-US"/>
-              <a:t/>
-            </a:r>
-            <a:endParaRPr lang="en-US"/>
-          </a:p>
-        </p:txBody>
-      </p:sp>
-      <p:sp>
-        <p:nvSpPr>
-          <p:cNvPr id="7" name="visual-label"/>
-          <p:cNvSpPr txBox="1"/>
-          <p:nvPr/>
-        </p:nvSpPr>
-        <p:spPr>
-          <a:xfrm xmlns:a="http://schemas.openxmlformats.org/drawingml/2006/main">
-            <a:off x="914400" y="4819650"/>
-            <a:ext cx="4953000" cy="228600"/>
-          </a:xfrm>
-          <a:prstGeom xmlns:a="http://schemas.openxmlformats.org/drawingml/2006/main" prst="rect">
-            <a:avLst/>
-          </a:prstGeom>
-          <a:noFill xmlns:a="http://schemas.openxmlformats.org/drawingml/2006/main"/>
-          <a:ln xmlns:a="http://schemas.openxmlformats.org/drawingml/2006/main" w="0">
-            <a:noFill/>
-          </a:ln>
-        </p:spPr>
-        <p:txBody>
-          <a:bodyPr xmlns:a="http://schemas.openxmlformats.org/drawingml/2006/main" wrap="square" lIns="0" tIns="0" rIns="0" bIns="0" anchor="t"/>
-          <a:lstStyle xmlns:a="http://schemas.openxmlformats.org/drawingml/2006/main"/>
-          <a:p xmlns:a="http://schemas.openxmlformats.org/drawingml/2006/main">
-            <a:r>
-              <a:rPr lang="en-US" sz="1200" b="1">
-                <a:solidFill>
-                  <a:srgbClr val="8B6BE8"/>
-                </a:solidFill>
-                <a:latin typeface="Arial"/>
-                <a:ea typeface="Arial"/>
-              </a:rPr>
-              <a:t>THE IMAGE IS EVIDENCE, NOT FILL</a:t>
-            </a:r>
-            <a:endParaRPr lang="en-US"/>
-          </a:p>
-        </p:txBody>
-      </p:sp>
-      <p:sp>
-        <p:nvSpPr>
-          <p:cNvPr id="8" name="source"/>
-          <p:cNvSpPr txBox="1"/>
-          <p:nvPr/>
-        </p:nvSpPr>
-        <p:spPr>
-          <a:xfrm xmlns:a="http://schemas.openxmlformats.org/drawingml/2006/main">
-            <a:off x="914400" y="7829550"/>
-            <a:ext cx="10953750" cy="209550"/>
-          </a:xfrm>
-          <a:prstGeom xmlns:a="http://schemas.openxmlformats.org/drawingml/2006/main" prst="rect">
-            <a:avLst/>
-          </a:prstGeom>
-          <a:noFill xmlns:a="http://schemas.openxmlformats.org/drawingml/2006/main"/>
-          <a:ln xmlns:a="http://schemas.openxmlformats.org/drawingml/2006/main" w="0">
-            <a:noFill/>
-          </a:ln>
-        </p:spPr>
-        <p:txBody>
-          <a:bodyPr xmlns:a="http://schemas.openxmlformats.org/drawingml/2006/main" wrap="square" lIns="0" tIns="0" rIns="0" bIns="0" anchor="t"/>
-          <a:lstStyle xmlns:a="http://schemas.openxmlformats.org/drawingml/2006/main"/>
-          <a:p xmlns:a="http://schemas.openxmlformats.org/drawingml/2006/main">
-            <a:r>
-              <a:rPr lang="en-US" sz="1050">
-                <a:solidFill>
-                  <a:srgbClr val="93959C"/>
-                </a:solidFill>
-                <a:latin typeface="Arial"/>
-                <a:ea typeface="Arial"/>
-              </a:rPr>
-              <a:t>OfficeKit original clean-room visual field · fictional content</a:t>
-            </a:r>
-            <a:endParaRPr lang="en-US"/>
-          </a:p>
-        </p:txBody>
-      </p:sp>
-      <p:sp>
-        <p:nvSpPr>
-          <p:cNvPr id="9" name="page-number"/>
-          <p:cNvSpPr txBox="1"/>
-          <p:nvPr/>
-        </p:nvSpPr>
-        <p:spPr>
-          <a:xfrm xmlns:a="http://schemas.openxmlformats.org/drawingml/2006/main">
-            <a:off x="13335000" y="7829550"/>
-            <a:ext cx="952500" cy="209550"/>
-          </a:xfrm>
-          <a:prstGeom xmlns:a="http://schemas.openxmlformats.org/drawingml/2006/main" prst="rect">
-            <a:avLst/>
-          </a:prstGeom>
-          <a:noFill xmlns:a="http://schemas.openxmlformats.org/drawingml/2006/main"/>
-          <a:ln xmlns:a="http://schemas.openxmlformats.org/drawingml/2006/main" w="0">
-            <a:noFill/>
-          </a:ln>
-        </p:spPr>
-        <p:txBody>
-          <a:bodyPr xmlns:a="http://schemas.openxmlformats.org/drawingml/2006/main" wrap="square" lIns="0" tIns="0" rIns="0" bIns="0" anchor="t"/>
-          <a:lstStyle xmlns:a="http://schemas.openxmlformats.org/drawingml/2006/main"/>
-          <a:p xmlns:a="http://schemas.openxmlformats.org/drawingml/2006/main">
-            <a:pPr algn="r"/>
-            <a:r>
-              <a:rPr lang="en-US" sz="1050">
-                <a:solidFill>
-                  <a:srgbClr val="93959C"/>
-                </a:solidFill>
-                <a:latin typeface="Arial"/>
-                <a:ea typeface="Arial"/>
-              </a:rPr>
-              <a:t>5 / 6</a:t>
-            </a:r>
-            <a:endParaRPr lang="en-US"/>
-          </a:p>
-        </p:txBody>
-      </p:sp>
-    </p:spTree>
-  </p:cSld>
-  <p:clrMapOvr>
-    <a:masterClrMapping xmlns:a="http://schemas.openxmlformats.org/drawingml/2006/main"/>
-  </p:clrMapOvr>
-</p:sld>
-</file>
-
-<file path=ppt/slides/slide6.xml><?xml version="1.0" encoding="utf-8"?>
-<p:sld xmlns:p="http://schemas.openxmlformats.org/presentationml/2006/main">
-  <p:cSld name="Decision close">
-    <p:bg>
-      <p:bgPr>
-        <a:blipFill xmlns:a="http://schemas.openxmlformats.org/drawingml/2006/main">
-          <a:blip xmlns:r="http://schemas.openxmlformats.org/officeDocument/2006/relationships" r:embed="rIdOfficeKitImaged71bfa074cda59bb_1"/>
-          <a:stretch>
-            <a:fillRect/>
-          </a:stretch>
-        </a:blipFill>
-      </p:bgPr>
-    </p:bg>
-    <p:spTree>
-      <p:nvGrpSpPr>
-        <p:cNvPr id="1" name=""/>
-        <p:cNvGrpSpPr/>
-        <p:nvPr/>
-      </p:nvGrpSpPr>
-      <p:grpSpPr>
-        <a:xfrm xmlns:a="http://schemas.openxmlformats.org/drawingml/2006/main">
-          <a:off x="0" y="0"/>
-          <a:ext cx="0" cy="0"/>
-          <a:chOff x="0" y="0"/>
-          <a:chExt cx="0" cy="0"/>
-        </a:xfrm>
-      </p:grpSpPr>
-      <p:sp>
-        <p:nvSpPr>
           <p:cNvPr id="2" name="close-paper-scrim"/>
           <p:cNvSpPr/>
           <p:nvPr/>
@@ -4139,7 +4139,7 @@
           <p:nvPr/>
         </p:nvPicPr>
         <p:blipFill>
-          <a:blip xmlns:r="http://schemas.openxmlformats.org/officeDocument/2006/relationships" xmlns:a="http://schemas.openxmlformats.org/drawingml/2006/main" r:embed="rIdOfficeKitImage59ee3aa5202fd02f_1"/>
+          <a:blip xmlns:r="http://schemas.openxmlformats.org/officeDocument/2006/relationships" xmlns:a="http://schemas.openxmlformats.org/drawingml/2006/main" r:embed="rIdOfficeKitImaged71bfa074cda59bb_1"/>
           <a:srcRect xmlns:a="http://schemas.openxmlformats.org/drawingml/2006/main" l="0" t="47258" r="0" b="47258"/>
           <a:stretch xmlns:a="http://schemas.openxmlformats.org/drawingml/2006/main">
             <a:fillRect/>

--- a/skills/presentation-template-library/skills/artifact-template-moonlit-work-report/assets/reference.pptx
+++ b/skills/presentation-template-library/skills/artifact-template-moonlit-work-report/assets/reference.pptx
@@ -484,7 +484,7 @@
     <p:bg>
       <p:bgPr>
         <a:blipFill xmlns:a="http://schemas.openxmlformats.org/drawingml/2006/main">
-          <a:blip xmlns:r="http://schemas.openxmlformats.org/officeDocument/2006/relationships" r:embed="rIdOfficeKitImage56df3e49f11f0ff0_1"/>
+          <a:blip xmlns:r="http://schemas.openxmlformats.org/officeDocument/2006/relationships" r:embed="rIdOfficeKitImage8579b0a87ff097c1_1"/>
           <a:stretch>
             <a:fillRect/>
           </a:stretch>
@@ -1279,7 +1279,7 @@
     <p:bg>
       <p:bgPr>
         <a:blipFill xmlns:a="http://schemas.openxmlformats.org/drawingml/2006/main">
-          <a:blip xmlns:r="http://schemas.openxmlformats.org/officeDocument/2006/relationships" r:embed="rIdOfficeKitImage026be3a43029630d_1"/>
+          <a:blip xmlns:r="http://schemas.openxmlformats.org/officeDocument/2006/relationships" r:embed="rIdOfficeKitImagee930dcb9c6b95953_1"/>
           <a:stretch>
             <a:fillRect/>
           </a:stretch>
@@ -1351,7 +1351,7 @@
           <p:nvPr/>
         </p:nvPicPr>
         <p:blipFill>
-          <a:blip xmlns:r="http://schemas.openxmlformats.org/officeDocument/2006/relationships" xmlns:a="http://schemas.openxmlformats.org/drawingml/2006/main" r:embed="rIdOfficeKitImaged71bfa074cda59bb_1"/>
+          <a:blip xmlns:r="http://schemas.openxmlformats.org/officeDocument/2006/relationships" xmlns:a="http://schemas.openxmlformats.org/drawingml/2006/main" r:embed="rIdOfficeKitImage06e55191024fa458_1"/>
           <a:srcRect xmlns:a="http://schemas.openxmlformats.org/drawingml/2006/main" l="0" t="47258" r="0" b="47258"/>
           <a:stretch xmlns:a="http://schemas.openxmlformats.org/drawingml/2006/main">
             <a:fillRect/>
@@ -2117,7 +2117,7 @@
     <p:bg>
       <p:bgPr>
         <a:blipFill xmlns:a="http://schemas.openxmlformats.org/drawingml/2006/main">
-          <a:blip xmlns:r="http://schemas.openxmlformats.org/officeDocument/2006/relationships" r:embed="rIdOfficeKitImage59ee3aa5202fd02f_1"/>
+          <a:blip xmlns:r="http://schemas.openxmlformats.org/officeDocument/2006/relationships" r:embed="rIdOfficeKitImaged96cedd8678b85ac_1"/>
           <a:stretch>
             <a:fillRect/>
           </a:stretch>
@@ -2189,7 +2189,7 @@
           <p:nvPr/>
         </p:nvPicPr>
         <p:blipFill>
-          <a:blip xmlns:r="http://schemas.openxmlformats.org/officeDocument/2006/relationships" xmlns:a="http://schemas.openxmlformats.org/drawingml/2006/main" r:embed="rIdOfficeKitImage083106afebc7d419_1"/>
+          <a:blip xmlns:r="http://schemas.openxmlformats.org/officeDocument/2006/relationships" xmlns:a="http://schemas.openxmlformats.org/drawingml/2006/main" r:embed="rIdOfficeKitImage10e4539a68783891_1"/>
           <a:srcRect xmlns:a="http://schemas.openxmlformats.org/drawingml/2006/main" l="0" t="47258" r="0" b="47258"/>
           <a:stretch xmlns:a="http://schemas.openxmlformats.org/drawingml/2006/main">
             <a:fillRect/>
@@ -2440,7 +2440,7 @@
         </p:xfrm>
         <a:graphic xmlns:a="http://schemas.openxmlformats.org/drawingml/2006/main">
           <a:graphicData uri="http://schemas.openxmlformats.org/drawingml/2006/chart">
-            <c:chart xmlns:r="http://schemas.openxmlformats.org/officeDocument/2006/relationships" xmlns:c="http://schemas.openxmlformats.org/drawingml/2006/chart" r:id="Rabb9d5e8662c42c6"/>
+            <c:chart xmlns:r="http://schemas.openxmlformats.org/officeDocument/2006/relationships" xmlns:c="http://schemas.openxmlformats.org/drawingml/2006/chart" r:id="R57b1dfa2c2184e17"/>
           </a:graphicData>
         </a:graphic>
       </p:graphicFrame>
@@ -2458,7 +2458,7 @@
         </p:xfrm>
         <a:graphic xmlns:a="http://schemas.openxmlformats.org/drawingml/2006/main">
           <a:graphicData uri="http://schemas.openxmlformats.org/drawingml/2006/chart">
-            <c:chart xmlns:r="http://schemas.openxmlformats.org/officeDocument/2006/relationships" xmlns:c="http://schemas.openxmlformats.org/drawingml/2006/chart" r:id="Rc6761d6a3f384aaf"/>
+            <c:chart xmlns:r="http://schemas.openxmlformats.org/officeDocument/2006/relationships" xmlns:c="http://schemas.openxmlformats.org/drawingml/2006/chart" r:id="R11aef00e39514dfc"/>
           </a:graphicData>
         </a:graphic>
       </p:graphicFrame>
@@ -2829,7 +2829,7 @@
           <p:nvPr/>
         </p:nvPicPr>
         <p:blipFill>
-          <a:blip xmlns:r="http://schemas.openxmlformats.org/officeDocument/2006/relationships" xmlns:a="http://schemas.openxmlformats.org/drawingml/2006/main" r:embed="rIdOfficeKitImaged3ade97fd9ca0fdd_1"/>
+          <a:blip xmlns:r="http://schemas.openxmlformats.org/officeDocument/2006/relationships" xmlns:a="http://schemas.openxmlformats.org/drawingml/2006/main" r:embed="rIdOfficeKitImage20fc6993425855c3_1"/>
           <a:srcRect xmlns:a="http://schemas.openxmlformats.org/drawingml/2006/main" l="0" t="47256" r="0" b="47256"/>
           <a:stretch xmlns:a="http://schemas.openxmlformats.org/drawingml/2006/main">
             <a:fillRect/>
@@ -3737,7 +3737,7 @@
     <p:bg>
       <p:bgPr>
         <a:blipFill xmlns:a="http://schemas.openxmlformats.org/drawingml/2006/main">
-          <a:blip xmlns:r="http://schemas.openxmlformats.org/officeDocument/2006/relationships" r:embed="rIdOfficeKitImage56df3e49f11f0ff0_1"/>
+          <a:blip xmlns:r="http://schemas.openxmlformats.org/officeDocument/2006/relationships" r:embed="rIdOfficeKitImage4df9c6298f17ef7a_1"/>
           <a:stretch>
             <a:fillRect/>
           </a:stretch>
@@ -4067,7 +4067,7 @@
     <p:bg>
       <p:bgPr>
         <a:blipFill xmlns:a="http://schemas.openxmlformats.org/drawingml/2006/main">
-          <a:blip xmlns:r="http://schemas.openxmlformats.org/officeDocument/2006/relationships" r:embed="rIdOfficeKitImage026be3a43029630d_1"/>
+          <a:blip xmlns:r="http://schemas.openxmlformats.org/officeDocument/2006/relationships" r:embed="rIdOfficeKitImage6a3db1fe43260f32_1"/>
           <a:stretch>
             <a:fillRect/>
           </a:stretch>
@@ -4139,8 +4139,8 @@
           <p:nvPr/>
         </p:nvPicPr>
         <p:blipFill>
-          <a:blip xmlns:r="http://schemas.openxmlformats.org/officeDocument/2006/relationships" xmlns:a="http://schemas.openxmlformats.org/drawingml/2006/main" r:embed="rIdOfficeKitImaged71bfa074cda59bb_1"/>
-          <a:srcRect xmlns:a="http://schemas.openxmlformats.org/drawingml/2006/main" l="0" t="47258" r="0" b="47258"/>
+          <a:blip xmlns:r="http://schemas.openxmlformats.org/officeDocument/2006/relationships" xmlns:a="http://schemas.openxmlformats.org/drawingml/2006/main" r:embed="rIdOfficeKitImage6785cc6781fd2511_1"/>
+          <a:srcRect xmlns:a="http://schemas.openxmlformats.org/drawingml/2006/main" l="0" t="47256" r="0" b="47256"/>
           <a:stretch xmlns:a="http://schemas.openxmlformats.org/drawingml/2006/main">
             <a:fillRect/>
           </a:stretch>

--- a/skills/presentation-template-library/skills/artifact-template-moonlit-work-report/assets/reference.pptx
+++ b/skills/presentation-template-library/skills/artifact-template-moonlit-work-report/assets/reference.pptx
@@ -2440,7 +2440,7 @@
         </p:xfrm>
         <a:graphic xmlns:a="http://schemas.openxmlformats.org/drawingml/2006/main">
           <a:graphicData uri="http://schemas.openxmlformats.org/drawingml/2006/chart">
-            <c:chart xmlns:r="http://schemas.openxmlformats.org/officeDocument/2006/relationships" xmlns:c="http://schemas.openxmlformats.org/drawingml/2006/chart" r:id="R57b1dfa2c2184e17"/>
+            <c:chart xmlns:r="http://schemas.openxmlformats.org/officeDocument/2006/relationships" xmlns:c="http://schemas.openxmlformats.org/drawingml/2006/chart" r:id="Rdcb0685a80914bf1"/>
           </a:graphicData>
         </a:graphic>
       </p:graphicFrame>
@@ -2458,7 +2458,7 @@
         </p:xfrm>
         <a:graphic xmlns:a="http://schemas.openxmlformats.org/drawingml/2006/main">
           <a:graphicData uri="http://schemas.openxmlformats.org/drawingml/2006/chart">
-            <c:chart xmlns:r="http://schemas.openxmlformats.org/officeDocument/2006/relationships" xmlns:c="http://schemas.openxmlformats.org/drawingml/2006/chart" r:id="R11aef00e39514dfc"/>
+            <c:chart xmlns:r="http://schemas.openxmlformats.org/officeDocument/2006/relationships" xmlns:c="http://schemas.openxmlformats.org/drawingml/2006/chart" r:id="R6a951304aa23420e"/>
           </a:graphicData>
         </a:graphic>
       </p:graphicFrame>

--- a/skills/presentation-template-library/skills/artifact-template-moonlit-work-report/assets/reference.pptx
+++ b/skills/presentation-template-library/skills/artifact-template-moonlit-work-report/assets/reference.pptx
@@ -484,6 +484,801 @@
     <p:bg>
       <p:bgPr>
         <a:blipFill xmlns:a="http://schemas.openxmlformats.org/drawingml/2006/main">
+          <a:blip xmlns:r="http://schemas.openxmlformats.org/officeDocument/2006/relationships" r:embed="rIdOfficeKitImagee56ecbe4d29b219f_1"/>
+          <a:stretch>
+            <a:fillRect/>
+          </a:stretch>
+        </a:blipFill>
+      </p:bgPr>
+    </p:bg>
+    <p:spTree>
+      <p:nvGrpSpPr>
+        <p:cNvPr id="1" name=""/>
+        <p:cNvGrpSpPr/>
+        <p:nvPr/>
+      </p:nvGrpSpPr>
+      <p:grpSpPr>
+        <a:xfrm xmlns:a="http://schemas.openxmlformats.org/drawingml/2006/main">
+          <a:off x="0" y="0"/>
+          <a:ext cx="0" cy="0"/>
+          <a:chOff x="0" y="0"/>
+          <a:chExt cx="0" cy="0"/>
+        </a:xfrm>
+      </p:grpSpPr>
+      <p:sp>
+        <p:nvSpPr>
+          <p:cNvPr id="2" name="cover-paper-scrim"/>
+          <p:cNvSpPr/>
+          <p:nvPr/>
+        </p:nvSpPr>
+        <p:spPr>
+          <a:xfrm xmlns:a="http://schemas.openxmlformats.org/drawingml/2006/main">
+            <a:off x="0" y="0"/>
+            <a:ext cx="9525000" cy="8572500"/>
+          </a:xfrm>
+          <a:prstGeom xmlns:a="http://schemas.openxmlformats.org/drawingml/2006/main" prst="rect">
+            <a:avLst/>
+          </a:prstGeom>
+          <a:solidFill xmlns:a="http://schemas.openxmlformats.org/drawingml/2006/main">
+            <a:srgbClr val="FFFFFF">
+              <a:alpha val="100000"/>
+            </a:srgbClr>
+          </a:solidFill>
+          <a:ln xmlns:a="http://schemas.openxmlformats.org/drawingml/2006/main" w="0">
+            <a:solidFill>
+              <a:srgbClr val="FFFFFF"/>
+            </a:solidFill>
+            <a:prstDash val="solid"/>
+          </a:ln>
+        </p:spPr>
+        <p:txBody>
+          <a:bodyPr xmlns:a="http://schemas.openxmlformats.org/drawingml/2006/main" wrap="square" lIns="0" tIns="0" rIns="0" bIns="0" anchor="t"/>
+          <a:lstStyle xmlns:a="http://schemas.openxmlformats.org/drawingml/2006/main"/>
+          <a:p xmlns:a="http://schemas.openxmlformats.org/drawingml/2006/main">
+            <a:r>
+              <a:rPr lang="en-US"/>
+              <a:t/>
+            </a:r>
+            <a:endParaRPr lang="en-US"/>
+          </a:p>
+        </p:txBody>
+      </p:sp>
+      <p:sp>
+        <p:nvSpPr>
+          <p:cNvPr id="3" name="top-rule"/>
+          <p:cNvSpPr/>
+          <p:nvPr/>
+        </p:nvSpPr>
+        <p:spPr>
+          <a:xfrm xmlns:a="http://schemas.openxmlformats.org/drawingml/2006/main">
+            <a:off x="838200" y="666750"/>
+            <a:ext cx="13563600" cy="0"/>
+          </a:xfrm>
+          <a:prstGeom xmlns:a="http://schemas.openxmlformats.org/drawingml/2006/main" prst="line">
+            <a:avLst/>
+          </a:prstGeom>
+          <a:noFill xmlns:a="http://schemas.openxmlformats.org/drawingml/2006/main"/>
+          <a:ln xmlns:a="http://schemas.openxmlformats.org/drawingml/2006/main" w="38100">
+            <a:solidFill>
+              <a:srgbClr val="8B6BE8"/>
+            </a:solidFill>
+            <a:prstDash val="solid"/>
+          </a:ln>
+        </p:spPr>
+        <p:txBody>
+          <a:bodyPr xmlns:a="http://schemas.openxmlformats.org/drawingml/2006/main" wrap="square" lIns="0" tIns="0" rIns="0" bIns="0" anchor="t"/>
+          <a:lstStyle xmlns:a="http://schemas.openxmlformats.org/drawingml/2006/main"/>
+          <a:p xmlns:a="http://schemas.openxmlformats.org/drawingml/2006/main">
+            <a:r>
+              <a:rPr lang="en-US"/>
+              <a:t/>
+            </a:r>
+            <a:endParaRPr lang="en-US"/>
+          </a:p>
+        </p:txBody>
+      </p:sp>
+      <p:sp>
+        <p:nvSpPr>
+          <p:cNvPr id="4" name="eyebrow"/>
+          <p:cNvSpPr txBox="1"/>
+          <p:nvPr/>
+        </p:nvSpPr>
+        <p:spPr>
+          <a:xfrm xmlns:a="http://schemas.openxmlformats.org/drawingml/2006/main">
+            <a:off x="914400" y="895350"/>
+            <a:ext cx="7239000" cy="228600"/>
+          </a:xfrm>
+          <a:prstGeom xmlns:a="http://schemas.openxmlformats.org/drawingml/2006/main" prst="rect">
+            <a:avLst/>
+          </a:prstGeom>
+          <a:noFill xmlns:a="http://schemas.openxmlformats.org/drawingml/2006/main"/>
+          <a:ln xmlns:a="http://schemas.openxmlformats.org/drawingml/2006/main" w="0">
+            <a:noFill/>
+          </a:ln>
+        </p:spPr>
+        <p:txBody>
+          <a:bodyPr xmlns:a="http://schemas.openxmlformats.org/drawingml/2006/main" wrap="square" lIns="0" tIns="0" rIns="0" bIns="0" anchor="t"/>
+          <a:lstStyle xmlns:a="http://schemas.openxmlformats.org/drawingml/2006/main"/>
+          <a:p xmlns:a="http://schemas.openxmlformats.org/drawingml/2006/main">
+            <a:r>
+              <a:rPr lang="en-US" sz="1200" b="1">
+                <a:solidFill>
+                  <a:srgbClr val="8B6BE8"/>
+                </a:solidFill>
+                <a:latin typeface="Arial"/>
+                <a:ea typeface="Arial"/>
+              </a:rPr>
+              <a:t>WORK · OFFICEKIT CALIBRATION</a:t>
+            </a:r>
+            <a:endParaRPr lang="en-US"/>
+          </a:p>
+        </p:txBody>
+      </p:sp>
+      <p:sp>
+        <p:nvSpPr>
+          <p:cNvPr id="5" name="cover-title"/>
+          <p:cNvSpPr txBox="1"/>
+          <p:nvPr/>
+        </p:nvSpPr>
+        <p:spPr>
+          <a:xfrm xmlns:a="http://schemas.openxmlformats.org/drawingml/2006/main">
+            <a:off x="914400" y="1571625"/>
+            <a:ext cx="8382000" cy="1066800"/>
+          </a:xfrm>
+          <a:prstGeom xmlns:a="http://schemas.openxmlformats.org/drawingml/2006/main" prst="rect">
+            <a:avLst/>
+          </a:prstGeom>
+          <a:noFill xmlns:a="http://schemas.openxmlformats.org/drawingml/2006/main"/>
+          <a:ln xmlns:a="http://schemas.openxmlformats.org/drawingml/2006/main" w="0">
+            <a:noFill/>
+          </a:ln>
+        </p:spPr>
+        <p:txBody>
+          <a:bodyPr xmlns:a="http://schemas.openxmlformats.org/drawingml/2006/main" wrap="square" lIns="0" tIns="0" rIns="0" bIns="0" anchor="t"/>
+          <a:lstStyle xmlns:a="http://schemas.openxmlformats.org/drawingml/2006/main"/>
+          <a:p xmlns:a="http://schemas.openxmlformats.org/drawingml/2006/main">
+            <a:r>
+              <a:rPr lang="en-US" sz="3600" b="1">
+                <a:solidFill>
+                  <a:srgbClr val="1D2330"/>
+                </a:solidFill>
+                <a:latin typeface="Arial"/>
+                <a:ea typeface="Arial"/>
+              </a:rPr>
+              <a:t>Moonlit Work Report: a claim worth testing</a:t>
+            </a:r>
+            <a:endParaRPr lang="en-US"/>
+          </a:p>
+        </p:txBody>
+      </p:sp>
+      <p:sp>
+        <p:nvSpPr>
+          <p:cNvPr id="6" name="cover-subtitle"/>
+          <p:cNvSpPr txBox="1"/>
+          <p:nvPr/>
+        </p:nvSpPr>
+        <p:spPr>
+          <a:xfrm xmlns:a="http://schemas.openxmlformats.org/drawingml/2006/main">
+            <a:off x="952500" y="2857500"/>
+            <a:ext cx="6858000" cy="323850"/>
+          </a:xfrm>
+          <a:prstGeom xmlns:a="http://schemas.openxmlformats.org/drawingml/2006/main" prst="rect">
+            <a:avLst/>
+          </a:prstGeom>
+          <a:noFill xmlns:a="http://schemas.openxmlformats.org/drawingml/2006/main"/>
+          <a:ln xmlns:a="http://schemas.openxmlformats.org/drawingml/2006/main" w="0">
+            <a:noFill/>
+          </a:ln>
+        </p:spPr>
+        <p:txBody>
+          <a:bodyPr xmlns:a="http://schemas.openxmlformats.org/drawingml/2006/main" wrap="square" lIns="0" tIns="0" rIns="0" bIns="0" anchor="t"/>
+          <a:lstStyle xmlns:a="http://schemas.openxmlformats.org/drawingml/2006/main"/>
+          <a:p xmlns:a="http://schemas.openxmlformats.org/drawingml/2006/main">
+            <a:r>
+              <a:rPr lang="en-US" sz="1725">
+                <a:solidFill>
+                  <a:srgbClr val="8B6BE8"/>
+                </a:solidFill>
+                <a:latin typeface="Arial"/>
+                <a:ea typeface="Arial"/>
+              </a:rPr>
+              <a:t>A clean-room reference for evidence, direction, and a decision.</a:t>
+            </a:r>
+            <a:endParaRPr lang="en-US"/>
+          </a:p>
+        </p:txBody>
+      </p:sp>
+      <p:sp>
+        <p:nvSpPr>
+          <p:cNvPr id="7" name="cover-rule"/>
+          <p:cNvSpPr/>
+          <p:nvPr/>
+        </p:nvSpPr>
+        <p:spPr>
+          <a:xfrm xmlns:a="http://schemas.openxmlformats.org/drawingml/2006/main">
+            <a:off x="914400" y="3524250"/>
+            <a:ext cx="7658100" cy="0"/>
+          </a:xfrm>
+          <a:prstGeom xmlns:a="http://schemas.openxmlformats.org/drawingml/2006/main" prst="line">
+            <a:avLst/>
+          </a:prstGeom>
+          <a:noFill xmlns:a="http://schemas.openxmlformats.org/drawingml/2006/main"/>
+          <a:ln xmlns:a="http://schemas.openxmlformats.org/drawingml/2006/main" w="25400">
+            <a:solidFill>
+              <a:srgbClr val="93959C"/>
+            </a:solidFill>
+            <a:prstDash val="solid"/>
+          </a:ln>
+        </p:spPr>
+        <p:txBody>
+          <a:bodyPr xmlns:a="http://schemas.openxmlformats.org/drawingml/2006/main" wrap="square" lIns="0" tIns="0" rIns="0" bIns="0" anchor="t"/>
+          <a:lstStyle xmlns:a="http://schemas.openxmlformats.org/drawingml/2006/main"/>
+          <a:p xmlns:a="http://schemas.openxmlformats.org/drawingml/2006/main">
+            <a:r>
+              <a:rPr lang="en-US"/>
+              <a:t/>
+            </a:r>
+            <a:endParaRPr lang="en-US"/>
+          </a:p>
+        </p:txBody>
+      </p:sp>
+      <p:sp>
+        <p:nvSpPr>
+          <p:cNvPr id="8" name="cover-basis"/>
+          <p:cNvSpPr txBox="1"/>
+          <p:nvPr/>
+        </p:nvSpPr>
+        <p:spPr>
+          <a:xfrm xmlns:a="http://schemas.openxmlformats.org/drawingml/2006/main">
+            <a:off x="952500" y="3762375"/>
+            <a:ext cx="7810500" cy="266700"/>
+          </a:xfrm>
+          <a:prstGeom xmlns:a="http://schemas.openxmlformats.org/drawingml/2006/main" prst="rect">
+            <a:avLst/>
+          </a:prstGeom>
+          <a:noFill xmlns:a="http://schemas.openxmlformats.org/drawingml/2006/main"/>
+          <a:ln xmlns:a="http://schemas.openxmlformats.org/drawingml/2006/main" w="0">
+            <a:noFill/>
+          </a:ln>
+        </p:spPr>
+        <p:txBody>
+          <a:bodyPr xmlns:a="http://schemas.openxmlformats.org/drawingml/2006/main" wrap="square" lIns="0" tIns="0" rIns="0" bIns="0" anchor="t"/>
+          <a:lstStyle xmlns:a="http://schemas.openxmlformats.org/drawingml/2006/main"/>
+          <a:p xmlns:a="http://schemas.openxmlformats.org/drawingml/2006/main">
+            <a:r>
+              <a:rPr lang="en-US" sz="1350">
+                <a:solidFill>
+                  <a:srgbClr val="1D2330"/>
+                </a:solidFill>
+                <a:latin typeface="Arial"/>
+                <a:ea typeface="Arial"/>
+              </a:rPr>
+              <a:t>One visual language · four page roles · native editable objects</a:t>
+            </a:r>
+            <a:endParaRPr lang="en-US"/>
+          </a:p>
+        </p:txBody>
+      </p:sp>
+      <p:sp>
+        <p:nvSpPr>
+          <p:cNvPr id="9" name="cover-thesis"/>
+          <p:cNvSpPr txBox="1"/>
+          <p:nvPr/>
+        </p:nvSpPr>
+        <p:spPr>
+          <a:xfrm xmlns:a="http://schemas.openxmlformats.org/drawingml/2006/main">
+            <a:off x="952500" y="4810125"/>
+            <a:ext cx="6667500" cy="628650"/>
+          </a:xfrm>
+          <a:prstGeom xmlns:a="http://schemas.openxmlformats.org/drawingml/2006/main" prst="rect">
+            <a:avLst/>
+          </a:prstGeom>
+          <a:noFill xmlns:a="http://schemas.openxmlformats.org/drawingml/2006/main"/>
+          <a:ln xmlns:a="http://schemas.openxmlformats.org/drawingml/2006/main" w="0">
+            <a:noFill/>
+          </a:ln>
+        </p:spPr>
+        <p:txBody>
+          <a:bodyPr xmlns:a="http://schemas.openxmlformats.org/drawingml/2006/main" wrap="square" lIns="0" tIns="0" rIns="0" bIns="0" anchor="t"/>
+          <a:lstStyle xmlns:a="http://schemas.openxmlformats.org/drawingml/2006/main"/>
+          <a:p xmlns:a="http://schemas.openxmlformats.org/drawingml/2006/main">
+            <a:r>
+              <a:rPr lang="en-US" sz="1875" b="1">
+                <a:solidFill>
+                  <a:srgbClr val="1D2330"/>
+                </a:solidFill>
+                <a:latin typeface="Arial"/>
+                <a:ea typeface="Arial"/>
+              </a:rPr>
+              <a:t>A visible operating signal creates a shared next action.</a:t>
+            </a:r>
+            <a:endParaRPr lang="en-US"/>
+          </a:p>
+        </p:txBody>
+      </p:sp>
+      <p:sp>
+        <p:nvSpPr>
+          <p:cNvPr id="10" name="cover-source"/>
+          <p:cNvSpPr txBox="1"/>
+          <p:nvPr/>
+        </p:nvSpPr>
+        <p:spPr>
+          <a:xfrm xmlns:a="http://schemas.openxmlformats.org/drawingml/2006/main">
+            <a:off x="952500" y="7315200"/>
+            <a:ext cx="9048750" cy="228600"/>
+          </a:xfrm>
+          <a:prstGeom xmlns:a="http://schemas.openxmlformats.org/drawingml/2006/main" prst="rect">
+            <a:avLst/>
+          </a:prstGeom>
+          <a:noFill xmlns:a="http://schemas.openxmlformats.org/drawingml/2006/main"/>
+          <a:ln xmlns:a="http://schemas.openxmlformats.org/drawingml/2006/main" w="0">
+            <a:noFill/>
+          </a:ln>
+        </p:spPr>
+        <p:txBody>
+          <a:bodyPr xmlns:a="http://schemas.openxmlformats.org/drawingml/2006/main" wrap="square" lIns="0" tIns="0" rIns="0" bIns="0" anchor="t"/>
+          <a:lstStyle xmlns:a="http://schemas.openxmlformats.org/drawingml/2006/main"/>
+          <a:p xmlns:a="http://schemas.openxmlformats.org/drawingml/2006/main">
+            <a:r>
+              <a:rPr lang="en-US" sz="1050">
+                <a:solidFill>
+                  <a:srgbClr val="93959C"/>
+                </a:solidFill>
+                <a:latin typeface="Arial"/>
+                <a:ea typeface="Arial"/>
+              </a:rPr>
+              <a:t>OfficeKit original clean-room calibration · fictional content · 2026-08-29</a:t>
+            </a:r>
+            <a:endParaRPr lang="en-US"/>
+          </a:p>
+        </p:txBody>
+      </p:sp>
+      <p:sp>
+        <p:nvSpPr>
+          <p:cNvPr id="11" name="page-number"/>
+          <p:cNvSpPr txBox="1"/>
+          <p:nvPr/>
+        </p:nvSpPr>
+        <p:spPr>
+          <a:xfrm xmlns:a="http://schemas.openxmlformats.org/drawingml/2006/main">
+            <a:off x="13335000" y="7810500"/>
+            <a:ext cx="952500" cy="209550"/>
+          </a:xfrm>
+          <a:prstGeom xmlns:a="http://schemas.openxmlformats.org/drawingml/2006/main" prst="rect">
+            <a:avLst/>
+          </a:prstGeom>
+          <a:noFill xmlns:a="http://schemas.openxmlformats.org/drawingml/2006/main"/>
+          <a:ln xmlns:a="http://schemas.openxmlformats.org/drawingml/2006/main" w="0">
+            <a:noFill/>
+          </a:ln>
+        </p:spPr>
+        <p:txBody>
+          <a:bodyPr xmlns:a="http://schemas.openxmlformats.org/drawingml/2006/main" wrap="square" lIns="0" tIns="0" rIns="0" bIns="0" anchor="t"/>
+          <a:lstStyle xmlns:a="http://schemas.openxmlformats.org/drawingml/2006/main"/>
+          <a:p xmlns:a="http://schemas.openxmlformats.org/drawingml/2006/main">
+            <a:pPr algn="r"/>
+            <a:r>
+              <a:rPr lang="en-US" sz="1050">
+                <a:solidFill>
+                  <a:srgbClr val="93959C"/>
+                </a:solidFill>
+                <a:latin typeface="Arial"/>
+                <a:ea typeface="Arial"/>
+              </a:rPr>
+              <a:t>1 / 6</a:t>
+            </a:r>
+            <a:endParaRPr lang="en-US"/>
+          </a:p>
+        </p:txBody>
+      </p:sp>
+      <p:sp>
+        <p:nvSpPr>
+          <p:cNvPr id="12" name="anchor-field"/>
+          <p:cNvSpPr/>
+          <p:nvPr/>
+        </p:nvSpPr>
+        <p:spPr>
+          <a:xfrm xmlns:a="http://schemas.openxmlformats.org/drawingml/2006/main">
+            <a:off x="11620500" y="1790700"/>
+            <a:ext cx="2095500" cy="2286000"/>
+          </a:xfrm>
+          <a:prstGeom xmlns:a="http://schemas.openxmlformats.org/drawingml/2006/main" prst="rect">
+            <a:avLst/>
+          </a:prstGeom>
+          <a:solidFill xmlns:a="http://schemas.openxmlformats.org/drawingml/2006/main">
+            <a:srgbClr val="F3F5F8"/>
+          </a:solidFill>
+          <a:ln xmlns:a="http://schemas.openxmlformats.org/drawingml/2006/main" w="25400">
+            <a:solidFill>
+              <a:srgbClr val="8B6BE8"/>
+            </a:solidFill>
+            <a:prstDash val="solid"/>
+          </a:ln>
+        </p:spPr>
+        <p:txBody>
+          <a:bodyPr xmlns:a="http://schemas.openxmlformats.org/drawingml/2006/main" wrap="square" lIns="0" tIns="0" rIns="0" bIns="0" anchor="t"/>
+          <a:lstStyle xmlns:a="http://schemas.openxmlformats.org/drawingml/2006/main"/>
+          <a:p xmlns:a="http://schemas.openxmlformats.org/drawingml/2006/main">
+            <a:r>
+              <a:rPr lang="en-US"/>
+              <a:t/>
+            </a:r>
+            <a:endParaRPr lang="en-US"/>
+          </a:p>
+        </p:txBody>
+      </p:sp>
+      <p:sp>
+        <p:nvSpPr>
+          <p:cNvPr id="13" name="anchor-grid-0-0"/>
+          <p:cNvSpPr/>
+          <p:nvPr/>
+        </p:nvSpPr>
+        <p:spPr>
+          <a:xfrm xmlns:a="http://schemas.openxmlformats.org/drawingml/2006/main">
+            <a:off x="11925300" y="2152650"/>
+            <a:ext cx="266700" cy="285750"/>
+          </a:xfrm>
+          <a:prstGeom xmlns:a="http://schemas.openxmlformats.org/drawingml/2006/main" prst="rect">
+            <a:avLst/>
+          </a:prstGeom>
+          <a:solidFill xmlns:a="http://schemas.openxmlformats.org/drawingml/2006/main">
+            <a:srgbClr val="8B6BE8"/>
+          </a:solidFill>
+          <a:ln xmlns:a="http://schemas.openxmlformats.org/drawingml/2006/main" w="12700">
+            <a:solidFill>
+              <a:srgbClr val="8B6BE8"/>
+            </a:solidFill>
+            <a:prstDash val="solid"/>
+          </a:ln>
+        </p:spPr>
+        <p:txBody>
+          <a:bodyPr xmlns:a="http://schemas.openxmlformats.org/drawingml/2006/main" wrap="square" lIns="0" tIns="0" rIns="0" bIns="0" anchor="t"/>
+          <a:lstStyle xmlns:a="http://schemas.openxmlformats.org/drawingml/2006/main"/>
+          <a:p xmlns:a="http://schemas.openxmlformats.org/drawingml/2006/main">
+            <a:r>
+              <a:rPr lang="en-US"/>
+              <a:t/>
+            </a:r>
+            <a:endParaRPr lang="en-US"/>
+          </a:p>
+        </p:txBody>
+      </p:sp>
+      <p:sp>
+        <p:nvSpPr>
+          <p:cNvPr id="14" name="anchor-grid-0-1"/>
+          <p:cNvSpPr/>
+          <p:nvPr/>
+        </p:nvSpPr>
+        <p:spPr>
+          <a:xfrm xmlns:a="http://schemas.openxmlformats.org/drawingml/2006/main">
+            <a:off x="12420600" y="2152650"/>
+            <a:ext cx="266700" cy="285750"/>
+          </a:xfrm>
+          <a:prstGeom xmlns:a="http://schemas.openxmlformats.org/drawingml/2006/main" prst="rect">
+            <a:avLst/>
+          </a:prstGeom>
+          <a:solidFill xmlns:a="http://schemas.openxmlformats.org/drawingml/2006/main">
+            <a:srgbClr val="8B6BE8"/>
+          </a:solidFill>
+          <a:ln xmlns:a="http://schemas.openxmlformats.org/drawingml/2006/main" w="12700">
+            <a:solidFill>
+              <a:srgbClr val="8B6BE8"/>
+            </a:solidFill>
+            <a:prstDash val="solid"/>
+          </a:ln>
+        </p:spPr>
+        <p:txBody>
+          <a:bodyPr xmlns:a="http://schemas.openxmlformats.org/drawingml/2006/main" wrap="square" lIns="0" tIns="0" rIns="0" bIns="0" anchor="t"/>
+          <a:lstStyle xmlns:a="http://schemas.openxmlformats.org/drawingml/2006/main"/>
+          <a:p xmlns:a="http://schemas.openxmlformats.org/drawingml/2006/main">
+            <a:r>
+              <a:rPr lang="en-US"/>
+              <a:t/>
+            </a:r>
+            <a:endParaRPr lang="en-US"/>
+          </a:p>
+        </p:txBody>
+      </p:sp>
+      <p:sp>
+        <p:nvSpPr>
+          <p:cNvPr id="15" name="anchor-grid-0-2"/>
+          <p:cNvSpPr/>
+          <p:nvPr/>
+        </p:nvSpPr>
+        <p:spPr>
+          <a:xfrm xmlns:a="http://schemas.openxmlformats.org/drawingml/2006/main">
+            <a:off x="12915900" y="2152650"/>
+            <a:ext cx="266700" cy="285750"/>
+          </a:xfrm>
+          <a:prstGeom xmlns:a="http://schemas.openxmlformats.org/drawingml/2006/main" prst="rect">
+            <a:avLst/>
+          </a:prstGeom>
+          <a:solidFill xmlns:a="http://schemas.openxmlformats.org/drawingml/2006/main">
+            <a:srgbClr val="FFFFFF"/>
+          </a:solidFill>
+          <a:ln xmlns:a="http://schemas.openxmlformats.org/drawingml/2006/main" w="12700">
+            <a:solidFill>
+              <a:srgbClr val="8B6BE8"/>
+            </a:solidFill>
+            <a:prstDash val="solid"/>
+          </a:ln>
+        </p:spPr>
+        <p:txBody>
+          <a:bodyPr xmlns:a="http://schemas.openxmlformats.org/drawingml/2006/main" wrap="square" lIns="0" tIns="0" rIns="0" bIns="0" anchor="t"/>
+          <a:lstStyle xmlns:a="http://schemas.openxmlformats.org/drawingml/2006/main"/>
+          <a:p xmlns:a="http://schemas.openxmlformats.org/drawingml/2006/main">
+            <a:r>
+              <a:rPr lang="en-US"/>
+              <a:t/>
+            </a:r>
+            <a:endParaRPr lang="en-US"/>
+          </a:p>
+        </p:txBody>
+      </p:sp>
+      <p:sp>
+        <p:nvSpPr>
+          <p:cNvPr id="16" name="anchor-grid-1-0"/>
+          <p:cNvSpPr/>
+          <p:nvPr/>
+        </p:nvSpPr>
+        <p:spPr>
+          <a:xfrm xmlns:a="http://schemas.openxmlformats.org/drawingml/2006/main">
+            <a:off x="11925300" y="2686050"/>
+            <a:ext cx="266700" cy="285750"/>
+          </a:xfrm>
+          <a:prstGeom xmlns:a="http://schemas.openxmlformats.org/drawingml/2006/main" prst="rect">
+            <a:avLst/>
+          </a:prstGeom>
+          <a:solidFill xmlns:a="http://schemas.openxmlformats.org/drawingml/2006/main">
+            <a:srgbClr val="8B6BE8"/>
+          </a:solidFill>
+          <a:ln xmlns:a="http://schemas.openxmlformats.org/drawingml/2006/main" w="12700">
+            <a:solidFill>
+              <a:srgbClr val="8B6BE8"/>
+            </a:solidFill>
+            <a:prstDash val="solid"/>
+          </a:ln>
+        </p:spPr>
+        <p:txBody>
+          <a:bodyPr xmlns:a="http://schemas.openxmlformats.org/drawingml/2006/main" wrap="square" lIns="0" tIns="0" rIns="0" bIns="0" anchor="t"/>
+          <a:lstStyle xmlns:a="http://schemas.openxmlformats.org/drawingml/2006/main"/>
+          <a:p xmlns:a="http://schemas.openxmlformats.org/drawingml/2006/main">
+            <a:r>
+              <a:rPr lang="en-US"/>
+              <a:t/>
+            </a:r>
+            <a:endParaRPr lang="en-US"/>
+          </a:p>
+        </p:txBody>
+      </p:sp>
+      <p:sp>
+        <p:nvSpPr>
+          <p:cNvPr id="17" name="anchor-grid-1-1"/>
+          <p:cNvSpPr/>
+          <p:nvPr/>
+        </p:nvSpPr>
+        <p:spPr>
+          <a:xfrm xmlns:a="http://schemas.openxmlformats.org/drawingml/2006/main">
+            <a:off x="12420600" y="2686050"/>
+            <a:ext cx="266700" cy="285750"/>
+          </a:xfrm>
+          <a:prstGeom xmlns:a="http://schemas.openxmlformats.org/drawingml/2006/main" prst="rect">
+            <a:avLst/>
+          </a:prstGeom>
+          <a:solidFill xmlns:a="http://schemas.openxmlformats.org/drawingml/2006/main">
+            <a:srgbClr val="8B6BE8"/>
+          </a:solidFill>
+          <a:ln xmlns:a="http://schemas.openxmlformats.org/drawingml/2006/main" w="12700">
+            <a:solidFill>
+              <a:srgbClr val="8B6BE8"/>
+            </a:solidFill>
+            <a:prstDash val="solid"/>
+          </a:ln>
+        </p:spPr>
+        <p:txBody>
+          <a:bodyPr xmlns:a="http://schemas.openxmlformats.org/drawingml/2006/main" wrap="square" lIns="0" tIns="0" rIns="0" bIns="0" anchor="t"/>
+          <a:lstStyle xmlns:a="http://schemas.openxmlformats.org/drawingml/2006/main"/>
+          <a:p xmlns:a="http://schemas.openxmlformats.org/drawingml/2006/main">
+            <a:r>
+              <a:rPr lang="en-US"/>
+              <a:t/>
+            </a:r>
+            <a:endParaRPr lang="en-US"/>
+          </a:p>
+        </p:txBody>
+      </p:sp>
+      <p:sp>
+        <p:nvSpPr>
+          <p:cNvPr id="18" name="anchor-grid-1-2"/>
+          <p:cNvSpPr/>
+          <p:nvPr/>
+        </p:nvSpPr>
+        <p:spPr>
+          <a:xfrm xmlns:a="http://schemas.openxmlformats.org/drawingml/2006/main">
+            <a:off x="12915900" y="2686050"/>
+            <a:ext cx="266700" cy="285750"/>
+          </a:xfrm>
+          <a:prstGeom xmlns:a="http://schemas.openxmlformats.org/drawingml/2006/main" prst="rect">
+            <a:avLst/>
+          </a:prstGeom>
+          <a:solidFill xmlns:a="http://schemas.openxmlformats.org/drawingml/2006/main">
+            <a:srgbClr val="FFFFFF"/>
+          </a:solidFill>
+          <a:ln xmlns:a="http://schemas.openxmlformats.org/drawingml/2006/main" w="12700">
+            <a:solidFill>
+              <a:srgbClr val="8B6BE8"/>
+            </a:solidFill>
+            <a:prstDash val="solid"/>
+          </a:ln>
+        </p:spPr>
+        <p:txBody>
+          <a:bodyPr xmlns:a="http://schemas.openxmlformats.org/drawingml/2006/main" wrap="square" lIns="0" tIns="0" rIns="0" bIns="0" anchor="t"/>
+          <a:lstStyle xmlns:a="http://schemas.openxmlformats.org/drawingml/2006/main"/>
+          <a:p xmlns:a="http://schemas.openxmlformats.org/drawingml/2006/main">
+            <a:r>
+              <a:rPr lang="en-US"/>
+              <a:t/>
+            </a:r>
+            <a:endParaRPr lang="en-US"/>
+          </a:p>
+        </p:txBody>
+      </p:sp>
+      <p:sp>
+        <p:nvSpPr>
+          <p:cNvPr id="19" name="anchor-grid-2-0"/>
+          <p:cNvSpPr/>
+          <p:nvPr/>
+        </p:nvSpPr>
+        <p:spPr>
+          <a:xfrm xmlns:a="http://schemas.openxmlformats.org/drawingml/2006/main">
+            <a:off x="11925300" y="3219450"/>
+            <a:ext cx="266700" cy="285750"/>
+          </a:xfrm>
+          <a:prstGeom xmlns:a="http://schemas.openxmlformats.org/drawingml/2006/main" prst="rect">
+            <a:avLst/>
+          </a:prstGeom>
+          <a:solidFill xmlns:a="http://schemas.openxmlformats.org/drawingml/2006/main">
+            <a:srgbClr val="8B6BE8"/>
+          </a:solidFill>
+          <a:ln xmlns:a="http://schemas.openxmlformats.org/drawingml/2006/main" w="12700">
+            <a:solidFill>
+              <a:srgbClr val="8B6BE8"/>
+            </a:solidFill>
+            <a:prstDash val="solid"/>
+          </a:ln>
+        </p:spPr>
+        <p:txBody>
+          <a:bodyPr xmlns:a="http://schemas.openxmlformats.org/drawingml/2006/main" wrap="square" lIns="0" tIns="0" rIns="0" bIns="0" anchor="t"/>
+          <a:lstStyle xmlns:a="http://schemas.openxmlformats.org/drawingml/2006/main"/>
+          <a:p xmlns:a="http://schemas.openxmlformats.org/drawingml/2006/main">
+            <a:r>
+              <a:rPr lang="en-US"/>
+              <a:t/>
+            </a:r>
+            <a:endParaRPr lang="en-US"/>
+          </a:p>
+        </p:txBody>
+      </p:sp>
+      <p:sp>
+        <p:nvSpPr>
+          <p:cNvPr id="20" name="anchor-grid-2-1"/>
+          <p:cNvSpPr/>
+          <p:nvPr/>
+        </p:nvSpPr>
+        <p:spPr>
+          <a:xfrm xmlns:a="http://schemas.openxmlformats.org/drawingml/2006/main">
+            <a:off x="12420600" y="3219450"/>
+            <a:ext cx="266700" cy="285750"/>
+          </a:xfrm>
+          <a:prstGeom xmlns:a="http://schemas.openxmlformats.org/drawingml/2006/main" prst="rect">
+            <a:avLst/>
+          </a:prstGeom>
+          <a:solidFill xmlns:a="http://schemas.openxmlformats.org/drawingml/2006/main">
+            <a:srgbClr val="8B6BE8"/>
+          </a:solidFill>
+          <a:ln xmlns:a="http://schemas.openxmlformats.org/drawingml/2006/main" w="12700">
+            <a:solidFill>
+              <a:srgbClr val="8B6BE8"/>
+            </a:solidFill>
+            <a:prstDash val="solid"/>
+          </a:ln>
+        </p:spPr>
+        <p:txBody>
+          <a:bodyPr xmlns:a="http://schemas.openxmlformats.org/drawingml/2006/main" wrap="square" lIns="0" tIns="0" rIns="0" bIns="0" anchor="t"/>
+          <a:lstStyle xmlns:a="http://schemas.openxmlformats.org/drawingml/2006/main"/>
+          <a:p xmlns:a="http://schemas.openxmlformats.org/drawingml/2006/main">
+            <a:r>
+              <a:rPr lang="en-US"/>
+              <a:t/>
+            </a:r>
+            <a:endParaRPr lang="en-US"/>
+          </a:p>
+        </p:txBody>
+      </p:sp>
+      <p:sp>
+        <p:nvSpPr>
+          <p:cNvPr id="21" name="anchor-grid-2-2"/>
+          <p:cNvSpPr/>
+          <p:nvPr/>
+        </p:nvSpPr>
+        <p:spPr>
+          <a:xfrm xmlns:a="http://schemas.openxmlformats.org/drawingml/2006/main">
+            <a:off x="12915900" y="3219450"/>
+            <a:ext cx="266700" cy="285750"/>
+          </a:xfrm>
+          <a:prstGeom xmlns:a="http://schemas.openxmlformats.org/drawingml/2006/main" prst="rect">
+            <a:avLst/>
+          </a:prstGeom>
+          <a:solidFill xmlns:a="http://schemas.openxmlformats.org/drawingml/2006/main">
+            <a:srgbClr val="FFFFFF"/>
+          </a:solidFill>
+          <a:ln xmlns:a="http://schemas.openxmlformats.org/drawingml/2006/main" w="12700">
+            <a:solidFill>
+              <a:srgbClr val="8B6BE8"/>
+            </a:solidFill>
+            <a:prstDash val="solid"/>
+          </a:ln>
+        </p:spPr>
+        <p:txBody>
+          <a:bodyPr xmlns:a="http://schemas.openxmlformats.org/drawingml/2006/main" wrap="square" lIns="0" tIns="0" rIns="0" bIns="0" anchor="t"/>
+          <a:lstStyle xmlns:a="http://schemas.openxmlformats.org/drawingml/2006/main"/>
+          <a:p xmlns:a="http://schemas.openxmlformats.org/drawingml/2006/main">
+            <a:r>
+              <a:rPr lang="en-US"/>
+              <a:t/>
+            </a:r>
+            <a:endParaRPr lang="en-US"/>
+          </a:p>
+        </p:txBody>
+      </p:sp>
+      <p:sp>
+        <p:nvSpPr>
+          <p:cNvPr id="22" name="anchor-axis"/>
+          <p:cNvSpPr/>
+          <p:nvPr/>
+        </p:nvSpPr>
+        <p:spPr>
+          <a:xfrm xmlns:a="http://schemas.openxmlformats.org/drawingml/2006/main">
+            <a:off x="12668250" y="1638300"/>
+            <a:ext cx="0" cy="2743200"/>
+          </a:xfrm>
+          <a:prstGeom xmlns:a="http://schemas.openxmlformats.org/drawingml/2006/main" prst="line">
+            <a:avLst/>
+          </a:prstGeom>
+          <a:noFill xmlns:a="http://schemas.openxmlformats.org/drawingml/2006/main"/>
+          <a:ln xmlns:a="http://schemas.openxmlformats.org/drawingml/2006/main" w="50800">
+            <a:solidFill>
+              <a:srgbClr val="1D2330"/>
+            </a:solidFill>
+            <a:prstDash val="solid"/>
+          </a:ln>
+        </p:spPr>
+        <p:txBody>
+          <a:bodyPr xmlns:a="http://schemas.openxmlformats.org/drawingml/2006/main" wrap="square" lIns="0" tIns="0" rIns="0" bIns="0" anchor="t"/>
+          <a:lstStyle xmlns:a="http://schemas.openxmlformats.org/drawingml/2006/main"/>
+          <a:p xmlns:a="http://schemas.openxmlformats.org/drawingml/2006/main">
+            <a:r>
+              <a:rPr lang="en-US"/>
+              <a:t/>
+            </a:r>
+            <a:endParaRPr lang="en-US"/>
+          </a:p>
+        </p:txBody>
+      </p:sp>
+    </p:spTree>
+  </p:cSld>
+  <p:clrMapOvr>
+    <a:masterClrMapping xmlns:a="http://schemas.openxmlformats.org/drawingml/2006/main"/>
+  </p:clrMapOvr>
+</p:sld>
+</file>
+
+<file path=ppt/slides/slide2.xml><?xml version="1.0" encoding="utf-8"?>
+<p:sld xmlns:p="http://schemas.openxmlformats.org/presentationml/2006/main">
+  <p:cSld name="Argument">
+    <p:bg>
+      <p:bgPr>
+        <a:blipFill xmlns:a="http://schemas.openxmlformats.org/drawingml/2006/main">
           <a:blip xmlns:r="http://schemas.openxmlformats.org/officeDocument/2006/relationships" r:embed="rIdOfficeKitImage8579b0a87ff097c1_1"/>
           <a:stretch>
             <a:fillRect/>
@@ -507,21 +1302,21 @@
       </p:grpSpPr>
       <p:sp>
         <p:nvSpPr>
-          <p:cNvPr id="2" name="cover-paper-scrim"/>
+          <p:cNvPr id="2" name="argument-paper-scrim"/>
           <p:cNvSpPr/>
           <p:nvPr/>
         </p:nvSpPr>
         <p:spPr>
           <a:xfrm xmlns:a="http://schemas.openxmlformats.org/drawingml/2006/main">
             <a:off x="0" y="0"/>
-            <a:ext cx="9525000" cy="8572500"/>
+            <a:ext cx="7429500" cy="8572500"/>
           </a:xfrm>
           <a:prstGeom xmlns:a="http://schemas.openxmlformats.org/drawingml/2006/main" prst="rect">
             <a:avLst/>
           </a:prstGeom>
           <a:solidFill xmlns:a="http://schemas.openxmlformats.org/drawingml/2006/main">
             <a:srgbClr val="FFFFFF">
-              <a:alpha val="100000"/>
+              <a:alpha val="96000"/>
             </a:srgbClr>
           </a:solidFill>
           <a:ln xmlns:a="http://schemas.openxmlformats.org/drawingml/2006/main" w="0">
@@ -543,16 +1338,83 @@
           </a:p>
         </p:txBody>
       </p:sp>
-      <p:sp>
-        <p:nvSpPr>
-          <p:cNvPr id="3" name="top-rule"/>
+      <p:pic>
+        <p:nvPicPr>
+          <p:cNvPr id="3" name="argument-photo-band">
+            <a:extLst xmlns:a="http://schemas.openxmlformats.org/drawingml/2006/main">
+              <a:ext uri="{C183D7F6-B498-43B3-948B-1728B52AA6E4}">
+                <adec:decorative xmlns:adec="http://schemas.microsoft.com/office/drawing/2017/decorative" val="1"/>
+              </a:ext>
+            </a:extLst>
+          </p:cNvPr>
+          <p:cNvPicPr/>
+          <p:nvPr/>
+        </p:nvPicPr>
+        <p:blipFill>
+          <a:blip xmlns:r="http://schemas.openxmlformats.org/officeDocument/2006/relationships" xmlns:a="http://schemas.openxmlformats.org/drawingml/2006/main" r:embed="rIdOfficeKitImageb4650c5e003a270c_1"/>
+          <a:srcRect xmlns:a="http://schemas.openxmlformats.org/drawingml/2006/main" l="0" t="47258" r="0" b="47258"/>
+          <a:stretch xmlns:a="http://schemas.openxmlformats.org/drawingml/2006/main">
+            <a:fillRect/>
+          </a:stretch>
+        </p:blipFill>
+        <p:spPr>
+          <a:xfrm xmlns:a="http://schemas.openxmlformats.org/drawingml/2006/main">
+            <a:off x="0" y="0"/>
+            <a:ext cx="15240000" cy="1485900"/>
+          </a:xfrm>
+          <a:prstGeom xmlns:a="http://schemas.openxmlformats.org/drawingml/2006/main" prst="rect">
+            <a:avLst/>
+          </a:prstGeom>
+        </p:spPr>
+      </p:pic>
+      <p:sp>
+        <p:nvSpPr>
+          <p:cNvPr id="4" name="argument-photo-scrim"/>
           <p:cNvSpPr/>
           <p:nvPr/>
         </p:nvSpPr>
         <p:spPr>
           <a:xfrm xmlns:a="http://schemas.openxmlformats.org/drawingml/2006/main">
-            <a:off x="838200" y="666750"/>
-            <a:ext cx="13563600" cy="0"/>
+            <a:off x="0" y="0"/>
+            <a:ext cx="15240000" cy="1485900"/>
+          </a:xfrm>
+          <a:prstGeom xmlns:a="http://schemas.openxmlformats.org/drawingml/2006/main" prst="rect">
+            <a:avLst/>
+          </a:prstGeom>
+          <a:solidFill xmlns:a="http://schemas.openxmlformats.org/drawingml/2006/main">
+            <a:srgbClr val="1D2330">
+              <a:alpha val="62000"/>
+            </a:srgbClr>
+          </a:solidFill>
+          <a:ln xmlns:a="http://schemas.openxmlformats.org/drawingml/2006/main" w="0">
+            <a:solidFill>
+              <a:srgbClr val="1D2330"/>
+            </a:solidFill>
+            <a:prstDash val="solid"/>
+          </a:ln>
+        </p:spPr>
+        <p:txBody>
+          <a:bodyPr xmlns:a="http://schemas.openxmlformats.org/drawingml/2006/main" wrap="square" lIns="0" tIns="0" rIns="0" bIns="0" anchor="t"/>
+          <a:lstStyle xmlns:a="http://schemas.openxmlformats.org/drawingml/2006/main"/>
+          <a:p xmlns:a="http://schemas.openxmlformats.org/drawingml/2006/main">
+            <a:r>
+              <a:rPr lang="en-US"/>
+              <a:t/>
+            </a:r>
+            <a:endParaRPr lang="en-US"/>
+          </a:p>
+        </p:txBody>
+      </p:sp>
+      <p:sp>
+        <p:nvSpPr>
+          <p:cNvPr id="5" name="argument-photo-rule"/>
+          <p:cNvSpPr/>
+          <p:nvPr/>
+        </p:nvSpPr>
+        <p:spPr>
+          <a:xfrm xmlns:a="http://schemas.openxmlformats.org/drawingml/2006/main">
+            <a:off x="914400" y="1438275"/>
+            <a:ext cx="13411200" cy="0"/>
           </a:xfrm>
           <a:prstGeom xmlns:a="http://schemas.openxmlformats.org/drawingml/2006/main" prst="line">
             <a:avLst/>
@@ -579,125 +1441,236 @@
       </p:sp>
       <p:sp>
         <p:nvSpPr>
-          <p:cNvPr id="4" name="eyebrow"/>
-          <p:cNvSpPr txBox="1"/>
-          <p:nvPr/>
-        </p:nvSpPr>
-        <p:spPr>
-          <a:xfrm xmlns:a="http://schemas.openxmlformats.org/drawingml/2006/main">
-            <a:off x="914400" y="895350"/>
-            <a:ext cx="7239000" cy="228600"/>
-          </a:xfrm>
-          <a:prstGeom xmlns:a="http://schemas.openxmlformats.org/drawingml/2006/main" prst="rect">
-            <a:avLst/>
-          </a:prstGeom>
-          <a:noFill xmlns:a="http://schemas.openxmlformats.org/drawingml/2006/main"/>
-          <a:ln xmlns:a="http://schemas.openxmlformats.org/drawingml/2006/main" w="0">
-            <a:noFill/>
-          </a:ln>
-        </p:spPr>
-        <p:txBody>
-          <a:bodyPr xmlns:a="http://schemas.openxmlformats.org/drawingml/2006/main" wrap="square" lIns="0" tIns="0" rIns="0" bIns="0" anchor="t"/>
-          <a:lstStyle xmlns:a="http://schemas.openxmlformats.org/drawingml/2006/main"/>
-          <a:p xmlns:a="http://schemas.openxmlformats.org/drawingml/2006/main">
-            <a:r>
-              <a:rPr lang="en-US" sz="1200" b="1">
+          <p:cNvPr id="6" name="MOONLIT WORK REPORT · ARGUMENT"/>
+          <p:cNvSpPr txBox="1"/>
+          <p:nvPr/>
+        </p:nvSpPr>
+        <p:spPr>
+          <a:xfrm xmlns:a="http://schemas.openxmlformats.org/drawingml/2006/main">
+            <a:off x="914400" y="228600"/>
+            <a:ext cx="9525000" cy="190500"/>
+          </a:xfrm>
+          <a:prstGeom xmlns:a="http://schemas.openxmlformats.org/drawingml/2006/main" prst="rect">
+            <a:avLst/>
+          </a:prstGeom>
+          <a:noFill xmlns:a="http://schemas.openxmlformats.org/drawingml/2006/main"/>
+          <a:ln xmlns:a="http://schemas.openxmlformats.org/drawingml/2006/main" w="0">
+            <a:noFill/>
+          </a:ln>
+        </p:spPr>
+        <p:txBody>
+          <a:bodyPr xmlns:a="http://schemas.openxmlformats.org/drawingml/2006/main" wrap="square" lIns="0" tIns="0" rIns="0" bIns="0" anchor="t"/>
+          <a:lstStyle xmlns:a="http://schemas.openxmlformats.org/drawingml/2006/main"/>
+          <a:p xmlns:a="http://schemas.openxmlformats.org/drawingml/2006/main">
+            <a:r>
+              <a:rPr lang="en-US" sz="1050" b="1">
                 <a:solidFill>
                   <a:srgbClr val="8B6BE8"/>
                 </a:solidFill>
                 <a:latin typeface="Arial"/>
                 <a:ea typeface="Arial"/>
               </a:rPr>
-              <a:t>WORK · OFFICEKIT CALIBRATION</a:t>
-            </a:r>
-            <a:endParaRPr lang="en-US"/>
-          </a:p>
-        </p:txBody>
-      </p:sp>
-      <p:sp>
-        <p:nvSpPr>
-          <p:cNvPr id="5" name="cover-title"/>
-          <p:cNvSpPr txBox="1"/>
-          <p:nvPr/>
-        </p:nvSpPr>
-        <p:spPr>
-          <a:xfrm xmlns:a="http://schemas.openxmlformats.org/drawingml/2006/main">
-            <a:off x="914400" y="1571625"/>
-            <a:ext cx="8382000" cy="1066800"/>
-          </a:xfrm>
-          <a:prstGeom xmlns:a="http://schemas.openxmlformats.org/drawingml/2006/main" prst="rect">
-            <a:avLst/>
-          </a:prstGeom>
-          <a:noFill xmlns:a="http://schemas.openxmlformats.org/drawingml/2006/main"/>
-          <a:ln xmlns:a="http://schemas.openxmlformats.org/drawingml/2006/main" w="0">
-            <a:noFill/>
-          </a:ln>
-        </p:spPr>
-        <p:txBody>
-          <a:bodyPr xmlns:a="http://schemas.openxmlformats.org/drawingml/2006/main" wrap="square" lIns="0" tIns="0" rIns="0" bIns="0" anchor="t"/>
-          <a:lstStyle xmlns:a="http://schemas.openxmlformats.org/drawingml/2006/main"/>
-          <a:p xmlns:a="http://schemas.openxmlformats.org/drawingml/2006/main">
-            <a:r>
-              <a:rPr lang="en-US" sz="3600" b="1">
+              <a:t>MOONLIT WORK REPORT · ARGUMENT</a:t>
+            </a:r>
+            <a:endParaRPr lang="en-US"/>
+          </a:p>
+        </p:txBody>
+      </p:sp>
+      <p:sp>
+        <p:nvSpPr>
+          <p:cNvPr id="7" name="argument-title"/>
+          <p:cNvSpPr txBox="1"/>
+          <p:nvPr/>
+        </p:nvSpPr>
+        <p:spPr>
+          <a:xfrm xmlns:a="http://schemas.openxmlformats.org/drawingml/2006/main">
+            <a:off x="914400" y="495300"/>
+            <a:ext cx="12001500" cy="457200"/>
+          </a:xfrm>
+          <a:prstGeom xmlns:a="http://schemas.openxmlformats.org/drawingml/2006/main" prst="rect">
+            <a:avLst/>
+          </a:prstGeom>
+          <a:noFill xmlns:a="http://schemas.openxmlformats.org/drawingml/2006/main"/>
+          <a:ln xmlns:a="http://schemas.openxmlformats.org/drawingml/2006/main" w="0">
+            <a:noFill/>
+          </a:ln>
+        </p:spPr>
+        <p:txBody>
+          <a:bodyPr xmlns:a="http://schemas.openxmlformats.org/drawingml/2006/main" wrap="square" lIns="0" tIns="0" rIns="0" bIns="0" anchor="t"/>
+          <a:lstStyle xmlns:a="http://schemas.openxmlformats.org/drawingml/2006/main"/>
+          <a:p xmlns:a="http://schemas.openxmlformats.org/drawingml/2006/main">
+            <a:r>
+              <a:rPr lang="en-US" sz="2550" b="1">
+                <a:solidFill>
+                  <a:srgbClr val="FFFFFF"/>
+                </a:solidFill>
+                <a:latin typeface="Arial"/>
+                <a:ea typeface="Arial"/>
+              </a:rPr>
+              <a:t>The constraint owns the page</a:t>
+            </a:r>
+            <a:endParaRPr lang="en-US"/>
+          </a:p>
+        </p:txBody>
+      </p:sp>
+      <p:sp>
+        <p:nvSpPr>
+          <p:cNvPr id="8" name="argument-basis"/>
+          <p:cNvSpPr txBox="1"/>
+          <p:nvPr/>
+        </p:nvSpPr>
+        <p:spPr>
+          <a:xfrm xmlns:a="http://schemas.openxmlformats.org/drawingml/2006/main">
+            <a:off x="952500" y="1066800"/>
+            <a:ext cx="11049000" cy="228600"/>
+          </a:xfrm>
+          <a:prstGeom xmlns:a="http://schemas.openxmlformats.org/drawingml/2006/main" prst="rect">
+            <a:avLst/>
+          </a:prstGeom>
+          <a:noFill xmlns:a="http://schemas.openxmlformats.org/drawingml/2006/main"/>
+          <a:ln xmlns:a="http://schemas.openxmlformats.org/drawingml/2006/main" w="0">
+            <a:noFill/>
+          </a:ln>
+        </p:spPr>
+        <p:txBody>
+          <a:bodyPr xmlns:a="http://schemas.openxmlformats.org/drawingml/2006/main" wrap="square" lIns="0" tIns="0" rIns="0" bIns="0" anchor="t"/>
+          <a:lstStyle xmlns:a="http://schemas.openxmlformats.org/drawingml/2006/main"/>
+          <a:p xmlns:a="http://schemas.openxmlformats.org/drawingml/2006/main">
+            <a:r>
+              <a:rPr lang="en-US" sz="1200">
+                <a:solidFill>
+                  <a:srgbClr val="F0F3F2"/>
+                </a:solidFill>
+                <a:latin typeface="Arial"/>
+                <a:ea typeface="Arial"/>
+              </a:rPr>
+              <a:t>Status, cause, owner and date stay together.</a:t>
+            </a:r>
+            <a:endParaRPr lang="en-US"/>
+          </a:p>
+        </p:txBody>
+      </p:sp>
+      <p:sp>
+        <p:nvSpPr>
+          <p:cNvPr id="9" name="work-status"/>
+          <p:cNvSpPr txBox="1"/>
+          <p:nvPr/>
+        </p:nvSpPr>
+        <p:spPr>
+          <a:xfrm xmlns:a="http://schemas.openxmlformats.org/drawingml/2006/main">
+            <a:off x="1104900" y="3352800"/>
+            <a:ext cx="2857500" cy="228600"/>
+          </a:xfrm>
+          <a:prstGeom xmlns:a="http://schemas.openxmlformats.org/drawingml/2006/main" prst="rect">
+            <a:avLst/>
+          </a:prstGeom>
+          <a:noFill xmlns:a="http://schemas.openxmlformats.org/drawingml/2006/main"/>
+          <a:ln xmlns:a="http://schemas.openxmlformats.org/drawingml/2006/main" w="0">
+            <a:noFill/>
+          </a:ln>
+        </p:spPr>
+        <p:txBody>
+          <a:bodyPr xmlns:a="http://schemas.openxmlformats.org/drawingml/2006/main" wrap="square" lIns="0" tIns="0" rIns="0" bIns="0" anchor="t"/>
+          <a:lstStyle xmlns:a="http://schemas.openxmlformats.org/drawingml/2006/main"/>
+          <a:p xmlns:a="http://schemas.openxmlformats.org/drawingml/2006/main">
+            <a:r>
+              <a:rPr lang="en-US" sz="1125" b="1">
+                <a:solidFill>
+                  <a:srgbClr val="8B6BE8"/>
+                </a:solidFill>
+                <a:latin typeface="Arial"/>
+                <a:ea typeface="Arial"/>
+              </a:rPr>
+              <a:t>OPERATING SIGNAL</a:t>
+            </a:r>
+            <a:endParaRPr lang="en-US"/>
+          </a:p>
+        </p:txBody>
+      </p:sp>
+      <p:sp>
+        <p:nvSpPr>
+          <p:cNvPr id="10" name="work-headline"/>
+          <p:cNvSpPr txBox="1"/>
+          <p:nvPr/>
+        </p:nvSpPr>
+        <p:spPr>
+          <a:xfrm xmlns:a="http://schemas.openxmlformats.org/drawingml/2006/main">
+            <a:off x="1104900" y="3790950"/>
+            <a:ext cx="6667500" cy="723900"/>
+          </a:xfrm>
+          <a:prstGeom xmlns:a="http://schemas.openxmlformats.org/drawingml/2006/main" prst="rect">
+            <a:avLst/>
+          </a:prstGeom>
+          <a:noFill xmlns:a="http://schemas.openxmlformats.org/drawingml/2006/main"/>
+          <a:ln xmlns:a="http://schemas.openxmlformats.org/drawingml/2006/main" w="0">
+            <a:noFill/>
+          </a:ln>
+        </p:spPr>
+        <p:txBody>
+          <a:bodyPr xmlns:a="http://schemas.openxmlformats.org/drawingml/2006/main" wrap="square" lIns="0" tIns="0" rIns="0" bIns="0" anchor="t"/>
+          <a:lstStyle xmlns:a="http://schemas.openxmlformats.org/drawingml/2006/main"/>
+          <a:p xmlns:a="http://schemas.openxmlformats.org/drawingml/2006/main">
+            <a:r>
+              <a:rPr lang="en-US" sz="2550" b="1">
                 <a:solidFill>
                   <a:srgbClr val="1D2330"/>
                 </a:solidFill>
                 <a:latin typeface="Arial"/>
                 <a:ea typeface="Arial"/>
               </a:rPr>
-              <a:t>Moonlit Work Report: a claim worth testing</a:t>
-            </a:r>
-            <a:endParaRPr lang="en-US"/>
-          </a:p>
-        </p:txBody>
-      </p:sp>
-      <p:sp>
-        <p:nvSpPr>
-          <p:cNvPr id="6" name="cover-subtitle"/>
-          <p:cNvSpPr txBox="1"/>
-          <p:nvPr/>
-        </p:nvSpPr>
-        <p:spPr>
-          <a:xfrm xmlns:a="http://schemas.openxmlformats.org/drawingml/2006/main">
-            <a:off x="952500" y="2857500"/>
-            <a:ext cx="6858000" cy="323850"/>
-          </a:xfrm>
-          <a:prstGeom xmlns:a="http://schemas.openxmlformats.org/drawingml/2006/main" prst="rect">
-            <a:avLst/>
-          </a:prstGeom>
-          <a:noFill xmlns:a="http://schemas.openxmlformats.org/drawingml/2006/main"/>
-          <a:ln xmlns:a="http://schemas.openxmlformats.org/drawingml/2006/main" w="0">
-            <a:noFill/>
-          </a:ln>
-        </p:spPr>
-        <p:txBody>
-          <a:bodyPr xmlns:a="http://schemas.openxmlformats.org/drawingml/2006/main" wrap="square" lIns="0" tIns="0" rIns="0" bIns="0" anchor="t"/>
-          <a:lstStyle xmlns:a="http://schemas.openxmlformats.org/drawingml/2006/main"/>
-          <a:p xmlns:a="http://schemas.openxmlformats.org/drawingml/2006/main">
-            <a:r>
-              <a:rPr lang="en-US" sz="1725">
-                <a:solidFill>
-                  <a:srgbClr val="8B6BE8"/>
-                </a:solidFill>
-                <a:latin typeface="Arial"/>
-                <a:ea typeface="Arial"/>
-              </a:rPr>
-              <a:t>A clean-room reference for evidence, direction, and a decision.</a:t>
-            </a:r>
-            <a:endParaRPr lang="en-US"/>
-          </a:p>
-        </p:txBody>
-      </p:sp>
-      <p:sp>
-        <p:nvSpPr>
-          <p:cNvPr id="7" name="cover-rule"/>
+              <a:t>The queue is healthy; the handoff is not.</a:t>
+            </a:r>
+            <a:endParaRPr lang="en-US"/>
+          </a:p>
+        </p:txBody>
+      </p:sp>
+      <p:sp>
+        <p:nvSpPr>
+          <p:cNvPr id="11" name="work-body"/>
+          <p:cNvSpPr txBox="1"/>
+          <p:nvPr/>
+        </p:nvSpPr>
+        <p:spPr>
+          <a:xfrm xmlns:a="http://schemas.openxmlformats.org/drawingml/2006/main">
+            <a:off x="1104900" y="4762500"/>
+            <a:ext cx="6191250" cy="400050"/>
+          </a:xfrm>
+          <a:prstGeom xmlns:a="http://schemas.openxmlformats.org/drawingml/2006/main" prst="rect">
+            <a:avLst/>
+          </a:prstGeom>
+          <a:noFill xmlns:a="http://schemas.openxmlformats.org/drawingml/2006/main"/>
+          <a:ln xmlns:a="http://schemas.openxmlformats.org/drawingml/2006/main" w="0">
+            <a:noFill/>
+          </a:ln>
+        </p:spPr>
+        <p:txBody>
+          <a:bodyPr xmlns:a="http://schemas.openxmlformats.org/drawingml/2006/main" wrap="square" lIns="0" tIns="0" rIns="0" bIns="0" anchor="t"/>
+          <a:lstStyle xmlns:a="http://schemas.openxmlformats.org/drawingml/2006/main"/>
+          <a:p xmlns:a="http://schemas.openxmlformats.org/drawingml/2006/main">
+            <a:r>
+              <a:rPr lang="en-US" sz="1575">
+                <a:solidFill>
+                  <a:srgbClr val="1D2330"/>
+                </a:solidFill>
+                <a:latin typeface="Arial"/>
+                <a:ea typeface="Arial"/>
+              </a:rPr>
+              <a:t>Three visible signals point to one owner and one date.</a:t>
+            </a:r>
+            <a:endParaRPr lang="en-US"/>
+          </a:p>
+        </p:txBody>
+      </p:sp>
+      <p:sp>
+        <p:nvSpPr>
+          <p:cNvPr id="12" name="work-rail"/>
           <p:cNvSpPr/>
           <p:nvPr/>
         </p:nvSpPr>
         <p:spPr>
           <a:xfrm xmlns:a="http://schemas.openxmlformats.org/drawingml/2006/main">
-            <a:off x="914400" y="3524250"/>
-            <a:ext cx="7658100" cy="0"/>
+            <a:off x="10001250" y="3333750"/>
+            <a:ext cx="0" cy="2381250"/>
           </a:xfrm>
           <a:prstGeom xmlns:a="http://schemas.openxmlformats.org/drawingml/2006/main" prst="line">
             <a:avLst/>
@@ -724,88 +1697,347 @@
       </p:sp>
       <p:sp>
         <p:nvSpPr>
-          <p:cNvPr id="8" name="cover-basis"/>
-          <p:cNvSpPr txBox="1"/>
-          <p:nvPr/>
-        </p:nvSpPr>
-        <p:spPr>
-          <a:xfrm xmlns:a="http://schemas.openxmlformats.org/drawingml/2006/main">
-            <a:off x="952500" y="3762375"/>
-            <a:ext cx="7810500" cy="266700"/>
-          </a:xfrm>
-          <a:prstGeom xmlns:a="http://schemas.openxmlformats.org/drawingml/2006/main" prst="rect">
-            <a:avLst/>
-          </a:prstGeom>
-          <a:noFill xmlns:a="http://schemas.openxmlformats.org/drawingml/2006/main"/>
-          <a:ln xmlns:a="http://schemas.openxmlformats.org/drawingml/2006/main" w="0">
-            <a:noFill/>
-          </a:ln>
-        </p:spPr>
-        <p:txBody>
-          <a:bodyPr xmlns:a="http://schemas.openxmlformats.org/drawingml/2006/main" wrap="square" lIns="0" tIns="0" rIns="0" bIns="0" anchor="t"/>
-          <a:lstStyle xmlns:a="http://schemas.openxmlformats.org/drawingml/2006/main"/>
-          <a:p xmlns:a="http://schemas.openxmlformats.org/drawingml/2006/main">
-            <a:r>
-              <a:rPr lang="en-US" sz="1350">
+          <p:cNvPr id="13" name="work-num-0"/>
+          <p:cNvSpPr txBox="1"/>
+          <p:nvPr/>
+        </p:nvSpPr>
+        <p:spPr>
+          <a:xfrm xmlns:a="http://schemas.openxmlformats.org/drawingml/2006/main">
+            <a:off x="10477500" y="3448050"/>
+            <a:ext cx="571500" cy="228600"/>
+          </a:xfrm>
+          <a:prstGeom xmlns:a="http://schemas.openxmlformats.org/drawingml/2006/main" prst="rect">
+            <a:avLst/>
+          </a:prstGeom>
+          <a:noFill xmlns:a="http://schemas.openxmlformats.org/drawingml/2006/main"/>
+          <a:ln xmlns:a="http://schemas.openxmlformats.org/drawingml/2006/main" w="0">
+            <a:noFill/>
+          </a:ln>
+        </p:spPr>
+        <p:txBody>
+          <a:bodyPr xmlns:a="http://schemas.openxmlformats.org/drawingml/2006/main" wrap="square" lIns="0" tIns="0" rIns="0" bIns="0" anchor="t"/>
+          <a:lstStyle xmlns:a="http://schemas.openxmlformats.org/drawingml/2006/main"/>
+          <a:p xmlns:a="http://schemas.openxmlformats.org/drawingml/2006/main">
+            <a:r>
+              <a:rPr lang="en-US" sz="1350" b="1">
+                <a:solidFill>
+                  <a:srgbClr val="8B6BE8"/>
+                </a:solidFill>
+                <a:latin typeface="Arial"/>
+                <a:ea typeface="Arial"/>
+              </a:rPr>
+              <a:t>01</a:t>
+            </a:r>
+            <a:endParaRPr lang="en-US"/>
+          </a:p>
+        </p:txBody>
+      </p:sp>
+      <p:sp>
+        <p:nvSpPr>
+          <p:cNvPr id="14" name="work-label-0"/>
+          <p:cNvSpPr txBox="1"/>
+          <p:nvPr/>
+        </p:nvSpPr>
+        <p:spPr>
+          <a:xfrm xmlns:a="http://schemas.openxmlformats.org/drawingml/2006/main">
+            <a:off x="11144250" y="3448050"/>
+            <a:ext cx="1428750" cy="228600"/>
+          </a:xfrm>
+          <a:prstGeom xmlns:a="http://schemas.openxmlformats.org/drawingml/2006/main" prst="rect">
+            <a:avLst/>
+          </a:prstGeom>
+          <a:noFill xmlns:a="http://schemas.openxmlformats.org/drawingml/2006/main"/>
+          <a:ln xmlns:a="http://schemas.openxmlformats.org/drawingml/2006/main" w="0">
+            <a:noFill/>
+          </a:ln>
+        </p:spPr>
+        <p:txBody>
+          <a:bodyPr xmlns:a="http://schemas.openxmlformats.org/drawingml/2006/main" wrap="square" lIns="0" tIns="0" rIns="0" bIns="0" anchor="t"/>
+          <a:lstStyle xmlns:a="http://schemas.openxmlformats.org/drawingml/2006/main"/>
+          <a:p xmlns:a="http://schemas.openxmlformats.org/drawingml/2006/main">
+            <a:r>
+              <a:rPr lang="en-US" sz="1350" b="1">
                 <a:solidFill>
                   <a:srgbClr val="1D2330"/>
                 </a:solidFill>
                 <a:latin typeface="Arial"/>
                 <a:ea typeface="Arial"/>
               </a:rPr>
-              <a:t>One visual language · four page roles · native editable objects</a:t>
-            </a:r>
-            <a:endParaRPr lang="en-US"/>
-          </a:p>
-        </p:txBody>
-      </p:sp>
-      <p:sp>
-        <p:nvSpPr>
-          <p:cNvPr id="9" name="cover-thesis"/>
-          <p:cNvSpPr txBox="1"/>
-          <p:nvPr/>
-        </p:nvSpPr>
-        <p:spPr>
-          <a:xfrm xmlns:a="http://schemas.openxmlformats.org/drawingml/2006/main">
-            <a:off x="952500" y="4810125"/>
-            <a:ext cx="6667500" cy="628650"/>
-          </a:xfrm>
-          <a:prstGeom xmlns:a="http://schemas.openxmlformats.org/drawingml/2006/main" prst="rect">
-            <a:avLst/>
-          </a:prstGeom>
-          <a:noFill xmlns:a="http://schemas.openxmlformats.org/drawingml/2006/main"/>
-          <a:ln xmlns:a="http://schemas.openxmlformats.org/drawingml/2006/main" w="0">
-            <a:noFill/>
-          </a:ln>
-        </p:spPr>
-        <p:txBody>
-          <a:bodyPr xmlns:a="http://schemas.openxmlformats.org/drawingml/2006/main" wrap="square" lIns="0" tIns="0" rIns="0" bIns="0" anchor="t"/>
-          <a:lstStyle xmlns:a="http://schemas.openxmlformats.org/drawingml/2006/main"/>
-          <a:p xmlns:a="http://schemas.openxmlformats.org/drawingml/2006/main">
-            <a:r>
-              <a:rPr lang="en-US" sz="1875" b="1">
+              <a:t>Queue</a:t>
+            </a:r>
+            <a:endParaRPr lang="en-US"/>
+          </a:p>
+        </p:txBody>
+      </p:sp>
+      <p:sp>
+        <p:nvSpPr>
+          <p:cNvPr id="15" name="work-text-0"/>
+          <p:cNvSpPr txBox="1"/>
+          <p:nvPr/>
+        </p:nvSpPr>
+        <p:spPr>
+          <a:xfrm xmlns:a="http://schemas.openxmlformats.org/drawingml/2006/main">
+            <a:off x="12668250" y="3448050"/>
+            <a:ext cx="1143000" cy="228600"/>
+          </a:xfrm>
+          <a:prstGeom xmlns:a="http://schemas.openxmlformats.org/drawingml/2006/main" prst="rect">
+            <a:avLst/>
+          </a:prstGeom>
+          <a:noFill xmlns:a="http://schemas.openxmlformats.org/drawingml/2006/main"/>
+          <a:ln xmlns:a="http://schemas.openxmlformats.org/drawingml/2006/main" w="0">
+            <a:noFill/>
+          </a:ln>
+        </p:spPr>
+        <p:txBody>
+          <a:bodyPr xmlns:a="http://schemas.openxmlformats.org/drawingml/2006/main" wrap="square" lIns="0" tIns="0" rIns="0" bIns="0" anchor="t"/>
+          <a:lstStyle xmlns:a="http://schemas.openxmlformats.org/drawingml/2006/main"/>
+          <a:p xmlns:a="http://schemas.openxmlformats.org/drawingml/2006/main">
+            <a:r>
+              <a:rPr lang="en-US" sz="1200">
+                <a:solidFill>
+                  <a:srgbClr val="93959C"/>
+                </a:solidFill>
+                <a:latin typeface="Arial"/>
+                <a:ea typeface="Arial"/>
+              </a:rPr>
+              <a:t>On target</a:t>
+            </a:r>
+            <a:endParaRPr lang="en-US"/>
+          </a:p>
+        </p:txBody>
+      </p:sp>
+      <p:sp>
+        <p:nvSpPr>
+          <p:cNvPr id="16" name="work-num-1"/>
+          <p:cNvSpPr txBox="1"/>
+          <p:nvPr/>
+        </p:nvSpPr>
+        <p:spPr>
+          <a:xfrm xmlns:a="http://schemas.openxmlformats.org/drawingml/2006/main">
+            <a:off x="10477500" y="4229100"/>
+            <a:ext cx="571500" cy="228600"/>
+          </a:xfrm>
+          <a:prstGeom xmlns:a="http://schemas.openxmlformats.org/drawingml/2006/main" prst="rect">
+            <a:avLst/>
+          </a:prstGeom>
+          <a:noFill xmlns:a="http://schemas.openxmlformats.org/drawingml/2006/main"/>
+          <a:ln xmlns:a="http://schemas.openxmlformats.org/drawingml/2006/main" w="0">
+            <a:noFill/>
+          </a:ln>
+        </p:spPr>
+        <p:txBody>
+          <a:bodyPr xmlns:a="http://schemas.openxmlformats.org/drawingml/2006/main" wrap="square" lIns="0" tIns="0" rIns="0" bIns="0" anchor="t"/>
+          <a:lstStyle xmlns:a="http://schemas.openxmlformats.org/drawingml/2006/main"/>
+          <a:p xmlns:a="http://schemas.openxmlformats.org/drawingml/2006/main">
+            <a:r>
+              <a:rPr lang="en-US" sz="1350" b="1">
+                <a:solidFill>
+                  <a:srgbClr val="8B6BE8"/>
+                </a:solidFill>
+                <a:latin typeface="Arial"/>
+                <a:ea typeface="Arial"/>
+              </a:rPr>
+              <a:t>02</a:t>
+            </a:r>
+            <a:endParaRPr lang="en-US"/>
+          </a:p>
+        </p:txBody>
+      </p:sp>
+      <p:sp>
+        <p:nvSpPr>
+          <p:cNvPr id="17" name="work-label-1"/>
+          <p:cNvSpPr txBox="1"/>
+          <p:nvPr/>
+        </p:nvSpPr>
+        <p:spPr>
+          <a:xfrm xmlns:a="http://schemas.openxmlformats.org/drawingml/2006/main">
+            <a:off x="11144250" y="4229100"/>
+            <a:ext cx="1428750" cy="228600"/>
+          </a:xfrm>
+          <a:prstGeom xmlns:a="http://schemas.openxmlformats.org/drawingml/2006/main" prst="rect">
+            <a:avLst/>
+          </a:prstGeom>
+          <a:noFill xmlns:a="http://schemas.openxmlformats.org/drawingml/2006/main"/>
+          <a:ln xmlns:a="http://schemas.openxmlformats.org/drawingml/2006/main" w="0">
+            <a:noFill/>
+          </a:ln>
+        </p:spPr>
+        <p:txBody>
+          <a:bodyPr xmlns:a="http://schemas.openxmlformats.org/drawingml/2006/main" wrap="square" lIns="0" tIns="0" rIns="0" bIns="0" anchor="t"/>
+          <a:lstStyle xmlns:a="http://schemas.openxmlformats.org/drawingml/2006/main"/>
+          <a:p xmlns:a="http://schemas.openxmlformats.org/drawingml/2006/main">
+            <a:r>
+              <a:rPr lang="en-US" sz="1350" b="1">
                 <a:solidFill>
                   <a:srgbClr val="1D2330"/>
                 </a:solidFill>
                 <a:latin typeface="Arial"/>
                 <a:ea typeface="Arial"/>
               </a:rPr>
-              <a:t>A visible operating signal creates a shared next action.</a:t>
-            </a:r>
-            <a:endParaRPr lang="en-US"/>
-          </a:p>
-        </p:txBody>
-      </p:sp>
-      <p:sp>
-        <p:nvSpPr>
-          <p:cNvPr id="10" name="cover-source"/>
-          <p:cNvSpPr txBox="1"/>
-          <p:nvPr/>
-        </p:nvSpPr>
-        <p:spPr>
-          <a:xfrm xmlns:a="http://schemas.openxmlformats.org/drawingml/2006/main">
-            <a:off x="952500" y="7315200"/>
-            <a:ext cx="9048750" cy="228600"/>
+              <a:t>Handoff</a:t>
+            </a:r>
+            <a:endParaRPr lang="en-US"/>
+          </a:p>
+        </p:txBody>
+      </p:sp>
+      <p:sp>
+        <p:nvSpPr>
+          <p:cNvPr id="18" name="work-text-1"/>
+          <p:cNvSpPr txBox="1"/>
+          <p:nvPr/>
+        </p:nvSpPr>
+        <p:spPr>
+          <a:xfrm xmlns:a="http://schemas.openxmlformats.org/drawingml/2006/main">
+            <a:off x="12668250" y="4229100"/>
+            <a:ext cx="1143000" cy="228600"/>
+          </a:xfrm>
+          <a:prstGeom xmlns:a="http://schemas.openxmlformats.org/drawingml/2006/main" prst="rect">
+            <a:avLst/>
+          </a:prstGeom>
+          <a:noFill xmlns:a="http://schemas.openxmlformats.org/drawingml/2006/main"/>
+          <a:ln xmlns:a="http://schemas.openxmlformats.org/drawingml/2006/main" w="0">
+            <a:noFill/>
+          </a:ln>
+        </p:spPr>
+        <p:txBody>
+          <a:bodyPr xmlns:a="http://schemas.openxmlformats.org/drawingml/2006/main" wrap="square" lIns="0" tIns="0" rIns="0" bIns="0" anchor="t"/>
+          <a:lstStyle xmlns:a="http://schemas.openxmlformats.org/drawingml/2006/main"/>
+          <a:p xmlns:a="http://schemas.openxmlformats.org/drawingml/2006/main">
+            <a:r>
+              <a:rPr lang="en-US" sz="1200">
+                <a:solidFill>
+                  <a:srgbClr val="8B6BE8"/>
+                </a:solidFill>
+                <a:latin typeface="Arial"/>
+                <a:ea typeface="Arial"/>
+              </a:rPr>
+              <a:t>At risk</a:t>
+            </a:r>
+            <a:endParaRPr lang="en-US"/>
+          </a:p>
+        </p:txBody>
+      </p:sp>
+      <p:sp>
+        <p:nvSpPr>
+          <p:cNvPr id="19" name="work-num-2"/>
+          <p:cNvSpPr txBox="1"/>
+          <p:nvPr/>
+        </p:nvSpPr>
+        <p:spPr>
+          <a:xfrm xmlns:a="http://schemas.openxmlformats.org/drawingml/2006/main">
+            <a:off x="10477500" y="5010150"/>
+            <a:ext cx="571500" cy="228600"/>
+          </a:xfrm>
+          <a:prstGeom xmlns:a="http://schemas.openxmlformats.org/drawingml/2006/main" prst="rect">
+            <a:avLst/>
+          </a:prstGeom>
+          <a:noFill xmlns:a="http://schemas.openxmlformats.org/drawingml/2006/main"/>
+          <a:ln xmlns:a="http://schemas.openxmlformats.org/drawingml/2006/main" w="0">
+            <a:noFill/>
+          </a:ln>
+        </p:spPr>
+        <p:txBody>
+          <a:bodyPr xmlns:a="http://schemas.openxmlformats.org/drawingml/2006/main" wrap="square" lIns="0" tIns="0" rIns="0" bIns="0" anchor="t"/>
+          <a:lstStyle xmlns:a="http://schemas.openxmlformats.org/drawingml/2006/main"/>
+          <a:p xmlns:a="http://schemas.openxmlformats.org/drawingml/2006/main">
+            <a:r>
+              <a:rPr lang="en-US" sz="1350" b="1">
+                <a:solidFill>
+                  <a:srgbClr val="8B6BE8"/>
+                </a:solidFill>
+                <a:latin typeface="Arial"/>
+                <a:ea typeface="Arial"/>
+              </a:rPr>
+              <a:t>03</a:t>
+            </a:r>
+            <a:endParaRPr lang="en-US"/>
+          </a:p>
+        </p:txBody>
+      </p:sp>
+      <p:sp>
+        <p:nvSpPr>
+          <p:cNvPr id="20" name="work-label-2"/>
+          <p:cNvSpPr txBox="1"/>
+          <p:nvPr/>
+        </p:nvSpPr>
+        <p:spPr>
+          <a:xfrm xmlns:a="http://schemas.openxmlformats.org/drawingml/2006/main">
+            <a:off x="11144250" y="5010150"/>
+            <a:ext cx="1428750" cy="228600"/>
+          </a:xfrm>
+          <a:prstGeom xmlns:a="http://schemas.openxmlformats.org/drawingml/2006/main" prst="rect">
+            <a:avLst/>
+          </a:prstGeom>
+          <a:noFill xmlns:a="http://schemas.openxmlformats.org/drawingml/2006/main"/>
+          <a:ln xmlns:a="http://schemas.openxmlformats.org/drawingml/2006/main" w="0">
+            <a:noFill/>
+          </a:ln>
+        </p:spPr>
+        <p:txBody>
+          <a:bodyPr xmlns:a="http://schemas.openxmlformats.org/drawingml/2006/main" wrap="square" lIns="0" tIns="0" rIns="0" bIns="0" anchor="t"/>
+          <a:lstStyle xmlns:a="http://schemas.openxmlformats.org/drawingml/2006/main"/>
+          <a:p xmlns:a="http://schemas.openxmlformats.org/drawingml/2006/main">
+            <a:r>
+              <a:rPr lang="en-US" sz="1350" b="1">
+                <a:solidFill>
+                  <a:srgbClr val="1D2330"/>
+                </a:solidFill>
+                <a:latin typeface="Arial"/>
+                <a:ea typeface="Arial"/>
+              </a:rPr>
+              <a:t>Owner</a:t>
+            </a:r>
+            <a:endParaRPr lang="en-US"/>
+          </a:p>
+        </p:txBody>
+      </p:sp>
+      <p:sp>
+        <p:nvSpPr>
+          <p:cNvPr id="21" name="work-text-2"/>
+          <p:cNvSpPr txBox="1"/>
+          <p:nvPr/>
+        </p:nvSpPr>
+        <p:spPr>
+          <a:xfrm xmlns:a="http://schemas.openxmlformats.org/drawingml/2006/main">
+            <a:off x="12668250" y="5010150"/>
+            <a:ext cx="1143000" cy="228600"/>
+          </a:xfrm>
+          <a:prstGeom xmlns:a="http://schemas.openxmlformats.org/drawingml/2006/main" prst="rect">
+            <a:avLst/>
+          </a:prstGeom>
+          <a:noFill xmlns:a="http://schemas.openxmlformats.org/drawingml/2006/main"/>
+          <a:ln xmlns:a="http://schemas.openxmlformats.org/drawingml/2006/main" w="0">
+            <a:noFill/>
+          </a:ln>
+        </p:spPr>
+        <p:txBody>
+          <a:bodyPr xmlns:a="http://schemas.openxmlformats.org/drawingml/2006/main" wrap="square" lIns="0" tIns="0" rIns="0" bIns="0" anchor="t"/>
+          <a:lstStyle xmlns:a="http://schemas.openxmlformats.org/drawingml/2006/main"/>
+          <a:p xmlns:a="http://schemas.openxmlformats.org/drawingml/2006/main">
+            <a:r>
+              <a:rPr lang="en-US" sz="1200">
+                <a:solidFill>
+                  <a:srgbClr val="93959C"/>
+                </a:solidFill>
+                <a:latin typeface="Arial"/>
+                <a:ea typeface="Arial"/>
+              </a:rPr>
+              <a:t>Named</a:t>
+            </a:r>
+            <a:endParaRPr lang="en-US"/>
+          </a:p>
+        </p:txBody>
+      </p:sp>
+      <p:sp>
+        <p:nvSpPr>
+          <p:cNvPr id="22" name="source"/>
+          <p:cNvSpPr txBox="1"/>
+          <p:nvPr/>
+        </p:nvSpPr>
+        <p:spPr>
+          <a:xfrm xmlns:a="http://schemas.openxmlformats.org/drawingml/2006/main">
+            <a:off x="914400" y="7810500"/>
+            <a:ext cx="10953750" cy="209550"/>
           </a:xfrm>
           <a:prstGeom xmlns:a="http://schemas.openxmlformats.org/drawingml/2006/main" prst="rect">
             <a:avLst/>
@@ -827,15 +2059,15 @@
                 <a:latin typeface="Arial"/>
                 <a:ea typeface="Arial"/>
               </a:rPr>
-              <a:t>OfficeKit original clean-room calibration · fictional content · 2026-08-29</a:t>
-            </a:r>
-            <a:endParaRPr lang="en-US"/>
-          </a:p>
-        </p:txBody>
-      </p:sp>
-      <p:sp>
-        <p:nvSpPr>
-          <p:cNvPr id="11" name="page-number"/>
+              <a:t>Source: illustrative calibration brief · every claim is fictional and bounded</a:t>
+            </a:r>
+            <a:endParaRPr lang="en-US"/>
+          </a:p>
+        </p:txBody>
+      </p:sp>
+      <p:sp>
+        <p:nvSpPr>
+          <p:cNvPr id="23" name="page-number"/>
           <p:cNvSpPr txBox="1"/>
           <p:nvPr/>
         </p:nvSpPr>
@@ -865,401 +2097,7 @@
                 <a:latin typeface="Arial"/>
                 <a:ea typeface="Arial"/>
               </a:rPr>
-              <a:t>1 / 6</a:t>
-            </a:r>
-            <a:endParaRPr lang="en-US"/>
-          </a:p>
-        </p:txBody>
-      </p:sp>
-      <p:sp>
-        <p:nvSpPr>
-          <p:cNvPr id="12" name="anchor-field"/>
-          <p:cNvSpPr/>
-          <p:nvPr/>
-        </p:nvSpPr>
-        <p:spPr>
-          <a:xfrm xmlns:a="http://schemas.openxmlformats.org/drawingml/2006/main">
-            <a:off x="11620500" y="1790700"/>
-            <a:ext cx="2095500" cy="2286000"/>
-          </a:xfrm>
-          <a:prstGeom xmlns:a="http://schemas.openxmlformats.org/drawingml/2006/main" prst="rect">
-            <a:avLst/>
-          </a:prstGeom>
-          <a:solidFill xmlns:a="http://schemas.openxmlformats.org/drawingml/2006/main">
-            <a:srgbClr val="F3F5F8"/>
-          </a:solidFill>
-          <a:ln xmlns:a="http://schemas.openxmlformats.org/drawingml/2006/main" w="25400">
-            <a:solidFill>
-              <a:srgbClr val="8B6BE8"/>
-            </a:solidFill>
-            <a:prstDash val="solid"/>
-          </a:ln>
-        </p:spPr>
-        <p:txBody>
-          <a:bodyPr xmlns:a="http://schemas.openxmlformats.org/drawingml/2006/main" wrap="square" lIns="0" tIns="0" rIns="0" bIns="0" anchor="t"/>
-          <a:lstStyle xmlns:a="http://schemas.openxmlformats.org/drawingml/2006/main"/>
-          <a:p xmlns:a="http://schemas.openxmlformats.org/drawingml/2006/main">
-            <a:r>
-              <a:rPr lang="en-US"/>
-              <a:t/>
-            </a:r>
-            <a:endParaRPr lang="en-US"/>
-          </a:p>
-        </p:txBody>
-      </p:sp>
-      <p:sp>
-        <p:nvSpPr>
-          <p:cNvPr id="13" name="anchor-grid-0-0"/>
-          <p:cNvSpPr/>
-          <p:nvPr/>
-        </p:nvSpPr>
-        <p:spPr>
-          <a:xfrm xmlns:a="http://schemas.openxmlformats.org/drawingml/2006/main">
-            <a:off x="11925300" y="2152650"/>
-            <a:ext cx="266700" cy="285750"/>
-          </a:xfrm>
-          <a:prstGeom xmlns:a="http://schemas.openxmlformats.org/drawingml/2006/main" prst="rect">
-            <a:avLst/>
-          </a:prstGeom>
-          <a:solidFill xmlns:a="http://schemas.openxmlformats.org/drawingml/2006/main">
-            <a:srgbClr val="8B6BE8"/>
-          </a:solidFill>
-          <a:ln xmlns:a="http://schemas.openxmlformats.org/drawingml/2006/main" w="12700">
-            <a:solidFill>
-              <a:srgbClr val="8B6BE8"/>
-            </a:solidFill>
-            <a:prstDash val="solid"/>
-          </a:ln>
-        </p:spPr>
-        <p:txBody>
-          <a:bodyPr xmlns:a="http://schemas.openxmlformats.org/drawingml/2006/main" wrap="square" lIns="0" tIns="0" rIns="0" bIns="0" anchor="t"/>
-          <a:lstStyle xmlns:a="http://schemas.openxmlformats.org/drawingml/2006/main"/>
-          <a:p xmlns:a="http://schemas.openxmlformats.org/drawingml/2006/main">
-            <a:r>
-              <a:rPr lang="en-US"/>
-              <a:t/>
-            </a:r>
-            <a:endParaRPr lang="en-US"/>
-          </a:p>
-        </p:txBody>
-      </p:sp>
-      <p:sp>
-        <p:nvSpPr>
-          <p:cNvPr id="14" name="anchor-grid-0-1"/>
-          <p:cNvSpPr/>
-          <p:nvPr/>
-        </p:nvSpPr>
-        <p:spPr>
-          <a:xfrm xmlns:a="http://schemas.openxmlformats.org/drawingml/2006/main">
-            <a:off x="12420600" y="2152650"/>
-            <a:ext cx="266700" cy="285750"/>
-          </a:xfrm>
-          <a:prstGeom xmlns:a="http://schemas.openxmlformats.org/drawingml/2006/main" prst="rect">
-            <a:avLst/>
-          </a:prstGeom>
-          <a:solidFill xmlns:a="http://schemas.openxmlformats.org/drawingml/2006/main">
-            <a:srgbClr val="8B6BE8"/>
-          </a:solidFill>
-          <a:ln xmlns:a="http://schemas.openxmlformats.org/drawingml/2006/main" w="12700">
-            <a:solidFill>
-              <a:srgbClr val="8B6BE8"/>
-            </a:solidFill>
-            <a:prstDash val="solid"/>
-          </a:ln>
-        </p:spPr>
-        <p:txBody>
-          <a:bodyPr xmlns:a="http://schemas.openxmlformats.org/drawingml/2006/main" wrap="square" lIns="0" tIns="0" rIns="0" bIns="0" anchor="t"/>
-          <a:lstStyle xmlns:a="http://schemas.openxmlformats.org/drawingml/2006/main"/>
-          <a:p xmlns:a="http://schemas.openxmlformats.org/drawingml/2006/main">
-            <a:r>
-              <a:rPr lang="en-US"/>
-              <a:t/>
-            </a:r>
-            <a:endParaRPr lang="en-US"/>
-          </a:p>
-        </p:txBody>
-      </p:sp>
-      <p:sp>
-        <p:nvSpPr>
-          <p:cNvPr id="15" name="anchor-grid-0-2"/>
-          <p:cNvSpPr/>
-          <p:nvPr/>
-        </p:nvSpPr>
-        <p:spPr>
-          <a:xfrm xmlns:a="http://schemas.openxmlformats.org/drawingml/2006/main">
-            <a:off x="12915900" y="2152650"/>
-            <a:ext cx="266700" cy="285750"/>
-          </a:xfrm>
-          <a:prstGeom xmlns:a="http://schemas.openxmlformats.org/drawingml/2006/main" prst="rect">
-            <a:avLst/>
-          </a:prstGeom>
-          <a:solidFill xmlns:a="http://schemas.openxmlformats.org/drawingml/2006/main">
-            <a:srgbClr val="FFFFFF"/>
-          </a:solidFill>
-          <a:ln xmlns:a="http://schemas.openxmlformats.org/drawingml/2006/main" w="12700">
-            <a:solidFill>
-              <a:srgbClr val="8B6BE8"/>
-            </a:solidFill>
-            <a:prstDash val="solid"/>
-          </a:ln>
-        </p:spPr>
-        <p:txBody>
-          <a:bodyPr xmlns:a="http://schemas.openxmlformats.org/drawingml/2006/main" wrap="square" lIns="0" tIns="0" rIns="0" bIns="0" anchor="t"/>
-          <a:lstStyle xmlns:a="http://schemas.openxmlformats.org/drawingml/2006/main"/>
-          <a:p xmlns:a="http://schemas.openxmlformats.org/drawingml/2006/main">
-            <a:r>
-              <a:rPr lang="en-US"/>
-              <a:t/>
-            </a:r>
-            <a:endParaRPr lang="en-US"/>
-          </a:p>
-        </p:txBody>
-      </p:sp>
-      <p:sp>
-        <p:nvSpPr>
-          <p:cNvPr id="16" name="anchor-grid-1-0"/>
-          <p:cNvSpPr/>
-          <p:nvPr/>
-        </p:nvSpPr>
-        <p:spPr>
-          <a:xfrm xmlns:a="http://schemas.openxmlformats.org/drawingml/2006/main">
-            <a:off x="11925300" y="2686050"/>
-            <a:ext cx="266700" cy="285750"/>
-          </a:xfrm>
-          <a:prstGeom xmlns:a="http://schemas.openxmlformats.org/drawingml/2006/main" prst="rect">
-            <a:avLst/>
-          </a:prstGeom>
-          <a:solidFill xmlns:a="http://schemas.openxmlformats.org/drawingml/2006/main">
-            <a:srgbClr val="8B6BE8"/>
-          </a:solidFill>
-          <a:ln xmlns:a="http://schemas.openxmlformats.org/drawingml/2006/main" w="12700">
-            <a:solidFill>
-              <a:srgbClr val="8B6BE8"/>
-            </a:solidFill>
-            <a:prstDash val="solid"/>
-          </a:ln>
-        </p:spPr>
-        <p:txBody>
-          <a:bodyPr xmlns:a="http://schemas.openxmlformats.org/drawingml/2006/main" wrap="square" lIns="0" tIns="0" rIns="0" bIns="0" anchor="t"/>
-          <a:lstStyle xmlns:a="http://schemas.openxmlformats.org/drawingml/2006/main"/>
-          <a:p xmlns:a="http://schemas.openxmlformats.org/drawingml/2006/main">
-            <a:r>
-              <a:rPr lang="en-US"/>
-              <a:t/>
-            </a:r>
-            <a:endParaRPr lang="en-US"/>
-          </a:p>
-        </p:txBody>
-      </p:sp>
-      <p:sp>
-        <p:nvSpPr>
-          <p:cNvPr id="17" name="anchor-grid-1-1"/>
-          <p:cNvSpPr/>
-          <p:nvPr/>
-        </p:nvSpPr>
-        <p:spPr>
-          <a:xfrm xmlns:a="http://schemas.openxmlformats.org/drawingml/2006/main">
-            <a:off x="12420600" y="2686050"/>
-            <a:ext cx="266700" cy="285750"/>
-          </a:xfrm>
-          <a:prstGeom xmlns:a="http://schemas.openxmlformats.org/drawingml/2006/main" prst="rect">
-            <a:avLst/>
-          </a:prstGeom>
-          <a:solidFill xmlns:a="http://schemas.openxmlformats.org/drawingml/2006/main">
-            <a:srgbClr val="8B6BE8"/>
-          </a:solidFill>
-          <a:ln xmlns:a="http://schemas.openxmlformats.org/drawingml/2006/main" w="12700">
-            <a:solidFill>
-              <a:srgbClr val="8B6BE8"/>
-            </a:solidFill>
-            <a:prstDash val="solid"/>
-          </a:ln>
-        </p:spPr>
-        <p:txBody>
-          <a:bodyPr xmlns:a="http://schemas.openxmlformats.org/drawingml/2006/main" wrap="square" lIns="0" tIns="0" rIns="0" bIns="0" anchor="t"/>
-          <a:lstStyle xmlns:a="http://schemas.openxmlformats.org/drawingml/2006/main"/>
-          <a:p xmlns:a="http://schemas.openxmlformats.org/drawingml/2006/main">
-            <a:r>
-              <a:rPr lang="en-US"/>
-              <a:t/>
-            </a:r>
-            <a:endParaRPr lang="en-US"/>
-          </a:p>
-        </p:txBody>
-      </p:sp>
-      <p:sp>
-        <p:nvSpPr>
-          <p:cNvPr id="18" name="anchor-grid-1-2"/>
-          <p:cNvSpPr/>
-          <p:nvPr/>
-        </p:nvSpPr>
-        <p:spPr>
-          <a:xfrm xmlns:a="http://schemas.openxmlformats.org/drawingml/2006/main">
-            <a:off x="12915900" y="2686050"/>
-            <a:ext cx="266700" cy="285750"/>
-          </a:xfrm>
-          <a:prstGeom xmlns:a="http://schemas.openxmlformats.org/drawingml/2006/main" prst="rect">
-            <a:avLst/>
-          </a:prstGeom>
-          <a:solidFill xmlns:a="http://schemas.openxmlformats.org/drawingml/2006/main">
-            <a:srgbClr val="FFFFFF"/>
-          </a:solidFill>
-          <a:ln xmlns:a="http://schemas.openxmlformats.org/drawingml/2006/main" w="12700">
-            <a:solidFill>
-              <a:srgbClr val="8B6BE8"/>
-            </a:solidFill>
-            <a:prstDash val="solid"/>
-          </a:ln>
-        </p:spPr>
-        <p:txBody>
-          <a:bodyPr xmlns:a="http://schemas.openxmlformats.org/drawingml/2006/main" wrap="square" lIns="0" tIns="0" rIns="0" bIns="0" anchor="t"/>
-          <a:lstStyle xmlns:a="http://schemas.openxmlformats.org/drawingml/2006/main"/>
-          <a:p xmlns:a="http://schemas.openxmlformats.org/drawingml/2006/main">
-            <a:r>
-              <a:rPr lang="en-US"/>
-              <a:t/>
-            </a:r>
-            <a:endParaRPr lang="en-US"/>
-          </a:p>
-        </p:txBody>
-      </p:sp>
-      <p:sp>
-        <p:nvSpPr>
-          <p:cNvPr id="19" name="anchor-grid-2-0"/>
-          <p:cNvSpPr/>
-          <p:nvPr/>
-        </p:nvSpPr>
-        <p:spPr>
-          <a:xfrm xmlns:a="http://schemas.openxmlformats.org/drawingml/2006/main">
-            <a:off x="11925300" y="3219450"/>
-            <a:ext cx="266700" cy="285750"/>
-          </a:xfrm>
-          <a:prstGeom xmlns:a="http://schemas.openxmlformats.org/drawingml/2006/main" prst="rect">
-            <a:avLst/>
-          </a:prstGeom>
-          <a:solidFill xmlns:a="http://schemas.openxmlformats.org/drawingml/2006/main">
-            <a:srgbClr val="8B6BE8"/>
-          </a:solidFill>
-          <a:ln xmlns:a="http://schemas.openxmlformats.org/drawingml/2006/main" w="12700">
-            <a:solidFill>
-              <a:srgbClr val="8B6BE8"/>
-            </a:solidFill>
-            <a:prstDash val="solid"/>
-          </a:ln>
-        </p:spPr>
-        <p:txBody>
-          <a:bodyPr xmlns:a="http://schemas.openxmlformats.org/drawingml/2006/main" wrap="square" lIns="0" tIns="0" rIns="0" bIns="0" anchor="t"/>
-          <a:lstStyle xmlns:a="http://schemas.openxmlformats.org/drawingml/2006/main"/>
-          <a:p xmlns:a="http://schemas.openxmlformats.org/drawingml/2006/main">
-            <a:r>
-              <a:rPr lang="en-US"/>
-              <a:t/>
-            </a:r>
-            <a:endParaRPr lang="en-US"/>
-          </a:p>
-        </p:txBody>
-      </p:sp>
-      <p:sp>
-        <p:nvSpPr>
-          <p:cNvPr id="20" name="anchor-grid-2-1"/>
-          <p:cNvSpPr/>
-          <p:nvPr/>
-        </p:nvSpPr>
-        <p:spPr>
-          <a:xfrm xmlns:a="http://schemas.openxmlformats.org/drawingml/2006/main">
-            <a:off x="12420600" y="3219450"/>
-            <a:ext cx="266700" cy="285750"/>
-          </a:xfrm>
-          <a:prstGeom xmlns:a="http://schemas.openxmlformats.org/drawingml/2006/main" prst="rect">
-            <a:avLst/>
-          </a:prstGeom>
-          <a:solidFill xmlns:a="http://schemas.openxmlformats.org/drawingml/2006/main">
-            <a:srgbClr val="8B6BE8"/>
-          </a:solidFill>
-          <a:ln xmlns:a="http://schemas.openxmlformats.org/drawingml/2006/main" w="12700">
-            <a:solidFill>
-              <a:srgbClr val="8B6BE8"/>
-            </a:solidFill>
-            <a:prstDash val="solid"/>
-          </a:ln>
-        </p:spPr>
-        <p:txBody>
-          <a:bodyPr xmlns:a="http://schemas.openxmlformats.org/drawingml/2006/main" wrap="square" lIns="0" tIns="0" rIns="0" bIns="0" anchor="t"/>
-          <a:lstStyle xmlns:a="http://schemas.openxmlformats.org/drawingml/2006/main"/>
-          <a:p xmlns:a="http://schemas.openxmlformats.org/drawingml/2006/main">
-            <a:r>
-              <a:rPr lang="en-US"/>
-              <a:t/>
-            </a:r>
-            <a:endParaRPr lang="en-US"/>
-          </a:p>
-        </p:txBody>
-      </p:sp>
-      <p:sp>
-        <p:nvSpPr>
-          <p:cNvPr id="21" name="anchor-grid-2-2"/>
-          <p:cNvSpPr/>
-          <p:nvPr/>
-        </p:nvSpPr>
-        <p:spPr>
-          <a:xfrm xmlns:a="http://schemas.openxmlformats.org/drawingml/2006/main">
-            <a:off x="12915900" y="3219450"/>
-            <a:ext cx="266700" cy="285750"/>
-          </a:xfrm>
-          <a:prstGeom xmlns:a="http://schemas.openxmlformats.org/drawingml/2006/main" prst="rect">
-            <a:avLst/>
-          </a:prstGeom>
-          <a:solidFill xmlns:a="http://schemas.openxmlformats.org/drawingml/2006/main">
-            <a:srgbClr val="FFFFFF"/>
-          </a:solidFill>
-          <a:ln xmlns:a="http://schemas.openxmlformats.org/drawingml/2006/main" w="12700">
-            <a:solidFill>
-              <a:srgbClr val="8B6BE8"/>
-            </a:solidFill>
-            <a:prstDash val="solid"/>
-          </a:ln>
-        </p:spPr>
-        <p:txBody>
-          <a:bodyPr xmlns:a="http://schemas.openxmlformats.org/drawingml/2006/main" wrap="square" lIns="0" tIns="0" rIns="0" bIns="0" anchor="t"/>
-          <a:lstStyle xmlns:a="http://schemas.openxmlformats.org/drawingml/2006/main"/>
-          <a:p xmlns:a="http://schemas.openxmlformats.org/drawingml/2006/main">
-            <a:r>
-              <a:rPr lang="en-US"/>
-              <a:t/>
-            </a:r>
-            <a:endParaRPr lang="en-US"/>
-          </a:p>
-        </p:txBody>
-      </p:sp>
-      <p:sp>
-        <p:nvSpPr>
-          <p:cNvPr id="22" name="anchor-axis"/>
-          <p:cNvSpPr/>
-          <p:nvPr/>
-        </p:nvSpPr>
-        <p:spPr>
-          <a:xfrm xmlns:a="http://schemas.openxmlformats.org/drawingml/2006/main">
-            <a:off x="12668250" y="1638300"/>
-            <a:ext cx="0" cy="2743200"/>
-          </a:xfrm>
-          <a:prstGeom xmlns:a="http://schemas.openxmlformats.org/drawingml/2006/main" prst="line">
-            <a:avLst/>
-          </a:prstGeom>
-          <a:noFill xmlns:a="http://schemas.openxmlformats.org/drawingml/2006/main"/>
-          <a:ln xmlns:a="http://schemas.openxmlformats.org/drawingml/2006/main" w="50800">
-            <a:solidFill>
-              <a:srgbClr val="1D2330"/>
-            </a:solidFill>
-            <a:prstDash val="solid"/>
-          </a:ln>
-        </p:spPr>
-        <p:txBody>
-          <a:bodyPr xmlns:a="http://schemas.openxmlformats.org/drawingml/2006/main" wrap="square" lIns="0" tIns="0" rIns="0" bIns="0" anchor="t"/>
-          <a:lstStyle xmlns:a="http://schemas.openxmlformats.org/drawingml/2006/main"/>
-          <a:p xmlns:a="http://schemas.openxmlformats.org/drawingml/2006/main">
-            <a:r>
-              <a:rPr lang="en-US"/>
-              <a:t/>
+              <a:t>2 / 6</a:t>
             </a:r>
             <a:endParaRPr lang="en-US"/>
           </a:p>
@@ -1273,9 +2111,9 @@
 </p:sld>
 </file>
 
-<file path=ppt/slides/slide2.xml><?xml version="1.0" encoding="utf-8"?>
+<file path=ppt/slides/slide3.xml><?xml version="1.0" encoding="utf-8"?>
 <p:sld xmlns:p="http://schemas.openxmlformats.org/presentationml/2006/main">
-  <p:cSld name="Argument">
+  <p:cSld name="Evidence">
     <p:bg>
       <p:bgPr>
         <a:blipFill xmlns:a="http://schemas.openxmlformats.org/drawingml/2006/main">
@@ -1302,844 +2140,6 @@
       </p:grpSpPr>
       <p:sp>
         <p:nvSpPr>
-          <p:cNvPr id="2" name="argument-paper-scrim"/>
-          <p:cNvSpPr/>
-          <p:nvPr/>
-        </p:nvSpPr>
-        <p:spPr>
-          <a:xfrm xmlns:a="http://schemas.openxmlformats.org/drawingml/2006/main">
-            <a:off x="0" y="0"/>
-            <a:ext cx="7429500" cy="8572500"/>
-          </a:xfrm>
-          <a:prstGeom xmlns:a="http://schemas.openxmlformats.org/drawingml/2006/main" prst="rect">
-            <a:avLst/>
-          </a:prstGeom>
-          <a:solidFill xmlns:a="http://schemas.openxmlformats.org/drawingml/2006/main">
-            <a:srgbClr val="FFFFFF">
-              <a:alpha val="96000"/>
-            </a:srgbClr>
-          </a:solidFill>
-          <a:ln xmlns:a="http://schemas.openxmlformats.org/drawingml/2006/main" w="0">
-            <a:solidFill>
-              <a:srgbClr val="FFFFFF"/>
-            </a:solidFill>
-            <a:prstDash val="solid"/>
-          </a:ln>
-        </p:spPr>
-        <p:txBody>
-          <a:bodyPr xmlns:a="http://schemas.openxmlformats.org/drawingml/2006/main" wrap="square" lIns="0" tIns="0" rIns="0" bIns="0" anchor="t"/>
-          <a:lstStyle xmlns:a="http://schemas.openxmlformats.org/drawingml/2006/main"/>
-          <a:p xmlns:a="http://schemas.openxmlformats.org/drawingml/2006/main">
-            <a:r>
-              <a:rPr lang="en-US"/>
-              <a:t/>
-            </a:r>
-            <a:endParaRPr lang="en-US"/>
-          </a:p>
-        </p:txBody>
-      </p:sp>
-      <p:pic>
-        <p:nvPicPr>
-          <p:cNvPr id="3" name="argument-photo-band">
-            <a:extLst xmlns:a="http://schemas.openxmlformats.org/drawingml/2006/main">
-              <a:ext uri="{C183D7F6-B498-43B3-948B-1728B52AA6E4}">
-                <adec:decorative xmlns:adec="http://schemas.microsoft.com/office/drawing/2017/decorative" val="1"/>
-              </a:ext>
-            </a:extLst>
-          </p:cNvPr>
-          <p:cNvPicPr/>
-          <p:nvPr/>
-        </p:nvPicPr>
-        <p:blipFill>
-          <a:blip xmlns:r="http://schemas.openxmlformats.org/officeDocument/2006/relationships" xmlns:a="http://schemas.openxmlformats.org/drawingml/2006/main" r:embed="rIdOfficeKitImage06e55191024fa458_1"/>
-          <a:srcRect xmlns:a="http://schemas.openxmlformats.org/drawingml/2006/main" l="0" t="47258" r="0" b="47258"/>
-          <a:stretch xmlns:a="http://schemas.openxmlformats.org/drawingml/2006/main">
-            <a:fillRect/>
-          </a:stretch>
-        </p:blipFill>
-        <p:spPr>
-          <a:xfrm xmlns:a="http://schemas.openxmlformats.org/drawingml/2006/main">
-            <a:off x="0" y="0"/>
-            <a:ext cx="15240000" cy="1485900"/>
-          </a:xfrm>
-          <a:prstGeom xmlns:a="http://schemas.openxmlformats.org/drawingml/2006/main" prst="rect">
-            <a:avLst/>
-          </a:prstGeom>
-        </p:spPr>
-      </p:pic>
-      <p:sp>
-        <p:nvSpPr>
-          <p:cNvPr id="4" name="argument-photo-scrim"/>
-          <p:cNvSpPr/>
-          <p:nvPr/>
-        </p:nvSpPr>
-        <p:spPr>
-          <a:xfrm xmlns:a="http://schemas.openxmlformats.org/drawingml/2006/main">
-            <a:off x="0" y="0"/>
-            <a:ext cx="15240000" cy="1485900"/>
-          </a:xfrm>
-          <a:prstGeom xmlns:a="http://schemas.openxmlformats.org/drawingml/2006/main" prst="rect">
-            <a:avLst/>
-          </a:prstGeom>
-          <a:solidFill xmlns:a="http://schemas.openxmlformats.org/drawingml/2006/main">
-            <a:srgbClr val="1D2330">
-              <a:alpha val="62000"/>
-            </a:srgbClr>
-          </a:solidFill>
-          <a:ln xmlns:a="http://schemas.openxmlformats.org/drawingml/2006/main" w="0">
-            <a:solidFill>
-              <a:srgbClr val="1D2330"/>
-            </a:solidFill>
-            <a:prstDash val="solid"/>
-          </a:ln>
-        </p:spPr>
-        <p:txBody>
-          <a:bodyPr xmlns:a="http://schemas.openxmlformats.org/drawingml/2006/main" wrap="square" lIns="0" tIns="0" rIns="0" bIns="0" anchor="t"/>
-          <a:lstStyle xmlns:a="http://schemas.openxmlformats.org/drawingml/2006/main"/>
-          <a:p xmlns:a="http://schemas.openxmlformats.org/drawingml/2006/main">
-            <a:r>
-              <a:rPr lang="en-US"/>
-              <a:t/>
-            </a:r>
-            <a:endParaRPr lang="en-US"/>
-          </a:p>
-        </p:txBody>
-      </p:sp>
-      <p:sp>
-        <p:nvSpPr>
-          <p:cNvPr id="5" name="argument-photo-rule"/>
-          <p:cNvSpPr/>
-          <p:nvPr/>
-        </p:nvSpPr>
-        <p:spPr>
-          <a:xfrm xmlns:a="http://schemas.openxmlformats.org/drawingml/2006/main">
-            <a:off x="914400" y="1438275"/>
-            <a:ext cx="13411200" cy="0"/>
-          </a:xfrm>
-          <a:prstGeom xmlns:a="http://schemas.openxmlformats.org/drawingml/2006/main" prst="line">
-            <a:avLst/>
-          </a:prstGeom>
-          <a:noFill xmlns:a="http://schemas.openxmlformats.org/drawingml/2006/main"/>
-          <a:ln xmlns:a="http://schemas.openxmlformats.org/drawingml/2006/main" w="38100">
-            <a:solidFill>
-              <a:srgbClr val="8B6BE8"/>
-            </a:solidFill>
-            <a:prstDash val="solid"/>
-          </a:ln>
-        </p:spPr>
-        <p:txBody>
-          <a:bodyPr xmlns:a="http://schemas.openxmlformats.org/drawingml/2006/main" wrap="square" lIns="0" tIns="0" rIns="0" bIns="0" anchor="t"/>
-          <a:lstStyle xmlns:a="http://schemas.openxmlformats.org/drawingml/2006/main"/>
-          <a:p xmlns:a="http://schemas.openxmlformats.org/drawingml/2006/main">
-            <a:r>
-              <a:rPr lang="en-US"/>
-              <a:t/>
-            </a:r>
-            <a:endParaRPr lang="en-US"/>
-          </a:p>
-        </p:txBody>
-      </p:sp>
-      <p:sp>
-        <p:nvSpPr>
-          <p:cNvPr id="6" name="MOONLIT WORK REPORT · ARGUMENT"/>
-          <p:cNvSpPr txBox="1"/>
-          <p:nvPr/>
-        </p:nvSpPr>
-        <p:spPr>
-          <a:xfrm xmlns:a="http://schemas.openxmlformats.org/drawingml/2006/main">
-            <a:off x="914400" y="228600"/>
-            <a:ext cx="9525000" cy="190500"/>
-          </a:xfrm>
-          <a:prstGeom xmlns:a="http://schemas.openxmlformats.org/drawingml/2006/main" prst="rect">
-            <a:avLst/>
-          </a:prstGeom>
-          <a:noFill xmlns:a="http://schemas.openxmlformats.org/drawingml/2006/main"/>
-          <a:ln xmlns:a="http://schemas.openxmlformats.org/drawingml/2006/main" w="0">
-            <a:noFill/>
-          </a:ln>
-        </p:spPr>
-        <p:txBody>
-          <a:bodyPr xmlns:a="http://schemas.openxmlformats.org/drawingml/2006/main" wrap="square" lIns="0" tIns="0" rIns="0" bIns="0" anchor="t"/>
-          <a:lstStyle xmlns:a="http://schemas.openxmlformats.org/drawingml/2006/main"/>
-          <a:p xmlns:a="http://schemas.openxmlformats.org/drawingml/2006/main">
-            <a:r>
-              <a:rPr lang="en-US" sz="1050" b="1">
-                <a:solidFill>
-                  <a:srgbClr val="8B6BE8"/>
-                </a:solidFill>
-                <a:latin typeface="Arial"/>
-                <a:ea typeface="Arial"/>
-              </a:rPr>
-              <a:t>MOONLIT WORK REPORT · ARGUMENT</a:t>
-            </a:r>
-            <a:endParaRPr lang="en-US"/>
-          </a:p>
-        </p:txBody>
-      </p:sp>
-      <p:sp>
-        <p:nvSpPr>
-          <p:cNvPr id="7" name="argument-title"/>
-          <p:cNvSpPr txBox="1"/>
-          <p:nvPr/>
-        </p:nvSpPr>
-        <p:spPr>
-          <a:xfrm xmlns:a="http://schemas.openxmlformats.org/drawingml/2006/main">
-            <a:off x="914400" y="495300"/>
-            <a:ext cx="12001500" cy="457200"/>
-          </a:xfrm>
-          <a:prstGeom xmlns:a="http://schemas.openxmlformats.org/drawingml/2006/main" prst="rect">
-            <a:avLst/>
-          </a:prstGeom>
-          <a:noFill xmlns:a="http://schemas.openxmlformats.org/drawingml/2006/main"/>
-          <a:ln xmlns:a="http://schemas.openxmlformats.org/drawingml/2006/main" w="0">
-            <a:noFill/>
-          </a:ln>
-        </p:spPr>
-        <p:txBody>
-          <a:bodyPr xmlns:a="http://schemas.openxmlformats.org/drawingml/2006/main" wrap="square" lIns="0" tIns="0" rIns="0" bIns="0" anchor="t"/>
-          <a:lstStyle xmlns:a="http://schemas.openxmlformats.org/drawingml/2006/main"/>
-          <a:p xmlns:a="http://schemas.openxmlformats.org/drawingml/2006/main">
-            <a:r>
-              <a:rPr lang="en-US" sz="2550" b="1">
-                <a:solidFill>
-                  <a:srgbClr val="FFFFFF"/>
-                </a:solidFill>
-                <a:latin typeface="Arial"/>
-                <a:ea typeface="Arial"/>
-              </a:rPr>
-              <a:t>The constraint owns the page</a:t>
-            </a:r>
-            <a:endParaRPr lang="en-US"/>
-          </a:p>
-        </p:txBody>
-      </p:sp>
-      <p:sp>
-        <p:nvSpPr>
-          <p:cNvPr id="8" name="argument-basis"/>
-          <p:cNvSpPr txBox="1"/>
-          <p:nvPr/>
-        </p:nvSpPr>
-        <p:spPr>
-          <a:xfrm xmlns:a="http://schemas.openxmlformats.org/drawingml/2006/main">
-            <a:off x="952500" y="1066800"/>
-            <a:ext cx="11049000" cy="228600"/>
-          </a:xfrm>
-          <a:prstGeom xmlns:a="http://schemas.openxmlformats.org/drawingml/2006/main" prst="rect">
-            <a:avLst/>
-          </a:prstGeom>
-          <a:noFill xmlns:a="http://schemas.openxmlformats.org/drawingml/2006/main"/>
-          <a:ln xmlns:a="http://schemas.openxmlformats.org/drawingml/2006/main" w="0">
-            <a:noFill/>
-          </a:ln>
-        </p:spPr>
-        <p:txBody>
-          <a:bodyPr xmlns:a="http://schemas.openxmlformats.org/drawingml/2006/main" wrap="square" lIns="0" tIns="0" rIns="0" bIns="0" anchor="t"/>
-          <a:lstStyle xmlns:a="http://schemas.openxmlformats.org/drawingml/2006/main"/>
-          <a:p xmlns:a="http://schemas.openxmlformats.org/drawingml/2006/main">
-            <a:r>
-              <a:rPr lang="en-US" sz="1200">
-                <a:solidFill>
-                  <a:srgbClr val="F0F3F2"/>
-                </a:solidFill>
-                <a:latin typeface="Arial"/>
-                <a:ea typeface="Arial"/>
-              </a:rPr>
-              <a:t>Status, cause, owner and date stay together.</a:t>
-            </a:r>
-            <a:endParaRPr lang="en-US"/>
-          </a:p>
-        </p:txBody>
-      </p:sp>
-      <p:sp>
-        <p:nvSpPr>
-          <p:cNvPr id="9" name="work-status"/>
-          <p:cNvSpPr txBox="1"/>
-          <p:nvPr/>
-        </p:nvSpPr>
-        <p:spPr>
-          <a:xfrm xmlns:a="http://schemas.openxmlformats.org/drawingml/2006/main">
-            <a:off x="1104900" y="3352800"/>
-            <a:ext cx="2857500" cy="228600"/>
-          </a:xfrm>
-          <a:prstGeom xmlns:a="http://schemas.openxmlformats.org/drawingml/2006/main" prst="rect">
-            <a:avLst/>
-          </a:prstGeom>
-          <a:noFill xmlns:a="http://schemas.openxmlformats.org/drawingml/2006/main"/>
-          <a:ln xmlns:a="http://schemas.openxmlformats.org/drawingml/2006/main" w="0">
-            <a:noFill/>
-          </a:ln>
-        </p:spPr>
-        <p:txBody>
-          <a:bodyPr xmlns:a="http://schemas.openxmlformats.org/drawingml/2006/main" wrap="square" lIns="0" tIns="0" rIns="0" bIns="0" anchor="t"/>
-          <a:lstStyle xmlns:a="http://schemas.openxmlformats.org/drawingml/2006/main"/>
-          <a:p xmlns:a="http://schemas.openxmlformats.org/drawingml/2006/main">
-            <a:r>
-              <a:rPr lang="en-US" sz="1125" b="1">
-                <a:solidFill>
-                  <a:srgbClr val="8B6BE8"/>
-                </a:solidFill>
-                <a:latin typeface="Arial"/>
-                <a:ea typeface="Arial"/>
-              </a:rPr>
-              <a:t>OPERATING SIGNAL</a:t>
-            </a:r>
-            <a:endParaRPr lang="en-US"/>
-          </a:p>
-        </p:txBody>
-      </p:sp>
-      <p:sp>
-        <p:nvSpPr>
-          <p:cNvPr id="10" name="work-headline"/>
-          <p:cNvSpPr txBox="1"/>
-          <p:nvPr/>
-        </p:nvSpPr>
-        <p:spPr>
-          <a:xfrm xmlns:a="http://schemas.openxmlformats.org/drawingml/2006/main">
-            <a:off x="1104900" y="3790950"/>
-            <a:ext cx="6667500" cy="723900"/>
-          </a:xfrm>
-          <a:prstGeom xmlns:a="http://schemas.openxmlformats.org/drawingml/2006/main" prst="rect">
-            <a:avLst/>
-          </a:prstGeom>
-          <a:noFill xmlns:a="http://schemas.openxmlformats.org/drawingml/2006/main"/>
-          <a:ln xmlns:a="http://schemas.openxmlformats.org/drawingml/2006/main" w="0">
-            <a:noFill/>
-          </a:ln>
-        </p:spPr>
-        <p:txBody>
-          <a:bodyPr xmlns:a="http://schemas.openxmlformats.org/drawingml/2006/main" wrap="square" lIns="0" tIns="0" rIns="0" bIns="0" anchor="t"/>
-          <a:lstStyle xmlns:a="http://schemas.openxmlformats.org/drawingml/2006/main"/>
-          <a:p xmlns:a="http://schemas.openxmlformats.org/drawingml/2006/main">
-            <a:r>
-              <a:rPr lang="en-US" sz="2550" b="1">
-                <a:solidFill>
-                  <a:srgbClr val="1D2330"/>
-                </a:solidFill>
-                <a:latin typeface="Arial"/>
-                <a:ea typeface="Arial"/>
-              </a:rPr>
-              <a:t>The queue is healthy; the handoff is not.</a:t>
-            </a:r>
-            <a:endParaRPr lang="en-US"/>
-          </a:p>
-        </p:txBody>
-      </p:sp>
-      <p:sp>
-        <p:nvSpPr>
-          <p:cNvPr id="11" name="work-body"/>
-          <p:cNvSpPr txBox="1"/>
-          <p:nvPr/>
-        </p:nvSpPr>
-        <p:spPr>
-          <a:xfrm xmlns:a="http://schemas.openxmlformats.org/drawingml/2006/main">
-            <a:off x="1104900" y="4762500"/>
-            <a:ext cx="6191250" cy="400050"/>
-          </a:xfrm>
-          <a:prstGeom xmlns:a="http://schemas.openxmlformats.org/drawingml/2006/main" prst="rect">
-            <a:avLst/>
-          </a:prstGeom>
-          <a:noFill xmlns:a="http://schemas.openxmlformats.org/drawingml/2006/main"/>
-          <a:ln xmlns:a="http://schemas.openxmlformats.org/drawingml/2006/main" w="0">
-            <a:noFill/>
-          </a:ln>
-        </p:spPr>
-        <p:txBody>
-          <a:bodyPr xmlns:a="http://schemas.openxmlformats.org/drawingml/2006/main" wrap="square" lIns="0" tIns="0" rIns="0" bIns="0" anchor="t"/>
-          <a:lstStyle xmlns:a="http://schemas.openxmlformats.org/drawingml/2006/main"/>
-          <a:p xmlns:a="http://schemas.openxmlformats.org/drawingml/2006/main">
-            <a:r>
-              <a:rPr lang="en-US" sz="1575">
-                <a:solidFill>
-                  <a:srgbClr val="1D2330"/>
-                </a:solidFill>
-                <a:latin typeface="Arial"/>
-                <a:ea typeface="Arial"/>
-              </a:rPr>
-              <a:t>Three visible signals point to one owner and one date.</a:t>
-            </a:r>
-            <a:endParaRPr lang="en-US"/>
-          </a:p>
-        </p:txBody>
-      </p:sp>
-      <p:sp>
-        <p:nvSpPr>
-          <p:cNvPr id="12" name="work-rail"/>
-          <p:cNvSpPr/>
-          <p:nvPr/>
-        </p:nvSpPr>
-        <p:spPr>
-          <a:xfrm xmlns:a="http://schemas.openxmlformats.org/drawingml/2006/main">
-            <a:off x="10001250" y="3333750"/>
-            <a:ext cx="0" cy="2381250"/>
-          </a:xfrm>
-          <a:prstGeom xmlns:a="http://schemas.openxmlformats.org/drawingml/2006/main" prst="line">
-            <a:avLst/>
-          </a:prstGeom>
-          <a:noFill xmlns:a="http://schemas.openxmlformats.org/drawingml/2006/main"/>
-          <a:ln xmlns:a="http://schemas.openxmlformats.org/drawingml/2006/main" w="25400">
-            <a:solidFill>
-              <a:srgbClr val="93959C"/>
-            </a:solidFill>
-            <a:prstDash val="solid"/>
-          </a:ln>
-        </p:spPr>
-        <p:txBody>
-          <a:bodyPr xmlns:a="http://schemas.openxmlformats.org/drawingml/2006/main" wrap="square" lIns="0" tIns="0" rIns="0" bIns="0" anchor="t"/>
-          <a:lstStyle xmlns:a="http://schemas.openxmlformats.org/drawingml/2006/main"/>
-          <a:p xmlns:a="http://schemas.openxmlformats.org/drawingml/2006/main">
-            <a:r>
-              <a:rPr lang="en-US"/>
-              <a:t/>
-            </a:r>
-            <a:endParaRPr lang="en-US"/>
-          </a:p>
-        </p:txBody>
-      </p:sp>
-      <p:sp>
-        <p:nvSpPr>
-          <p:cNvPr id="13" name="work-num-0"/>
-          <p:cNvSpPr txBox="1"/>
-          <p:nvPr/>
-        </p:nvSpPr>
-        <p:spPr>
-          <a:xfrm xmlns:a="http://schemas.openxmlformats.org/drawingml/2006/main">
-            <a:off x="10477500" y="3448050"/>
-            <a:ext cx="571500" cy="228600"/>
-          </a:xfrm>
-          <a:prstGeom xmlns:a="http://schemas.openxmlformats.org/drawingml/2006/main" prst="rect">
-            <a:avLst/>
-          </a:prstGeom>
-          <a:noFill xmlns:a="http://schemas.openxmlformats.org/drawingml/2006/main"/>
-          <a:ln xmlns:a="http://schemas.openxmlformats.org/drawingml/2006/main" w="0">
-            <a:noFill/>
-          </a:ln>
-        </p:spPr>
-        <p:txBody>
-          <a:bodyPr xmlns:a="http://schemas.openxmlformats.org/drawingml/2006/main" wrap="square" lIns="0" tIns="0" rIns="0" bIns="0" anchor="t"/>
-          <a:lstStyle xmlns:a="http://schemas.openxmlformats.org/drawingml/2006/main"/>
-          <a:p xmlns:a="http://schemas.openxmlformats.org/drawingml/2006/main">
-            <a:r>
-              <a:rPr lang="en-US" sz="1350" b="1">
-                <a:solidFill>
-                  <a:srgbClr val="8B6BE8"/>
-                </a:solidFill>
-                <a:latin typeface="Arial"/>
-                <a:ea typeface="Arial"/>
-              </a:rPr>
-              <a:t>01</a:t>
-            </a:r>
-            <a:endParaRPr lang="en-US"/>
-          </a:p>
-        </p:txBody>
-      </p:sp>
-      <p:sp>
-        <p:nvSpPr>
-          <p:cNvPr id="14" name="work-label-0"/>
-          <p:cNvSpPr txBox="1"/>
-          <p:nvPr/>
-        </p:nvSpPr>
-        <p:spPr>
-          <a:xfrm xmlns:a="http://schemas.openxmlformats.org/drawingml/2006/main">
-            <a:off x="11144250" y="3448050"/>
-            <a:ext cx="1428750" cy="228600"/>
-          </a:xfrm>
-          <a:prstGeom xmlns:a="http://schemas.openxmlformats.org/drawingml/2006/main" prst="rect">
-            <a:avLst/>
-          </a:prstGeom>
-          <a:noFill xmlns:a="http://schemas.openxmlformats.org/drawingml/2006/main"/>
-          <a:ln xmlns:a="http://schemas.openxmlformats.org/drawingml/2006/main" w="0">
-            <a:noFill/>
-          </a:ln>
-        </p:spPr>
-        <p:txBody>
-          <a:bodyPr xmlns:a="http://schemas.openxmlformats.org/drawingml/2006/main" wrap="square" lIns="0" tIns="0" rIns="0" bIns="0" anchor="t"/>
-          <a:lstStyle xmlns:a="http://schemas.openxmlformats.org/drawingml/2006/main"/>
-          <a:p xmlns:a="http://schemas.openxmlformats.org/drawingml/2006/main">
-            <a:r>
-              <a:rPr lang="en-US" sz="1350" b="1">
-                <a:solidFill>
-                  <a:srgbClr val="1D2330"/>
-                </a:solidFill>
-                <a:latin typeface="Arial"/>
-                <a:ea typeface="Arial"/>
-              </a:rPr>
-              <a:t>Queue</a:t>
-            </a:r>
-            <a:endParaRPr lang="en-US"/>
-          </a:p>
-        </p:txBody>
-      </p:sp>
-      <p:sp>
-        <p:nvSpPr>
-          <p:cNvPr id="15" name="work-text-0"/>
-          <p:cNvSpPr txBox="1"/>
-          <p:nvPr/>
-        </p:nvSpPr>
-        <p:spPr>
-          <a:xfrm xmlns:a="http://schemas.openxmlformats.org/drawingml/2006/main">
-            <a:off x="12668250" y="3448050"/>
-            <a:ext cx="1143000" cy="228600"/>
-          </a:xfrm>
-          <a:prstGeom xmlns:a="http://schemas.openxmlformats.org/drawingml/2006/main" prst="rect">
-            <a:avLst/>
-          </a:prstGeom>
-          <a:noFill xmlns:a="http://schemas.openxmlformats.org/drawingml/2006/main"/>
-          <a:ln xmlns:a="http://schemas.openxmlformats.org/drawingml/2006/main" w="0">
-            <a:noFill/>
-          </a:ln>
-        </p:spPr>
-        <p:txBody>
-          <a:bodyPr xmlns:a="http://schemas.openxmlformats.org/drawingml/2006/main" wrap="square" lIns="0" tIns="0" rIns="0" bIns="0" anchor="t"/>
-          <a:lstStyle xmlns:a="http://schemas.openxmlformats.org/drawingml/2006/main"/>
-          <a:p xmlns:a="http://schemas.openxmlformats.org/drawingml/2006/main">
-            <a:r>
-              <a:rPr lang="en-US" sz="1200">
-                <a:solidFill>
-                  <a:srgbClr val="93959C"/>
-                </a:solidFill>
-                <a:latin typeface="Arial"/>
-                <a:ea typeface="Arial"/>
-              </a:rPr>
-              <a:t>On target</a:t>
-            </a:r>
-            <a:endParaRPr lang="en-US"/>
-          </a:p>
-        </p:txBody>
-      </p:sp>
-      <p:sp>
-        <p:nvSpPr>
-          <p:cNvPr id="16" name="work-num-1"/>
-          <p:cNvSpPr txBox="1"/>
-          <p:nvPr/>
-        </p:nvSpPr>
-        <p:spPr>
-          <a:xfrm xmlns:a="http://schemas.openxmlformats.org/drawingml/2006/main">
-            <a:off x="10477500" y="4229100"/>
-            <a:ext cx="571500" cy="228600"/>
-          </a:xfrm>
-          <a:prstGeom xmlns:a="http://schemas.openxmlformats.org/drawingml/2006/main" prst="rect">
-            <a:avLst/>
-          </a:prstGeom>
-          <a:noFill xmlns:a="http://schemas.openxmlformats.org/drawingml/2006/main"/>
-          <a:ln xmlns:a="http://schemas.openxmlformats.org/drawingml/2006/main" w="0">
-            <a:noFill/>
-          </a:ln>
-        </p:spPr>
-        <p:txBody>
-          <a:bodyPr xmlns:a="http://schemas.openxmlformats.org/drawingml/2006/main" wrap="square" lIns="0" tIns="0" rIns="0" bIns="0" anchor="t"/>
-          <a:lstStyle xmlns:a="http://schemas.openxmlformats.org/drawingml/2006/main"/>
-          <a:p xmlns:a="http://schemas.openxmlformats.org/drawingml/2006/main">
-            <a:r>
-              <a:rPr lang="en-US" sz="1350" b="1">
-                <a:solidFill>
-                  <a:srgbClr val="8B6BE8"/>
-                </a:solidFill>
-                <a:latin typeface="Arial"/>
-                <a:ea typeface="Arial"/>
-              </a:rPr>
-              <a:t>02</a:t>
-            </a:r>
-            <a:endParaRPr lang="en-US"/>
-          </a:p>
-        </p:txBody>
-      </p:sp>
-      <p:sp>
-        <p:nvSpPr>
-          <p:cNvPr id="17" name="work-label-1"/>
-          <p:cNvSpPr txBox="1"/>
-          <p:nvPr/>
-        </p:nvSpPr>
-        <p:spPr>
-          <a:xfrm xmlns:a="http://schemas.openxmlformats.org/drawingml/2006/main">
-            <a:off x="11144250" y="4229100"/>
-            <a:ext cx="1428750" cy="228600"/>
-          </a:xfrm>
-          <a:prstGeom xmlns:a="http://schemas.openxmlformats.org/drawingml/2006/main" prst="rect">
-            <a:avLst/>
-          </a:prstGeom>
-          <a:noFill xmlns:a="http://schemas.openxmlformats.org/drawingml/2006/main"/>
-          <a:ln xmlns:a="http://schemas.openxmlformats.org/drawingml/2006/main" w="0">
-            <a:noFill/>
-          </a:ln>
-        </p:spPr>
-        <p:txBody>
-          <a:bodyPr xmlns:a="http://schemas.openxmlformats.org/drawingml/2006/main" wrap="square" lIns="0" tIns="0" rIns="0" bIns="0" anchor="t"/>
-          <a:lstStyle xmlns:a="http://schemas.openxmlformats.org/drawingml/2006/main"/>
-          <a:p xmlns:a="http://schemas.openxmlformats.org/drawingml/2006/main">
-            <a:r>
-              <a:rPr lang="en-US" sz="1350" b="1">
-                <a:solidFill>
-                  <a:srgbClr val="1D2330"/>
-                </a:solidFill>
-                <a:latin typeface="Arial"/>
-                <a:ea typeface="Arial"/>
-              </a:rPr>
-              <a:t>Handoff</a:t>
-            </a:r>
-            <a:endParaRPr lang="en-US"/>
-          </a:p>
-        </p:txBody>
-      </p:sp>
-      <p:sp>
-        <p:nvSpPr>
-          <p:cNvPr id="18" name="work-text-1"/>
-          <p:cNvSpPr txBox="1"/>
-          <p:nvPr/>
-        </p:nvSpPr>
-        <p:spPr>
-          <a:xfrm xmlns:a="http://schemas.openxmlformats.org/drawingml/2006/main">
-            <a:off x="12668250" y="4229100"/>
-            <a:ext cx="1143000" cy="228600"/>
-          </a:xfrm>
-          <a:prstGeom xmlns:a="http://schemas.openxmlformats.org/drawingml/2006/main" prst="rect">
-            <a:avLst/>
-          </a:prstGeom>
-          <a:noFill xmlns:a="http://schemas.openxmlformats.org/drawingml/2006/main"/>
-          <a:ln xmlns:a="http://schemas.openxmlformats.org/drawingml/2006/main" w="0">
-            <a:noFill/>
-          </a:ln>
-        </p:spPr>
-        <p:txBody>
-          <a:bodyPr xmlns:a="http://schemas.openxmlformats.org/drawingml/2006/main" wrap="square" lIns="0" tIns="0" rIns="0" bIns="0" anchor="t"/>
-          <a:lstStyle xmlns:a="http://schemas.openxmlformats.org/drawingml/2006/main"/>
-          <a:p xmlns:a="http://schemas.openxmlformats.org/drawingml/2006/main">
-            <a:r>
-              <a:rPr lang="en-US" sz="1200">
-                <a:solidFill>
-                  <a:srgbClr val="8B6BE8"/>
-                </a:solidFill>
-                <a:latin typeface="Arial"/>
-                <a:ea typeface="Arial"/>
-              </a:rPr>
-              <a:t>At risk</a:t>
-            </a:r>
-            <a:endParaRPr lang="en-US"/>
-          </a:p>
-        </p:txBody>
-      </p:sp>
-      <p:sp>
-        <p:nvSpPr>
-          <p:cNvPr id="19" name="work-num-2"/>
-          <p:cNvSpPr txBox="1"/>
-          <p:nvPr/>
-        </p:nvSpPr>
-        <p:spPr>
-          <a:xfrm xmlns:a="http://schemas.openxmlformats.org/drawingml/2006/main">
-            <a:off x="10477500" y="5010150"/>
-            <a:ext cx="571500" cy="228600"/>
-          </a:xfrm>
-          <a:prstGeom xmlns:a="http://schemas.openxmlformats.org/drawingml/2006/main" prst="rect">
-            <a:avLst/>
-          </a:prstGeom>
-          <a:noFill xmlns:a="http://schemas.openxmlformats.org/drawingml/2006/main"/>
-          <a:ln xmlns:a="http://schemas.openxmlformats.org/drawingml/2006/main" w="0">
-            <a:noFill/>
-          </a:ln>
-        </p:spPr>
-        <p:txBody>
-          <a:bodyPr xmlns:a="http://schemas.openxmlformats.org/drawingml/2006/main" wrap="square" lIns="0" tIns="0" rIns="0" bIns="0" anchor="t"/>
-          <a:lstStyle xmlns:a="http://schemas.openxmlformats.org/drawingml/2006/main"/>
-          <a:p xmlns:a="http://schemas.openxmlformats.org/drawingml/2006/main">
-            <a:r>
-              <a:rPr lang="en-US" sz="1350" b="1">
-                <a:solidFill>
-                  <a:srgbClr val="8B6BE8"/>
-                </a:solidFill>
-                <a:latin typeface="Arial"/>
-                <a:ea typeface="Arial"/>
-              </a:rPr>
-              <a:t>03</a:t>
-            </a:r>
-            <a:endParaRPr lang="en-US"/>
-          </a:p>
-        </p:txBody>
-      </p:sp>
-      <p:sp>
-        <p:nvSpPr>
-          <p:cNvPr id="20" name="work-label-2"/>
-          <p:cNvSpPr txBox="1"/>
-          <p:nvPr/>
-        </p:nvSpPr>
-        <p:spPr>
-          <a:xfrm xmlns:a="http://schemas.openxmlformats.org/drawingml/2006/main">
-            <a:off x="11144250" y="5010150"/>
-            <a:ext cx="1428750" cy="228600"/>
-          </a:xfrm>
-          <a:prstGeom xmlns:a="http://schemas.openxmlformats.org/drawingml/2006/main" prst="rect">
-            <a:avLst/>
-          </a:prstGeom>
-          <a:noFill xmlns:a="http://schemas.openxmlformats.org/drawingml/2006/main"/>
-          <a:ln xmlns:a="http://schemas.openxmlformats.org/drawingml/2006/main" w="0">
-            <a:noFill/>
-          </a:ln>
-        </p:spPr>
-        <p:txBody>
-          <a:bodyPr xmlns:a="http://schemas.openxmlformats.org/drawingml/2006/main" wrap="square" lIns="0" tIns="0" rIns="0" bIns="0" anchor="t"/>
-          <a:lstStyle xmlns:a="http://schemas.openxmlformats.org/drawingml/2006/main"/>
-          <a:p xmlns:a="http://schemas.openxmlformats.org/drawingml/2006/main">
-            <a:r>
-              <a:rPr lang="en-US" sz="1350" b="1">
-                <a:solidFill>
-                  <a:srgbClr val="1D2330"/>
-                </a:solidFill>
-                <a:latin typeface="Arial"/>
-                <a:ea typeface="Arial"/>
-              </a:rPr>
-              <a:t>Owner</a:t>
-            </a:r>
-            <a:endParaRPr lang="en-US"/>
-          </a:p>
-        </p:txBody>
-      </p:sp>
-      <p:sp>
-        <p:nvSpPr>
-          <p:cNvPr id="21" name="work-text-2"/>
-          <p:cNvSpPr txBox="1"/>
-          <p:nvPr/>
-        </p:nvSpPr>
-        <p:spPr>
-          <a:xfrm xmlns:a="http://schemas.openxmlformats.org/drawingml/2006/main">
-            <a:off x="12668250" y="5010150"/>
-            <a:ext cx="1143000" cy="228600"/>
-          </a:xfrm>
-          <a:prstGeom xmlns:a="http://schemas.openxmlformats.org/drawingml/2006/main" prst="rect">
-            <a:avLst/>
-          </a:prstGeom>
-          <a:noFill xmlns:a="http://schemas.openxmlformats.org/drawingml/2006/main"/>
-          <a:ln xmlns:a="http://schemas.openxmlformats.org/drawingml/2006/main" w="0">
-            <a:noFill/>
-          </a:ln>
-        </p:spPr>
-        <p:txBody>
-          <a:bodyPr xmlns:a="http://schemas.openxmlformats.org/drawingml/2006/main" wrap="square" lIns="0" tIns="0" rIns="0" bIns="0" anchor="t"/>
-          <a:lstStyle xmlns:a="http://schemas.openxmlformats.org/drawingml/2006/main"/>
-          <a:p xmlns:a="http://schemas.openxmlformats.org/drawingml/2006/main">
-            <a:r>
-              <a:rPr lang="en-US" sz="1200">
-                <a:solidFill>
-                  <a:srgbClr val="93959C"/>
-                </a:solidFill>
-                <a:latin typeface="Arial"/>
-                <a:ea typeface="Arial"/>
-              </a:rPr>
-              <a:t>Named</a:t>
-            </a:r>
-            <a:endParaRPr lang="en-US"/>
-          </a:p>
-        </p:txBody>
-      </p:sp>
-      <p:sp>
-        <p:nvSpPr>
-          <p:cNvPr id="22" name="source"/>
-          <p:cNvSpPr txBox="1"/>
-          <p:nvPr/>
-        </p:nvSpPr>
-        <p:spPr>
-          <a:xfrm xmlns:a="http://schemas.openxmlformats.org/drawingml/2006/main">
-            <a:off x="914400" y="7810500"/>
-            <a:ext cx="10953750" cy="209550"/>
-          </a:xfrm>
-          <a:prstGeom xmlns:a="http://schemas.openxmlformats.org/drawingml/2006/main" prst="rect">
-            <a:avLst/>
-          </a:prstGeom>
-          <a:noFill xmlns:a="http://schemas.openxmlformats.org/drawingml/2006/main"/>
-          <a:ln xmlns:a="http://schemas.openxmlformats.org/drawingml/2006/main" w="0">
-            <a:noFill/>
-          </a:ln>
-        </p:spPr>
-        <p:txBody>
-          <a:bodyPr xmlns:a="http://schemas.openxmlformats.org/drawingml/2006/main" wrap="square" lIns="0" tIns="0" rIns="0" bIns="0" anchor="t"/>
-          <a:lstStyle xmlns:a="http://schemas.openxmlformats.org/drawingml/2006/main"/>
-          <a:p xmlns:a="http://schemas.openxmlformats.org/drawingml/2006/main">
-            <a:r>
-              <a:rPr lang="en-US" sz="1050">
-                <a:solidFill>
-                  <a:srgbClr val="93959C"/>
-                </a:solidFill>
-                <a:latin typeface="Arial"/>
-                <a:ea typeface="Arial"/>
-              </a:rPr>
-              <a:t>Source: illustrative calibration brief · every claim is fictional and bounded</a:t>
-            </a:r>
-            <a:endParaRPr lang="en-US"/>
-          </a:p>
-        </p:txBody>
-      </p:sp>
-      <p:sp>
-        <p:nvSpPr>
-          <p:cNvPr id="23" name="page-number"/>
-          <p:cNvSpPr txBox="1"/>
-          <p:nvPr/>
-        </p:nvSpPr>
-        <p:spPr>
-          <a:xfrm xmlns:a="http://schemas.openxmlformats.org/drawingml/2006/main">
-            <a:off x="13335000" y="7810500"/>
-            <a:ext cx="952500" cy="209550"/>
-          </a:xfrm>
-          <a:prstGeom xmlns:a="http://schemas.openxmlformats.org/drawingml/2006/main" prst="rect">
-            <a:avLst/>
-          </a:prstGeom>
-          <a:noFill xmlns:a="http://schemas.openxmlformats.org/drawingml/2006/main"/>
-          <a:ln xmlns:a="http://schemas.openxmlformats.org/drawingml/2006/main" w="0">
-            <a:noFill/>
-          </a:ln>
-        </p:spPr>
-        <p:txBody>
-          <a:bodyPr xmlns:a="http://schemas.openxmlformats.org/drawingml/2006/main" wrap="square" lIns="0" tIns="0" rIns="0" bIns="0" anchor="t"/>
-          <a:lstStyle xmlns:a="http://schemas.openxmlformats.org/drawingml/2006/main"/>
-          <a:p xmlns:a="http://schemas.openxmlformats.org/drawingml/2006/main">
-            <a:pPr algn="r"/>
-            <a:r>
-              <a:rPr lang="en-US" sz="1050">
-                <a:solidFill>
-                  <a:srgbClr val="93959C"/>
-                </a:solidFill>
-                <a:latin typeface="Arial"/>
-                <a:ea typeface="Arial"/>
-              </a:rPr>
-              <a:t>2 / 6</a:t>
-            </a:r>
-            <a:endParaRPr lang="en-US"/>
-          </a:p>
-        </p:txBody>
-      </p:sp>
-    </p:spTree>
-  </p:cSld>
-  <p:clrMapOvr>
-    <a:masterClrMapping xmlns:a="http://schemas.openxmlformats.org/drawingml/2006/main"/>
-  </p:clrMapOvr>
-</p:sld>
-</file>
-
-<file path=ppt/slides/slide3.xml><?xml version="1.0" encoding="utf-8"?>
-<p:sld xmlns:p="http://schemas.openxmlformats.org/presentationml/2006/main">
-  <p:cSld name="Evidence">
-    <p:bg>
-      <p:bgPr>
-        <a:blipFill xmlns:a="http://schemas.openxmlformats.org/drawingml/2006/main">
-          <a:blip xmlns:r="http://schemas.openxmlformats.org/officeDocument/2006/relationships" r:embed="rIdOfficeKitImaged96cedd8678b85ac_1"/>
-          <a:stretch>
-            <a:fillRect/>
-          </a:stretch>
-        </a:blipFill>
-      </p:bgPr>
-    </p:bg>
-    <p:spTree>
-      <p:nvGrpSpPr>
-        <p:cNvPr id="1" name=""/>
-        <p:cNvGrpSpPr/>
-        <p:nvPr/>
-      </p:nvGrpSpPr>
-      <p:grpSpPr>
-        <a:xfrm xmlns:a="http://schemas.openxmlformats.org/drawingml/2006/main">
-          <a:off x="0" y="0"/>
-          <a:ext cx="0" cy="0"/>
-          <a:chOff x="0" y="0"/>
-          <a:chExt cx="0" cy="0"/>
-        </a:xfrm>
-      </p:grpSpPr>
-      <p:sp>
-        <p:nvSpPr>
           <p:cNvPr id="2" name="evidence-paper-scrim"/>
           <p:cNvSpPr/>
           <p:nvPr/>
@@ -2189,7 +2189,7 @@
           <p:nvPr/>
         </p:nvPicPr>
         <p:blipFill>
-          <a:blip xmlns:r="http://schemas.openxmlformats.org/officeDocument/2006/relationships" xmlns:a="http://schemas.openxmlformats.org/drawingml/2006/main" r:embed="rIdOfficeKitImage10e4539a68783891_1"/>
+          <a:blip xmlns:r="http://schemas.openxmlformats.org/officeDocument/2006/relationships" xmlns:a="http://schemas.openxmlformats.org/drawingml/2006/main" r:embed="rIdOfficeKitImage06e55191024fa458_1"/>
           <a:srcRect xmlns:a="http://schemas.openxmlformats.org/drawingml/2006/main" l="0" t="47258" r="0" b="47258"/>
           <a:stretch xmlns:a="http://schemas.openxmlformats.org/drawingml/2006/main">
             <a:fillRect/>
@@ -2440,7 +2440,7 @@
         </p:xfrm>
         <a:graphic xmlns:a="http://schemas.openxmlformats.org/drawingml/2006/main">
           <a:graphicData uri="http://schemas.openxmlformats.org/drawingml/2006/chart">
-            <c:chart xmlns:r="http://schemas.openxmlformats.org/officeDocument/2006/relationships" xmlns:c="http://schemas.openxmlformats.org/drawingml/2006/chart" r:id="Rdcb0685a80914bf1"/>
+            <c:chart xmlns:r="http://schemas.openxmlformats.org/officeDocument/2006/relationships" xmlns:c="http://schemas.openxmlformats.org/drawingml/2006/chart" r:id="Rb3d2b12378074eab"/>
           </a:graphicData>
         </a:graphic>
       </p:graphicFrame>
@@ -2458,7 +2458,7 @@
         </p:xfrm>
         <a:graphic xmlns:a="http://schemas.openxmlformats.org/drawingml/2006/main">
           <a:graphicData uri="http://schemas.openxmlformats.org/drawingml/2006/chart">
-            <c:chart xmlns:r="http://schemas.openxmlformats.org/officeDocument/2006/relationships" xmlns:c="http://schemas.openxmlformats.org/drawingml/2006/chart" r:id="R6a951304aa23420e"/>
+            <c:chart xmlns:r="http://schemas.openxmlformats.org/officeDocument/2006/relationships" xmlns:c="http://schemas.openxmlformats.org/drawingml/2006/chart" r:id="R75870c07c7ea4f31"/>
           </a:graphicData>
         </a:graphic>
       </p:graphicFrame>
@@ -2829,8 +2829,8 @@
           <p:nvPr/>
         </p:nvPicPr>
         <p:blipFill>
-          <a:blip xmlns:r="http://schemas.openxmlformats.org/officeDocument/2006/relationships" xmlns:a="http://schemas.openxmlformats.org/drawingml/2006/main" r:embed="rIdOfficeKitImage20fc6993425855c3_1"/>
-          <a:srcRect xmlns:a="http://schemas.openxmlformats.org/drawingml/2006/main" l="0" t="47256" r="0" b="47256"/>
+          <a:blip xmlns:r="http://schemas.openxmlformats.org/officeDocument/2006/relationships" xmlns:a="http://schemas.openxmlformats.org/drawingml/2006/main" r:embed="rIdOfficeKitImaged96cedd8678b85ac_1"/>
+          <a:srcRect xmlns:a="http://schemas.openxmlformats.org/drawingml/2006/main" l="0" t="47258" r="0" b="47258"/>
           <a:stretch xmlns:a="http://schemas.openxmlformats.org/drawingml/2006/main">
             <a:fillRect/>
           </a:stretch>
@@ -3737,7 +3737,7 @@
     <p:bg>
       <p:bgPr>
         <a:blipFill xmlns:a="http://schemas.openxmlformats.org/drawingml/2006/main">
-          <a:blip xmlns:r="http://schemas.openxmlformats.org/officeDocument/2006/relationships" r:embed="rIdOfficeKitImage4df9c6298f17ef7a_1"/>
+          <a:blip xmlns:r="http://schemas.openxmlformats.org/officeDocument/2006/relationships" r:embed="rIdOfficeKitImage10e4539a68783891_1"/>
           <a:stretch>
             <a:fillRect/>
           </a:stretch>
@@ -4067,7 +4067,7 @@
     <p:bg>
       <p:bgPr>
         <a:blipFill xmlns:a="http://schemas.openxmlformats.org/drawingml/2006/main">
-          <a:blip xmlns:r="http://schemas.openxmlformats.org/officeDocument/2006/relationships" r:embed="rIdOfficeKitImage6a3db1fe43260f32_1"/>
+          <a:blip xmlns:r="http://schemas.openxmlformats.org/officeDocument/2006/relationships" r:embed="rIdOfficeKitImage20fc6993425855c3_1"/>
           <a:stretch>
             <a:fillRect/>
           </a:stretch>
@@ -4139,8 +4139,8 @@
           <p:nvPr/>
         </p:nvPicPr>
         <p:blipFill>
-          <a:blip xmlns:r="http://schemas.openxmlformats.org/officeDocument/2006/relationships" xmlns:a="http://schemas.openxmlformats.org/drawingml/2006/main" r:embed="rIdOfficeKitImage6785cc6781fd2511_1"/>
-          <a:srcRect xmlns:a="http://schemas.openxmlformats.org/drawingml/2006/main" l="0" t="47256" r="0" b="47256"/>
+          <a:blip xmlns:r="http://schemas.openxmlformats.org/officeDocument/2006/relationships" xmlns:a="http://schemas.openxmlformats.org/drawingml/2006/main" r:embed="rIdOfficeKitImage4df9c6298f17ef7a_1"/>
+          <a:srcRect xmlns:a="http://schemas.openxmlformats.org/drawingml/2006/main" l="0" t="47258" r="0" b="47258"/>
           <a:stretch xmlns:a="http://schemas.openxmlformats.org/drawingml/2006/main">
             <a:fillRect/>
           </a:stretch>
